--- a/docs/Controller Mappings & Paths.pptx
+++ b/docs/Controller Mappings & Paths.pptx
@@ -265,7 +265,7 @@
           <a:p>
             <a:fld id="{B6000E93-69C7-4C90-931E-A5484B820028}" type="datetimeFigureOut">
               <a:rPr lang="en-US" smtClean="0"/>
-              <a:t>2/16/2026</a:t>
+              <a:t>2/23/2026</a:t>
             </a:fld>
             <a:endParaRPr lang="en-US"/>
           </a:p>
@@ -463,7 +463,7 @@
           <a:p>
             <a:fld id="{B6000E93-69C7-4C90-931E-A5484B820028}" type="datetimeFigureOut">
               <a:rPr lang="en-US" smtClean="0"/>
-              <a:t>2/16/2026</a:t>
+              <a:t>2/23/2026</a:t>
             </a:fld>
             <a:endParaRPr lang="en-US"/>
           </a:p>
@@ -671,7 +671,7 @@
           <a:p>
             <a:fld id="{B6000E93-69C7-4C90-931E-A5484B820028}" type="datetimeFigureOut">
               <a:rPr lang="en-US" smtClean="0"/>
-              <a:t>2/16/2026</a:t>
+              <a:t>2/23/2026</a:t>
             </a:fld>
             <a:endParaRPr lang="en-US"/>
           </a:p>
@@ -869,7 +869,7 @@
           <a:p>
             <a:fld id="{B6000E93-69C7-4C90-931E-A5484B820028}" type="datetimeFigureOut">
               <a:rPr lang="en-US" smtClean="0"/>
-              <a:t>2/16/2026</a:t>
+              <a:t>2/23/2026</a:t>
             </a:fld>
             <a:endParaRPr lang="en-US"/>
           </a:p>
@@ -1144,7 +1144,7 @@
           <a:p>
             <a:fld id="{B6000E93-69C7-4C90-931E-A5484B820028}" type="datetimeFigureOut">
               <a:rPr lang="en-US" smtClean="0"/>
-              <a:t>2/16/2026</a:t>
+              <a:t>2/23/2026</a:t>
             </a:fld>
             <a:endParaRPr lang="en-US"/>
           </a:p>
@@ -1409,7 +1409,7 @@
           <a:p>
             <a:fld id="{B6000E93-69C7-4C90-931E-A5484B820028}" type="datetimeFigureOut">
               <a:rPr lang="en-US" smtClean="0"/>
-              <a:t>2/16/2026</a:t>
+              <a:t>2/23/2026</a:t>
             </a:fld>
             <a:endParaRPr lang="en-US"/>
           </a:p>
@@ -1821,7 +1821,7 @@
           <a:p>
             <a:fld id="{B6000E93-69C7-4C90-931E-A5484B820028}" type="datetimeFigureOut">
               <a:rPr lang="en-US" smtClean="0"/>
-              <a:t>2/16/2026</a:t>
+              <a:t>2/23/2026</a:t>
             </a:fld>
             <a:endParaRPr lang="en-US"/>
           </a:p>
@@ -1962,7 +1962,7 @@
           <a:p>
             <a:fld id="{B6000E93-69C7-4C90-931E-A5484B820028}" type="datetimeFigureOut">
               <a:rPr lang="en-US" smtClean="0"/>
-              <a:t>2/16/2026</a:t>
+              <a:t>2/23/2026</a:t>
             </a:fld>
             <a:endParaRPr lang="en-US"/>
           </a:p>
@@ -2075,7 +2075,7 @@
           <a:p>
             <a:fld id="{B6000E93-69C7-4C90-931E-A5484B820028}" type="datetimeFigureOut">
               <a:rPr lang="en-US" smtClean="0"/>
-              <a:t>2/16/2026</a:t>
+              <a:t>2/23/2026</a:t>
             </a:fld>
             <a:endParaRPr lang="en-US"/>
           </a:p>
@@ -2386,7 +2386,7 @@
           <a:p>
             <a:fld id="{B6000E93-69C7-4C90-931E-A5484B820028}" type="datetimeFigureOut">
               <a:rPr lang="en-US" smtClean="0"/>
-              <a:t>2/16/2026</a:t>
+              <a:t>2/23/2026</a:t>
             </a:fld>
             <a:endParaRPr lang="en-US"/>
           </a:p>
@@ -2674,7 +2674,7 @@
           <a:p>
             <a:fld id="{B6000E93-69C7-4C90-931E-A5484B820028}" type="datetimeFigureOut">
               <a:rPr lang="en-US" smtClean="0"/>
-              <a:t>2/16/2026</a:t>
+              <a:t>2/23/2026</a:t>
             </a:fld>
             <a:endParaRPr lang="en-US"/>
           </a:p>
@@ -2915,7 +2915,7 @@
           <a:p>
             <a:fld id="{B6000E93-69C7-4C90-931E-A5484B820028}" type="datetimeFigureOut">
               <a:rPr lang="en-US" smtClean="0"/>
-              <a:t>2/16/2026</a:t>
+              <a:t>2/23/2026</a:t>
             </a:fld>
             <a:endParaRPr lang="en-US"/>
           </a:p>
@@ -5317,6 +5317,92 @@
           </p:txBody>
         </p:sp>
       </p:grpSp>
+      <p:sp>
+        <p:nvSpPr>
+          <p:cNvPr id="23" name="TextBox 22">
+            <a:extLst>
+              <a:ext uri="{FF2B5EF4-FFF2-40B4-BE49-F238E27FC236}">
+                <a16:creationId xmlns:a16="http://schemas.microsoft.com/office/drawing/2014/main" id="{C91A3CDA-940D-348D-BCAF-490642C36BE9}"/>
+              </a:ext>
+            </a:extLst>
+          </p:cNvPr>
+          <p:cNvSpPr txBox="1"/>
+          <p:nvPr/>
+        </p:nvSpPr>
+        <p:spPr>
+          <a:xfrm rot="5400000">
+            <a:off x="6374581" y="3926180"/>
+            <a:ext cx="276999" cy="306301"/>
+          </a:xfrm>
+          <a:prstGeom prst="rect">
+            <a:avLst/>
+          </a:prstGeom>
+          <a:noFill/>
+        </p:spPr>
+        <p:txBody>
+          <a:bodyPr vert="vert270" wrap="none" lIns="0" tIns="0" rIns="91440" bIns="0" rtlCol="0">
+            <a:spAutoFit/>
+          </a:bodyPr>
+          <a:lstStyle/>
+          <a:p>
+            <a:pPr algn="ctr"/>
+            <a:r>
+              <a:rPr lang="en-US" sz="1200" dirty="0">
+                <a:solidFill>
+                  <a:schemeClr val="accent2">
+                    <a:lumMod val="60000"/>
+                    <a:lumOff val="40000"/>
+                  </a:schemeClr>
+                </a:solidFill>
+              </a:rPr>
+              <a:t>start</a:t>
+            </a:r>
+          </a:p>
+        </p:txBody>
+      </p:sp>
+      <p:sp>
+        <p:nvSpPr>
+          <p:cNvPr id="37" name="TextBox 36">
+            <a:extLst>
+              <a:ext uri="{FF2B5EF4-FFF2-40B4-BE49-F238E27FC236}">
+                <a16:creationId xmlns:a16="http://schemas.microsoft.com/office/drawing/2014/main" id="{D8B36C15-FF92-3AEC-5434-F1B9809B8308}"/>
+              </a:ext>
+            </a:extLst>
+          </p:cNvPr>
+          <p:cNvSpPr txBox="1"/>
+          <p:nvPr/>
+        </p:nvSpPr>
+        <p:spPr>
+          <a:xfrm rot="5400000">
+            <a:off x="5583361" y="3917427"/>
+            <a:ext cx="276999" cy="323808"/>
+          </a:xfrm>
+          <a:prstGeom prst="rect">
+            <a:avLst/>
+          </a:prstGeom>
+          <a:noFill/>
+        </p:spPr>
+        <p:txBody>
+          <a:bodyPr vert="vert270" wrap="none" lIns="0" tIns="0" rIns="91440" bIns="0" rtlCol="0">
+            <a:spAutoFit/>
+          </a:bodyPr>
+          <a:lstStyle/>
+          <a:p>
+            <a:pPr algn="ctr"/>
+            <a:r>
+              <a:rPr lang="en-US" sz="1200" dirty="0">
+                <a:solidFill>
+                  <a:schemeClr val="accent2">
+                    <a:lumMod val="60000"/>
+                    <a:lumOff val="40000"/>
+                  </a:schemeClr>
+                </a:solidFill>
+              </a:rPr>
+              <a:t>back</a:t>
+            </a:r>
+          </a:p>
+        </p:txBody>
+      </p:sp>
     </p:spTree>
     <p:extLst>
       <p:ext uri="{BB962C8B-B14F-4D97-AF65-F5344CB8AC3E}">
@@ -7307,6 +7393,92 @@
                 </a:solidFill>
               </a:rPr>
               <a:t>Trigger</a:t>
+            </a:r>
+          </a:p>
+        </p:txBody>
+      </p:sp>
+      <p:sp>
+        <p:nvSpPr>
+          <p:cNvPr id="30" name="TextBox 29">
+            <a:extLst>
+              <a:ext uri="{FF2B5EF4-FFF2-40B4-BE49-F238E27FC236}">
+                <a16:creationId xmlns:a16="http://schemas.microsoft.com/office/drawing/2014/main" id="{4DD483E6-0944-EC88-9A25-F3839E12ED50}"/>
+              </a:ext>
+            </a:extLst>
+          </p:cNvPr>
+          <p:cNvSpPr txBox="1"/>
+          <p:nvPr/>
+        </p:nvSpPr>
+        <p:spPr>
+          <a:xfrm rot="5400000">
+            <a:off x="6456089" y="3957501"/>
+            <a:ext cx="276999" cy="306301"/>
+          </a:xfrm>
+          <a:prstGeom prst="rect">
+            <a:avLst/>
+          </a:prstGeom>
+          <a:noFill/>
+        </p:spPr>
+        <p:txBody>
+          <a:bodyPr vert="vert270" wrap="none" lIns="0" tIns="0" rIns="91440" bIns="0" rtlCol="0">
+            <a:spAutoFit/>
+          </a:bodyPr>
+          <a:lstStyle/>
+          <a:p>
+            <a:pPr algn="ctr"/>
+            <a:r>
+              <a:rPr lang="en-US" sz="1200" dirty="0">
+                <a:solidFill>
+                  <a:schemeClr val="accent2">
+                    <a:lumMod val="60000"/>
+                    <a:lumOff val="40000"/>
+                  </a:schemeClr>
+                </a:solidFill>
+              </a:rPr>
+              <a:t>start</a:t>
+            </a:r>
+          </a:p>
+        </p:txBody>
+      </p:sp>
+      <p:sp>
+        <p:nvSpPr>
+          <p:cNvPr id="31" name="TextBox 30">
+            <a:extLst>
+              <a:ext uri="{FF2B5EF4-FFF2-40B4-BE49-F238E27FC236}">
+                <a16:creationId xmlns:a16="http://schemas.microsoft.com/office/drawing/2014/main" id="{2E389938-BC74-9774-0C0E-5E96467866AF}"/>
+              </a:ext>
+            </a:extLst>
+          </p:cNvPr>
+          <p:cNvSpPr txBox="1"/>
+          <p:nvPr/>
+        </p:nvSpPr>
+        <p:spPr>
+          <a:xfrm rot="5400000">
+            <a:off x="5515841" y="3970089"/>
+            <a:ext cx="276999" cy="323808"/>
+          </a:xfrm>
+          <a:prstGeom prst="rect">
+            <a:avLst/>
+          </a:prstGeom>
+          <a:noFill/>
+        </p:spPr>
+        <p:txBody>
+          <a:bodyPr vert="vert270" wrap="none" lIns="0" tIns="0" rIns="91440" bIns="0" rtlCol="0">
+            <a:spAutoFit/>
+          </a:bodyPr>
+          <a:lstStyle/>
+          <a:p>
+            <a:pPr algn="ctr"/>
+            <a:r>
+              <a:rPr lang="en-US" sz="1200" dirty="0">
+                <a:solidFill>
+                  <a:schemeClr val="accent2">
+                    <a:lumMod val="60000"/>
+                    <a:lumOff val="40000"/>
+                  </a:schemeClr>
+                </a:solidFill>
+              </a:rPr>
+              <a:t>back</a:t>
             </a:r>
           </a:p>
         </p:txBody>

--- a/docs/Controller Mappings & Paths.pptx
+++ b/docs/Controller Mappings & Paths.pptx
@@ -9,9 +9,11 @@
     <p:sldId id="256" r:id="rId3"/>
     <p:sldId id="258" r:id="rId4"/>
     <p:sldId id="259" r:id="rId5"/>
-    <p:sldId id="260" r:id="rId6"/>
-    <p:sldId id="261" r:id="rId7"/>
-    <p:sldId id="262" r:id="rId8"/>
+    <p:sldId id="263" r:id="rId6"/>
+    <p:sldId id="265" r:id="rId7"/>
+    <p:sldId id="260" r:id="rId8"/>
+    <p:sldId id="261" r:id="rId9"/>
+    <p:sldId id="264" r:id="rId10"/>
   </p:sldIdLst>
   <p:sldSz cx="12192000" cy="6858000"/>
   <p:notesSz cx="6858000" cy="9144000"/>
@@ -118,6 +120,146 @@
 </p:presentation>
 </file>
 
+<file path=ppt/ink/ink1.xml><?xml version="1.0" encoding="utf-8"?>
+<inkml:ink xmlns:inkml="http://www.w3.org/2003/InkML">
+  <inkml:definitions>
+    <inkml:context xml:id="ctx0">
+      <inkml:inkSource xml:id="inkSrc0">
+        <inkml:traceFormat>
+          <inkml:channel name="X" type="integer" min="-2.14748E9" max="2.14748E9" units="cm"/>
+          <inkml:channel name="Y" type="integer" min="-2.14748E9" max="2.14748E9" units="cm"/>
+          <inkml:channel name="F" type="integer" max="32767" units="dev"/>
+        </inkml:traceFormat>
+        <inkml:channelProperties>
+          <inkml:channelProperty channel="X" name="resolution" value="1000" units="1/cm"/>
+          <inkml:channelProperty channel="Y" name="resolution" value="1000" units="1/cm"/>
+          <inkml:channelProperty channel="F" name="resolution" value="0" units="1/dev"/>
+        </inkml:channelProperties>
+      </inkml:inkSource>
+      <inkml:timestamp xml:id="ts0" timeString="2026-03-22T23:16:27.302"/>
+    </inkml:context>
+    <inkml:brush xml:id="br0">
+      <inkml:brushProperty name="width" value="0.05" units="cm"/>
+      <inkml:brushProperty name="height" value="0.05" units="cm"/>
+      <inkml:brushProperty name="color" value="#E71224"/>
+    </inkml:brush>
+  </inkml:definitions>
+  <inkml:trace contextRef="#ctx0" brushRef="#br0">0 3740 24575,'2'-4'0,"0"-1"0,0 1 0,0 0 0,0 0 0,0 0 0,1 0 0,0 0 0,0 1 0,0-1 0,0 1 0,1 0 0,-1 0 0,1 0 0,8-4 0,-9 4 0,44-28 0,2 1 0,2 3 0,106-42 0,-109 49 0,-2-4 0,-2-1 0,0-2 0,-2-2 0,-2-1 0,63-61 0,-26 13 0,-3-3 0,102-144 0,-145 179 0,-2-2 0,-2-1 0,-2-1 0,-3-2 0,20-65 0,57-279 0,-59 216 0,38-198 0,10-44 0,-85 412 0,76-270 0,-63 238 0,1 1 0,1 1 0,3 1 0,39-57 0,2-1 0,-49 73 0,1 0 0,1 1 0,2 1 0,0 1 0,1 0 0,33-29 0,37-23 0,-38 30 0,93-60 0,-126 92 0,8-5 0,1 1 0,0 1 0,1 1 0,38-12 0,-57 22 0,-1 2 0,1-1 0,0 1 0,0 0 0,0 0 0,0 1 0,1 0 0,-1 0 0,0 1 0,0 0 0,0 1 0,-1 0 0,1 0 0,0 1 0,0-1 0,-1 2 0,0-1 0,0 1 0,0 0 0,0 1 0,6 5 0,36 28 0,-4-3 0,70 71 0,-86-74 0,9 8 0,-1 1 0,-2 2 0,57 94 0,-33-39 0,-40-69 0,-1 1 0,-1 1 0,20 52 0,71 331 0,-39-160 0,-21-84 0,-31-108 0,-7-22 0,21 50 0,2 2 0,37 163 0,-61-217 0,12 58 0,-11-43 0,28 82 0,7 18 0,-36-117 0,40 209 0,-27-115 0,6 25 0,54 156 0,-65-241 0,-8-39 0,-1 1 0,-2 0 0,3 54 0,-7-62 0,8 47 0,-5-47 0,-1 0 0,0 26 0,-5 366 0,-1-392 0,-1 0 0,-1-1 0,-1 1 0,-10 29 0,-5 20 0,-5 35 0,-6-2 0,-69 165 0,44-157 0,-20 51 0,-20 72 0,81-198 0,-39 70 0,2-6 0,44-86 0,-2 0 0,0 0 0,-1-1 0,-1 0 0,0-1 0,-1 0 0,0-1 0,-2-1 0,-21 17 0,-201 186 0,225-205 0,-1 0 0,0-1 0,0-1 0,-1 0 0,0-1 0,0 0 0,-1-1 0,0-1 0,0 0 0,-1-1 0,0-1 0,0-1 0,0 0 0,-19 1 0,-32 7 0,55-7 0,0-2 0,0 0 0,-24 1 0,35-3 0,1 0 0,-1 1 0,1-1 0,-1 0 0,1 0 0,-1 0 0,0 0 0,1 0 0,-1 0 0,1 0 0,-1 0 0,1-1 0,-1 1 0,1 0 0,-1 0 0,0 0 0,1-1 0,-1 1 0,1 0 0,-1 0 0,1-1 0,0 1 0,-1 0 0,1-1 0,-1 1 0,1-1 0,0 1 0,-1-1 0,1 1 0,0-1 0,-1 1 0,1-1 0,0 1 0,0-1 0,-1 1 0,1-1 0,0 1 0,0-1 0,0 1 0,0-1 0,0 1 0,0-1 0,0 0 0,0 1 0,0-1 0,0 1 0,0-1 0,0 1 0,0-1 0,1 1 0,-1-1 0,0 1 0,1-2 0,0 0 0,0-1 0,1 1 0,-1 0 0,1 0 0,-1 0 0,1 0 0,0 0 0,0 0 0,0 1 0,4-4 0,31-8 0,-35 12 0,-1 1 0,1-1 0,-1 1 0,1-1 0,0 1 0,-1-1 0,1 1 0,-1 0 0,1 0 0,0 0 0,-1 0 0,1 0 0,0 1 0,-1-1 0,1 0 0,-1 1 0,1-1 0,0 1 0,2 1 0,-6-1 0,1 0 0,-1 0 0,1 0 0,-1 0 0,1 0 0,-1 0 0,0 0 0,0-1 0,1 1 0,-1 0 0,0-1 0,0 0 0,0 1 0,-2-1 0,-152 17 0,42-6 0,-28 7 0,-1-6 0,-196-9 0,280-11 0,0-2 0,0-2 0,-73-27 0,40 11 0,69 22 0,1-2 0,-1 0 0,2-1 0,-1-2 0,1 0 0,-34-26 0,24 16 0,2-1 0,1-1 0,1-2 0,0-1 0,-26-35 0,40 44 0,6 8 0,0 0 0,1 0 0,-1 0 0,2 0 0,0-1 0,0 0 0,0 0 0,2-1 0,-1 1 0,1-1 0,-2-14 0,-2-10 0,-1 1 0,-2-1 0,-18-44 0,-10-31 0,30 82 0,-26-95 0,-80-192 0,99 281 0,1 1 0,-2 1 0,-1 0 0,-1 1 0,-22-28 0,9 16 0,-28-50 0,0-2 0,6 17-455,-3 3 0,-71-73 0,106 127-6371</inkml:trace>
+</inkml:ink>
+</file>
+
+<file path=ppt/ink/ink2.xml><?xml version="1.0" encoding="utf-8"?>
+<inkml:ink xmlns:inkml="http://www.w3.org/2003/InkML">
+  <inkml:definitions>
+    <inkml:context xml:id="ctx0">
+      <inkml:inkSource xml:id="inkSrc0">
+        <inkml:traceFormat>
+          <inkml:channel name="X" type="integer" min="-2.14748E9" max="2.14748E9" units="cm"/>
+          <inkml:channel name="Y" type="integer" min="-2.14748E9" max="2.14748E9" units="cm"/>
+          <inkml:channel name="F" type="integer" max="32767" units="dev"/>
+        </inkml:traceFormat>
+        <inkml:channelProperties>
+          <inkml:channelProperty channel="X" name="resolution" value="1000" units="1/cm"/>
+          <inkml:channelProperty channel="Y" name="resolution" value="1000" units="1/cm"/>
+          <inkml:channelProperty channel="F" name="resolution" value="0" units="1/dev"/>
+        </inkml:channelProperties>
+      </inkml:inkSource>
+      <inkml:timestamp xml:id="ts0" timeString="2026-03-22T23:16:29.642"/>
+    </inkml:context>
+    <inkml:brush xml:id="br0">
+      <inkml:brushProperty name="width" value="0.05" units="cm"/>
+      <inkml:brushProperty name="height" value="0.05" units="cm"/>
+      <inkml:brushProperty name="color" value="#E71224"/>
+    </inkml:brush>
+  </inkml:definitions>
+  <inkml:trace contextRef="#ctx0" brushRef="#br0">51 0 24575,'1'155'0,"-3"176"0,1-306 0,-1 0 0,-2 0 0,-1 0 0,0-1 0,-14 36 0,19-59 2,0-1 0,0 0 0,0 1-1,0-1 1,0 0 0,0 0 0,0 1-1,0-1 1,0 0 0,0 1 0,0-1 0,0 0-1,0 1 1,-1-1 0,1 0 0,0 0-1,0 1 1,0-1 0,0 0 0,-1 1-1,1-1 1,0 0 0,0 0 0,-1 0 0,1 1-1,0-1 1,0 0 0,-1 0 0,1 0-1,0 0 1,0 1 0,-1-1 0,1 0 0,0 0-1,-1 0 1,1 0 0,0 0 0,-1 0-1,1 0 1,0 0 0,-1 0 0,1 0 0,-1 0-1,-3-13-1444,3-3-5383</inkml:trace>
+</inkml:ink>
+</file>
+
+<file path=ppt/ink/ink3.xml><?xml version="1.0" encoding="utf-8"?>
+<inkml:ink xmlns:inkml="http://www.w3.org/2003/InkML">
+  <inkml:definitions>
+    <inkml:context xml:id="ctx0">
+      <inkml:inkSource xml:id="inkSrc0">
+        <inkml:traceFormat>
+          <inkml:channel name="X" type="integer" min="-2.14748E9" max="2.14748E9" units="cm"/>
+          <inkml:channel name="Y" type="integer" min="-2.14748E9" max="2.14748E9" units="cm"/>
+          <inkml:channel name="F" type="integer" max="32767" units="dev"/>
+        </inkml:traceFormat>
+        <inkml:channelProperties>
+          <inkml:channelProperty channel="X" name="resolution" value="1000" units="1/cm"/>
+          <inkml:channelProperty channel="Y" name="resolution" value="1000" units="1/cm"/>
+          <inkml:channelProperty channel="F" name="resolution" value="0" units="1/dev"/>
+        </inkml:channelProperties>
+      </inkml:inkSource>
+      <inkml:timestamp xml:id="ts0" timeString="2026-03-22T23:16:30.757"/>
+    </inkml:context>
+    <inkml:brush xml:id="br0">
+      <inkml:brushProperty name="width" value="0.05" units="cm"/>
+      <inkml:brushProperty name="height" value="0.05" units="cm"/>
+      <inkml:brushProperty name="color" value="#E71224"/>
+    </inkml:brush>
+  </inkml:definitions>
+  <inkml:trace contextRef="#ctx0" brushRef="#br0">1 0 24575,'30'2'0,"1"2"0,-1 1 0,0 1 0,0 2 0,42 16 0,-38-12 0,0-1 0,1-2 0,54 7 0,35 4-1365,-103-17-5461</inkml:trace>
+</inkml:ink>
+</file>
+
+<file path=ppt/ink/ink4.xml><?xml version="1.0" encoding="utf-8"?>
+<inkml:ink xmlns:inkml="http://www.w3.org/2003/InkML">
+  <inkml:definitions>
+    <inkml:context xml:id="ctx0">
+      <inkml:inkSource xml:id="inkSrc0">
+        <inkml:traceFormat>
+          <inkml:channel name="X" type="integer" min="-2.14748E9" max="2.14748E9" units="cm"/>
+          <inkml:channel name="Y" type="integer" min="-2.14748E9" max="2.14748E9" units="cm"/>
+          <inkml:channel name="F" type="integer" max="32767" units="dev"/>
+        </inkml:traceFormat>
+        <inkml:channelProperties>
+          <inkml:channelProperty channel="X" name="resolution" value="1000" units="1/cm"/>
+          <inkml:channelProperty channel="Y" name="resolution" value="1000" units="1/cm"/>
+          <inkml:channelProperty channel="F" name="resolution" value="0" units="1/dev"/>
+        </inkml:channelProperties>
+      </inkml:inkSource>
+      <inkml:timestamp xml:id="ts0" timeString="2026-03-22T23:17:19.219"/>
+    </inkml:context>
+    <inkml:brush xml:id="br0">
+      <inkml:brushProperty name="width" value="0.05" units="cm"/>
+      <inkml:brushProperty name="height" value="0.05" units="cm"/>
+      <inkml:brushProperty name="color" value="#E71224"/>
+    </inkml:brush>
+  </inkml:definitions>
+  <inkml:trace contextRef="#ctx0" brushRef="#br0">0 2340 24575,'40'0'0,"-8"-1"0,63 7 0,-84-4 0,1 0 0,0 2 0,-1-1 0,0 1 0,0 1 0,0 0 0,0 0 0,17 13 0,-13-7 0,-1 1 0,-1 1 0,0 0 0,-1 1 0,0 0 0,-1 1 0,-1 0 0,15 29 0,-9-10 0,-1 1 0,-2 0 0,12 48 0,-14-35 0,-2-1 0,-3 1 0,-1 0 0,-2 54 0,-2-75 0,1 0 0,7 30 0,4 43 0,-14 120 0,2 57 0,11-162 0,-6-65 0,0 56 0,-6-65 0,-2 2 0,1 0 0,3 0 0,2 0 0,1 0 0,18 66 0,27 38 0,107 219 0,-101-233 0,-38-85 0,37 69 0,-46-102 0,0 0 0,0 0 0,1-1 0,1 0 0,1-1 0,0 0 0,0-1 0,1 0 0,1-1 0,0 0 0,0-1 0,1-1 0,0-1 0,1 0 0,0 0 0,0-2 0,1 0 0,-1-1 0,26 4 0,-28-4 0,-1-1 0,1 2 0,-1 0 0,0 1 0,0 0 0,-1 0 0,0 2 0,0 0 0,11 11 0,37 25 0,157 85 0,-181-108 0,-25-13 0,1-1 0,0-1 0,1 0 0,0-1 0,0 0 0,0-1 0,1 0 0,0-2 0,-1 1 0,1-1 0,27 1 0,-14-4 0,16 1 0,62-8 0,-90 5 0,0-1 0,0-1 0,-1 0 0,0-1 0,0 0 0,0-1 0,25-15 0,102-76 0,-86 64 0,-37 22 0,0 0 0,-1 0 0,0-2 0,21-20 0,-29 25 0,0 1 0,1 0 0,0 0 0,0 1 0,0 1 0,1 0 0,0 0 0,15-4 0,-14 5 0,0 0 0,0-1 0,-1 0 0,1-1 0,-1-1 0,-1 0 0,13-10 0,13-20 0,-1-1 0,-2-2 0,-2-2 0,-2-1 0,36-70 0,56-124 0,48-57 0,-153 268 0,93-134 0,-48 75 0,-45 62 0,-8 10 0,0-1 0,1 2 0,1-1 0,0 1 0,1 1 0,0 0 0,17-12 0,-25 21 0,0 1 0,0-1 0,0 1 0,1 0 0,-1 0 0,1 0 0,-1 1 0,1-1 0,-1 1 0,4 0 0,-5 0 0,0 0 0,0 0 0,0 0 0,0 0 0,0 0 0,-1 0 0,1 0 0,0-1 0,0 1 0,0-1 0,-1 1 0,1-1 0,0 0 0,-1 0 0,1 0 0,0 0 0,-1 0 0,1 0 0,-1 0 0,0 0 0,1-1 0,-1 1 0,0 0 0,0-1 0,0 0 0,0 1 0,0-1 0,0 1 0,0-1 0,0 0 0,0-2 0,56-188 0,-49 163 0,-1 1 0,-1-1 0,2-35 0,-5 31 0,2 1 0,11-37 0,-11 46 0,-1 1 0,-1-1 0,-1 1 0,0-1 0,-3-27 0,0 23 0,1 1 0,2-1 0,6-34 0,14-103 0,-10 57 0,-6 34 0,-5-146 0,-3 96 0,1 53 0,-13-107 0,4 58 0,7 71 0,-9-50 0,4 36 0,3 0 0,3-1 0,5-64 0,0 6 0,-5 79 0,-9-50 0,5 50 0,0-53 0,8-31 0,-4-139 0,-23 95 0,19 136 0,-3 0 0,0 0 0,-3 1 0,-16-36 0,5 23 0,-2 1 0,-44-59 0,55 84 0,-119-158 0,109 150 0,-1 1 0,0 2 0,-3 0 0,-31-22 0,45 39 0,-1 2 0,0-1 0,0 2 0,-1 0 0,1 1 0,-1 1 0,0 0 0,0 1 0,-28 0 0,1-2 0,-230-7 0,-9 0 0,245 8 0,0 2 0,0 1 0,-57 9 0,-110 28 0,75-11 0,88-19 0,1 1 0,0 2 0,0 1 0,2 3 0,-1 1 0,-52 29 0,69-31 0,-125 81 0,129-80 0,2 0 0,-1 1 0,2 0 0,0 1 0,-24 36 0,1 12 0,4 2 0,-33 86 0,-13 26 0,67-155 0,-1-1 0,-1-1 0,-30 33 0,-16 21 0,22-24 0,-53 53 0,37-44 0,28-33 0,-47 38 0,47-43 0,2 0 0,-34 39 0,-70 71 0,28-32 0,94-91-119,-1-1-130,0 1 0,0-1 0,-1 0-1,-15 11 1,11-13-6577</inkml:trace>
+</inkml:ink>
+</file>
+
+<file path=ppt/ink/ink5.xml><?xml version="1.0" encoding="utf-8"?>
+<inkml:ink xmlns:inkml="http://www.w3.org/2003/InkML">
+  <inkml:definitions>
+    <inkml:context xml:id="ctx0">
+      <inkml:inkSource xml:id="inkSrc0">
+        <inkml:traceFormat>
+          <inkml:channel name="X" type="integer" min="-2.14748E9" max="2.14748E9" units="cm"/>
+          <inkml:channel name="Y" type="integer" min="-2.14748E9" max="2.14748E9" units="cm"/>
+          <inkml:channel name="F" type="integer" max="32767" units="dev"/>
+        </inkml:traceFormat>
+        <inkml:channelProperties>
+          <inkml:channelProperty channel="X" name="resolution" value="1000" units="1/cm"/>
+          <inkml:channelProperty channel="Y" name="resolution" value="1000" units="1/cm"/>
+          <inkml:channelProperty channel="F" name="resolution" value="0" units="1/dev"/>
+        </inkml:channelProperties>
+      </inkml:inkSource>
+      <inkml:timestamp xml:id="ts0" timeString="2026-03-22T23:17:21.490"/>
+    </inkml:context>
+    <inkml:brush xml:id="br0">
+      <inkml:brushProperty name="width" value="0.05" units="cm"/>
+      <inkml:brushProperty name="height" value="0.05" units="cm"/>
+      <inkml:brushProperty name="color" value="#E71224"/>
+    </inkml:brush>
+  </inkml:definitions>
+  <inkml:trace contextRef="#ctx0" brushRef="#br0">102 0 24575,'0'45'0,"-2"0"0,-11 61 0,7-70 0,0-3 0,0-1 0,-15 39 0,-27 63 0,51-142 0,1 1 0,0 0 0,0 0 0,1 0 0,-1 1 0,1 0 0,1 0 0,-1 0 0,1 0 0,0 1 0,11-7 0,1-1 0,2 1 0,-1 1 0,28-10 0,-37 16-110,0-1 0,-1 1-1,1-2 1,15-13 0,-17 13-704,4-2-6012</inkml:trace>
+</inkml:ink>
+</file>
+
 <file path=ppt/slideLayouts/slideLayout1.xml><?xml version="1.0" encoding="utf-8"?>
 <p:sldLayout xmlns:a="http://schemas.openxmlformats.org/drawingml/2006/main" xmlns:r="http://schemas.openxmlformats.org/officeDocument/2006/relationships" xmlns:p="http://schemas.openxmlformats.org/presentationml/2006/main" type="title" preserve="1">
   <p:cSld name="Title Slide">
@@ -265,7 +407,7 @@
           <a:p>
             <a:fld id="{B6000E93-69C7-4C90-931E-A5484B820028}" type="datetimeFigureOut">
               <a:rPr lang="en-US" smtClean="0"/>
-              <a:t>2/23/2026</a:t>
+              <a:t>3/22/2026</a:t>
             </a:fld>
             <a:endParaRPr lang="en-US"/>
           </a:p>
@@ -463,7 +605,7 @@
           <a:p>
             <a:fld id="{B6000E93-69C7-4C90-931E-A5484B820028}" type="datetimeFigureOut">
               <a:rPr lang="en-US" smtClean="0"/>
-              <a:t>2/23/2026</a:t>
+              <a:t>3/22/2026</a:t>
             </a:fld>
             <a:endParaRPr lang="en-US"/>
           </a:p>
@@ -671,7 +813,7 @@
           <a:p>
             <a:fld id="{B6000E93-69C7-4C90-931E-A5484B820028}" type="datetimeFigureOut">
               <a:rPr lang="en-US" smtClean="0"/>
-              <a:t>2/23/2026</a:t>
+              <a:t>3/22/2026</a:t>
             </a:fld>
             <a:endParaRPr lang="en-US"/>
           </a:p>
@@ -869,7 +1011,7 @@
           <a:p>
             <a:fld id="{B6000E93-69C7-4C90-931E-A5484B820028}" type="datetimeFigureOut">
               <a:rPr lang="en-US" smtClean="0"/>
-              <a:t>2/23/2026</a:t>
+              <a:t>3/22/2026</a:t>
             </a:fld>
             <a:endParaRPr lang="en-US"/>
           </a:p>
@@ -1144,7 +1286,7 @@
           <a:p>
             <a:fld id="{B6000E93-69C7-4C90-931E-A5484B820028}" type="datetimeFigureOut">
               <a:rPr lang="en-US" smtClean="0"/>
-              <a:t>2/23/2026</a:t>
+              <a:t>3/22/2026</a:t>
             </a:fld>
             <a:endParaRPr lang="en-US"/>
           </a:p>
@@ -1409,7 +1551,7 @@
           <a:p>
             <a:fld id="{B6000E93-69C7-4C90-931E-A5484B820028}" type="datetimeFigureOut">
               <a:rPr lang="en-US" smtClean="0"/>
-              <a:t>2/23/2026</a:t>
+              <a:t>3/22/2026</a:t>
             </a:fld>
             <a:endParaRPr lang="en-US"/>
           </a:p>
@@ -1821,7 +1963,7 @@
           <a:p>
             <a:fld id="{B6000E93-69C7-4C90-931E-A5484B820028}" type="datetimeFigureOut">
               <a:rPr lang="en-US" smtClean="0"/>
-              <a:t>2/23/2026</a:t>
+              <a:t>3/22/2026</a:t>
             </a:fld>
             <a:endParaRPr lang="en-US"/>
           </a:p>
@@ -1962,7 +2104,7 @@
           <a:p>
             <a:fld id="{B6000E93-69C7-4C90-931E-A5484B820028}" type="datetimeFigureOut">
               <a:rPr lang="en-US" smtClean="0"/>
-              <a:t>2/23/2026</a:t>
+              <a:t>3/22/2026</a:t>
             </a:fld>
             <a:endParaRPr lang="en-US"/>
           </a:p>
@@ -2075,7 +2217,7 @@
           <a:p>
             <a:fld id="{B6000E93-69C7-4C90-931E-A5484B820028}" type="datetimeFigureOut">
               <a:rPr lang="en-US" smtClean="0"/>
-              <a:t>2/23/2026</a:t>
+              <a:t>3/22/2026</a:t>
             </a:fld>
             <a:endParaRPr lang="en-US"/>
           </a:p>
@@ -2386,7 +2528,7 @@
           <a:p>
             <a:fld id="{B6000E93-69C7-4C90-931E-A5484B820028}" type="datetimeFigureOut">
               <a:rPr lang="en-US" smtClean="0"/>
-              <a:t>2/23/2026</a:t>
+              <a:t>3/22/2026</a:t>
             </a:fld>
             <a:endParaRPr lang="en-US"/>
           </a:p>
@@ -2674,7 +2816,7 @@
           <a:p>
             <a:fld id="{B6000E93-69C7-4C90-931E-A5484B820028}" type="datetimeFigureOut">
               <a:rPr lang="en-US" smtClean="0"/>
-              <a:t>2/23/2026</a:t>
+              <a:t>3/22/2026</a:t>
             </a:fld>
             <a:endParaRPr lang="en-US"/>
           </a:p>
@@ -2915,7 +3057,7 @@
           <a:p>
             <a:fld id="{B6000E93-69C7-4C90-931E-A5484B820028}" type="datetimeFigureOut">
               <a:rPr lang="en-US" smtClean="0"/>
-              <a:t>2/23/2026</a:t>
+              <a:t>3/22/2026</a:t>
             </a:fld>
             <a:endParaRPr lang="en-US"/>
           </a:p>
@@ -8701,7 +8843,7 @@
         <p:spPr>
           <a:xfrm>
             <a:off x="201086" y="2106672"/>
-            <a:ext cx="1628590" cy="2554545"/>
+            <a:ext cx="1628590" cy="3046988"/>
           </a:xfrm>
           <a:prstGeom prst="rect">
             <a:avLst/>
@@ -8779,6 +8921,206 @@
             <a:r>
               <a:rPr lang="en-US" sz="1600" dirty="0"/>
               <a:t>C2- 0.9, 2.9</a:t>
+            </a:r>
+          </a:p>
+          <a:p>
+            <a:pPr indent="285750"/>
+            <a:r>
+              <a:rPr lang="en-US" sz="1600" dirty="0"/>
+              <a:t>C3-</a:t>
+            </a:r>
+          </a:p>
+          <a:p>
+            <a:pPr indent="285750"/>
+            <a:r>
+              <a:rPr lang="en-US" sz="1600" dirty="0"/>
+              <a:t>C4-</a:t>
+            </a:r>
+          </a:p>
+        </p:txBody>
+      </p:sp>
+      <p:sp>
+        <p:nvSpPr>
+          <p:cNvPr id="3" name="Rectangle 2">
+            <a:extLst>
+              <a:ext uri="{FF2B5EF4-FFF2-40B4-BE49-F238E27FC236}">
+                <a16:creationId xmlns:a16="http://schemas.microsoft.com/office/drawing/2014/main" id="{9DB60F1E-C95A-7F9F-EA8B-C9E804817959}"/>
+              </a:ext>
+            </a:extLst>
+          </p:cNvPr>
+          <p:cNvSpPr/>
+          <p:nvPr/>
+        </p:nvSpPr>
+        <p:spPr>
+          <a:xfrm>
+            <a:off x="3460463" y="3570762"/>
+            <a:ext cx="466928" cy="466928"/>
+          </a:xfrm>
+          <a:prstGeom prst="rect">
+            <a:avLst/>
+          </a:prstGeom>
+          <a:solidFill>
+            <a:schemeClr val="accent1">
+              <a:lumMod val="40000"/>
+              <a:lumOff val="60000"/>
+            </a:schemeClr>
+          </a:solidFill>
+        </p:spPr>
+        <p:style>
+          <a:lnRef idx="2">
+            <a:schemeClr val="accent1">
+              <a:shade val="15000"/>
+            </a:schemeClr>
+          </a:lnRef>
+          <a:fillRef idx="1">
+            <a:schemeClr val="accent1"/>
+          </a:fillRef>
+          <a:effectRef idx="0">
+            <a:schemeClr val="accent1"/>
+          </a:effectRef>
+          <a:fontRef idx="minor">
+            <a:schemeClr val="lt1"/>
+          </a:fontRef>
+        </p:style>
+        <p:txBody>
+          <a:bodyPr tIns="0" bIns="91440" rtlCol="0" anchor="ctr"/>
+          <a:lstStyle/>
+          <a:p>
+            <a:r>
+              <a:rPr lang="en-US" sz="1400" dirty="0">
+                <a:solidFill>
+                  <a:schemeClr val="tx1"/>
+                </a:solidFill>
+              </a:rPr>
+              <a:t>C3</a:t>
+            </a:r>
+          </a:p>
+        </p:txBody>
+      </p:sp>
+      <p:sp>
+        <p:nvSpPr>
+          <p:cNvPr id="4" name="Rectangle 3">
+            <a:extLst>
+              <a:ext uri="{FF2B5EF4-FFF2-40B4-BE49-F238E27FC236}">
+                <a16:creationId xmlns:a16="http://schemas.microsoft.com/office/drawing/2014/main" id="{500991A2-9D54-EA33-019E-AEF36A18F0BD}"/>
+              </a:ext>
+            </a:extLst>
+          </p:cNvPr>
+          <p:cNvSpPr/>
+          <p:nvPr/>
+        </p:nvSpPr>
+        <p:spPr>
+          <a:xfrm>
+            <a:off x="3460463" y="3652969"/>
+            <a:ext cx="466928" cy="466928"/>
+          </a:xfrm>
+          <a:prstGeom prst="rect">
+            <a:avLst/>
+          </a:prstGeom>
+          <a:solidFill>
+            <a:schemeClr val="accent1">
+              <a:lumMod val="40000"/>
+              <a:lumOff val="60000"/>
+              <a:alpha val="20000"/>
+            </a:schemeClr>
+          </a:solidFill>
+        </p:spPr>
+        <p:style>
+          <a:lnRef idx="2">
+            <a:schemeClr val="accent1">
+              <a:shade val="15000"/>
+            </a:schemeClr>
+          </a:lnRef>
+          <a:fillRef idx="1">
+            <a:schemeClr val="accent1"/>
+          </a:fillRef>
+          <a:effectRef idx="0">
+            <a:schemeClr val="accent1"/>
+          </a:effectRef>
+          <a:fontRef idx="minor">
+            <a:schemeClr val="lt1"/>
+          </a:fontRef>
+        </p:style>
+        <p:txBody>
+          <a:bodyPr tIns="91440" bIns="0" rtlCol="0" anchor="ctr"/>
+          <a:lstStyle/>
+          <a:p>
+            <a:pPr algn="r"/>
+            <a:r>
+              <a:rPr lang="en-US" sz="1400" dirty="0">
+                <a:solidFill>
+                  <a:schemeClr val="tx1"/>
+                </a:solidFill>
+              </a:rPr>
+              <a:t>C4</a:t>
+            </a:r>
+          </a:p>
+        </p:txBody>
+      </p:sp>
+      <p:sp>
+        <p:nvSpPr>
+          <p:cNvPr id="8" name="TextBox 7">
+            <a:extLst>
+              <a:ext uri="{FF2B5EF4-FFF2-40B4-BE49-F238E27FC236}">
+                <a16:creationId xmlns:a16="http://schemas.microsoft.com/office/drawing/2014/main" id="{6F48ACF3-E084-E530-4FBA-33676471B46A}"/>
+              </a:ext>
+            </a:extLst>
+          </p:cNvPr>
+          <p:cNvSpPr txBox="1"/>
+          <p:nvPr/>
+        </p:nvSpPr>
+        <p:spPr>
+          <a:xfrm>
+            <a:off x="6724339" y="4419600"/>
+            <a:ext cx="3944378" cy="707886"/>
+          </a:xfrm>
+          <a:prstGeom prst="rect">
+            <a:avLst/>
+          </a:prstGeom>
+          <a:noFill/>
+          <a:ln>
+            <a:solidFill>
+              <a:srgbClr val="FF0000"/>
+            </a:solidFill>
+          </a:ln>
+        </p:spPr>
+        <p:txBody>
+          <a:bodyPr wrap="square">
+            <a:spAutoFit/>
+          </a:bodyPr>
+          <a:lstStyle/>
+          <a:p>
+            <a:pPr algn="l"/>
+            <a:r>
+              <a:rPr lang="en-US" sz="1600" b="1" i="0" u="none" strike="noStrike" baseline="0" dirty="0">
+                <a:solidFill>
+                  <a:srgbClr val="000000"/>
+                </a:solidFill>
+                <a:latin typeface="Roboto" panose="02000000000000000000" pitchFamily="2" charset="0"/>
+              </a:rPr>
+              <a:t>G303 – Robot Placement</a:t>
+            </a:r>
+          </a:p>
+          <a:p>
+            <a:r>
+              <a:rPr lang="en-US" sz="1200" b="0" i="0" u="none" strike="noStrike" baseline="0" dirty="0">
+                <a:solidFill>
+                  <a:srgbClr val="000000"/>
+                </a:solidFill>
+                <a:latin typeface="Roboto" panose="02000000000000000000" pitchFamily="2" charset="0"/>
+              </a:rPr>
+              <a:t>D. its BUMPERS overlap their ROBOT STARTING LINE, </a:t>
+            </a:r>
+          </a:p>
+          <a:p>
+            <a:r>
+              <a:rPr lang="en-US" sz="1200" b="0" i="0" u="none" strike="noStrike" baseline="0" dirty="0">
+                <a:solidFill>
+                  <a:srgbClr val="000000"/>
+                </a:solidFill>
+                <a:latin typeface="Roboto" panose="02000000000000000000" pitchFamily="2" charset="0"/>
+              </a:rPr>
+              <a:t>E. it’s not contacting the BUMP </a:t>
             </a:r>
           </a:p>
         </p:txBody>
@@ -8856,66 +9198,6 @@
           </a:prstGeom>
         </p:spPr>
       </p:pic>
-      <p:sp>
-        <p:nvSpPr>
-          <p:cNvPr id="44" name="Rectangle 43">
-            <a:extLst>
-              <a:ext uri="{FF2B5EF4-FFF2-40B4-BE49-F238E27FC236}">
-                <a16:creationId xmlns:a16="http://schemas.microsoft.com/office/drawing/2014/main" id="{AB59C961-3696-03C9-3E25-29BB556001EA}"/>
-              </a:ext>
-            </a:extLst>
-          </p:cNvPr>
-          <p:cNvSpPr/>
-          <p:nvPr/>
-        </p:nvSpPr>
-        <p:spPr>
-          <a:xfrm>
-            <a:off x="5218585" y="2579483"/>
-            <a:ext cx="466928" cy="466928"/>
-          </a:xfrm>
-          <a:prstGeom prst="rect">
-            <a:avLst/>
-          </a:prstGeom>
-          <a:solidFill>
-            <a:schemeClr val="accent3">
-              <a:lumMod val="40000"/>
-              <a:lumOff val="60000"/>
-              <a:alpha val="54000"/>
-            </a:schemeClr>
-          </a:solidFill>
-        </p:spPr>
-        <p:style>
-          <a:lnRef idx="2">
-            <a:schemeClr val="accent1">
-              <a:shade val="15000"/>
-            </a:schemeClr>
-          </a:lnRef>
-          <a:fillRef idx="1">
-            <a:schemeClr val="accent1"/>
-          </a:fillRef>
-          <a:effectRef idx="0">
-            <a:schemeClr val="accent1"/>
-          </a:effectRef>
-          <a:fontRef idx="minor">
-            <a:schemeClr val="lt1"/>
-          </a:fontRef>
-        </p:style>
-        <p:txBody>
-          <a:bodyPr rtlCol="0" anchor="ctr"/>
-          <a:lstStyle/>
-          <a:p>
-            <a:pPr algn="ctr"/>
-            <a:r>
-              <a:rPr lang="en-US" dirty="0">
-                <a:solidFill>
-                  <a:schemeClr val="tx1"/>
-                </a:solidFill>
-              </a:rPr>
-              <a:t>A3</a:t>
-            </a:r>
-          </a:p>
-        </p:txBody>
-      </p:sp>
       <p:cxnSp>
         <p:nvCxnSpPr>
           <p:cNvPr id="7" name="Straight Connector 6">
@@ -9607,7 +9889,7 @@
         </p:nvSpPr>
         <p:spPr>
           <a:xfrm>
-            <a:off x="5219423" y="2027091"/>
+            <a:off x="5179668" y="2257670"/>
             <a:ext cx="466928" cy="466928"/>
           </a:xfrm>
           <a:prstGeom prst="rect">
@@ -9674,7 +9956,7 @@
         </p:nvSpPr>
         <p:spPr>
           <a:xfrm>
-            <a:off x="5150492" y="2299189"/>
+            <a:off x="5160867" y="4525554"/>
             <a:ext cx="466928" cy="466928"/>
           </a:xfrm>
           <a:prstGeom prst="rect">
@@ -10018,7 +10300,7 @@
         </p:nvSpPr>
         <p:spPr>
           <a:xfrm>
-            <a:off x="6614807" y="2027091"/>
+            <a:off x="6654562" y="2257670"/>
             <a:ext cx="465287" cy="466928"/>
           </a:xfrm>
           <a:prstGeom prst="rect">
@@ -10090,7 +10372,7 @@
         </p:nvSpPr>
         <p:spPr>
           <a:xfrm>
-            <a:off x="6672249" y="2270687"/>
+            <a:off x="6682624" y="4497052"/>
             <a:ext cx="466928" cy="466928"/>
           </a:xfrm>
           <a:prstGeom prst="rect">
@@ -10138,10 +10420,1055 @@
       </p:sp>
       <p:sp>
         <p:nvSpPr>
-          <p:cNvPr id="16" name="Rectangle 15">
-            <a:extLst>
-              <a:ext uri="{FF2B5EF4-FFF2-40B4-BE49-F238E27FC236}">
-                <a16:creationId xmlns:a16="http://schemas.microsoft.com/office/drawing/2014/main" id="{D911689B-315D-85E7-6146-CE49FAC4F925}"/>
+          <p:cNvPr id="13" name="TextBox 12">
+            <a:extLst>
+              <a:ext uri="{FF2B5EF4-FFF2-40B4-BE49-F238E27FC236}">
+                <a16:creationId xmlns:a16="http://schemas.microsoft.com/office/drawing/2014/main" id="{2C1F0821-2990-31E5-EEBA-16A76089DEE4}"/>
+              </a:ext>
+            </a:extLst>
+          </p:cNvPr>
+          <p:cNvSpPr txBox="1"/>
+          <p:nvPr/>
+        </p:nvSpPr>
+        <p:spPr>
+          <a:xfrm>
+            <a:off x="163546" y="1217381"/>
+            <a:ext cx="1898718" cy="3170099"/>
+          </a:xfrm>
+          <a:prstGeom prst="rect">
+            <a:avLst/>
+          </a:prstGeom>
+          <a:noFill/>
+        </p:spPr>
+        <p:txBody>
+          <a:bodyPr wrap="square" rtlCol="0">
+            <a:spAutoFit/>
+          </a:bodyPr>
+          <a:lstStyle/>
+          <a:p>
+            <a:pPr algn="ctr"/>
+            <a:r>
+              <a:rPr lang="en-US" sz="1600" dirty="0"/>
+              <a:t>Coordinates</a:t>
+            </a:r>
+          </a:p>
+          <a:p>
+            <a:pPr algn="ctr"/>
+            <a:r>
+              <a:rPr lang="en-US" sz="1600" dirty="0"/>
+              <a:t> (x, y, theta) – </a:t>
+            </a:r>
+            <a:endParaRPr lang="en-US" sz="900" dirty="0"/>
+          </a:p>
+          <a:p>
+            <a:pPr algn="ctr"/>
+            <a:endParaRPr lang="en-US" sz="1400" dirty="0"/>
+          </a:p>
+          <a:p>
+            <a:pPr indent="285750"/>
+            <a:r>
+              <a:rPr lang="en-US" sz="1400" dirty="0"/>
+              <a:t>A1 – 3.4 , 5.5, 0 </a:t>
+            </a:r>
+          </a:p>
+          <a:p>
+            <a:pPr indent="285750"/>
+            <a:r>
+              <a:rPr lang="en-US" sz="1400" dirty="0"/>
+              <a:t>N1 – 5.8, 5.5, 0</a:t>
+            </a:r>
+          </a:p>
+          <a:p>
+            <a:pPr indent="285750"/>
+            <a:endParaRPr lang="en-US" sz="1400" dirty="0"/>
+          </a:p>
+          <a:p>
+            <a:pPr indent="285750"/>
+            <a:r>
+              <a:rPr lang="en-US" sz="1400" dirty="0"/>
+              <a:t>A2 – 3.4, 2.5, 0</a:t>
+            </a:r>
+          </a:p>
+          <a:p>
+            <a:pPr indent="285750"/>
+            <a:r>
+              <a:rPr lang="en-US" sz="1400" dirty="0"/>
+              <a:t>N2 – 5.8, 2.5, 0</a:t>
+            </a:r>
+          </a:p>
+          <a:p>
+            <a:pPr indent="285750"/>
+            <a:endParaRPr lang="en-US" sz="1400" dirty="0"/>
+          </a:p>
+          <a:p>
+            <a:pPr indent="285750"/>
+            <a:r>
+              <a:rPr lang="en-US" sz="1400" dirty="0"/>
+              <a:t>D1-</a:t>
+            </a:r>
+          </a:p>
+          <a:p>
+            <a:pPr indent="285750"/>
+            <a:r>
+              <a:rPr lang="en-US" sz="1400" dirty="0"/>
+              <a:t>D2-</a:t>
+            </a:r>
+          </a:p>
+          <a:p>
+            <a:pPr indent="285750"/>
+            <a:endParaRPr lang="en-US" sz="1400" dirty="0"/>
+          </a:p>
+          <a:p>
+            <a:pPr indent="285750"/>
+            <a:r>
+              <a:rPr lang="en-US" sz="1400" dirty="0"/>
+              <a:t>O1-</a:t>
+            </a:r>
+          </a:p>
+          <a:p>
+            <a:pPr indent="285750"/>
+            <a:r>
+              <a:rPr lang="en-US" sz="1400" dirty="0"/>
+              <a:t> </a:t>
+            </a:r>
+            <a:endParaRPr lang="en-US" sz="1600" dirty="0"/>
+          </a:p>
+        </p:txBody>
+      </p:sp>
+      <p:sp>
+        <p:nvSpPr>
+          <p:cNvPr id="18" name="TextBox 17">
+            <a:extLst>
+              <a:ext uri="{FF2B5EF4-FFF2-40B4-BE49-F238E27FC236}">
+                <a16:creationId xmlns:a16="http://schemas.microsoft.com/office/drawing/2014/main" id="{FF5155CE-9B80-EEDC-4E19-B7774AA2FF00}"/>
+              </a:ext>
+            </a:extLst>
+          </p:cNvPr>
+          <p:cNvSpPr txBox="1"/>
+          <p:nvPr/>
+        </p:nvSpPr>
+        <p:spPr>
+          <a:xfrm>
+            <a:off x="300534" y="4207296"/>
+            <a:ext cx="1477010" cy="523220"/>
+          </a:xfrm>
+          <a:prstGeom prst="rect">
+            <a:avLst/>
+          </a:prstGeom>
+          <a:noFill/>
+        </p:spPr>
+        <p:txBody>
+          <a:bodyPr wrap="square" rtlCol="0">
+            <a:spAutoFit/>
+          </a:bodyPr>
+          <a:lstStyle/>
+          <a:p>
+            <a:r>
+              <a:rPr lang="en-US" sz="1400" dirty="0"/>
+              <a:t>Bump Crossing Speed: 2.0 m/s</a:t>
+            </a:r>
+          </a:p>
+        </p:txBody>
+      </p:sp>
+      <p:sp>
+        <p:nvSpPr>
+          <p:cNvPr id="20" name="TextBox 19">
+            <a:extLst>
+              <a:ext uri="{FF2B5EF4-FFF2-40B4-BE49-F238E27FC236}">
+                <a16:creationId xmlns:a16="http://schemas.microsoft.com/office/drawing/2014/main" id="{B118F9A2-E423-6A21-0B18-6E107DBDF1A9}"/>
+              </a:ext>
+            </a:extLst>
+          </p:cNvPr>
+          <p:cNvSpPr txBox="1"/>
+          <p:nvPr/>
+        </p:nvSpPr>
+        <p:spPr>
+          <a:xfrm>
+            <a:off x="7656509" y="3782944"/>
+            <a:ext cx="3144893" cy="2462213"/>
+          </a:xfrm>
+          <a:prstGeom prst="rect">
+            <a:avLst/>
+          </a:prstGeom>
+          <a:noFill/>
+        </p:spPr>
+        <p:txBody>
+          <a:bodyPr wrap="square" rtlCol="0">
+            <a:spAutoFit/>
+          </a:bodyPr>
+          <a:lstStyle/>
+          <a:p>
+            <a:r>
+              <a:rPr lang="en-US" sz="1400" dirty="0"/>
+              <a:t>Linked Waypoint names follow the convention.</a:t>
+            </a:r>
+          </a:p>
+          <a:p>
+            <a:br>
+              <a:rPr lang="en-US" sz="1400" dirty="0"/>
+            </a:br>
+            <a:r>
+              <a:rPr lang="en-US" sz="1400" dirty="0"/>
+              <a:t>                 PT – PATH</a:t>
+            </a:r>
+          </a:p>
+          <a:p>
+            <a:br>
+              <a:rPr lang="en-US" sz="1400" dirty="0"/>
+            </a:br>
+            <a:r>
+              <a:rPr lang="en-US" sz="1400" dirty="0"/>
+              <a:t>So, for the A1-Point in the A1</a:t>
+            </a:r>
+            <a:r>
+              <a:rPr lang="en-US" sz="1400" dirty="0">
+                <a:sym typeface="Wingdings" panose="05000000000000000000" pitchFamily="2" charset="2"/>
+              </a:rPr>
+              <a:t> A2 direction, link name is</a:t>
+            </a:r>
+          </a:p>
+          <a:p>
+            <a:r>
+              <a:rPr lang="en-US" sz="1400" dirty="0">
+                <a:sym typeface="Wingdings" panose="05000000000000000000" pitchFamily="2" charset="2"/>
+              </a:rPr>
+              <a:t>                 A1-A1-N2</a:t>
+            </a:r>
+          </a:p>
+          <a:p>
+            <a:endParaRPr lang="en-US" sz="1400" dirty="0">
+              <a:sym typeface="Wingdings" panose="05000000000000000000" pitchFamily="2" charset="2"/>
+            </a:endParaRPr>
+          </a:p>
+          <a:p>
+            <a:r>
+              <a:rPr lang="en-US" sz="1400" dirty="0">
+                <a:sym typeface="Wingdings" panose="05000000000000000000" pitchFamily="2" charset="2"/>
+              </a:rPr>
+              <a:t>This is so we can control the ‘theta’ value depending on the direction.</a:t>
+            </a:r>
+            <a:endParaRPr lang="en-US" sz="1400" dirty="0"/>
+          </a:p>
+        </p:txBody>
+      </p:sp>
+    </p:spTree>
+    <p:extLst>
+      <p:ext uri="{BB962C8B-B14F-4D97-AF65-F5344CB8AC3E}">
+        <p14:creationId xmlns:p14="http://schemas.microsoft.com/office/powerpoint/2010/main" val="3330468595"/>
+      </p:ext>
+    </p:extLst>
+  </p:cSld>
+  <p:clrMapOvr>
+    <a:masterClrMapping/>
+  </p:clrMapOvr>
+</p:sld>
+</file>
+
+<file path=ppt/slides/slide5.xml><?xml version="1.0" encoding="utf-8"?>
+<p:sld xmlns:a="http://schemas.openxmlformats.org/drawingml/2006/main" xmlns:r="http://schemas.openxmlformats.org/officeDocument/2006/relationships" xmlns:p="http://schemas.openxmlformats.org/presentationml/2006/main">
+  <p:cSld>
+    <p:spTree>
+      <p:nvGrpSpPr>
+        <p:cNvPr id="1" name="">
+          <a:extLst>
+            <a:ext uri="{FF2B5EF4-FFF2-40B4-BE49-F238E27FC236}">
+              <a16:creationId xmlns:a16="http://schemas.microsoft.com/office/drawing/2014/main" id="{1AFFBB49-4F40-F573-9222-D595880B401E}"/>
+            </a:ext>
+          </a:extLst>
+        </p:cNvPr>
+        <p:cNvGrpSpPr/>
+        <p:nvPr/>
+      </p:nvGrpSpPr>
+      <p:grpSpPr>
+        <a:xfrm>
+          <a:off x="0" y="0"/>
+          <a:ext cx="0" cy="0"/>
+          <a:chOff x="0" y="0"/>
+          <a:chExt cx="0" cy="0"/>
+        </a:xfrm>
+      </p:grpSpPr>
+      <p:pic>
+        <p:nvPicPr>
+          <p:cNvPr id="11" name="Picture 10">
+            <a:extLst>
+              <a:ext uri="{FF2B5EF4-FFF2-40B4-BE49-F238E27FC236}">
+                <a16:creationId xmlns:a16="http://schemas.microsoft.com/office/drawing/2014/main" id="{AC61F05F-27BE-79DC-838E-27A55A08C467}"/>
+              </a:ext>
+            </a:extLst>
+          </p:cNvPr>
+          <p:cNvPicPr>
+            <a:picLocks noChangeAspect="1"/>
+          </p:cNvPicPr>
+          <p:nvPr/>
+        </p:nvPicPr>
+        <p:blipFill>
+          <a:blip r:embed="rId2"/>
+          <a:stretch>
+            <a:fillRect/>
+          </a:stretch>
+        </p:blipFill>
+        <p:spPr>
+          <a:xfrm>
+            <a:off x="2129612" y="418288"/>
+            <a:ext cx="9154803" cy="6373114"/>
+          </a:xfrm>
+          <a:prstGeom prst="rect">
+            <a:avLst/>
+          </a:prstGeom>
+        </p:spPr>
+      </p:pic>
+      <p:cxnSp>
+        <p:nvCxnSpPr>
+          <p:cNvPr id="7" name="Straight Connector 6">
+            <a:extLst>
+              <a:ext uri="{FF2B5EF4-FFF2-40B4-BE49-F238E27FC236}">
+                <a16:creationId xmlns:a16="http://schemas.microsoft.com/office/drawing/2014/main" id="{02336022-44D2-2140-D9CF-34DA2FD432B2}"/>
+              </a:ext>
+            </a:extLst>
+          </p:cNvPr>
+          <p:cNvCxnSpPr/>
+          <p:nvPr/>
+        </p:nvCxnSpPr>
+        <p:spPr>
+          <a:xfrm flipV="1">
+            <a:off x="2893925" y="80387"/>
+            <a:ext cx="0" cy="622998"/>
+          </a:xfrm>
+          <a:prstGeom prst="line">
+            <a:avLst/>
+          </a:prstGeom>
+        </p:spPr>
+        <p:style>
+          <a:lnRef idx="2">
+            <a:schemeClr val="accent1"/>
+          </a:lnRef>
+          <a:fillRef idx="0">
+            <a:schemeClr val="accent1"/>
+          </a:fillRef>
+          <a:effectRef idx="1">
+            <a:schemeClr val="accent1"/>
+          </a:effectRef>
+          <a:fontRef idx="minor">
+            <a:schemeClr val="tx1"/>
+          </a:fontRef>
+        </p:style>
+      </p:cxnSp>
+      <p:cxnSp>
+        <p:nvCxnSpPr>
+          <p:cNvPr id="9" name="Straight Connector 8">
+            <a:extLst>
+              <a:ext uri="{FF2B5EF4-FFF2-40B4-BE49-F238E27FC236}">
+                <a16:creationId xmlns:a16="http://schemas.microsoft.com/office/drawing/2014/main" id="{200F9688-C844-6B8E-F7A8-C21F1E08B1C3}"/>
+              </a:ext>
+            </a:extLst>
+          </p:cNvPr>
+          <p:cNvCxnSpPr/>
+          <p:nvPr/>
+        </p:nvCxnSpPr>
+        <p:spPr>
+          <a:xfrm flipV="1">
+            <a:off x="6173821" y="80387"/>
+            <a:ext cx="0" cy="622998"/>
+          </a:xfrm>
+          <a:prstGeom prst="line">
+            <a:avLst/>
+          </a:prstGeom>
+        </p:spPr>
+        <p:style>
+          <a:lnRef idx="2">
+            <a:schemeClr val="accent1"/>
+          </a:lnRef>
+          <a:fillRef idx="0">
+            <a:schemeClr val="accent1"/>
+          </a:fillRef>
+          <a:effectRef idx="1">
+            <a:schemeClr val="accent1"/>
+          </a:effectRef>
+          <a:fontRef idx="minor">
+            <a:schemeClr val="tx1"/>
+          </a:fontRef>
+        </p:style>
+      </p:cxnSp>
+      <p:sp>
+        <p:nvSpPr>
+          <p:cNvPr id="10" name="TextBox 9">
+            <a:extLst>
+              <a:ext uri="{FF2B5EF4-FFF2-40B4-BE49-F238E27FC236}">
+                <a16:creationId xmlns:a16="http://schemas.microsoft.com/office/drawing/2014/main" id="{8229CE06-E1F0-A7CB-53CE-4C575A465240}"/>
+              </a:ext>
+            </a:extLst>
+          </p:cNvPr>
+          <p:cNvSpPr txBox="1"/>
+          <p:nvPr/>
+        </p:nvSpPr>
+        <p:spPr>
+          <a:xfrm>
+            <a:off x="4124527" y="207220"/>
+            <a:ext cx="1040857" cy="369332"/>
+          </a:xfrm>
+          <a:prstGeom prst="rect">
+            <a:avLst/>
+          </a:prstGeom>
+          <a:noFill/>
+        </p:spPr>
+        <p:txBody>
+          <a:bodyPr wrap="square" rtlCol="0">
+            <a:spAutoFit/>
+          </a:bodyPr>
+          <a:lstStyle/>
+          <a:p>
+            <a:r>
+              <a:rPr lang="en-US" dirty="0"/>
+              <a:t>15’ – 2”</a:t>
+            </a:r>
+          </a:p>
+        </p:txBody>
+      </p:sp>
+      <p:cxnSp>
+        <p:nvCxnSpPr>
+          <p:cNvPr id="12" name="Straight Arrow Connector 11">
+            <a:extLst>
+              <a:ext uri="{FF2B5EF4-FFF2-40B4-BE49-F238E27FC236}">
+                <a16:creationId xmlns:a16="http://schemas.microsoft.com/office/drawing/2014/main" id="{4E95618E-4140-F4B2-9396-637A635AFC32}"/>
+              </a:ext>
+            </a:extLst>
+          </p:cNvPr>
+          <p:cNvCxnSpPr/>
+          <p:nvPr/>
+        </p:nvCxnSpPr>
+        <p:spPr>
+          <a:xfrm>
+            <a:off x="4980562" y="391886"/>
+            <a:ext cx="1193259" cy="0"/>
+          </a:xfrm>
+          <a:prstGeom prst="straightConnector1">
+            <a:avLst/>
+          </a:prstGeom>
+          <a:ln>
+            <a:tailEnd type="triangle"/>
+          </a:ln>
+        </p:spPr>
+        <p:style>
+          <a:lnRef idx="2">
+            <a:schemeClr val="accent1"/>
+          </a:lnRef>
+          <a:fillRef idx="0">
+            <a:schemeClr val="accent1"/>
+          </a:fillRef>
+          <a:effectRef idx="1">
+            <a:schemeClr val="accent1"/>
+          </a:effectRef>
+          <a:fontRef idx="minor">
+            <a:schemeClr val="tx1"/>
+          </a:fontRef>
+        </p:style>
+      </p:cxnSp>
+      <p:cxnSp>
+        <p:nvCxnSpPr>
+          <p:cNvPr id="14" name="Straight Arrow Connector 13">
+            <a:extLst>
+              <a:ext uri="{FF2B5EF4-FFF2-40B4-BE49-F238E27FC236}">
+                <a16:creationId xmlns:a16="http://schemas.microsoft.com/office/drawing/2014/main" id="{F81E1B8B-C60D-2F01-3015-2213CD058AD7}"/>
+              </a:ext>
+            </a:extLst>
+          </p:cNvPr>
+          <p:cNvCxnSpPr>
+            <a:stCxn id="10" idx="1"/>
+          </p:cNvCxnSpPr>
+          <p:nvPr/>
+        </p:nvCxnSpPr>
+        <p:spPr>
+          <a:xfrm flipH="1">
+            <a:off x="2893925" y="391886"/>
+            <a:ext cx="1230602" cy="0"/>
+          </a:xfrm>
+          <a:prstGeom prst="straightConnector1">
+            <a:avLst/>
+          </a:prstGeom>
+          <a:ln>
+            <a:tailEnd type="triangle"/>
+          </a:ln>
+        </p:spPr>
+        <p:style>
+          <a:lnRef idx="2">
+            <a:schemeClr val="accent1"/>
+          </a:lnRef>
+          <a:fillRef idx="0">
+            <a:schemeClr val="accent1"/>
+          </a:fillRef>
+          <a:effectRef idx="1">
+            <a:schemeClr val="accent1"/>
+          </a:effectRef>
+          <a:fontRef idx="minor">
+            <a:schemeClr val="tx1"/>
+          </a:fontRef>
+        </p:style>
+      </p:cxnSp>
+      <p:sp>
+        <p:nvSpPr>
+          <p:cNvPr id="15" name="TextBox 14">
+            <a:extLst>
+              <a:ext uri="{FF2B5EF4-FFF2-40B4-BE49-F238E27FC236}">
+                <a16:creationId xmlns:a16="http://schemas.microsoft.com/office/drawing/2014/main" id="{BA83DB17-34C8-6B72-EB17-7EB6D87DCECA}"/>
+              </a:ext>
+            </a:extLst>
+          </p:cNvPr>
+          <p:cNvSpPr txBox="1"/>
+          <p:nvPr/>
+        </p:nvSpPr>
+        <p:spPr>
+          <a:xfrm>
+            <a:off x="6846630" y="207220"/>
+            <a:ext cx="1115583" cy="369332"/>
+          </a:xfrm>
+          <a:prstGeom prst="rect">
+            <a:avLst/>
+          </a:prstGeom>
+          <a:noFill/>
+        </p:spPr>
+        <p:txBody>
+          <a:bodyPr wrap="square" rtlCol="0">
+            <a:spAutoFit/>
+          </a:bodyPr>
+          <a:lstStyle/>
+          <a:p>
+            <a:pPr algn="ctr"/>
+            <a:r>
+              <a:rPr lang="en-US" dirty="0"/>
+              <a:t>11’-11”</a:t>
+            </a:r>
+          </a:p>
+        </p:txBody>
+      </p:sp>
+      <p:cxnSp>
+        <p:nvCxnSpPr>
+          <p:cNvPr id="17" name="Straight Arrow Connector 16">
+            <a:extLst>
+              <a:ext uri="{FF2B5EF4-FFF2-40B4-BE49-F238E27FC236}">
+                <a16:creationId xmlns:a16="http://schemas.microsoft.com/office/drawing/2014/main" id="{F92E0747-6E1F-24FA-AD39-B21AD6B8D087}"/>
+              </a:ext>
+            </a:extLst>
+          </p:cNvPr>
+          <p:cNvCxnSpPr/>
+          <p:nvPr/>
+        </p:nvCxnSpPr>
+        <p:spPr>
+          <a:xfrm flipH="1">
+            <a:off x="6245157" y="391886"/>
+            <a:ext cx="739303" cy="0"/>
+          </a:xfrm>
+          <a:prstGeom prst="straightConnector1">
+            <a:avLst/>
+          </a:prstGeom>
+          <a:ln>
+            <a:tailEnd type="triangle"/>
+          </a:ln>
+        </p:spPr>
+        <p:style>
+          <a:lnRef idx="2">
+            <a:schemeClr val="accent1"/>
+          </a:lnRef>
+          <a:fillRef idx="0">
+            <a:schemeClr val="accent1"/>
+          </a:fillRef>
+          <a:effectRef idx="1">
+            <a:schemeClr val="accent1"/>
+          </a:effectRef>
+          <a:fontRef idx="minor">
+            <a:schemeClr val="tx1"/>
+          </a:fontRef>
+        </p:style>
+      </p:cxnSp>
+      <p:cxnSp>
+        <p:nvCxnSpPr>
+          <p:cNvPr id="19" name="Straight Connector 18">
+            <a:extLst>
+              <a:ext uri="{FF2B5EF4-FFF2-40B4-BE49-F238E27FC236}">
+                <a16:creationId xmlns:a16="http://schemas.microsoft.com/office/drawing/2014/main" id="{8FCC5B96-A432-9A6F-A904-F287832FE60E}"/>
+              </a:ext>
+            </a:extLst>
+          </p:cNvPr>
+          <p:cNvCxnSpPr/>
+          <p:nvPr/>
+        </p:nvCxnSpPr>
+        <p:spPr>
+          <a:xfrm flipV="1">
+            <a:off x="8725711" y="80387"/>
+            <a:ext cx="0" cy="622998"/>
+          </a:xfrm>
+          <a:prstGeom prst="line">
+            <a:avLst/>
+          </a:prstGeom>
+        </p:spPr>
+        <p:style>
+          <a:lnRef idx="2">
+            <a:schemeClr val="accent1"/>
+          </a:lnRef>
+          <a:fillRef idx="0">
+            <a:schemeClr val="accent1"/>
+          </a:fillRef>
+          <a:effectRef idx="1">
+            <a:schemeClr val="accent1"/>
+          </a:effectRef>
+          <a:fontRef idx="minor">
+            <a:schemeClr val="tx1"/>
+          </a:fontRef>
+        </p:style>
+      </p:cxnSp>
+      <p:cxnSp>
+        <p:nvCxnSpPr>
+          <p:cNvPr id="21" name="Straight Arrow Connector 20">
+            <a:extLst>
+              <a:ext uri="{FF2B5EF4-FFF2-40B4-BE49-F238E27FC236}">
+                <a16:creationId xmlns:a16="http://schemas.microsoft.com/office/drawing/2014/main" id="{2BA6309F-477B-687E-24EE-A651E0E16F71}"/>
+              </a:ext>
+            </a:extLst>
+          </p:cNvPr>
+          <p:cNvCxnSpPr/>
+          <p:nvPr/>
+        </p:nvCxnSpPr>
+        <p:spPr>
+          <a:xfrm>
+            <a:off x="7801583" y="391886"/>
+            <a:ext cx="894945" cy="0"/>
+          </a:xfrm>
+          <a:prstGeom prst="straightConnector1">
+            <a:avLst/>
+          </a:prstGeom>
+          <a:ln>
+            <a:tailEnd type="triangle"/>
+          </a:ln>
+        </p:spPr>
+        <p:style>
+          <a:lnRef idx="2">
+            <a:schemeClr val="accent1"/>
+          </a:lnRef>
+          <a:fillRef idx="0">
+            <a:schemeClr val="accent1"/>
+          </a:fillRef>
+          <a:effectRef idx="1">
+            <a:schemeClr val="accent1"/>
+          </a:effectRef>
+          <a:fontRef idx="minor">
+            <a:schemeClr val="tx1"/>
+          </a:fontRef>
+        </p:style>
+      </p:cxnSp>
+      <p:cxnSp>
+        <p:nvCxnSpPr>
+          <p:cNvPr id="23" name="Straight Connector 22">
+            <a:extLst>
+              <a:ext uri="{FF2B5EF4-FFF2-40B4-BE49-F238E27FC236}">
+                <a16:creationId xmlns:a16="http://schemas.microsoft.com/office/drawing/2014/main" id="{6C32DA1D-C0C8-0AFF-6BDE-60CA2FD26EAE}"/>
+              </a:ext>
+            </a:extLst>
+          </p:cNvPr>
+          <p:cNvCxnSpPr>
+            <a:cxnSpLocks/>
+          </p:cNvCxnSpPr>
+          <p:nvPr/>
+        </p:nvCxnSpPr>
+        <p:spPr>
+          <a:xfrm flipH="1">
+            <a:off x="1867711" y="787940"/>
+            <a:ext cx="856034" cy="0"/>
+          </a:xfrm>
+          <a:prstGeom prst="line">
+            <a:avLst/>
+          </a:prstGeom>
+        </p:spPr>
+        <p:style>
+          <a:lnRef idx="2">
+            <a:schemeClr val="accent1"/>
+          </a:lnRef>
+          <a:fillRef idx="0">
+            <a:schemeClr val="accent1"/>
+          </a:fillRef>
+          <a:effectRef idx="1">
+            <a:schemeClr val="accent1"/>
+          </a:effectRef>
+          <a:fontRef idx="minor">
+            <a:schemeClr val="tx1"/>
+          </a:fontRef>
+        </p:style>
+      </p:cxnSp>
+      <p:cxnSp>
+        <p:nvCxnSpPr>
+          <p:cNvPr id="25" name="Straight Connector 24">
+            <a:extLst>
+              <a:ext uri="{FF2B5EF4-FFF2-40B4-BE49-F238E27FC236}">
+                <a16:creationId xmlns:a16="http://schemas.microsoft.com/office/drawing/2014/main" id="{BF7AE60C-F927-949E-8724-DEF7CE5D483D}"/>
+              </a:ext>
+            </a:extLst>
+          </p:cNvPr>
+          <p:cNvCxnSpPr>
+            <a:cxnSpLocks/>
+          </p:cNvCxnSpPr>
+          <p:nvPr/>
+        </p:nvCxnSpPr>
+        <p:spPr>
+          <a:xfrm>
+            <a:off x="2235116" y="3652970"/>
+            <a:ext cx="367406" cy="0"/>
+          </a:xfrm>
+          <a:prstGeom prst="line">
+            <a:avLst/>
+          </a:prstGeom>
+        </p:spPr>
+        <p:style>
+          <a:lnRef idx="2">
+            <a:schemeClr val="accent1"/>
+          </a:lnRef>
+          <a:fillRef idx="0">
+            <a:schemeClr val="accent1"/>
+          </a:fillRef>
+          <a:effectRef idx="1">
+            <a:schemeClr val="accent1"/>
+          </a:effectRef>
+          <a:fontRef idx="minor">
+            <a:schemeClr val="tx1"/>
+          </a:fontRef>
+        </p:style>
+      </p:cxnSp>
+      <p:cxnSp>
+        <p:nvCxnSpPr>
+          <p:cNvPr id="28" name="Straight Connector 27">
+            <a:extLst>
+              <a:ext uri="{FF2B5EF4-FFF2-40B4-BE49-F238E27FC236}">
+                <a16:creationId xmlns:a16="http://schemas.microsoft.com/office/drawing/2014/main" id="{AC44D5A0-089C-71AA-D300-5A804D9BC625}"/>
+              </a:ext>
+            </a:extLst>
+          </p:cNvPr>
+          <p:cNvCxnSpPr/>
+          <p:nvPr/>
+        </p:nvCxnSpPr>
+        <p:spPr>
+          <a:xfrm flipH="1">
+            <a:off x="1867711" y="6439711"/>
+            <a:ext cx="734811" cy="0"/>
+          </a:xfrm>
+          <a:prstGeom prst="line">
+            <a:avLst/>
+          </a:prstGeom>
+        </p:spPr>
+        <p:style>
+          <a:lnRef idx="2">
+            <a:schemeClr val="accent1"/>
+          </a:lnRef>
+          <a:fillRef idx="0">
+            <a:schemeClr val="accent1"/>
+          </a:fillRef>
+          <a:effectRef idx="1">
+            <a:schemeClr val="accent1"/>
+          </a:effectRef>
+          <a:fontRef idx="minor">
+            <a:schemeClr val="tx1"/>
+          </a:fontRef>
+        </p:style>
+      </p:cxnSp>
+      <p:cxnSp>
+        <p:nvCxnSpPr>
+          <p:cNvPr id="30" name="Straight Arrow Connector 29">
+            <a:extLst>
+              <a:ext uri="{FF2B5EF4-FFF2-40B4-BE49-F238E27FC236}">
+                <a16:creationId xmlns:a16="http://schemas.microsoft.com/office/drawing/2014/main" id="{51EBAF16-851C-308F-715C-76B9C050D8E3}"/>
+              </a:ext>
+            </a:extLst>
+          </p:cNvPr>
+          <p:cNvCxnSpPr/>
+          <p:nvPr/>
+        </p:nvCxnSpPr>
+        <p:spPr>
+          <a:xfrm flipV="1">
+            <a:off x="2332393" y="787940"/>
+            <a:ext cx="0" cy="710120"/>
+          </a:xfrm>
+          <a:prstGeom prst="straightConnector1">
+            <a:avLst/>
+          </a:prstGeom>
+          <a:ln>
+            <a:tailEnd type="triangle"/>
+          </a:ln>
+        </p:spPr>
+        <p:style>
+          <a:lnRef idx="2">
+            <a:schemeClr val="accent1"/>
+          </a:lnRef>
+          <a:fillRef idx="0">
+            <a:schemeClr val="accent1"/>
+          </a:fillRef>
+          <a:effectRef idx="1">
+            <a:schemeClr val="accent1"/>
+          </a:effectRef>
+          <a:fontRef idx="minor">
+            <a:schemeClr val="tx1"/>
+          </a:fontRef>
+        </p:style>
+      </p:cxnSp>
+      <p:cxnSp>
+        <p:nvCxnSpPr>
+          <p:cNvPr id="32" name="Straight Arrow Connector 31">
+            <a:extLst>
+              <a:ext uri="{FF2B5EF4-FFF2-40B4-BE49-F238E27FC236}">
+                <a16:creationId xmlns:a16="http://schemas.microsoft.com/office/drawing/2014/main" id="{8E625F0F-07EF-2D16-57A7-21A6B977C7BC}"/>
+              </a:ext>
+            </a:extLst>
+          </p:cNvPr>
+          <p:cNvCxnSpPr/>
+          <p:nvPr/>
+        </p:nvCxnSpPr>
+        <p:spPr>
+          <a:xfrm>
+            <a:off x="2332393" y="1760706"/>
+            <a:ext cx="0" cy="1892263"/>
+          </a:xfrm>
+          <a:prstGeom prst="straightConnector1">
+            <a:avLst/>
+          </a:prstGeom>
+          <a:ln>
+            <a:tailEnd type="triangle"/>
+          </a:ln>
+        </p:spPr>
+        <p:style>
+          <a:lnRef idx="2">
+            <a:schemeClr val="accent1"/>
+          </a:lnRef>
+          <a:fillRef idx="0">
+            <a:schemeClr val="accent1"/>
+          </a:fillRef>
+          <a:effectRef idx="1">
+            <a:schemeClr val="accent1"/>
+          </a:effectRef>
+          <a:fontRef idx="minor">
+            <a:schemeClr val="tx1"/>
+          </a:fontRef>
+        </p:style>
+      </p:cxnSp>
+      <p:cxnSp>
+        <p:nvCxnSpPr>
+          <p:cNvPr id="35" name="Straight Arrow Connector 34">
+            <a:extLst>
+              <a:ext uri="{FF2B5EF4-FFF2-40B4-BE49-F238E27FC236}">
+                <a16:creationId xmlns:a16="http://schemas.microsoft.com/office/drawing/2014/main" id="{0BDD3451-25F8-4D14-D690-B88FE4BE175C}"/>
+              </a:ext>
+            </a:extLst>
+          </p:cNvPr>
+          <p:cNvCxnSpPr/>
+          <p:nvPr/>
+        </p:nvCxnSpPr>
+        <p:spPr>
+          <a:xfrm flipV="1">
+            <a:off x="2062264" y="787940"/>
+            <a:ext cx="0" cy="4863830"/>
+          </a:xfrm>
+          <a:prstGeom prst="straightConnector1">
+            <a:avLst/>
+          </a:prstGeom>
+          <a:ln>
+            <a:tailEnd type="triangle"/>
+          </a:ln>
+        </p:spPr>
+        <p:style>
+          <a:lnRef idx="2">
+            <a:schemeClr val="accent1"/>
+          </a:lnRef>
+          <a:fillRef idx="0">
+            <a:schemeClr val="accent1"/>
+          </a:fillRef>
+          <a:effectRef idx="1">
+            <a:schemeClr val="accent1"/>
+          </a:effectRef>
+          <a:fontRef idx="minor">
+            <a:schemeClr val="tx1"/>
+          </a:fontRef>
+        </p:style>
+      </p:cxnSp>
+      <p:cxnSp>
+        <p:nvCxnSpPr>
+          <p:cNvPr id="38" name="Straight Arrow Connector 37">
+            <a:extLst>
+              <a:ext uri="{FF2B5EF4-FFF2-40B4-BE49-F238E27FC236}">
+                <a16:creationId xmlns:a16="http://schemas.microsoft.com/office/drawing/2014/main" id="{E04969D4-5E81-28EA-8D27-8D0B6DE41D05}"/>
+              </a:ext>
+            </a:extLst>
+          </p:cNvPr>
+          <p:cNvCxnSpPr/>
+          <p:nvPr/>
+        </p:nvCxnSpPr>
+        <p:spPr>
+          <a:xfrm>
+            <a:off x="2062264" y="6050604"/>
+            <a:ext cx="0" cy="389107"/>
+          </a:xfrm>
+          <a:prstGeom prst="straightConnector1">
+            <a:avLst/>
+          </a:prstGeom>
+          <a:ln>
+            <a:tailEnd type="triangle"/>
+          </a:ln>
+        </p:spPr>
+        <p:style>
+          <a:lnRef idx="2">
+            <a:schemeClr val="accent1"/>
+          </a:lnRef>
+          <a:fillRef idx="0">
+            <a:schemeClr val="accent1"/>
+          </a:fillRef>
+          <a:effectRef idx="1">
+            <a:schemeClr val="accent1"/>
+          </a:effectRef>
+          <a:fontRef idx="minor">
+            <a:schemeClr val="tx1"/>
+          </a:fontRef>
+        </p:style>
+      </p:cxnSp>
+      <p:sp>
+        <p:nvSpPr>
+          <p:cNvPr id="39" name="TextBox 38">
+            <a:extLst>
+              <a:ext uri="{FF2B5EF4-FFF2-40B4-BE49-F238E27FC236}">
+                <a16:creationId xmlns:a16="http://schemas.microsoft.com/office/drawing/2014/main" id="{C6E3D898-4D53-8389-463D-9D7FEA3FE0E9}"/>
+              </a:ext>
+            </a:extLst>
+          </p:cNvPr>
+          <p:cNvSpPr txBox="1"/>
+          <p:nvPr/>
+        </p:nvSpPr>
+        <p:spPr>
+          <a:xfrm>
+            <a:off x="1867711" y="1498060"/>
+            <a:ext cx="1026213" cy="369332"/>
+          </a:xfrm>
+          <a:prstGeom prst="rect">
+            <a:avLst/>
+          </a:prstGeom>
+          <a:noFill/>
+        </p:spPr>
+        <p:txBody>
+          <a:bodyPr wrap="square" rtlCol="0">
+            <a:spAutoFit/>
+          </a:bodyPr>
+          <a:lstStyle/>
+          <a:p>
+            <a:pPr algn="ctr"/>
+            <a:r>
+              <a:rPr lang="en-US" dirty="0"/>
+              <a:t>13’- 3”</a:t>
+            </a:r>
+          </a:p>
+        </p:txBody>
+      </p:sp>
+      <p:sp>
+        <p:nvSpPr>
+          <p:cNvPr id="40" name="TextBox 39">
+            <a:extLst>
+              <a:ext uri="{FF2B5EF4-FFF2-40B4-BE49-F238E27FC236}">
+                <a16:creationId xmlns:a16="http://schemas.microsoft.com/office/drawing/2014/main" id="{35D444A8-FA4E-DCE3-7BC7-E8C583731CED}"/>
+              </a:ext>
+            </a:extLst>
+          </p:cNvPr>
+          <p:cNvSpPr txBox="1"/>
+          <p:nvPr/>
+        </p:nvSpPr>
+        <p:spPr>
+          <a:xfrm>
+            <a:off x="1678395" y="5690998"/>
+            <a:ext cx="856034" cy="369332"/>
+          </a:xfrm>
+          <a:prstGeom prst="rect">
+            <a:avLst/>
+          </a:prstGeom>
+          <a:noFill/>
+        </p:spPr>
+        <p:txBody>
+          <a:bodyPr wrap="square" rtlCol="0">
+            <a:spAutoFit/>
+          </a:bodyPr>
+          <a:lstStyle/>
+          <a:p>
+            <a:r>
+              <a:rPr lang="en-US" dirty="0"/>
+              <a:t>26’- 7”</a:t>
+            </a:r>
+          </a:p>
+        </p:txBody>
+      </p:sp>
+      <p:sp>
+        <p:nvSpPr>
+          <p:cNvPr id="3" name="TextBox 2">
+            <a:extLst>
+              <a:ext uri="{FF2B5EF4-FFF2-40B4-BE49-F238E27FC236}">
+                <a16:creationId xmlns:a16="http://schemas.microsoft.com/office/drawing/2014/main" id="{B34E6BDB-9746-1CC2-A51C-A67E5606CBE2}"/>
+              </a:ext>
+            </a:extLst>
+          </p:cNvPr>
+          <p:cNvSpPr txBox="1"/>
+          <p:nvPr/>
+        </p:nvSpPr>
+        <p:spPr>
+          <a:xfrm>
+            <a:off x="8769379" y="897102"/>
+            <a:ext cx="1717482" cy="400110"/>
+          </a:xfrm>
+          <a:prstGeom prst="rect">
+            <a:avLst/>
+          </a:prstGeom>
+          <a:noFill/>
+        </p:spPr>
+        <p:txBody>
+          <a:bodyPr wrap="square" rtlCol="0">
+            <a:spAutoFit/>
+          </a:bodyPr>
+          <a:lstStyle/>
+          <a:p>
+            <a:r>
+              <a:rPr lang="en-US" sz="2000" dirty="0"/>
+              <a:t>Neutral   Zone</a:t>
+            </a:r>
+          </a:p>
+        </p:txBody>
+      </p:sp>
+      <p:sp>
+        <p:nvSpPr>
+          <p:cNvPr id="4" name="TextBox 3">
+            <a:extLst>
+              <a:ext uri="{FF2B5EF4-FFF2-40B4-BE49-F238E27FC236}">
+                <a16:creationId xmlns:a16="http://schemas.microsoft.com/office/drawing/2014/main" id="{B2E8AA86-3561-A18A-EB59-CACF27EF8FF6}"/>
+              </a:ext>
+            </a:extLst>
+          </p:cNvPr>
+          <p:cNvSpPr txBox="1"/>
+          <p:nvPr/>
+        </p:nvSpPr>
+        <p:spPr>
+          <a:xfrm>
+            <a:off x="2974663" y="867099"/>
+            <a:ext cx="1717482" cy="400110"/>
+          </a:xfrm>
+          <a:prstGeom prst="rect">
+            <a:avLst/>
+          </a:prstGeom>
+          <a:noFill/>
+        </p:spPr>
+        <p:txBody>
+          <a:bodyPr wrap="square" rtlCol="0">
+            <a:spAutoFit/>
+          </a:bodyPr>
+          <a:lstStyle/>
+          <a:p>
+            <a:r>
+              <a:rPr lang="en-US" sz="2000" dirty="0"/>
+              <a:t>Alliance Zone</a:t>
+            </a:r>
+          </a:p>
+        </p:txBody>
+      </p:sp>
+      <p:sp>
+        <p:nvSpPr>
+          <p:cNvPr id="13" name="Rectangle 12">
+            <a:extLst>
+              <a:ext uri="{FF2B5EF4-FFF2-40B4-BE49-F238E27FC236}">
+                <a16:creationId xmlns:a16="http://schemas.microsoft.com/office/drawing/2014/main" id="{81A674B5-440B-5422-AD55-0C17C466F63B}"/>
               </a:ext>
             </a:extLst>
           </p:cNvPr>
@@ -10150,127 +11477,7 @@
         </p:nvSpPr>
         <p:spPr>
           <a:xfrm>
-            <a:off x="6614808" y="2551494"/>
-            <a:ext cx="466928" cy="466928"/>
-          </a:xfrm>
-          <a:prstGeom prst="rect">
-            <a:avLst/>
-          </a:prstGeom>
-          <a:solidFill>
-            <a:schemeClr val="accent3">
-              <a:lumMod val="40000"/>
-              <a:lumOff val="60000"/>
-              <a:alpha val="54000"/>
-            </a:schemeClr>
-          </a:solidFill>
-        </p:spPr>
-        <p:style>
-          <a:lnRef idx="2">
-            <a:schemeClr val="accent1">
-              <a:shade val="15000"/>
-            </a:schemeClr>
-          </a:lnRef>
-          <a:fillRef idx="1">
-            <a:schemeClr val="accent1"/>
-          </a:fillRef>
-          <a:effectRef idx="0">
-            <a:schemeClr val="accent1"/>
-          </a:effectRef>
-          <a:fontRef idx="minor">
-            <a:schemeClr val="lt1"/>
-          </a:fontRef>
-        </p:style>
-        <p:txBody>
-          <a:bodyPr rtlCol="0" anchor="ctr"/>
-          <a:lstStyle/>
-          <a:p>
-            <a:pPr algn="ctr"/>
-            <a:r>
-              <a:rPr lang="en-US" sz="1600" dirty="0">
-                <a:solidFill>
-                  <a:schemeClr val="tx1"/>
-                </a:solidFill>
-              </a:rPr>
-              <a:t>N3</a:t>
-            </a:r>
-          </a:p>
-        </p:txBody>
-      </p:sp>
-      <p:sp>
-        <p:nvSpPr>
-          <p:cNvPr id="29" name="Rectangle 28">
-            <a:extLst>
-              <a:ext uri="{FF2B5EF4-FFF2-40B4-BE49-F238E27FC236}">
-                <a16:creationId xmlns:a16="http://schemas.microsoft.com/office/drawing/2014/main" id="{8DB8492B-5C8E-756A-F71B-9D97D7B861EA}"/>
-              </a:ext>
-            </a:extLst>
-          </p:cNvPr>
-          <p:cNvSpPr/>
-          <p:nvPr/>
-        </p:nvSpPr>
-        <p:spPr>
-          <a:xfrm>
-            <a:off x="5216943" y="4831434"/>
-            <a:ext cx="466928" cy="466928"/>
-          </a:xfrm>
-          <a:prstGeom prst="rect">
-            <a:avLst/>
-          </a:prstGeom>
-          <a:solidFill>
-            <a:schemeClr val="accent3">
-              <a:lumMod val="40000"/>
-              <a:lumOff val="60000"/>
-              <a:alpha val="54000"/>
-            </a:schemeClr>
-          </a:solidFill>
-        </p:spPr>
-        <p:style>
-          <a:lnRef idx="2">
-            <a:schemeClr val="accent1">
-              <a:shade val="15000"/>
-            </a:schemeClr>
-          </a:lnRef>
-          <a:fillRef idx="1">
-            <a:schemeClr val="accent1"/>
-          </a:fillRef>
-          <a:effectRef idx="0">
-            <a:schemeClr val="accent1"/>
-          </a:effectRef>
-          <a:fontRef idx="minor">
-            <a:schemeClr val="lt1"/>
-          </a:fontRef>
-        </p:style>
-        <p:txBody>
-          <a:bodyPr rtlCol="0" anchor="ctr"/>
-          <a:lstStyle/>
-          <a:p>
-            <a:pPr algn="ctr"/>
-            <a:r>
-              <a:rPr lang="en-US" dirty="0">
-                <a:solidFill>
-                  <a:schemeClr val="tx1"/>
-                </a:solidFill>
-              </a:rPr>
-              <a:t>A6</a:t>
-            </a:r>
-          </a:p>
-        </p:txBody>
-      </p:sp>
-      <p:sp>
-        <p:nvSpPr>
-          <p:cNvPr id="31" name="Rectangle 30">
-            <a:extLst>
-              <a:ext uri="{FF2B5EF4-FFF2-40B4-BE49-F238E27FC236}">
-                <a16:creationId xmlns:a16="http://schemas.microsoft.com/office/drawing/2014/main" id="{6F5D0803-AB42-78EA-05F5-C1A7A93C1508}"/>
-              </a:ext>
-            </a:extLst>
-          </p:cNvPr>
-          <p:cNvSpPr/>
-          <p:nvPr/>
-        </p:nvSpPr>
-        <p:spPr>
-          <a:xfrm>
-            <a:off x="5217781" y="4287751"/>
+            <a:off x="5179668" y="2257670"/>
             <a:ext cx="466928" cy="466928"/>
           </a:xfrm>
           <a:prstGeom prst="rect">
@@ -10318,17 +11525,17 @@
                   <a:schemeClr val="tx1"/>
                 </a:solidFill>
               </a:rPr>
-              <a:t>A4</a:t>
-            </a:r>
-          </a:p>
-        </p:txBody>
-      </p:sp>
-      <p:sp>
-        <p:nvSpPr>
-          <p:cNvPr id="33" name="Rectangle 32">
-            <a:extLst>
-              <a:ext uri="{FF2B5EF4-FFF2-40B4-BE49-F238E27FC236}">
-                <a16:creationId xmlns:a16="http://schemas.microsoft.com/office/drawing/2014/main" id="{1A27DE07-00AD-7113-708B-7BAA4FD03616}"/>
+              <a:t>A1</a:t>
+            </a:r>
+          </a:p>
+        </p:txBody>
+      </p:sp>
+      <p:sp>
+        <p:nvSpPr>
+          <p:cNvPr id="16" name="Rectangle 15">
+            <a:extLst>
+              <a:ext uri="{FF2B5EF4-FFF2-40B4-BE49-F238E27FC236}">
+                <a16:creationId xmlns:a16="http://schemas.microsoft.com/office/drawing/2014/main" id="{84923F29-9850-C8FC-A6CA-CD985A5D56BE}"/>
               </a:ext>
             </a:extLst>
           </p:cNvPr>
@@ -10337,68 +11544,8 @@
         </p:nvSpPr>
         <p:spPr>
           <a:xfrm>
-            <a:off x="5148850" y="4559849"/>
-            <a:ext cx="466928" cy="466928"/>
-          </a:xfrm>
-          <a:prstGeom prst="rect">
-            <a:avLst/>
-          </a:prstGeom>
-          <a:solidFill>
-            <a:schemeClr val="accent2">
-              <a:lumMod val="60000"/>
-              <a:lumOff val="40000"/>
-              <a:alpha val="52000"/>
-            </a:schemeClr>
-          </a:solidFill>
-        </p:spPr>
-        <p:style>
-          <a:lnRef idx="2">
-            <a:schemeClr val="accent1">
-              <a:shade val="15000"/>
-            </a:schemeClr>
-          </a:lnRef>
-          <a:fillRef idx="1">
-            <a:schemeClr val="accent1"/>
-          </a:fillRef>
-          <a:effectRef idx="0">
-            <a:schemeClr val="accent1"/>
-          </a:effectRef>
-          <a:fontRef idx="minor">
-            <a:schemeClr val="lt1"/>
-          </a:fontRef>
-        </p:style>
-        <p:txBody>
-          <a:bodyPr rtlCol="0" anchor="ctr"/>
-          <a:lstStyle/>
-          <a:p>
-            <a:pPr algn="ctr"/>
-            <a:r>
-              <a:rPr lang="en-US" dirty="0">
-                <a:solidFill>
-                  <a:schemeClr val="tx1"/>
-                </a:solidFill>
-              </a:rPr>
-              <a:t>A5</a:t>
-            </a:r>
-          </a:p>
-        </p:txBody>
-      </p:sp>
-      <p:sp>
-        <p:nvSpPr>
-          <p:cNvPr id="34" name="Rectangle 33">
-            <a:extLst>
-              <a:ext uri="{FF2B5EF4-FFF2-40B4-BE49-F238E27FC236}">
-                <a16:creationId xmlns:a16="http://schemas.microsoft.com/office/drawing/2014/main" id="{E0E14AF4-F66C-E05D-41B4-4C8E57B63695}"/>
-              </a:ext>
-            </a:extLst>
-          </p:cNvPr>
-          <p:cNvSpPr/>
-          <p:nvPr/>
-        </p:nvSpPr>
-        <p:spPr>
-          <a:xfrm>
-            <a:off x="6613166" y="4287751"/>
-            <a:ext cx="466928" cy="466928"/>
+            <a:off x="6654562" y="2257670"/>
+            <a:ext cx="465287" cy="466928"/>
           </a:xfrm>
           <a:prstGeom prst="rect">
             <a:avLst/>
@@ -10445,17 +11592,57 @@
                   <a:schemeClr val="tx1"/>
                 </a:solidFill>
               </a:rPr>
-              <a:t>N4</a:t>
-            </a:r>
-          </a:p>
-        </p:txBody>
-      </p:sp>
-      <p:sp>
-        <p:nvSpPr>
-          <p:cNvPr id="36" name="Rectangle 35">
-            <a:extLst>
-              <a:ext uri="{FF2B5EF4-FFF2-40B4-BE49-F238E27FC236}">
-                <a16:creationId xmlns:a16="http://schemas.microsoft.com/office/drawing/2014/main" id="{2C86FF98-785C-4306-A6F8-CBE8D53875D0}"/>
+              <a:t>N1</a:t>
+            </a:r>
+            <a:endParaRPr lang="en-US" dirty="0">
+              <a:solidFill>
+                <a:schemeClr val="tx1"/>
+              </a:solidFill>
+            </a:endParaRPr>
+          </a:p>
+        </p:txBody>
+      </p:sp>
+      <p:sp>
+        <p:nvSpPr>
+          <p:cNvPr id="18" name="TextBox 17">
+            <a:extLst>
+              <a:ext uri="{FF2B5EF4-FFF2-40B4-BE49-F238E27FC236}">
+                <a16:creationId xmlns:a16="http://schemas.microsoft.com/office/drawing/2014/main" id="{57F17218-3FC5-6A6D-6BD2-7642BBCAAA3C}"/>
+              </a:ext>
+            </a:extLst>
+          </p:cNvPr>
+          <p:cNvSpPr txBox="1"/>
+          <p:nvPr/>
+        </p:nvSpPr>
+        <p:spPr>
+          <a:xfrm>
+            <a:off x="238673" y="173504"/>
+            <a:ext cx="1739940" cy="646331"/>
+          </a:xfrm>
+          <a:prstGeom prst="rect">
+            <a:avLst/>
+          </a:prstGeom>
+          <a:noFill/>
+        </p:spPr>
+        <p:txBody>
+          <a:bodyPr wrap="square" rtlCol="0">
+            <a:spAutoFit/>
+          </a:bodyPr>
+          <a:lstStyle/>
+          <a:p>
+            <a:r>
+              <a:rPr lang="en-US" dirty="0"/>
+              <a:t>Same Bump Routes</a:t>
+            </a:r>
+          </a:p>
+        </p:txBody>
+      </p:sp>
+      <p:sp>
+        <p:nvSpPr>
+          <p:cNvPr id="20" name="Rectangle 19">
+            <a:extLst>
+              <a:ext uri="{FF2B5EF4-FFF2-40B4-BE49-F238E27FC236}">
+                <a16:creationId xmlns:a16="http://schemas.microsoft.com/office/drawing/2014/main" id="{A9049139-E93E-04E4-04CF-786F90D57F1F}"/>
               </a:ext>
             </a:extLst>
           </p:cNvPr>
@@ -10464,7 +11651,7 @@
         </p:nvSpPr>
         <p:spPr>
           <a:xfrm>
-            <a:off x="6670607" y="4531347"/>
+            <a:off x="5160867" y="4525554"/>
             <a:ext cx="466928" cy="466928"/>
           </a:xfrm>
           <a:prstGeom prst="rect">
@@ -10500,87 +11687,82 @@
           <a:p>
             <a:pPr algn="ctr"/>
             <a:r>
+              <a:rPr lang="en-US" dirty="0">
+                <a:solidFill>
+                  <a:schemeClr val="tx1"/>
+                </a:solidFill>
+              </a:rPr>
+              <a:t>A2</a:t>
+            </a:r>
+          </a:p>
+        </p:txBody>
+      </p:sp>
+      <p:sp>
+        <p:nvSpPr>
+          <p:cNvPr id="22" name="Rectangle 21">
+            <a:extLst>
+              <a:ext uri="{FF2B5EF4-FFF2-40B4-BE49-F238E27FC236}">
+                <a16:creationId xmlns:a16="http://schemas.microsoft.com/office/drawing/2014/main" id="{32AB1735-48AE-CFD4-BCDB-9EBF642B1619}"/>
+              </a:ext>
+            </a:extLst>
+          </p:cNvPr>
+          <p:cNvSpPr/>
+          <p:nvPr/>
+        </p:nvSpPr>
+        <p:spPr>
+          <a:xfrm>
+            <a:off x="6682624" y="4497052"/>
+            <a:ext cx="466928" cy="466928"/>
+          </a:xfrm>
+          <a:prstGeom prst="rect">
+            <a:avLst/>
+          </a:prstGeom>
+          <a:solidFill>
+            <a:schemeClr val="accent2">
+              <a:lumMod val="60000"/>
+              <a:lumOff val="40000"/>
+              <a:alpha val="52000"/>
+            </a:schemeClr>
+          </a:solidFill>
+        </p:spPr>
+        <p:style>
+          <a:lnRef idx="2">
+            <a:schemeClr val="accent1">
+              <a:shade val="15000"/>
+            </a:schemeClr>
+          </a:lnRef>
+          <a:fillRef idx="1">
+            <a:schemeClr val="accent1"/>
+          </a:fillRef>
+          <a:effectRef idx="0">
+            <a:schemeClr val="accent1"/>
+          </a:effectRef>
+          <a:fontRef idx="minor">
+            <a:schemeClr val="lt1"/>
+          </a:fontRef>
+        </p:style>
+        <p:txBody>
+          <a:bodyPr rtlCol="0" anchor="ctr"/>
+          <a:lstStyle/>
+          <a:p>
+            <a:pPr algn="ctr"/>
+            <a:r>
               <a:rPr lang="en-US" sz="1600" dirty="0">
                 <a:solidFill>
                   <a:schemeClr val="tx1"/>
                 </a:solidFill>
               </a:rPr>
-              <a:t>N5</a:t>
-            </a:r>
-            <a:endParaRPr lang="en-US" dirty="0">
-              <a:solidFill>
-                <a:schemeClr val="tx1"/>
-              </a:solidFill>
-            </a:endParaRPr>
-          </a:p>
-        </p:txBody>
-      </p:sp>
-      <p:sp>
-        <p:nvSpPr>
-          <p:cNvPr id="37" name="Rectangle 36">
-            <a:extLst>
-              <a:ext uri="{FF2B5EF4-FFF2-40B4-BE49-F238E27FC236}">
-                <a16:creationId xmlns:a16="http://schemas.microsoft.com/office/drawing/2014/main" id="{768A24AD-8785-C327-6477-1A224574605A}"/>
-              </a:ext>
-            </a:extLst>
-          </p:cNvPr>
-          <p:cNvSpPr/>
-          <p:nvPr/>
-        </p:nvSpPr>
-        <p:spPr>
-          <a:xfrm>
-            <a:off x="6613166" y="4812154"/>
-            <a:ext cx="466928" cy="466928"/>
-          </a:xfrm>
-          <a:prstGeom prst="rect">
-            <a:avLst/>
-          </a:prstGeom>
-          <a:solidFill>
-            <a:schemeClr val="accent3">
-              <a:lumMod val="40000"/>
-              <a:lumOff val="60000"/>
-              <a:alpha val="54000"/>
-            </a:schemeClr>
-          </a:solidFill>
-        </p:spPr>
-        <p:style>
-          <a:lnRef idx="2">
-            <a:schemeClr val="accent1">
-              <a:shade val="15000"/>
-            </a:schemeClr>
-          </a:lnRef>
-          <a:fillRef idx="1">
-            <a:schemeClr val="accent1"/>
-          </a:fillRef>
-          <a:effectRef idx="0">
-            <a:schemeClr val="accent1"/>
-          </a:effectRef>
-          <a:fontRef idx="minor">
-            <a:schemeClr val="lt1"/>
-          </a:fontRef>
-        </p:style>
-        <p:txBody>
-          <a:bodyPr rtlCol="0" anchor="ctr"/>
-          <a:lstStyle/>
-          <a:p>
-            <a:pPr algn="ctr"/>
-            <a:r>
-              <a:rPr lang="en-US" sz="1600" dirty="0">
-                <a:solidFill>
-                  <a:schemeClr val="tx1"/>
-                </a:solidFill>
-              </a:rPr>
-              <a:t>N6</a:t>
-            </a:r>
-          </a:p>
-        </p:txBody>
-      </p:sp>
-      <p:sp>
-        <p:nvSpPr>
-          <p:cNvPr id="13" name="TextBox 12">
-            <a:extLst>
-              <a:ext uri="{FF2B5EF4-FFF2-40B4-BE49-F238E27FC236}">
-                <a16:creationId xmlns:a16="http://schemas.microsoft.com/office/drawing/2014/main" id="{2C1F0821-2990-31E5-EEBA-16A76089DEE4}"/>
+              <a:t>N2</a:t>
+            </a:r>
+          </a:p>
+        </p:txBody>
+      </p:sp>
+      <p:sp>
+        <p:nvSpPr>
+          <p:cNvPr id="24" name="TextBox 23">
+            <a:extLst>
+              <a:ext uri="{FF2B5EF4-FFF2-40B4-BE49-F238E27FC236}">
+                <a16:creationId xmlns:a16="http://schemas.microsoft.com/office/drawing/2014/main" id="{6D1ACA9C-12F5-53AE-8A3B-447D1AF1AE0C}"/>
               </a:ext>
             </a:extLst>
           </p:cNvPr>
@@ -10589,8 +11771,8 @@
         </p:nvSpPr>
         <p:spPr>
           <a:xfrm>
-            <a:off x="209938" y="1203918"/>
-            <a:ext cx="1628590" cy="5755422"/>
+            <a:off x="164064" y="1067154"/>
+            <a:ext cx="1739940" cy="646331"/>
           </a:xfrm>
           <a:prstGeom prst="rect">
             <a:avLst/>
@@ -10603,179 +11785,528 @@
           </a:bodyPr>
           <a:lstStyle/>
           <a:p>
-            <a:pPr algn="ctr"/>
-            <a:r>
-              <a:rPr lang="en-US" sz="1600" dirty="0"/>
-              <a:t>Coordinates</a:t>
-            </a:r>
-          </a:p>
-          <a:p>
-            <a:pPr algn="ctr"/>
-            <a:r>
-              <a:rPr lang="en-US" sz="1600" dirty="0"/>
-              <a:t> (x, y) – </a:t>
-            </a:r>
-            <a:r>
-              <a:rPr lang="en-US" sz="900" dirty="0"/>
-              <a:t>meters</a:t>
-            </a:r>
-          </a:p>
-          <a:p>
-            <a:pPr algn="ctr"/>
-            <a:endParaRPr lang="en-US" sz="1400" dirty="0"/>
-          </a:p>
-          <a:p>
-            <a:pPr indent="285750"/>
-            <a:r>
-              <a:rPr lang="en-US" sz="1400" dirty="0"/>
-              <a:t>A1 – 3.5, 5.9</a:t>
-            </a:r>
-          </a:p>
-          <a:p>
-            <a:pPr indent="285750"/>
-            <a:r>
-              <a:rPr lang="en-US" sz="1400" dirty="0"/>
-              <a:t>N1 – 5.8, 5.9</a:t>
-            </a:r>
-          </a:p>
-          <a:p>
-            <a:pPr indent="285750"/>
-            <a:endParaRPr lang="en-US" sz="1400" dirty="0"/>
-          </a:p>
-          <a:p>
-            <a:pPr indent="285750"/>
-            <a:r>
-              <a:rPr lang="en-US" sz="1400" dirty="0"/>
-              <a:t>A2 – 3.4 </a:t>
-            </a:r>
-            <a:r>
-              <a:rPr lang="en-US" sz="1400"/>
-              <a:t>, 5.5 </a:t>
-            </a:r>
-            <a:endParaRPr lang="en-US" sz="1400" dirty="0"/>
-          </a:p>
-          <a:p>
-            <a:pPr indent="285750"/>
-            <a:r>
-              <a:rPr lang="en-US" sz="1400" dirty="0"/>
-              <a:t>N2 – 5.8, 5.5</a:t>
-            </a:r>
-          </a:p>
-          <a:p>
-            <a:pPr indent="285750"/>
-            <a:endParaRPr lang="en-US" sz="1400" dirty="0"/>
-          </a:p>
-          <a:p>
-            <a:pPr indent="285750"/>
-            <a:r>
-              <a:rPr lang="en-US" sz="1400" dirty="0"/>
-              <a:t>A3 – 3.5, 5.2</a:t>
-            </a:r>
-          </a:p>
-          <a:p>
-            <a:pPr indent="285750"/>
-            <a:r>
-              <a:rPr lang="en-US" sz="1400" dirty="0"/>
-              <a:t>N3- , 5.2</a:t>
-            </a:r>
-          </a:p>
-          <a:p>
-            <a:pPr indent="285750"/>
-            <a:endParaRPr lang="en-US" sz="1400" dirty="0"/>
-          </a:p>
-          <a:p>
-            <a:pPr indent="285750"/>
-            <a:r>
-              <a:rPr lang="en-US" sz="1400" dirty="0"/>
-              <a:t>A4- 3.5,</a:t>
-            </a:r>
-          </a:p>
-          <a:p>
-            <a:pPr indent="285750"/>
-            <a:r>
-              <a:rPr lang="en-US" sz="1400" dirty="0"/>
-              <a:t>N4 -</a:t>
-            </a:r>
-          </a:p>
-          <a:p>
-            <a:pPr indent="285750"/>
-            <a:endParaRPr lang="en-US" sz="1400" dirty="0"/>
-          </a:p>
-          <a:p>
-            <a:pPr indent="285750"/>
-            <a:r>
-              <a:rPr lang="en-US" sz="1400" dirty="0"/>
-              <a:t>A5- 3.4, </a:t>
-            </a:r>
-          </a:p>
-          <a:p>
-            <a:pPr indent="285750"/>
-            <a:r>
-              <a:rPr lang="en-US" sz="1400" dirty="0"/>
-              <a:t>N5 –</a:t>
-            </a:r>
-          </a:p>
-          <a:p>
-            <a:pPr indent="285750"/>
-            <a:endParaRPr lang="en-US" sz="1400" dirty="0"/>
-          </a:p>
-          <a:p>
-            <a:pPr indent="285750"/>
-            <a:r>
-              <a:rPr lang="en-US" sz="1400" dirty="0"/>
-              <a:t>A6- 3.5,</a:t>
-            </a:r>
-          </a:p>
-          <a:p>
-            <a:pPr indent="285750"/>
-            <a:r>
-              <a:rPr lang="en-US" sz="1400" dirty="0"/>
-              <a:t>N6 –</a:t>
-            </a:r>
-          </a:p>
-          <a:p>
-            <a:pPr indent="285750"/>
-            <a:endParaRPr lang="en-US" sz="1400" dirty="0"/>
-          </a:p>
-          <a:p>
-            <a:pPr indent="285750"/>
-            <a:r>
-              <a:rPr lang="en-US" sz="1400" dirty="0"/>
-              <a:t>D1-</a:t>
-            </a:r>
-          </a:p>
-          <a:p>
-            <a:pPr indent="285750"/>
-            <a:r>
-              <a:rPr lang="en-US" sz="1400" dirty="0"/>
-              <a:t>D2-</a:t>
-            </a:r>
-          </a:p>
-          <a:p>
-            <a:pPr indent="285750"/>
-            <a:endParaRPr lang="en-US" sz="1400" dirty="0"/>
-          </a:p>
-          <a:p>
-            <a:pPr indent="285750"/>
-            <a:r>
-              <a:rPr lang="en-US" sz="1400" dirty="0"/>
-              <a:t>O1-</a:t>
-            </a:r>
-          </a:p>
-          <a:p>
-            <a:pPr indent="285750"/>
-            <a:r>
-              <a:rPr lang="en-US" sz="1400" dirty="0"/>
-              <a:t> </a:t>
-            </a:r>
-            <a:endParaRPr lang="en-US" sz="1600" dirty="0"/>
+            <a:r>
+              <a:rPr lang="en-US" sz="1200" dirty="0"/>
+              <a:t>These are routes where you enter and leave via the same bump</a:t>
+            </a:r>
+          </a:p>
+        </p:txBody>
+      </p:sp>
+      <p:cxnSp>
+        <p:nvCxnSpPr>
+          <p:cNvPr id="27" name="Straight Arrow Connector 26">
+            <a:extLst>
+              <a:ext uri="{FF2B5EF4-FFF2-40B4-BE49-F238E27FC236}">
+                <a16:creationId xmlns:a16="http://schemas.microsoft.com/office/drawing/2014/main" id="{3780336E-C9E8-F4B5-13E8-4F1CB15A935C}"/>
+              </a:ext>
+            </a:extLst>
+          </p:cNvPr>
+          <p:cNvCxnSpPr>
+            <a:stCxn id="13" idx="3"/>
+            <a:endCxn id="16" idx="1"/>
+          </p:cNvCxnSpPr>
+          <p:nvPr/>
+        </p:nvCxnSpPr>
+        <p:spPr>
+          <a:xfrm>
+            <a:off x="5646596" y="2491134"/>
+            <a:ext cx="1007966" cy="0"/>
+          </a:xfrm>
+          <a:prstGeom prst="straightConnector1">
+            <a:avLst/>
+          </a:prstGeom>
+          <a:ln w="34925">
+            <a:solidFill>
+              <a:srgbClr val="FF0000"/>
+            </a:solidFill>
+            <a:tailEnd type="triangle"/>
+          </a:ln>
+        </p:spPr>
+        <p:style>
+          <a:lnRef idx="2">
+            <a:schemeClr val="accent1"/>
+          </a:lnRef>
+          <a:fillRef idx="0">
+            <a:schemeClr val="accent1"/>
+          </a:fillRef>
+          <a:effectRef idx="1">
+            <a:schemeClr val="accent1"/>
+          </a:effectRef>
+          <a:fontRef idx="minor">
+            <a:schemeClr val="tx1"/>
+          </a:fontRef>
+        </p:style>
+      </p:cxnSp>
+      <p:cxnSp>
+        <p:nvCxnSpPr>
+          <p:cNvPr id="34" name="Straight Arrow Connector 33">
+            <a:extLst>
+              <a:ext uri="{FF2B5EF4-FFF2-40B4-BE49-F238E27FC236}">
+                <a16:creationId xmlns:a16="http://schemas.microsoft.com/office/drawing/2014/main" id="{35E91530-F949-1B93-D9C0-D9DA975323FC}"/>
+              </a:ext>
+            </a:extLst>
+          </p:cNvPr>
+          <p:cNvCxnSpPr/>
+          <p:nvPr/>
+        </p:nvCxnSpPr>
+        <p:spPr>
+          <a:xfrm>
+            <a:off x="5674658" y="4709727"/>
+            <a:ext cx="1007966" cy="0"/>
+          </a:xfrm>
+          <a:prstGeom prst="straightConnector1">
+            <a:avLst/>
+          </a:prstGeom>
+          <a:ln w="34925">
+            <a:solidFill>
+              <a:srgbClr val="FF0000"/>
+            </a:solidFill>
+            <a:tailEnd type="triangle"/>
+          </a:ln>
+        </p:spPr>
+        <p:style>
+          <a:lnRef idx="2">
+            <a:schemeClr val="accent1"/>
+          </a:lnRef>
+          <a:fillRef idx="0">
+            <a:schemeClr val="accent1"/>
+          </a:fillRef>
+          <a:effectRef idx="1">
+            <a:schemeClr val="accent1"/>
+          </a:effectRef>
+          <a:fontRef idx="minor">
+            <a:schemeClr val="tx1"/>
+          </a:fontRef>
+        </p:style>
+      </p:cxnSp>
+      <p:grpSp>
+        <p:nvGrpSpPr>
+          <p:cNvPr id="46" name="Group 45">
+            <a:extLst>
+              <a:ext uri="{FF2B5EF4-FFF2-40B4-BE49-F238E27FC236}">
+                <a16:creationId xmlns:a16="http://schemas.microsoft.com/office/drawing/2014/main" id="{B0AA9251-8B10-3CE1-6EA5-734368DB6004}"/>
+              </a:ext>
+            </a:extLst>
+          </p:cNvPr>
+          <p:cNvGrpSpPr/>
+          <p:nvPr/>
+        </p:nvGrpSpPr>
+        <p:grpSpPr>
+          <a:xfrm>
+            <a:off x="7121825" y="1133197"/>
+            <a:ext cx="1424880" cy="2295720"/>
+            <a:chOff x="7121825" y="1133197"/>
+            <a:chExt cx="1424880" cy="2295720"/>
+          </a:xfrm>
+        </p:grpSpPr>
+        <mc:AlternateContent xmlns:mc="http://schemas.openxmlformats.org/markup-compatibility/2006">
+          <mc:Choice xmlns:p14="http://schemas.microsoft.com/office/powerpoint/2010/main" Requires="p14">
+            <p:contentPart p14:bwMode="auto" r:id="rId3">
+              <p14:nvContentPartPr>
+                <p14:cNvPr id="42" name="Ink 41">
+                  <a:extLst>
+                    <a:ext uri="{FF2B5EF4-FFF2-40B4-BE49-F238E27FC236}">
+                      <a16:creationId xmlns:a16="http://schemas.microsoft.com/office/drawing/2014/main" id="{731BE54A-8885-E6E3-C72D-965C0A30B264}"/>
+                    </a:ext>
+                  </a:extLst>
+                </p14:cNvPr>
+                <p14:cNvContentPartPr/>
+                <p14:nvPr/>
+              </p14:nvContentPartPr>
+              <p14:xfrm>
+                <a:off x="7121825" y="1133197"/>
+                <a:ext cx="1424880" cy="2295720"/>
+              </p14:xfrm>
+            </p:contentPart>
+          </mc:Choice>
+          <mc:Fallback>
+            <p:pic>
+              <p:nvPicPr>
+                <p:cNvPr id="42" name="Ink 41">
+                  <a:extLst>
+                    <a:ext uri="{FF2B5EF4-FFF2-40B4-BE49-F238E27FC236}">
+                      <a16:creationId xmlns:a16="http://schemas.microsoft.com/office/drawing/2014/main" id="{731BE54A-8885-E6E3-C72D-965C0A30B264}"/>
+                    </a:ext>
+                  </a:extLst>
+                </p:cNvPr>
+                <p:cNvPicPr/>
+                <p:nvPr/>
+              </p:nvPicPr>
+              <p:blipFill>
+                <a:blip r:embed="rId4"/>
+                <a:stretch>
+                  <a:fillRect/>
+                </a:stretch>
+              </p:blipFill>
+              <p:spPr>
+                <a:xfrm>
+                  <a:off x="7112825" y="1124557"/>
+                  <a:ext cx="1442520" cy="2313360"/>
+                </a:xfrm>
+                <a:prstGeom prst="rect">
+                  <a:avLst/>
+                </a:prstGeom>
+              </p:spPr>
+            </p:pic>
+          </mc:Fallback>
+        </mc:AlternateContent>
+        <mc:AlternateContent xmlns:mc="http://schemas.openxmlformats.org/markup-compatibility/2006">
+          <mc:Choice xmlns:p14="http://schemas.microsoft.com/office/powerpoint/2010/main" Requires="p14">
+            <p:contentPart p14:bwMode="auto" r:id="rId5">
+              <p14:nvContentPartPr>
+                <p14:cNvPr id="43" name="Ink 42">
+                  <a:extLst>
+                    <a:ext uri="{FF2B5EF4-FFF2-40B4-BE49-F238E27FC236}">
+                      <a16:creationId xmlns:a16="http://schemas.microsoft.com/office/drawing/2014/main" id="{DEAE9586-2304-8656-D9E7-E49E3F95DF8A}"/>
+                    </a:ext>
+                  </a:extLst>
+                </p14:cNvPr>
+                <p14:cNvContentPartPr/>
+                <p14:nvPr/>
+              </p14:nvContentPartPr>
+              <p14:xfrm>
+                <a:off x="7182665" y="2690557"/>
+                <a:ext cx="19080" cy="244800"/>
+              </p14:xfrm>
+            </p:contentPart>
+          </mc:Choice>
+          <mc:Fallback>
+            <p:pic>
+              <p:nvPicPr>
+                <p:cNvPr id="43" name="Ink 42">
+                  <a:extLst>
+                    <a:ext uri="{FF2B5EF4-FFF2-40B4-BE49-F238E27FC236}">
+                      <a16:creationId xmlns:a16="http://schemas.microsoft.com/office/drawing/2014/main" id="{DEAE9586-2304-8656-D9E7-E49E3F95DF8A}"/>
+                    </a:ext>
+                  </a:extLst>
+                </p:cNvPr>
+                <p:cNvPicPr/>
+                <p:nvPr/>
+              </p:nvPicPr>
+              <p:blipFill>
+                <a:blip r:embed="rId6"/>
+                <a:stretch>
+                  <a:fillRect/>
+                </a:stretch>
+              </p:blipFill>
+              <p:spPr>
+                <a:xfrm>
+                  <a:off x="7173665" y="2681557"/>
+                  <a:ext cx="36720" cy="262440"/>
+                </a:xfrm>
+                <a:prstGeom prst="rect">
+                  <a:avLst/>
+                </a:prstGeom>
+              </p:spPr>
+            </p:pic>
+          </mc:Fallback>
+        </mc:AlternateContent>
+        <mc:AlternateContent xmlns:mc="http://schemas.openxmlformats.org/markup-compatibility/2006">
+          <mc:Choice xmlns:p14="http://schemas.microsoft.com/office/powerpoint/2010/main" Requires="p14">
+            <p:contentPart p14:bwMode="auto" r:id="rId7">
+              <p14:nvContentPartPr>
+                <p14:cNvPr id="45" name="Ink 44">
+                  <a:extLst>
+                    <a:ext uri="{FF2B5EF4-FFF2-40B4-BE49-F238E27FC236}">
+                      <a16:creationId xmlns:a16="http://schemas.microsoft.com/office/drawing/2014/main" id="{114338DC-3534-0629-470F-CF03E5ECE97F}"/>
+                    </a:ext>
+                  </a:extLst>
+                </p14:cNvPr>
+                <p14:cNvContentPartPr/>
+                <p14:nvPr/>
+              </p14:nvContentPartPr>
+              <p14:xfrm>
+                <a:off x="7226945" y="2690557"/>
+                <a:ext cx="201960" cy="43560"/>
+              </p14:xfrm>
+            </p:contentPart>
+          </mc:Choice>
+          <mc:Fallback>
+            <p:pic>
+              <p:nvPicPr>
+                <p:cNvPr id="45" name="Ink 44">
+                  <a:extLst>
+                    <a:ext uri="{FF2B5EF4-FFF2-40B4-BE49-F238E27FC236}">
+                      <a16:creationId xmlns:a16="http://schemas.microsoft.com/office/drawing/2014/main" id="{114338DC-3534-0629-470F-CF03E5ECE97F}"/>
+                    </a:ext>
+                  </a:extLst>
+                </p:cNvPr>
+                <p:cNvPicPr/>
+                <p:nvPr/>
+              </p:nvPicPr>
+              <p:blipFill>
+                <a:blip r:embed="rId8"/>
+                <a:stretch>
+                  <a:fillRect/>
+                </a:stretch>
+              </p:blipFill>
+              <p:spPr>
+                <a:xfrm>
+                  <a:off x="7218305" y="2681557"/>
+                  <a:ext cx="219600" cy="61200"/>
+                </a:xfrm>
+                <a:prstGeom prst="rect">
+                  <a:avLst/>
+                </a:prstGeom>
+              </p:spPr>
+            </p:pic>
+          </mc:Fallback>
+        </mc:AlternateContent>
+      </p:grpSp>
+      <p:grpSp>
+        <p:nvGrpSpPr>
+          <p:cNvPr id="53" name="Group 52">
+            <a:extLst>
+              <a:ext uri="{FF2B5EF4-FFF2-40B4-BE49-F238E27FC236}">
+                <a16:creationId xmlns:a16="http://schemas.microsoft.com/office/drawing/2014/main" id="{F16D62C4-EB21-FF12-6118-F938ADE54BF7}"/>
+              </a:ext>
+            </a:extLst>
+          </p:cNvPr>
+          <p:cNvGrpSpPr/>
+          <p:nvPr/>
+        </p:nvGrpSpPr>
+        <p:grpSpPr>
+          <a:xfrm>
+            <a:off x="7183385" y="3887917"/>
+            <a:ext cx="1355040" cy="2065680"/>
+            <a:chOff x="7183385" y="3887917"/>
+            <a:chExt cx="1355040" cy="2065680"/>
+          </a:xfrm>
+        </p:grpSpPr>
+        <mc:AlternateContent xmlns:mc="http://schemas.openxmlformats.org/markup-compatibility/2006">
+          <mc:Choice xmlns:p14="http://schemas.microsoft.com/office/powerpoint/2010/main" Requires="p14">
+            <p:contentPart p14:bwMode="auto" r:id="rId9">
+              <p14:nvContentPartPr>
+                <p14:cNvPr id="51" name="Ink 50">
+                  <a:extLst>
+                    <a:ext uri="{FF2B5EF4-FFF2-40B4-BE49-F238E27FC236}">
+                      <a16:creationId xmlns:a16="http://schemas.microsoft.com/office/drawing/2014/main" id="{FBEB3665-E8A7-3D64-1E89-AC85055E2FBB}"/>
+                    </a:ext>
+                  </a:extLst>
+                </p14:cNvPr>
+                <p14:cNvContentPartPr/>
+                <p14:nvPr/>
+              </p14:nvContentPartPr>
+              <p14:xfrm>
+                <a:off x="7183385" y="3887917"/>
+                <a:ext cx="1355040" cy="2065680"/>
+              </p14:xfrm>
+            </p:contentPart>
+          </mc:Choice>
+          <mc:Fallback>
+            <p:pic>
+              <p:nvPicPr>
+                <p:cNvPr id="51" name="Ink 50">
+                  <a:extLst>
+                    <a:ext uri="{FF2B5EF4-FFF2-40B4-BE49-F238E27FC236}">
+                      <a16:creationId xmlns:a16="http://schemas.microsoft.com/office/drawing/2014/main" id="{FBEB3665-E8A7-3D64-1E89-AC85055E2FBB}"/>
+                    </a:ext>
+                  </a:extLst>
+                </p:cNvPr>
+                <p:cNvPicPr/>
+                <p:nvPr/>
+              </p:nvPicPr>
+              <p:blipFill>
+                <a:blip r:embed="rId10"/>
+                <a:stretch>
+                  <a:fillRect/>
+                </a:stretch>
+              </p:blipFill>
+              <p:spPr>
+                <a:xfrm>
+                  <a:off x="7174385" y="3879277"/>
+                  <a:ext cx="1372680" cy="2083320"/>
+                </a:xfrm>
+                <a:prstGeom prst="rect">
+                  <a:avLst/>
+                </a:prstGeom>
+              </p:spPr>
+            </p:pic>
+          </mc:Fallback>
+        </mc:AlternateContent>
+        <mc:AlternateContent xmlns:mc="http://schemas.openxmlformats.org/markup-compatibility/2006">
+          <mc:Choice xmlns:p14="http://schemas.microsoft.com/office/powerpoint/2010/main" Requires="p14">
+            <p:contentPart p14:bwMode="auto" r:id="rId11">
+              <p14:nvContentPartPr>
+                <p14:cNvPr id="52" name="Ink 51">
+                  <a:extLst>
+                    <a:ext uri="{FF2B5EF4-FFF2-40B4-BE49-F238E27FC236}">
+                      <a16:creationId xmlns:a16="http://schemas.microsoft.com/office/drawing/2014/main" id="{5DE1D71F-3AAB-9245-99A5-65C8A99DD78A}"/>
+                    </a:ext>
+                  </a:extLst>
+                </p14:cNvPr>
+                <p14:cNvContentPartPr/>
+                <p14:nvPr/>
+              </p14:nvContentPartPr>
+              <p14:xfrm>
+                <a:off x="7216865" y="4422517"/>
+                <a:ext cx="92520" cy="181080"/>
+              </p14:xfrm>
+            </p:contentPart>
+          </mc:Choice>
+          <mc:Fallback>
+            <p:pic>
+              <p:nvPicPr>
+                <p:cNvPr id="52" name="Ink 51">
+                  <a:extLst>
+                    <a:ext uri="{FF2B5EF4-FFF2-40B4-BE49-F238E27FC236}">
+                      <a16:creationId xmlns:a16="http://schemas.microsoft.com/office/drawing/2014/main" id="{5DE1D71F-3AAB-9245-99A5-65C8A99DD78A}"/>
+                    </a:ext>
+                  </a:extLst>
+                </p:cNvPr>
+                <p:cNvPicPr/>
+                <p:nvPr/>
+              </p:nvPicPr>
+              <p:blipFill>
+                <a:blip r:embed="rId12"/>
+                <a:stretch>
+                  <a:fillRect/>
+                </a:stretch>
+              </p:blipFill>
+              <p:spPr>
+                <a:xfrm>
+                  <a:off x="7207865" y="4413517"/>
+                  <a:ext cx="110160" cy="198720"/>
+                </a:xfrm>
+                <a:prstGeom prst="rect">
+                  <a:avLst/>
+                </a:prstGeom>
+              </p:spPr>
+            </p:pic>
+          </mc:Fallback>
+        </mc:AlternateContent>
+      </p:grpSp>
+      <p:sp>
+        <p:nvSpPr>
+          <p:cNvPr id="1027" name="TextBox 1026">
+            <a:extLst>
+              <a:ext uri="{FF2B5EF4-FFF2-40B4-BE49-F238E27FC236}">
+                <a16:creationId xmlns:a16="http://schemas.microsoft.com/office/drawing/2014/main" id="{EEC14A98-D76A-4460-3EE0-22FABCC700B5}"/>
+              </a:ext>
+            </a:extLst>
+          </p:cNvPr>
+          <p:cNvSpPr txBox="1"/>
+          <p:nvPr/>
+        </p:nvSpPr>
+        <p:spPr>
+          <a:xfrm>
+            <a:off x="164064" y="1865558"/>
+            <a:ext cx="1739940" cy="830997"/>
+          </a:xfrm>
+          <a:prstGeom prst="rect">
+            <a:avLst/>
+          </a:prstGeom>
+          <a:noFill/>
+        </p:spPr>
+        <p:txBody>
+          <a:bodyPr wrap="square" rtlCol="0">
+            <a:spAutoFit/>
+          </a:bodyPr>
+          <a:lstStyle/>
+          <a:p>
+            <a:r>
+              <a:rPr lang="en-US" sz="1200" dirty="0"/>
+              <a:t>Goal is to enter from the perimeter side, collect fuel, and return across same bump.</a:t>
+            </a:r>
+          </a:p>
+        </p:txBody>
+      </p:sp>
+      <p:sp>
+        <p:nvSpPr>
+          <p:cNvPr id="1029" name="TextBox 1028">
+            <a:extLst>
+              <a:ext uri="{FF2B5EF4-FFF2-40B4-BE49-F238E27FC236}">
+                <a16:creationId xmlns:a16="http://schemas.microsoft.com/office/drawing/2014/main" id="{5B9502E8-52F5-BEBB-D6DE-C7F3AB431D2F}"/>
+              </a:ext>
+            </a:extLst>
+          </p:cNvPr>
+          <p:cNvSpPr txBox="1"/>
+          <p:nvPr/>
+        </p:nvSpPr>
+        <p:spPr>
+          <a:xfrm>
+            <a:off x="191374" y="2828752"/>
+            <a:ext cx="1739940" cy="1200329"/>
+          </a:xfrm>
+          <a:prstGeom prst="rect">
+            <a:avLst/>
+          </a:prstGeom>
+          <a:noFill/>
+        </p:spPr>
+        <p:txBody>
+          <a:bodyPr wrap="square" rtlCol="0">
+            <a:spAutoFit/>
+          </a:bodyPr>
+          <a:lstStyle/>
+          <a:p>
+            <a:r>
+              <a:rPr lang="en-US" sz="1200" dirty="0"/>
+              <a:t>The robot stays in the alliance’s ‘side’ of the neutral zone but is slightly skewed to push balls toward the alliance side.</a:t>
+            </a:r>
+          </a:p>
+        </p:txBody>
+      </p:sp>
+      <p:sp>
+        <p:nvSpPr>
+          <p:cNvPr id="1031" name="TextBox 1030">
+            <a:extLst>
+              <a:ext uri="{FF2B5EF4-FFF2-40B4-BE49-F238E27FC236}">
+                <a16:creationId xmlns:a16="http://schemas.microsoft.com/office/drawing/2014/main" id="{6355898D-8078-EEF2-374F-BA76745ED11B}"/>
+              </a:ext>
+            </a:extLst>
+          </p:cNvPr>
+          <p:cNvSpPr txBox="1"/>
+          <p:nvPr/>
+        </p:nvSpPr>
+        <p:spPr>
+          <a:xfrm>
+            <a:off x="184983" y="4259875"/>
+            <a:ext cx="1739940" cy="1384995"/>
+          </a:xfrm>
+          <a:prstGeom prst="rect">
+            <a:avLst/>
+          </a:prstGeom>
+          <a:noFill/>
+        </p:spPr>
+        <p:txBody>
+          <a:bodyPr wrap="square" rtlCol="0">
+            <a:spAutoFit/>
+          </a:bodyPr>
+          <a:lstStyle/>
+          <a:p>
+            <a:r>
+              <a:rPr lang="en-US" sz="1200" dirty="0"/>
+              <a:t>Path is name for the neutral side entry.  Either :</a:t>
+            </a:r>
+            <a:br>
+              <a:rPr lang="en-US" sz="1200" dirty="0"/>
+            </a:br>
+            <a:br>
+              <a:rPr lang="en-US" sz="1200" dirty="0"/>
+            </a:br>
+            <a:r>
+              <a:rPr lang="en-US" sz="1200" dirty="0"/>
+              <a:t>    N1-Sweep</a:t>
+            </a:r>
+          </a:p>
+          <a:p>
+            <a:r>
+              <a:rPr lang="en-US" sz="1200" dirty="0"/>
+              <a:t>or</a:t>
+            </a:r>
+          </a:p>
+          <a:p>
+            <a:r>
+              <a:rPr lang="en-US" sz="1200" dirty="0"/>
+              <a:t>    N2-Sweep</a:t>
+            </a:r>
           </a:p>
         </p:txBody>
       </p:sp>
     </p:spTree>
     <p:extLst>
       <p:ext uri="{BB962C8B-B14F-4D97-AF65-F5344CB8AC3E}">
-        <p14:creationId xmlns:p14="http://schemas.microsoft.com/office/powerpoint/2010/main" val="3330468595"/>
+        <p14:creationId xmlns:p14="http://schemas.microsoft.com/office/powerpoint/2010/main" val="2712064698"/>
       </p:ext>
     </p:extLst>
   </p:cSld>
@@ -10785,7 +12316,1148 @@
 </p:sld>
 </file>
 
-<file path=ppt/slides/slide5.xml><?xml version="1.0" encoding="utf-8"?>
+<file path=ppt/slides/slide6.xml><?xml version="1.0" encoding="utf-8"?>
+<p:sld xmlns:a="http://schemas.openxmlformats.org/drawingml/2006/main" xmlns:r="http://schemas.openxmlformats.org/officeDocument/2006/relationships" xmlns:p="http://schemas.openxmlformats.org/presentationml/2006/main">
+  <p:cSld>
+    <p:spTree>
+      <p:nvGrpSpPr>
+        <p:cNvPr id="1" name="">
+          <a:extLst>
+            <a:ext uri="{FF2B5EF4-FFF2-40B4-BE49-F238E27FC236}">
+              <a16:creationId xmlns:a16="http://schemas.microsoft.com/office/drawing/2014/main" id="{493B3987-3211-BA42-B632-AD9AD8342A59}"/>
+            </a:ext>
+          </a:extLst>
+        </p:cNvPr>
+        <p:cNvGrpSpPr/>
+        <p:nvPr/>
+      </p:nvGrpSpPr>
+      <p:grpSpPr>
+        <a:xfrm>
+          <a:off x="0" y="0"/>
+          <a:ext cx="0" cy="0"/>
+          <a:chOff x="0" y="0"/>
+          <a:chExt cx="0" cy="0"/>
+        </a:xfrm>
+      </p:grpSpPr>
+      <p:pic>
+        <p:nvPicPr>
+          <p:cNvPr id="11" name="Picture 10">
+            <a:extLst>
+              <a:ext uri="{FF2B5EF4-FFF2-40B4-BE49-F238E27FC236}">
+                <a16:creationId xmlns:a16="http://schemas.microsoft.com/office/drawing/2014/main" id="{F0D27C90-1D2B-EDC4-69A0-C6548D2D960F}"/>
+              </a:ext>
+            </a:extLst>
+          </p:cNvPr>
+          <p:cNvPicPr>
+            <a:picLocks noChangeAspect="1"/>
+          </p:cNvPicPr>
+          <p:nvPr/>
+        </p:nvPicPr>
+        <p:blipFill>
+          <a:blip r:embed="rId2"/>
+          <a:stretch>
+            <a:fillRect/>
+          </a:stretch>
+        </p:blipFill>
+        <p:spPr>
+          <a:xfrm>
+            <a:off x="2129612" y="418288"/>
+            <a:ext cx="9154803" cy="6373114"/>
+          </a:xfrm>
+          <a:prstGeom prst="rect">
+            <a:avLst/>
+          </a:prstGeom>
+        </p:spPr>
+      </p:pic>
+      <p:cxnSp>
+        <p:nvCxnSpPr>
+          <p:cNvPr id="7" name="Straight Connector 6">
+            <a:extLst>
+              <a:ext uri="{FF2B5EF4-FFF2-40B4-BE49-F238E27FC236}">
+                <a16:creationId xmlns:a16="http://schemas.microsoft.com/office/drawing/2014/main" id="{6D7E8104-6828-CE3E-AED4-5C1881F33191}"/>
+              </a:ext>
+            </a:extLst>
+          </p:cNvPr>
+          <p:cNvCxnSpPr/>
+          <p:nvPr/>
+        </p:nvCxnSpPr>
+        <p:spPr>
+          <a:xfrm flipV="1">
+            <a:off x="2893925" y="80387"/>
+            <a:ext cx="0" cy="622998"/>
+          </a:xfrm>
+          <a:prstGeom prst="line">
+            <a:avLst/>
+          </a:prstGeom>
+        </p:spPr>
+        <p:style>
+          <a:lnRef idx="2">
+            <a:schemeClr val="accent1"/>
+          </a:lnRef>
+          <a:fillRef idx="0">
+            <a:schemeClr val="accent1"/>
+          </a:fillRef>
+          <a:effectRef idx="1">
+            <a:schemeClr val="accent1"/>
+          </a:effectRef>
+          <a:fontRef idx="minor">
+            <a:schemeClr val="tx1"/>
+          </a:fontRef>
+        </p:style>
+      </p:cxnSp>
+      <p:cxnSp>
+        <p:nvCxnSpPr>
+          <p:cNvPr id="9" name="Straight Connector 8">
+            <a:extLst>
+              <a:ext uri="{FF2B5EF4-FFF2-40B4-BE49-F238E27FC236}">
+                <a16:creationId xmlns:a16="http://schemas.microsoft.com/office/drawing/2014/main" id="{613E45EF-3CB3-ED60-2F83-8FCEAEE25B76}"/>
+              </a:ext>
+            </a:extLst>
+          </p:cNvPr>
+          <p:cNvCxnSpPr/>
+          <p:nvPr/>
+        </p:nvCxnSpPr>
+        <p:spPr>
+          <a:xfrm flipV="1">
+            <a:off x="6173821" y="80387"/>
+            <a:ext cx="0" cy="622998"/>
+          </a:xfrm>
+          <a:prstGeom prst="line">
+            <a:avLst/>
+          </a:prstGeom>
+        </p:spPr>
+        <p:style>
+          <a:lnRef idx="2">
+            <a:schemeClr val="accent1"/>
+          </a:lnRef>
+          <a:fillRef idx="0">
+            <a:schemeClr val="accent1"/>
+          </a:fillRef>
+          <a:effectRef idx="1">
+            <a:schemeClr val="accent1"/>
+          </a:effectRef>
+          <a:fontRef idx="minor">
+            <a:schemeClr val="tx1"/>
+          </a:fontRef>
+        </p:style>
+      </p:cxnSp>
+      <p:sp>
+        <p:nvSpPr>
+          <p:cNvPr id="10" name="TextBox 9">
+            <a:extLst>
+              <a:ext uri="{FF2B5EF4-FFF2-40B4-BE49-F238E27FC236}">
+                <a16:creationId xmlns:a16="http://schemas.microsoft.com/office/drawing/2014/main" id="{B9CB6B67-7895-576B-513F-03962FBF9C7E}"/>
+              </a:ext>
+            </a:extLst>
+          </p:cNvPr>
+          <p:cNvSpPr txBox="1"/>
+          <p:nvPr/>
+        </p:nvSpPr>
+        <p:spPr>
+          <a:xfrm>
+            <a:off x="4124527" y="207220"/>
+            <a:ext cx="1040857" cy="369332"/>
+          </a:xfrm>
+          <a:prstGeom prst="rect">
+            <a:avLst/>
+          </a:prstGeom>
+          <a:noFill/>
+        </p:spPr>
+        <p:txBody>
+          <a:bodyPr wrap="square" rtlCol="0">
+            <a:spAutoFit/>
+          </a:bodyPr>
+          <a:lstStyle/>
+          <a:p>
+            <a:r>
+              <a:rPr lang="en-US" dirty="0"/>
+              <a:t>15’ – 2”</a:t>
+            </a:r>
+          </a:p>
+        </p:txBody>
+      </p:sp>
+      <p:cxnSp>
+        <p:nvCxnSpPr>
+          <p:cNvPr id="12" name="Straight Arrow Connector 11">
+            <a:extLst>
+              <a:ext uri="{FF2B5EF4-FFF2-40B4-BE49-F238E27FC236}">
+                <a16:creationId xmlns:a16="http://schemas.microsoft.com/office/drawing/2014/main" id="{0DA3FFF0-412A-9AF5-4157-06C0F402194D}"/>
+              </a:ext>
+            </a:extLst>
+          </p:cNvPr>
+          <p:cNvCxnSpPr/>
+          <p:nvPr/>
+        </p:nvCxnSpPr>
+        <p:spPr>
+          <a:xfrm>
+            <a:off x="4980562" y="391886"/>
+            <a:ext cx="1193259" cy="0"/>
+          </a:xfrm>
+          <a:prstGeom prst="straightConnector1">
+            <a:avLst/>
+          </a:prstGeom>
+          <a:ln>
+            <a:tailEnd type="triangle"/>
+          </a:ln>
+        </p:spPr>
+        <p:style>
+          <a:lnRef idx="2">
+            <a:schemeClr val="accent1"/>
+          </a:lnRef>
+          <a:fillRef idx="0">
+            <a:schemeClr val="accent1"/>
+          </a:fillRef>
+          <a:effectRef idx="1">
+            <a:schemeClr val="accent1"/>
+          </a:effectRef>
+          <a:fontRef idx="minor">
+            <a:schemeClr val="tx1"/>
+          </a:fontRef>
+        </p:style>
+      </p:cxnSp>
+      <p:cxnSp>
+        <p:nvCxnSpPr>
+          <p:cNvPr id="14" name="Straight Arrow Connector 13">
+            <a:extLst>
+              <a:ext uri="{FF2B5EF4-FFF2-40B4-BE49-F238E27FC236}">
+                <a16:creationId xmlns:a16="http://schemas.microsoft.com/office/drawing/2014/main" id="{6A205DB1-344B-12B6-1E1C-7A9D66EF1B4B}"/>
+              </a:ext>
+            </a:extLst>
+          </p:cNvPr>
+          <p:cNvCxnSpPr>
+            <a:stCxn id="10" idx="1"/>
+          </p:cNvCxnSpPr>
+          <p:nvPr/>
+        </p:nvCxnSpPr>
+        <p:spPr>
+          <a:xfrm flipH="1">
+            <a:off x="2893925" y="391886"/>
+            <a:ext cx="1230602" cy="0"/>
+          </a:xfrm>
+          <a:prstGeom prst="straightConnector1">
+            <a:avLst/>
+          </a:prstGeom>
+          <a:ln>
+            <a:tailEnd type="triangle"/>
+          </a:ln>
+        </p:spPr>
+        <p:style>
+          <a:lnRef idx="2">
+            <a:schemeClr val="accent1"/>
+          </a:lnRef>
+          <a:fillRef idx="0">
+            <a:schemeClr val="accent1"/>
+          </a:fillRef>
+          <a:effectRef idx="1">
+            <a:schemeClr val="accent1"/>
+          </a:effectRef>
+          <a:fontRef idx="minor">
+            <a:schemeClr val="tx1"/>
+          </a:fontRef>
+        </p:style>
+      </p:cxnSp>
+      <p:sp>
+        <p:nvSpPr>
+          <p:cNvPr id="15" name="TextBox 14">
+            <a:extLst>
+              <a:ext uri="{FF2B5EF4-FFF2-40B4-BE49-F238E27FC236}">
+                <a16:creationId xmlns:a16="http://schemas.microsoft.com/office/drawing/2014/main" id="{2DF8BE85-88C9-FE41-BEDC-864D225D392E}"/>
+              </a:ext>
+            </a:extLst>
+          </p:cNvPr>
+          <p:cNvSpPr txBox="1"/>
+          <p:nvPr/>
+        </p:nvSpPr>
+        <p:spPr>
+          <a:xfrm>
+            <a:off x="6846630" y="207220"/>
+            <a:ext cx="1115583" cy="369332"/>
+          </a:xfrm>
+          <a:prstGeom prst="rect">
+            <a:avLst/>
+          </a:prstGeom>
+          <a:noFill/>
+        </p:spPr>
+        <p:txBody>
+          <a:bodyPr wrap="square" rtlCol="0">
+            <a:spAutoFit/>
+          </a:bodyPr>
+          <a:lstStyle/>
+          <a:p>
+            <a:pPr algn="ctr"/>
+            <a:r>
+              <a:rPr lang="en-US" dirty="0"/>
+              <a:t>11’-11”</a:t>
+            </a:r>
+          </a:p>
+        </p:txBody>
+      </p:sp>
+      <p:cxnSp>
+        <p:nvCxnSpPr>
+          <p:cNvPr id="17" name="Straight Arrow Connector 16">
+            <a:extLst>
+              <a:ext uri="{FF2B5EF4-FFF2-40B4-BE49-F238E27FC236}">
+                <a16:creationId xmlns:a16="http://schemas.microsoft.com/office/drawing/2014/main" id="{A5F8C39F-539C-D55E-4A9E-00F8FBEB8245}"/>
+              </a:ext>
+            </a:extLst>
+          </p:cNvPr>
+          <p:cNvCxnSpPr/>
+          <p:nvPr/>
+        </p:nvCxnSpPr>
+        <p:spPr>
+          <a:xfrm flipH="1">
+            <a:off x="6245157" y="391886"/>
+            <a:ext cx="739303" cy="0"/>
+          </a:xfrm>
+          <a:prstGeom prst="straightConnector1">
+            <a:avLst/>
+          </a:prstGeom>
+          <a:ln>
+            <a:tailEnd type="triangle"/>
+          </a:ln>
+        </p:spPr>
+        <p:style>
+          <a:lnRef idx="2">
+            <a:schemeClr val="accent1"/>
+          </a:lnRef>
+          <a:fillRef idx="0">
+            <a:schemeClr val="accent1"/>
+          </a:fillRef>
+          <a:effectRef idx="1">
+            <a:schemeClr val="accent1"/>
+          </a:effectRef>
+          <a:fontRef idx="minor">
+            <a:schemeClr val="tx1"/>
+          </a:fontRef>
+        </p:style>
+      </p:cxnSp>
+      <p:cxnSp>
+        <p:nvCxnSpPr>
+          <p:cNvPr id="19" name="Straight Connector 18">
+            <a:extLst>
+              <a:ext uri="{FF2B5EF4-FFF2-40B4-BE49-F238E27FC236}">
+                <a16:creationId xmlns:a16="http://schemas.microsoft.com/office/drawing/2014/main" id="{9661DBAC-DAFB-5551-94D6-D4B33826764D}"/>
+              </a:ext>
+            </a:extLst>
+          </p:cNvPr>
+          <p:cNvCxnSpPr/>
+          <p:nvPr/>
+        </p:nvCxnSpPr>
+        <p:spPr>
+          <a:xfrm flipV="1">
+            <a:off x="8725711" y="80387"/>
+            <a:ext cx="0" cy="622998"/>
+          </a:xfrm>
+          <a:prstGeom prst="line">
+            <a:avLst/>
+          </a:prstGeom>
+        </p:spPr>
+        <p:style>
+          <a:lnRef idx="2">
+            <a:schemeClr val="accent1"/>
+          </a:lnRef>
+          <a:fillRef idx="0">
+            <a:schemeClr val="accent1"/>
+          </a:fillRef>
+          <a:effectRef idx="1">
+            <a:schemeClr val="accent1"/>
+          </a:effectRef>
+          <a:fontRef idx="minor">
+            <a:schemeClr val="tx1"/>
+          </a:fontRef>
+        </p:style>
+      </p:cxnSp>
+      <p:cxnSp>
+        <p:nvCxnSpPr>
+          <p:cNvPr id="21" name="Straight Arrow Connector 20">
+            <a:extLst>
+              <a:ext uri="{FF2B5EF4-FFF2-40B4-BE49-F238E27FC236}">
+                <a16:creationId xmlns:a16="http://schemas.microsoft.com/office/drawing/2014/main" id="{4FD10CD1-7DCF-4922-D911-D7BA54B86C4F}"/>
+              </a:ext>
+            </a:extLst>
+          </p:cNvPr>
+          <p:cNvCxnSpPr/>
+          <p:nvPr/>
+        </p:nvCxnSpPr>
+        <p:spPr>
+          <a:xfrm>
+            <a:off x="7801583" y="391886"/>
+            <a:ext cx="894945" cy="0"/>
+          </a:xfrm>
+          <a:prstGeom prst="straightConnector1">
+            <a:avLst/>
+          </a:prstGeom>
+          <a:ln>
+            <a:tailEnd type="triangle"/>
+          </a:ln>
+        </p:spPr>
+        <p:style>
+          <a:lnRef idx="2">
+            <a:schemeClr val="accent1"/>
+          </a:lnRef>
+          <a:fillRef idx="0">
+            <a:schemeClr val="accent1"/>
+          </a:fillRef>
+          <a:effectRef idx="1">
+            <a:schemeClr val="accent1"/>
+          </a:effectRef>
+          <a:fontRef idx="minor">
+            <a:schemeClr val="tx1"/>
+          </a:fontRef>
+        </p:style>
+      </p:cxnSp>
+      <p:cxnSp>
+        <p:nvCxnSpPr>
+          <p:cNvPr id="23" name="Straight Connector 22">
+            <a:extLst>
+              <a:ext uri="{FF2B5EF4-FFF2-40B4-BE49-F238E27FC236}">
+                <a16:creationId xmlns:a16="http://schemas.microsoft.com/office/drawing/2014/main" id="{5130890B-97F6-54C8-BFCD-D8C46E5B5AB7}"/>
+              </a:ext>
+            </a:extLst>
+          </p:cNvPr>
+          <p:cNvCxnSpPr>
+            <a:cxnSpLocks/>
+          </p:cNvCxnSpPr>
+          <p:nvPr/>
+        </p:nvCxnSpPr>
+        <p:spPr>
+          <a:xfrm flipH="1">
+            <a:off x="1867711" y="787940"/>
+            <a:ext cx="856034" cy="0"/>
+          </a:xfrm>
+          <a:prstGeom prst="line">
+            <a:avLst/>
+          </a:prstGeom>
+        </p:spPr>
+        <p:style>
+          <a:lnRef idx="2">
+            <a:schemeClr val="accent1"/>
+          </a:lnRef>
+          <a:fillRef idx="0">
+            <a:schemeClr val="accent1"/>
+          </a:fillRef>
+          <a:effectRef idx="1">
+            <a:schemeClr val="accent1"/>
+          </a:effectRef>
+          <a:fontRef idx="minor">
+            <a:schemeClr val="tx1"/>
+          </a:fontRef>
+        </p:style>
+      </p:cxnSp>
+      <p:cxnSp>
+        <p:nvCxnSpPr>
+          <p:cNvPr id="25" name="Straight Connector 24">
+            <a:extLst>
+              <a:ext uri="{FF2B5EF4-FFF2-40B4-BE49-F238E27FC236}">
+                <a16:creationId xmlns:a16="http://schemas.microsoft.com/office/drawing/2014/main" id="{CC4DDF3B-E630-53F5-29FC-D7D649AE03E8}"/>
+              </a:ext>
+            </a:extLst>
+          </p:cNvPr>
+          <p:cNvCxnSpPr>
+            <a:cxnSpLocks/>
+          </p:cNvCxnSpPr>
+          <p:nvPr/>
+        </p:nvCxnSpPr>
+        <p:spPr>
+          <a:xfrm>
+            <a:off x="2235116" y="3652970"/>
+            <a:ext cx="367406" cy="0"/>
+          </a:xfrm>
+          <a:prstGeom prst="line">
+            <a:avLst/>
+          </a:prstGeom>
+        </p:spPr>
+        <p:style>
+          <a:lnRef idx="2">
+            <a:schemeClr val="accent1"/>
+          </a:lnRef>
+          <a:fillRef idx="0">
+            <a:schemeClr val="accent1"/>
+          </a:fillRef>
+          <a:effectRef idx="1">
+            <a:schemeClr val="accent1"/>
+          </a:effectRef>
+          <a:fontRef idx="minor">
+            <a:schemeClr val="tx1"/>
+          </a:fontRef>
+        </p:style>
+      </p:cxnSp>
+      <p:cxnSp>
+        <p:nvCxnSpPr>
+          <p:cNvPr id="28" name="Straight Connector 27">
+            <a:extLst>
+              <a:ext uri="{FF2B5EF4-FFF2-40B4-BE49-F238E27FC236}">
+                <a16:creationId xmlns:a16="http://schemas.microsoft.com/office/drawing/2014/main" id="{F2893AC5-F655-1A83-13A3-221CA08066E8}"/>
+              </a:ext>
+            </a:extLst>
+          </p:cNvPr>
+          <p:cNvCxnSpPr/>
+          <p:nvPr/>
+        </p:nvCxnSpPr>
+        <p:spPr>
+          <a:xfrm flipH="1">
+            <a:off x="1867711" y="6439711"/>
+            <a:ext cx="734811" cy="0"/>
+          </a:xfrm>
+          <a:prstGeom prst="line">
+            <a:avLst/>
+          </a:prstGeom>
+        </p:spPr>
+        <p:style>
+          <a:lnRef idx="2">
+            <a:schemeClr val="accent1"/>
+          </a:lnRef>
+          <a:fillRef idx="0">
+            <a:schemeClr val="accent1"/>
+          </a:fillRef>
+          <a:effectRef idx="1">
+            <a:schemeClr val="accent1"/>
+          </a:effectRef>
+          <a:fontRef idx="minor">
+            <a:schemeClr val="tx1"/>
+          </a:fontRef>
+        </p:style>
+      </p:cxnSp>
+      <p:cxnSp>
+        <p:nvCxnSpPr>
+          <p:cNvPr id="30" name="Straight Arrow Connector 29">
+            <a:extLst>
+              <a:ext uri="{FF2B5EF4-FFF2-40B4-BE49-F238E27FC236}">
+                <a16:creationId xmlns:a16="http://schemas.microsoft.com/office/drawing/2014/main" id="{07D9E744-92A9-5992-525C-C9AFA5D07BEB}"/>
+              </a:ext>
+            </a:extLst>
+          </p:cNvPr>
+          <p:cNvCxnSpPr/>
+          <p:nvPr/>
+        </p:nvCxnSpPr>
+        <p:spPr>
+          <a:xfrm flipV="1">
+            <a:off x="2332393" y="787940"/>
+            <a:ext cx="0" cy="710120"/>
+          </a:xfrm>
+          <a:prstGeom prst="straightConnector1">
+            <a:avLst/>
+          </a:prstGeom>
+          <a:ln>
+            <a:tailEnd type="triangle"/>
+          </a:ln>
+        </p:spPr>
+        <p:style>
+          <a:lnRef idx="2">
+            <a:schemeClr val="accent1"/>
+          </a:lnRef>
+          <a:fillRef idx="0">
+            <a:schemeClr val="accent1"/>
+          </a:fillRef>
+          <a:effectRef idx="1">
+            <a:schemeClr val="accent1"/>
+          </a:effectRef>
+          <a:fontRef idx="minor">
+            <a:schemeClr val="tx1"/>
+          </a:fontRef>
+        </p:style>
+      </p:cxnSp>
+      <p:cxnSp>
+        <p:nvCxnSpPr>
+          <p:cNvPr id="32" name="Straight Arrow Connector 31">
+            <a:extLst>
+              <a:ext uri="{FF2B5EF4-FFF2-40B4-BE49-F238E27FC236}">
+                <a16:creationId xmlns:a16="http://schemas.microsoft.com/office/drawing/2014/main" id="{2839B854-9BBC-6B8B-810C-51B48118F2D8}"/>
+              </a:ext>
+            </a:extLst>
+          </p:cNvPr>
+          <p:cNvCxnSpPr/>
+          <p:nvPr/>
+        </p:nvCxnSpPr>
+        <p:spPr>
+          <a:xfrm>
+            <a:off x="2332393" y="1760706"/>
+            <a:ext cx="0" cy="1892263"/>
+          </a:xfrm>
+          <a:prstGeom prst="straightConnector1">
+            <a:avLst/>
+          </a:prstGeom>
+          <a:ln>
+            <a:tailEnd type="triangle"/>
+          </a:ln>
+        </p:spPr>
+        <p:style>
+          <a:lnRef idx="2">
+            <a:schemeClr val="accent1"/>
+          </a:lnRef>
+          <a:fillRef idx="0">
+            <a:schemeClr val="accent1"/>
+          </a:fillRef>
+          <a:effectRef idx="1">
+            <a:schemeClr val="accent1"/>
+          </a:effectRef>
+          <a:fontRef idx="minor">
+            <a:schemeClr val="tx1"/>
+          </a:fontRef>
+        </p:style>
+      </p:cxnSp>
+      <p:cxnSp>
+        <p:nvCxnSpPr>
+          <p:cNvPr id="35" name="Straight Arrow Connector 34">
+            <a:extLst>
+              <a:ext uri="{FF2B5EF4-FFF2-40B4-BE49-F238E27FC236}">
+                <a16:creationId xmlns:a16="http://schemas.microsoft.com/office/drawing/2014/main" id="{112F93EF-91E5-9A5B-864B-5D17B3AB6CED}"/>
+              </a:ext>
+            </a:extLst>
+          </p:cNvPr>
+          <p:cNvCxnSpPr/>
+          <p:nvPr/>
+        </p:nvCxnSpPr>
+        <p:spPr>
+          <a:xfrm flipV="1">
+            <a:off x="2062264" y="787940"/>
+            <a:ext cx="0" cy="4863830"/>
+          </a:xfrm>
+          <a:prstGeom prst="straightConnector1">
+            <a:avLst/>
+          </a:prstGeom>
+          <a:ln>
+            <a:tailEnd type="triangle"/>
+          </a:ln>
+        </p:spPr>
+        <p:style>
+          <a:lnRef idx="2">
+            <a:schemeClr val="accent1"/>
+          </a:lnRef>
+          <a:fillRef idx="0">
+            <a:schemeClr val="accent1"/>
+          </a:fillRef>
+          <a:effectRef idx="1">
+            <a:schemeClr val="accent1"/>
+          </a:effectRef>
+          <a:fontRef idx="minor">
+            <a:schemeClr val="tx1"/>
+          </a:fontRef>
+        </p:style>
+      </p:cxnSp>
+      <p:cxnSp>
+        <p:nvCxnSpPr>
+          <p:cNvPr id="38" name="Straight Arrow Connector 37">
+            <a:extLst>
+              <a:ext uri="{FF2B5EF4-FFF2-40B4-BE49-F238E27FC236}">
+                <a16:creationId xmlns:a16="http://schemas.microsoft.com/office/drawing/2014/main" id="{2E354A23-EB7D-5D8F-F4E8-14D1D4468F12}"/>
+              </a:ext>
+            </a:extLst>
+          </p:cNvPr>
+          <p:cNvCxnSpPr/>
+          <p:nvPr/>
+        </p:nvCxnSpPr>
+        <p:spPr>
+          <a:xfrm>
+            <a:off x="2062264" y="6050604"/>
+            <a:ext cx="0" cy="389107"/>
+          </a:xfrm>
+          <a:prstGeom prst="straightConnector1">
+            <a:avLst/>
+          </a:prstGeom>
+          <a:ln>
+            <a:tailEnd type="triangle"/>
+          </a:ln>
+        </p:spPr>
+        <p:style>
+          <a:lnRef idx="2">
+            <a:schemeClr val="accent1"/>
+          </a:lnRef>
+          <a:fillRef idx="0">
+            <a:schemeClr val="accent1"/>
+          </a:fillRef>
+          <a:effectRef idx="1">
+            <a:schemeClr val="accent1"/>
+          </a:effectRef>
+          <a:fontRef idx="minor">
+            <a:schemeClr val="tx1"/>
+          </a:fontRef>
+        </p:style>
+      </p:cxnSp>
+      <p:sp>
+        <p:nvSpPr>
+          <p:cNvPr id="39" name="TextBox 38">
+            <a:extLst>
+              <a:ext uri="{FF2B5EF4-FFF2-40B4-BE49-F238E27FC236}">
+                <a16:creationId xmlns:a16="http://schemas.microsoft.com/office/drawing/2014/main" id="{29187103-CB19-D006-F91A-0AFAD302733C}"/>
+              </a:ext>
+            </a:extLst>
+          </p:cNvPr>
+          <p:cNvSpPr txBox="1"/>
+          <p:nvPr/>
+        </p:nvSpPr>
+        <p:spPr>
+          <a:xfrm>
+            <a:off x="1867711" y="1498060"/>
+            <a:ext cx="1026213" cy="369332"/>
+          </a:xfrm>
+          <a:prstGeom prst="rect">
+            <a:avLst/>
+          </a:prstGeom>
+          <a:noFill/>
+        </p:spPr>
+        <p:txBody>
+          <a:bodyPr wrap="square" rtlCol="0">
+            <a:spAutoFit/>
+          </a:bodyPr>
+          <a:lstStyle/>
+          <a:p>
+            <a:pPr algn="ctr"/>
+            <a:r>
+              <a:rPr lang="en-US" dirty="0"/>
+              <a:t>13’- 3”</a:t>
+            </a:r>
+          </a:p>
+        </p:txBody>
+      </p:sp>
+      <p:sp>
+        <p:nvSpPr>
+          <p:cNvPr id="40" name="TextBox 39">
+            <a:extLst>
+              <a:ext uri="{FF2B5EF4-FFF2-40B4-BE49-F238E27FC236}">
+                <a16:creationId xmlns:a16="http://schemas.microsoft.com/office/drawing/2014/main" id="{8CD359CD-4848-A82E-4A48-C4AF4E2BEBD4}"/>
+              </a:ext>
+            </a:extLst>
+          </p:cNvPr>
+          <p:cNvSpPr txBox="1"/>
+          <p:nvPr/>
+        </p:nvSpPr>
+        <p:spPr>
+          <a:xfrm>
+            <a:off x="1678395" y="5690998"/>
+            <a:ext cx="856034" cy="369332"/>
+          </a:xfrm>
+          <a:prstGeom prst="rect">
+            <a:avLst/>
+          </a:prstGeom>
+          <a:noFill/>
+        </p:spPr>
+        <p:txBody>
+          <a:bodyPr wrap="square" rtlCol="0">
+            <a:spAutoFit/>
+          </a:bodyPr>
+          <a:lstStyle/>
+          <a:p>
+            <a:r>
+              <a:rPr lang="en-US" dirty="0"/>
+              <a:t>26’- 7”</a:t>
+            </a:r>
+          </a:p>
+        </p:txBody>
+      </p:sp>
+      <p:sp>
+        <p:nvSpPr>
+          <p:cNvPr id="3" name="TextBox 2">
+            <a:extLst>
+              <a:ext uri="{FF2B5EF4-FFF2-40B4-BE49-F238E27FC236}">
+                <a16:creationId xmlns:a16="http://schemas.microsoft.com/office/drawing/2014/main" id="{141493F8-067F-F788-F407-9B487477AA4D}"/>
+              </a:ext>
+            </a:extLst>
+          </p:cNvPr>
+          <p:cNvSpPr txBox="1"/>
+          <p:nvPr/>
+        </p:nvSpPr>
+        <p:spPr>
+          <a:xfrm>
+            <a:off x="8769379" y="897102"/>
+            <a:ext cx="1717482" cy="400110"/>
+          </a:xfrm>
+          <a:prstGeom prst="rect">
+            <a:avLst/>
+          </a:prstGeom>
+          <a:noFill/>
+        </p:spPr>
+        <p:txBody>
+          <a:bodyPr wrap="square" rtlCol="0">
+            <a:spAutoFit/>
+          </a:bodyPr>
+          <a:lstStyle/>
+          <a:p>
+            <a:r>
+              <a:rPr lang="en-US" sz="2000" dirty="0"/>
+              <a:t>Neutral   Zone</a:t>
+            </a:r>
+          </a:p>
+        </p:txBody>
+      </p:sp>
+      <p:sp>
+        <p:nvSpPr>
+          <p:cNvPr id="4" name="TextBox 3">
+            <a:extLst>
+              <a:ext uri="{FF2B5EF4-FFF2-40B4-BE49-F238E27FC236}">
+                <a16:creationId xmlns:a16="http://schemas.microsoft.com/office/drawing/2014/main" id="{EB0273D5-6043-BD8E-964E-B76B0E119340}"/>
+              </a:ext>
+            </a:extLst>
+          </p:cNvPr>
+          <p:cNvSpPr txBox="1"/>
+          <p:nvPr/>
+        </p:nvSpPr>
+        <p:spPr>
+          <a:xfrm>
+            <a:off x="2974663" y="867099"/>
+            <a:ext cx="1717482" cy="400110"/>
+          </a:xfrm>
+          <a:prstGeom prst="rect">
+            <a:avLst/>
+          </a:prstGeom>
+          <a:noFill/>
+        </p:spPr>
+        <p:txBody>
+          <a:bodyPr wrap="square" rtlCol="0">
+            <a:spAutoFit/>
+          </a:bodyPr>
+          <a:lstStyle/>
+          <a:p>
+            <a:r>
+              <a:rPr lang="en-US" sz="2000" dirty="0"/>
+              <a:t>Alliance Zone</a:t>
+            </a:r>
+          </a:p>
+        </p:txBody>
+      </p:sp>
+      <p:sp>
+        <p:nvSpPr>
+          <p:cNvPr id="13" name="Rectangle 12">
+            <a:extLst>
+              <a:ext uri="{FF2B5EF4-FFF2-40B4-BE49-F238E27FC236}">
+                <a16:creationId xmlns:a16="http://schemas.microsoft.com/office/drawing/2014/main" id="{8904766B-8F3B-D548-D8C1-C540BB757C5A}"/>
+              </a:ext>
+            </a:extLst>
+          </p:cNvPr>
+          <p:cNvSpPr/>
+          <p:nvPr/>
+        </p:nvSpPr>
+        <p:spPr>
+          <a:xfrm>
+            <a:off x="5179668" y="2257670"/>
+            <a:ext cx="466928" cy="466928"/>
+          </a:xfrm>
+          <a:prstGeom prst="rect">
+            <a:avLst/>
+          </a:prstGeom>
+          <a:solidFill>
+            <a:schemeClr val="accent5">
+              <a:lumMod val="40000"/>
+              <a:lumOff val="60000"/>
+            </a:schemeClr>
+          </a:solidFill>
+          <a:ln>
+            <a:solidFill>
+              <a:schemeClr val="accent1">
+                <a:shade val="15000"/>
+                <a:alpha val="48000"/>
+              </a:schemeClr>
+            </a:solidFill>
+          </a:ln>
+        </p:spPr>
+        <p:style>
+          <a:lnRef idx="2">
+            <a:schemeClr val="accent1">
+              <a:shade val="15000"/>
+            </a:schemeClr>
+          </a:lnRef>
+          <a:fillRef idx="1">
+            <a:schemeClr val="accent1"/>
+          </a:fillRef>
+          <a:effectRef idx="0">
+            <a:schemeClr val="accent1"/>
+          </a:effectRef>
+          <a:fontRef idx="minor">
+            <a:schemeClr val="lt1"/>
+          </a:fontRef>
+        </p:style>
+        <p:txBody>
+          <a:bodyPr rtlCol="0" anchor="ctr"/>
+          <a:lstStyle/>
+          <a:p>
+            <a:pPr algn="ctr"/>
+            <a:r>
+              <a:rPr lang="en-US" dirty="0">
+                <a:solidFill>
+                  <a:schemeClr val="tx1"/>
+                </a:solidFill>
+              </a:rPr>
+              <a:t>A1</a:t>
+            </a:r>
+          </a:p>
+        </p:txBody>
+      </p:sp>
+      <p:sp>
+        <p:nvSpPr>
+          <p:cNvPr id="16" name="Rectangle 15">
+            <a:extLst>
+              <a:ext uri="{FF2B5EF4-FFF2-40B4-BE49-F238E27FC236}">
+                <a16:creationId xmlns:a16="http://schemas.microsoft.com/office/drawing/2014/main" id="{0FD63059-CC08-2BEA-8505-F94FBEE03BD5}"/>
+              </a:ext>
+            </a:extLst>
+          </p:cNvPr>
+          <p:cNvSpPr/>
+          <p:nvPr/>
+        </p:nvSpPr>
+        <p:spPr>
+          <a:xfrm>
+            <a:off x="6654562" y="2257670"/>
+            <a:ext cx="465287" cy="466928"/>
+          </a:xfrm>
+          <a:prstGeom prst="rect">
+            <a:avLst/>
+          </a:prstGeom>
+          <a:solidFill>
+            <a:schemeClr val="accent5">
+              <a:lumMod val="40000"/>
+              <a:lumOff val="60000"/>
+              <a:alpha val="51000"/>
+            </a:schemeClr>
+          </a:solidFill>
+          <a:ln>
+            <a:solidFill>
+              <a:schemeClr val="accent1">
+                <a:shade val="15000"/>
+              </a:schemeClr>
+            </a:solidFill>
+          </a:ln>
+        </p:spPr>
+        <p:style>
+          <a:lnRef idx="2">
+            <a:schemeClr val="accent1">
+              <a:shade val="15000"/>
+            </a:schemeClr>
+          </a:lnRef>
+          <a:fillRef idx="1">
+            <a:schemeClr val="accent1"/>
+          </a:fillRef>
+          <a:effectRef idx="0">
+            <a:schemeClr val="accent1"/>
+          </a:effectRef>
+          <a:fontRef idx="minor">
+            <a:schemeClr val="lt1"/>
+          </a:fontRef>
+        </p:style>
+        <p:txBody>
+          <a:bodyPr rtlCol="0" anchor="ctr"/>
+          <a:lstStyle/>
+          <a:p>
+            <a:pPr algn="ctr"/>
+            <a:r>
+              <a:rPr lang="en-US" sz="1600" dirty="0">
+                <a:solidFill>
+                  <a:schemeClr val="tx1"/>
+                </a:solidFill>
+              </a:rPr>
+              <a:t>N1</a:t>
+            </a:r>
+            <a:endParaRPr lang="en-US" dirty="0">
+              <a:solidFill>
+                <a:schemeClr val="tx1"/>
+              </a:solidFill>
+            </a:endParaRPr>
+          </a:p>
+        </p:txBody>
+      </p:sp>
+      <p:sp>
+        <p:nvSpPr>
+          <p:cNvPr id="18" name="TextBox 17">
+            <a:extLst>
+              <a:ext uri="{FF2B5EF4-FFF2-40B4-BE49-F238E27FC236}">
+                <a16:creationId xmlns:a16="http://schemas.microsoft.com/office/drawing/2014/main" id="{0B5C9E55-E5B5-EA76-D30F-814157F7CF0E}"/>
+              </a:ext>
+            </a:extLst>
+          </p:cNvPr>
+          <p:cNvSpPr txBox="1"/>
+          <p:nvPr/>
+        </p:nvSpPr>
+        <p:spPr>
+          <a:xfrm>
+            <a:off x="238673" y="173504"/>
+            <a:ext cx="1739940" cy="646331"/>
+          </a:xfrm>
+          <a:prstGeom prst="rect">
+            <a:avLst/>
+          </a:prstGeom>
+          <a:noFill/>
+        </p:spPr>
+        <p:txBody>
+          <a:bodyPr wrap="square" rtlCol="0">
+            <a:spAutoFit/>
+          </a:bodyPr>
+          <a:lstStyle/>
+          <a:p>
+            <a:r>
+              <a:rPr lang="en-US" dirty="0"/>
+              <a:t>Other Bump Routes</a:t>
+            </a:r>
+          </a:p>
+        </p:txBody>
+      </p:sp>
+      <p:sp>
+        <p:nvSpPr>
+          <p:cNvPr id="20" name="Rectangle 19">
+            <a:extLst>
+              <a:ext uri="{FF2B5EF4-FFF2-40B4-BE49-F238E27FC236}">
+                <a16:creationId xmlns:a16="http://schemas.microsoft.com/office/drawing/2014/main" id="{0D17A3B9-C059-D944-3073-DAC62A593C86}"/>
+              </a:ext>
+            </a:extLst>
+          </p:cNvPr>
+          <p:cNvSpPr/>
+          <p:nvPr/>
+        </p:nvSpPr>
+        <p:spPr>
+          <a:xfrm>
+            <a:off x="5160867" y="4525554"/>
+            <a:ext cx="466928" cy="466928"/>
+          </a:xfrm>
+          <a:prstGeom prst="rect">
+            <a:avLst/>
+          </a:prstGeom>
+          <a:solidFill>
+            <a:schemeClr val="accent2">
+              <a:lumMod val="60000"/>
+              <a:lumOff val="40000"/>
+              <a:alpha val="52000"/>
+            </a:schemeClr>
+          </a:solidFill>
+        </p:spPr>
+        <p:style>
+          <a:lnRef idx="2">
+            <a:schemeClr val="accent1">
+              <a:shade val="15000"/>
+            </a:schemeClr>
+          </a:lnRef>
+          <a:fillRef idx="1">
+            <a:schemeClr val="accent1"/>
+          </a:fillRef>
+          <a:effectRef idx="0">
+            <a:schemeClr val="accent1"/>
+          </a:effectRef>
+          <a:fontRef idx="minor">
+            <a:schemeClr val="lt1"/>
+          </a:fontRef>
+        </p:style>
+        <p:txBody>
+          <a:bodyPr rtlCol="0" anchor="ctr"/>
+          <a:lstStyle/>
+          <a:p>
+            <a:pPr algn="ctr"/>
+            <a:r>
+              <a:rPr lang="en-US" dirty="0">
+                <a:solidFill>
+                  <a:schemeClr val="tx1"/>
+                </a:solidFill>
+              </a:rPr>
+              <a:t>A2</a:t>
+            </a:r>
+          </a:p>
+        </p:txBody>
+      </p:sp>
+      <p:sp>
+        <p:nvSpPr>
+          <p:cNvPr id="22" name="Rectangle 21">
+            <a:extLst>
+              <a:ext uri="{FF2B5EF4-FFF2-40B4-BE49-F238E27FC236}">
+                <a16:creationId xmlns:a16="http://schemas.microsoft.com/office/drawing/2014/main" id="{A1B33256-466F-E728-EE30-92CF31725CF4}"/>
+              </a:ext>
+            </a:extLst>
+          </p:cNvPr>
+          <p:cNvSpPr/>
+          <p:nvPr/>
+        </p:nvSpPr>
+        <p:spPr>
+          <a:xfrm>
+            <a:off x="6682624" y="4497052"/>
+            <a:ext cx="466928" cy="466928"/>
+          </a:xfrm>
+          <a:prstGeom prst="rect">
+            <a:avLst/>
+          </a:prstGeom>
+          <a:solidFill>
+            <a:schemeClr val="accent2">
+              <a:lumMod val="60000"/>
+              <a:lumOff val="40000"/>
+              <a:alpha val="52000"/>
+            </a:schemeClr>
+          </a:solidFill>
+        </p:spPr>
+        <p:style>
+          <a:lnRef idx="2">
+            <a:schemeClr val="accent1">
+              <a:shade val="15000"/>
+            </a:schemeClr>
+          </a:lnRef>
+          <a:fillRef idx="1">
+            <a:schemeClr val="accent1"/>
+          </a:fillRef>
+          <a:effectRef idx="0">
+            <a:schemeClr val="accent1"/>
+          </a:effectRef>
+          <a:fontRef idx="minor">
+            <a:schemeClr val="lt1"/>
+          </a:fontRef>
+        </p:style>
+        <p:txBody>
+          <a:bodyPr rtlCol="0" anchor="ctr"/>
+          <a:lstStyle/>
+          <a:p>
+            <a:pPr algn="ctr"/>
+            <a:r>
+              <a:rPr lang="en-US" sz="1600" dirty="0">
+                <a:solidFill>
+                  <a:schemeClr val="tx1"/>
+                </a:solidFill>
+              </a:rPr>
+              <a:t>N2</a:t>
+            </a:r>
+          </a:p>
+        </p:txBody>
+      </p:sp>
+      <p:sp>
+        <p:nvSpPr>
+          <p:cNvPr id="24" name="TextBox 23">
+            <a:extLst>
+              <a:ext uri="{FF2B5EF4-FFF2-40B4-BE49-F238E27FC236}">
+                <a16:creationId xmlns:a16="http://schemas.microsoft.com/office/drawing/2014/main" id="{82569A1E-466F-1E17-194B-CCFD2FB251EF}"/>
+              </a:ext>
+            </a:extLst>
+          </p:cNvPr>
+          <p:cNvSpPr txBox="1"/>
+          <p:nvPr/>
+        </p:nvSpPr>
+        <p:spPr>
+          <a:xfrm>
+            <a:off x="164064" y="1067154"/>
+            <a:ext cx="1739940" cy="646331"/>
+          </a:xfrm>
+          <a:prstGeom prst="rect">
+            <a:avLst/>
+          </a:prstGeom>
+          <a:noFill/>
+        </p:spPr>
+        <p:txBody>
+          <a:bodyPr wrap="square" rtlCol="0">
+            <a:spAutoFit/>
+          </a:bodyPr>
+          <a:lstStyle/>
+          <a:p>
+            <a:r>
+              <a:rPr lang="en-US" sz="1200" dirty="0"/>
+              <a:t>These are routes where you enter on one bump, but exit on the other</a:t>
+            </a:r>
+          </a:p>
+        </p:txBody>
+      </p:sp>
+    </p:spTree>
+    <p:extLst>
+      <p:ext uri="{BB962C8B-B14F-4D97-AF65-F5344CB8AC3E}">
+        <p14:creationId xmlns:p14="http://schemas.microsoft.com/office/powerpoint/2010/main" val="1651022312"/>
+      </p:ext>
+    </p:extLst>
+  </p:cSld>
+  <p:clrMapOvr>
+    <a:masterClrMapping/>
+  </p:clrMapOvr>
+</p:sld>
+</file>
+
+<file path=ppt/slides/slide7.xml><?xml version="1.0" encoding="utf-8"?>
 <p:sld xmlns:a="http://schemas.openxmlformats.org/drawingml/2006/main" xmlns:r="http://schemas.openxmlformats.org/officeDocument/2006/relationships" xmlns:p="http://schemas.openxmlformats.org/presentationml/2006/main">
   <p:cSld>
     <p:spTree>
@@ -11605,7 +14277,7 @@
 </p:sld>
 </file>
 
-<file path=ppt/slides/slide6.xml><?xml version="1.0" encoding="utf-8"?>
+<file path=ppt/slides/slide8.xml><?xml version="1.0" encoding="utf-8"?>
 <p:sld xmlns:a="http://schemas.openxmlformats.org/drawingml/2006/main" xmlns:r="http://schemas.openxmlformats.org/officeDocument/2006/relationships" xmlns:p="http://schemas.openxmlformats.org/presentationml/2006/main">
   <p:cSld>
     <p:spTree>
@@ -12425,7 +15097,7 @@
 </p:sld>
 </file>
 
-<file path=ppt/slides/slide7.xml><?xml version="1.0" encoding="utf-8"?>
+<file path=ppt/slides/slide9.xml><?xml version="1.0" encoding="utf-8"?>
 <p:sld xmlns:a="http://schemas.openxmlformats.org/drawingml/2006/main" xmlns:r="http://schemas.openxmlformats.org/officeDocument/2006/relationships" xmlns:p="http://schemas.openxmlformats.org/presentationml/2006/main">
   <p:cSld>
     <p:spTree>
@@ -12433,7 +15105,7 @@
         <p:cNvPr id="1" name="">
           <a:extLst>
             <a:ext uri="{FF2B5EF4-FFF2-40B4-BE49-F238E27FC236}">
-              <a16:creationId xmlns:a16="http://schemas.microsoft.com/office/drawing/2014/main" id="{380CC9A7-880F-366A-4746-7412F463E7C2}"/>
+              <a16:creationId xmlns:a16="http://schemas.microsoft.com/office/drawing/2014/main" id="{85A59EA1-170D-1517-3EE3-7DB7AC35DA25}"/>
             </a:ext>
           </a:extLst>
         </p:cNvPr>
@@ -12450,10 +15122,10 @@
       </p:grpSpPr>
       <p:pic>
         <p:nvPicPr>
-          <p:cNvPr id="5" name="Picture 4">
-            <a:extLst>
-              <a:ext uri="{FF2B5EF4-FFF2-40B4-BE49-F238E27FC236}">
-                <a16:creationId xmlns:a16="http://schemas.microsoft.com/office/drawing/2014/main" id="{ED474870-262B-56B2-C101-7A3ECFA230B2}"/>
+          <p:cNvPr id="11" name="Picture 10">
+            <a:extLst>
+              <a:ext uri="{FF2B5EF4-FFF2-40B4-BE49-F238E27FC236}">
+                <a16:creationId xmlns:a16="http://schemas.microsoft.com/office/drawing/2014/main" id="{252F296E-AF2E-D3A2-FB33-878441B33310}"/>
               </a:ext>
             </a:extLst>
           </p:cNvPr>
@@ -12463,22 +15135,15 @@
           <p:nvPr/>
         </p:nvPicPr>
         <p:blipFill>
-          <a:blip r:embed="rId2">
-            <a:extLst>
-              <a:ext uri="{28A0092B-C50C-407E-A947-70E740481C1C}">
-                <a14:useLocalDpi xmlns:a14="http://schemas.microsoft.com/office/drawing/2010/main" val="0"/>
-              </a:ext>
-            </a:extLst>
-          </a:blip>
-          <a:srcRect l="35550" r="11291"/>
+          <a:blip r:embed="rId2"/>
           <a:stretch>
             <a:fillRect/>
           </a:stretch>
         </p:blipFill>
         <p:spPr>
-          <a:xfrm rot="10800000">
-            <a:off x="2602522" y="447940"/>
-            <a:ext cx="8400421" cy="6410060"/>
+          <a:xfrm>
+            <a:off x="2120820" y="418288"/>
+            <a:ext cx="9154803" cy="6373114"/>
           </a:xfrm>
           <a:prstGeom prst="rect">
             <a:avLst/>
@@ -12490,7 +15155,7 @@
           <p:cNvPr id="7" name="Straight Connector 6">
             <a:extLst>
               <a:ext uri="{FF2B5EF4-FFF2-40B4-BE49-F238E27FC236}">
-                <a16:creationId xmlns:a16="http://schemas.microsoft.com/office/drawing/2014/main" id="{176688C5-2DB5-3573-C036-EEEC845792B6}"/>
+                <a16:creationId xmlns:a16="http://schemas.microsoft.com/office/drawing/2014/main" id="{4166B934-CF53-DD34-188F-EEB2D73D49A2}"/>
               </a:ext>
             </a:extLst>
           </p:cNvPr>
@@ -12526,7 +15191,7 @@
           <p:cNvPr id="9" name="Straight Connector 8">
             <a:extLst>
               <a:ext uri="{FF2B5EF4-FFF2-40B4-BE49-F238E27FC236}">
-                <a16:creationId xmlns:a16="http://schemas.microsoft.com/office/drawing/2014/main" id="{6E3D64EA-FEFF-C83C-7CE7-E2528F5BB46E}"/>
+                <a16:creationId xmlns:a16="http://schemas.microsoft.com/office/drawing/2014/main" id="{13F91E21-8D94-1FD9-BE61-1929A4F87717}"/>
               </a:ext>
             </a:extLst>
           </p:cNvPr>
@@ -12562,7 +15227,7 @@
           <p:cNvPr id="10" name="TextBox 9">
             <a:extLst>
               <a:ext uri="{FF2B5EF4-FFF2-40B4-BE49-F238E27FC236}">
-                <a16:creationId xmlns:a16="http://schemas.microsoft.com/office/drawing/2014/main" id="{C089E226-D443-450A-0711-EBFF224ED759}"/>
+                <a16:creationId xmlns:a16="http://schemas.microsoft.com/office/drawing/2014/main" id="{DAD2B27B-1BF2-D93E-8160-7C4A036FCEA3}"/>
               </a:ext>
             </a:extLst>
           </p:cNvPr>
@@ -12597,7 +15262,7 @@
           <p:cNvPr id="12" name="Straight Arrow Connector 11">
             <a:extLst>
               <a:ext uri="{FF2B5EF4-FFF2-40B4-BE49-F238E27FC236}">
-                <a16:creationId xmlns:a16="http://schemas.microsoft.com/office/drawing/2014/main" id="{82DB10E5-7987-67AE-907D-96866B830660}"/>
+                <a16:creationId xmlns:a16="http://schemas.microsoft.com/office/drawing/2014/main" id="{951F2944-804A-2B4A-96DC-D3C59119D5FC}"/>
               </a:ext>
             </a:extLst>
           </p:cNvPr>
@@ -12636,7 +15301,7 @@
           <p:cNvPr id="14" name="Straight Arrow Connector 13">
             <a:extLst>
               <a:ext uri="{FF2B5EF4-FFF2-40B4-BE49-F238E27FC236}">
-                <a16:creationId xmlns:a16="http://schemas.microsoft.com/office/drawing/2014/main" id="{0029B26A-875C-1D34-AAF4-C8E884027635}"/>
+                <a16:creationId xmlns:a16="http://schemas.microsoft.com/office/drawing/2014/main" id="{97BC1B51-5D44-9FFF-3375-45ADE026141A}"/>
               </a:ext>
             </a:extLst>
           </p:cNvPr>
@@ -12677,7 +15342,7 @@
           <p:cNvPr id="15" name="TextBox 14">
             <a:extLst>
               <a:ext uri="{FF2B5EF4-FFF2-40B4-BE49-F238E27FC236}">
-                <a16:creationId xmlns:a16="http://schemas.microsoft.com/office/drawing/2014/main" id="{3BBBB089-600F-0CD7-D8E3-A973E80D20B9}"/>
+                <a16:creationId xmlns:a16="http://schemas.microsoft.com/office/drawing/2014/main" id="{F8940841-CBB2-F889-696D-0831DF07794A}"/>
               </a:ext>
             </a:extLst>
           </p:cNvPr>
@@ -12713,7 +15378,7 @@
           <p:cNvPr id="17" name="Straight Arrow Connector 16">
             <a:extLst>
               <a:ext uri="{FF2B5EF4-FFF2-40B4-BE49-F238E27FC236}">
-                <a16:creationId xmlns:a16="http://schemas.microsoft.com/office/drawing/2014/main" id="{F13668E3-CD92-69C0-E8BA-B7E0D12A73F7}"/>
+                <a16:creationId xmlns:a16="http://schemas.microsoft.com/office/drawing/2014/main" id="{49C7805C-5E76-68D1-6B2C-183C624CE929}"/>
               </a:ext>
             </a:extLst>
           </p:cNvPr>
@@ -12752,7 +15417,7 @@
           <p:cNvPr id="19" name="Straight Connector 18">
             <a:extLst>
               <a:ext uri="{FF2B5EF4-FFF2-40B4-BE49-F238E27FC236}">
-                <a16:creationId xmlns:a16="http://schemas.microsoft.com/office/drawing/2014/main" id="{5C35936B-1325-C650-3B17-AC0F166F5450}"/>
+                <a16:creationId xmlns:a16="http://schemas.microsoft.com/office/drawing/2014/main" id="{303670F2-BCE5-EB0F-E50C-F9E9A251010D}"/>
               </a:ext>
             </a:extLst>
           </p:cNvPr>
@@ -12788,7 +15453,7 @@
           <p:cNvPr id="21" name="Straight Arrow Connector 20">
             <a:extLst>
               <a:ext uri="{FF2B5EF4-FFF2-40B4-BE49-F238E27FC236}">
-                <a16:creationId xmlns:a16="http://schemas.microsoft.com/office/drawing/2014/main" id="{7DD6E884-E7C9-96F7-88DE-DC30AADC0597}"/>
+                <a16:creationId xmlns:a16="http://schemas.microsoft.com/office/drawing/2014/main" id="{94166174-9E1E-A7BD-CDB4-87CA68B21114}"/>
               </a:ext>
             </a:extLst>
           </p:cNvPr>
@@ -12827,7 +15492,7 @@
           <p:cNvPr id="23" name="Straight Connector 22">
             <a:extLst>
               <a:ext uri="{FF2B5EF4-FFF2-40B4-BE49-F238E27FC236}">
-                <a16:creationId xmlns:a16="http://schemas.microsoft.com/office/drawing/2014/main" id="{5B946095-33EC-8DA1-1648-B873A7DA710F}"/>
+                <a16:creationId xmlns:a16="http://schemas.microsoft.com/office/drawing/2014/main" id="{695CE47F-2B6C-6B00-772C-C9CBEE1856C4}"/>
               </a:ext>
             </a:extLst>
           </p:cNvPr>
@@ -12865,13 +15530,12 @@
           <p:cNvPr id="25" name="Straight Connector 24">
             <a:extLst>
               <a:ext uri="{FF2B5EF4-FFF2-40B4-BE49-F238E27FC236}">
-                <a16:creationId xmlns:a16="http://schemas.microsoft.com/office/drawing/2014/main" id="{5CFA70FA-7418-9F50-427D-C6DF937CEE07}"/>
+                <a16:creationId xmlns:a16="http://schemas.microsoft.com/office/drawing/2014/main" id="{95885E15-1A7B-A653-86B2-CEB27F5A4F63}"/>
               </a:ext>
             </a:extLst>
           </p:cNvPr>
           <p:cNvCxnSpPr>
             <a:cxnSpLocks/>
-            <a:endCxn id="5" idx="3"/>
           </p:cNvCxnSpPr>
           <p:nvPr/>
         </p:nvCxnSpPr>
@@ -12904,7 +15568,7 @@
           <p:cNvPr id="28" name="Straight Connector 27">
             <a:extLst>
               <a:ext uri="{FF2B5EF4-FFF2-40B4-BE49-F238E27FC236}">
-                <a16:creationId xmlns:a16="http://schemas.microsoft.com/office/drawing/2014/main" id="{374A1FFB-E610-E95E-B19F-04DCB58F0F36}"/>
+                <a16:creationId xmlns:a16="http://schemas.microsoft.com/office/drawing/2014/main" id="{D4B43FEB-5ABC-98DC-4B64-81D6559D3855}"/>
               </a:ext>
             </a:extLst>
           </p:cNvPr>
@@ -12940,7 +15604,7 @@
           <p:cNvPr id="30" name="Straight Arrow Connector 29">
             <a:extLst>
               <a:ext uri="{FF2B5EF4-FFF2-40B4-BE49-F238E27FC236}">
-                <a16:creationId xmlns:a16="http://schemas.microsoft.com/office/drawing/2014/main" id="{73C86588-8ED1-3659-9E2A-E253DADE2A46}"/>
+                <a16:creationId xmlns:a16="http://schemas.microsoft.com/office/drawing/2014/main" id="{1BEF3C15-4810-E531-328C-0624DDC71096}"/>
               </a:ext>
             </a:extLst>
           </p:cNvPr>
@@ -12979,7 +15643,7 @@
           <p:cNvPr id="32" name="Straight Arrow Connector 31">
             <a:extLst>
               <a:ext uri="{FF2B5EF4-FFF2-40B4-BE49-F238E27FC236}">
-                <a16:creationId xmlns:a16="http://schemas.microsoft.com/office/drawing/2014/main" id="{D79418DD-92C7-0D8D-E902-3265EA6DBBFC}"/>
+                <a16:creationId xmlns:a16="http://schemas.microsoft.com/office/drawing/2014/main" id="{4E1C1BF2-189C-AD48-5553-D8513B6808E3}"/>
               </a:ext>
             </a:extLst>
           </p:cNvPr>
@@ -13018,7 +15682,7 @@
           <p:cNvPr id="35" name="Straight Arrow Connector 34">
             <a:extLst>
               <a:ext uri="{FF2B5EF4-FFF2-40B4-BE49-F238E27FC236}">
-                <a16:creationId xmlns:a16="http://schemas.microsoft.com/office/drawing/2014/main" id="{4F024290-7F9D-E571-D4A0-A3FBF500F984}"/>
+                <a16:creationId xmlns:a16="http://schemas.microsoft.com/office/drawing/2014/main" id="{14F42975-632D-6233-1402-6EE2735B7479}"/>
               </a:ext>
             </a:extLst>
           </p:cNvPr>
@@ -13057,7 +15721,7 @@
           <p:cNvPr id="38" name="Straight Arrow Connector 37">
             <a:extLst>
               <a:ext uri="{FF2B5EF4-FFF2-40B4-BE49-F238E27FC236}">
-                <a16:creationId xmlns:a16="http://schemas.microsoft.com/office/drawing/2014/main" id="{59F63A00-5303-5C26-A115-E1A786C6F7A6}"/>
+                <a16:creationId xmlns:a16="http://schemas.microsoft.com/office/drawing/2014/main" id="{4E6232F9-36F8-7DDB-B7CD-ADF82B0500CB}"/>
               </a:ext>
             </a:extLst>
           </p:cNvPr>
@@ -13096,7 +15760,7 @@
           <p:cNvPr id="39" name="TextBox 38">
             <a:extLst>
               <a:ext uri="{FF2B5EF4-FFF2-40B4-BE49-F238E27FC236}">
-                <a16:creationId xmlns:a16="http://schemas.microsoft.com/office/drawing/2014/main" id="{602B75DE-B760-C9A3-6E6F-9DA1A11BDA28}"/>
+                <a16:creationId xmlns:a16="http://schemas.microsoft.com/office/drawing/2014/main" id="{EA0248D2-46ED-9958-D880-0C88DADCE612}"/>
               </a:ext>
             </a:extLst>
           </p:cNvPr>
@@ -13132,7 +15796,7 @@
           <p:cNvPr id="40" name="TextBox 39">
             <a:extLst>
               <a:ext uri="{FF2B5EF4-FFF2-40B4-BE49-F238E27FC236}">
-                <a16:creationId xmlns:a16="http://schemas.microsoft.com/office/drawing/2014/main" id="{67501CA7-EF96-2D51-8A6E-B1D28591D209}"/>
+                <a16:creationId xmlns:a16="http://schemas.microsoft.com/office/drawing/2014/main" id="{BF3F5EFE-03CE-BC10-CF3E-9045135EE7AD}"/>
               </a:ext>
             </a:extLst>
           </p:cNvPr>
@@ -13167,7 +15831,7 @@
           <p:cNvPr id="3" name="TextBox 2">
             <a:extLst>
               <a:ext uri="{FF2B5EF4-FFF2-40B4-BE49-F238E27FC236}">
-                <a16:creationId xmlns:a16="http://schemas.microsoft.com/office/drawing/2014/main" id="{7BCECEE9-5407-DB14-8494-C9B6CE444FCF}"/>
+                <a16:creationId xmlns:a16="http://schemas.microsoft.com/office/drawing/2014/main" id="{55021627-8ED4-157A-7FAB-3018581A68B4}"/>
               </a:ext>
             </a:extLst>
           </p:cNvPr>
@@ -13202,7 +15866,7 @@
           <p:cNvPr id="4" name="TextBox 3">
             <a:extLst>
               <a:ext uri="{FF2B5EF4-FFF2-40B4-BE49-F238E27FC236}">
-                <a16:creationId xmlns:a16="http://schemas.microsoft.com/office/drawing/2014/main" id="{768F0B1E-D6F0-28B9-A18D-828235E52A09}"/>
+                <a16:creationId xmlns:a16="http://schemas.microsoft.com/office/drawing/2014/main" id="{5BE83CCB-6024-BEBF-F90A-76ECFC1216C1}"/>
               </a:ext>
             </a:extLst>
           </p:cNvPr>
@@ -13235,7 +15899,7 @@
     </p:spTree>
     <p:extLst>
       <p:ext uri="{BB962C8B-B14F-4D97-AF65-F5344CB8AC3E}">
-        <p14:creationId xmlns:p14="http://schemas.microsoft.com/office/powerpoint/2010/main" val="3209567277"/>
+        <p14:creationId xmlns:p14="http://schemas.microsoft.com/office/powerpoint/2010/main" val="2142383859"/>
       </p:ext>
     </p:extLst>
   </p:cSld>

--- a/docs/Controller Mappings & Paths.pptx
+++ b/docs/Controller Mappings & Paths.pptx
@@ -407,7 +407,7 @@
           <a:p>
             <a:fld id="{B6000E93-69C7-4C90-931E-A5484B820028}" type="datetimeFigureOut">
               <a:rPr lang="en-US" smtClean="0"/>
-              <a:t>3/22/2026</a:t>
+              <a:t>3/23/2026</a:t>
             </a:fld>
             <a:endParaRPr lang="en-US"/>
           </a:p>
@@ -605,7 +605,7 @@
           <a:p>
             <a:fld id="{B6000E93-69C7-4C90-931E-A5484B820028}" type="datetimeFigureOut">
               <a:rPr lang="en-US" smtClean="0"/>
-              <a:t>3/22/2026</a:t>
+              <a:t>3/23/2026</a:t>
             </a:fld>
             <a:endParaRPr lang="en-US"/>
           </a:p>
@@ -813,7 +813,7 @@
           <a:p>
             <a:fld id="{B6000E93-69C7-4C90-931E-A5484B820028}" type="datetimeFigureOut">
               <a:rPr lang="en-US" smtClean="0"/>
-              <a:t>3/22/2026</a:t>
+              <a:t>3/23/2026</a:t>
             </a:fld>
             <a:endParaRPr lang="en-US"/>
           </a:p>
@@ -1011,7 +1011,7 @@
           <a:p>
             <a:fld id="{B6000E93-69C7-4C90-931E-A5484B820028}" type="datetimeFigureOut">
               <a:rPr lang="en-US" smtClean="0"/>
-              <a:t>3/22/2026</a:t>
+              <a:t>3/23/2026</a:t>
             </a:fld>
             <a:endParaRPr lang="en-US"/>
           </a:p>
@@ -1286,7 +1286,7 @@
           <a:p>
             <a:fld id="{B6000E93-69C7-4C90-931E-A5484B820028}" type="datetimeFigureOut">
               <a:rPr lang="en-US" smtClean="0"/>
-              <a:t>3/22/2026</a:t>
+              <a:t>3/23/2026</a:t>
             </a:fld>
             <a:endParaRPr lang="en-US"/>
           </a:p>
@@ -1551,7 +1551,7 @@
           <a:p>
             <a:fld id="{B6000E93-69C7-4C90-931E-A5484B820028}" type="datetimeFigureOut">
               <a:rPr lang="en-US" smtClean="0"/>
-              <a:t>3/22/2026</a:t>
+              <a:t>3/23/2026</a:t>
             </a:fld>
             <a:endParaRPr lang="en-US"/>
           </a:p>
@@ -1963,7 +1963,7 @@
           <a:p>
             <a:fld id="{B6000E93-69C7-4C90-931E-A5484B820028}" type="datetimeFigureOut">
               <a:rPr lang="en-US" smtClean="0"/>
-              <a:t>3/22/2026</a:t>
+              <a:t>3/23/2026</a:t>
             </a:fld>
             <a:endParaRPr lang="en-US"/>
           </a:p>
@@ -2104,7 +2104,7 @@
           <a:p>
             <a:fld id="{B6000E93-69C7-4C90-931E-A5484B820028}" type="datetimeFigureOut">
               <a:rPr lang="en-US" smtClean="0"/>
-              <a:t>3/22/2026</a:t>
+              <a:t>3/23/2026</a:t>
             </a:fld>
             <a:endParaRPr lang="en-US"/>
           </a:p>
@@ -2217,7 +2217,7 @@
           <a:p>
             <a:fld id="{B6000E93-69C7-4C90-931E-A5484B820028}" type="datetimeFigureOut">
               <a:rPr lang="en-US" smtClean="0"/>
-              <a:t>3/22/2026</a:t>
+              <a:t>3/23/2026</a:t>
             </a:fld>
             <a:endParaRPr lang="en-US"/>
           </a:p>
@@ -2528,7 +2528,7 @@
           <a:p>
             <a:fld id="{B6000E93-69C7-4C90-931E-A5484B820028}" type="datetimeFigureOut">
               <a:rPr lang="en-US" smtClean="0"/>
-              <a:t>3/22/2026</a:t>
+              <a:t>3/23/2026</a:t>
             </a:fld>
             <a:endParaRPr lang="en-US"/>
           </a:p>
@@ -2816,7 +2816,7 @@
           <a:p>
             <a:fld id="{B6000E93-69C7-4C90-931E-A5484B820028}" type="datetimeFigureOut">
               <a:rPr lang="en-US" smtClean="0"/>
-              <a:t>3/22/2026</a:t>
+              <a:t>3/23/2026</a:t>
             </a:fld>
             <a:endParaRPr lang="en-US"/>
           </a:p>
@@ -3057,7 +3057,7 @@
           <a:p>
             <a:fld id="{B6000E93-69C7-4C90-931E-A5484B820028}" type="datetimeFigureOut">
               <a:rPr lang="en-US" smtClean="0"/>
-              <a:t>3/22/2026</a:t>
+              <a:t>3/23/2026</a:t>
             </a:fld>
             <a:endParaRPr lang="en-US"/>
           </a:p>
@@ -10468,14 +10468,14 @@
             <a:pPr indent="285750"/>
             <a:r>
               <a:rPr lang="en-US" sz="1400" dirty="0"/>
-              <a:t>A1 – 3.4 , 5.5, 0 </a:t>
+              <a:t>A1 – 3.4 , 5.5, 90 </a:t>
             </a:r>
           </a:p>
           <a:p>
             <a:pPr indent="285750"/>
             <a:r>
               <a:rPr lang="en-US" sz="1400" dirty="0"/>
-              <a:t>N1 – 5.8, 5.5, 0</a:t>
+              <a:t>N1 – 5.8, 5.5, 30</a:t>
             </a:r>
           </a:p>
           <a:p>
@@ -10486,14 +10486,14 @@
             <a:pPr indent="285750"/>
             <a:r>
               <a:rPr lang="en-US" sz="1400" dirty="0"/>
-              <a:t>A2 – 3.4, 2.5, 0</a:t>
+              <a:t>A2 – 3.4, 2.5, -90</a:t>
             </a:r>
           </a:p>
           <a:p>
             <a:pPr indent="285750"/>
             <a:r>
               <a:rPr lang="en-US" sz="1400" dirty="0"/>
-              <a:t>N2 – 5.8, 2.5, 0</a:t>
+              <a:t>N2 – 5.8, 2.5, -30</a:t>
             </a:r>
           </a:p>
           <a:p>
@@ -11899,8 +11899,8 @@
             <a:chExt cx="1424880" cy="2295720"/>
           </a:xfrm>
         </p:grpSpPr>
-        <mc:AlternateContent xmlns:mc="http://schemas.openxmlformats.org/markup-compatibility/2006">
-          <mc:Choice xmlns:p14="http://schemas.microsoft.com/office/powerpoint/2010/main" Requires="p14">
+        <mc:AlternateContent xmlns:mc="http://schemas.openxmlformats.org/markup-compatibility/2006" xmlns:p14="http://schemas.microsoft.com/office/powerpoint/2010/main">
+          <mc:Choice Requires="p14">
             <p:contentPart p14:bwMode="auto" r:id="rId3">
               <p14:nvContentPartPr>
                 <p14:cNvPr id="42" name="Ink 41">
@@ -11919,7 +11919,7 @@
               </p14:xfrm>
             </p:contentPart>
           </mc:Choice>
-          <mc:Fallback>
+          <mc:Fallback xmlns="">
             <p:pic>
               <p:nvPicPr>
                 <p:cNvPr id="42" name="Ink 41">
@@ -11950,8 +11950,8 @@
             </p:pic>
           </mc:Fallback>
         </mc:AlternateContent>
-        <mc:AlternateContent xmlns:mc="http://schemas.openxmlformats.org/markup-compatibility/2006">
-          <mc:Choice xmlns:p14="http://schemas.microsoft.com/office/powerpoint/2010/main" Requires="p14">
+        <mc:AlternateContent xmlns:mc="http://schemas.openxmlformats.org/markup-compatibility/2006" xmlns:p14="http://schemas.microsoft.com/office/powerpoint/2010/main">
+          <mc:Choice Requires="p14">
             <p:contentPart p14:bwMode="auto" r:id="rId5">
               <p14:nvContentPartPr>
                 <p14:cNvPr id="43" name="Ink 42">
@@ -11970,7 +11970,7 @@
               </p14:xfrm>
             </p:contentPart>
           </mc:Choice>
-          <mc:Fallback>
+          <mc:Fallback xmlns="">
             <p:pic>
               <p:nvPicPr>
                 <p:cNvPr id="43" name="Ink 42">
@@ -12001,8 +12001,8 @@
             </p:pic>
           </mc:Fallback>
         </mc:AlternateContent>
-        <mc:AlternateContent xmlns:mc="http://schemas.openxmlformats.org/markup-compatibility/2006">
-          <mc:Choice xmlns:p14="http://schemas.microsoft.com/office/powerpoint/2010/main" Requires="p14">
+        <mc:AlternateContent xmlns:mc="http://schemas.openxmlformats.org/markup-compatibility/2006" xmlns:p14="http://schemas.microsoft.com/office/powerpoint/2010/main">
+          <mc:Choice Requires="p14">
             <p:contentPart p14:bwMode="auto" r:id="rId7">
               <p14:nvContentPartPr>
                 <p14:cNvPr id="45" name="Ink 44">
@@ -12021,7 +12021,7 @@
               </p14:xfrm>
             </p:contentPart>
           </mc:Choice>
-          <mc:Fallback>
+          <mc:Fallback xmlns="">
             <p:pic>
               <p:nvPicPr>
                 <p:cNvPr id="45" name="Ink 44">
@@ -12073,8 +12073,8 @@
             <a:chExt cx="1355040" cy="2065680"/>
           </a:xfrm>
         </p:grpSpPr>
-        <mc:AlternateContent xmlns:mc="http://schemas.openxmlformats.org/markup-compatibility/2006">
-          <mc:Choice xmlns:p14="http://schemas.microsoft.com/office/powerpoint/2010/main" Requires="p14">
+        <mc:AlternateContent xmlns:mc="http://schemas.openxmlformats.org/markup-compatibility/2006" xmlns:p14="http://schemas.microsoft.com/office/powerpoint/2010/main">
+          <mc:Choice Requires="p14">
             <p:contentPart p14:bwMode="auto" r:id="rId9">
               <p14:nvContentPartPr>
                 <p14:cNvPr id="51" name="Ink 50">
@@ -12093,7 +12093,7 @@
               </p14:xfrm>
             </p:contentPart>
           </mc:Choice>
-          <mc:Fallback>
+          <mc:Fallback xmlns="">
             <p:pic>
               <p:nvPicPr>
                 <p:cNvPr id="51" name="Ink 50">
@@ -12124,8 +12124,8 @@
             </p:pic>
           </mc:Fallback>
         </mc:AlternateContent>
-        <mc:AlternateContent xmlns:mc="http://schemas.openxmlformats.org/markup-compatibility/2006">
-          <mc:Choice xmlns:p14="http://schemas.microsoft.com/office/powerpoint/2010/main" Requires="p14">
+        <mc:AlternateContent xmlns:mc="http://schemas.openxmlformats.org/markup-compatibility/2006" xmlns:p14="http://schemas.microsoft.com/office/powerpoint/2010/main">
+          <mc:Choice Requires="p14">
             <p:contentPart p14:bwMode="auto" r:id="rId11">
               <p14:nvContentPartPr>
                 <p14:cNvPr id="52" name="Ink 51">
@@ -12144,7 +12144,7 @@
               </p14:xfrm>
             </p:contentPart>
           </mc:Choice>
-          <mc:Fallback>
+          <mc:Fallback xmlns="">
             <p:pic>
               <p:nvPicPr>
                 <p:cNvPr id="52" name="Ink 51">

--- a/docs/Controller Mappings & Paths.pptx
+++ b/docs/Controller Mappings & Paths.pptx
@@ -407,7 +407,7 @@
           <a:p>
             <a:fld id="{B6000E93-69C7-4C90-931E-A5484B820028}" type="datetimeFigureOut">
               <a:rPr lang="en-US" smtClean="0"/>
-              <a:t>3/23/2026</a:t>
+              <a:t>3/25/2026</a:t>
             </a:fld>
             <a:endParaRPr lang="en-US"/>
           </a:p>
@@ -605,7 +605,7 @@
           <a:p>
             <a:fld id="{B6000E93-69C7-4C90-931E-A5484B820028}" type="datetimeFigureOut">
               <a:rPr lang="en-US" smtClean="0"/>
-              <a:t>3/23/2026</a:t>
+              <a:t>3/25/2026</a:t>
             </a:fld>
             <a:endParaRPr lang="en-US"/>
           </a:p>
@@ -813,7 +813,7 @@
           <a:p>
             <a:fld id="{B6000E93-69C7-4C90-931E-A5484B820028}" type="datetimeFigureOut">
               <a:rPr lang="en-US" smtClean="0"/>
-              <a:t>3/23/2026</a:t>
+              <a:t>3/25/2026</a:t>
             </a:fld>
             <a:endParaRPr lang="en-US"/>
           </a:p>
@@ -1011,7 +1011,7 @@
           <a:p>
             <a:fld id="{B6000E93-69C7-4C90-931E-A5484B820028}" type="datetimeFigureOut">
               <a:rPr lang="en-US" smtClean="0"/>
-              <a:t>3/23/2026</a:t>
+              <a:t>3/25/2026</a:t>
             </a:fld>
             <a:endParaRPr lang="en-US"/>
           </a:p>
@@ -1286,7 +1286,7 @@
           <a:p>
             <a:fld id="{B6000E93-69C7-4C90-931E-A5484B820028}" type="datetimeFigureOut">
               <a:rPr lang="en-US" smtClean="0"/>
-              <a:t>3/23/2026</a:t>
+              <a:t>3/25/2026</a:t>
             </a:fld>
             <a:endParaRPr lang="en-US"/>
           </a:p>
@@ -1551,7 +1551,7 @@
           <a:p>
             <a:fld id="{B6000E93-69C7-4C90-931E-A5484B820028}" type="datetimeFigureOut">
               <a:rPr lang="en-US" smtClean="0"/>
-              <a:t>3/23/2026</a:t>
+              <a:t>3/25/2026</a:t>
             </a:fld>
             <a:endParaRPr lang="en-US"/>
           </a:p>
@@ -1963,7 +1963,7 @@
           <a:p>
             <a:fld id="{B6000E93-69C7-4C90-931E-A5484B820028}" type="datetimeFigureOut">
               <a:rPr lang="en-US" smtClean="0"/>
-              <a:t>3/23/2026</a:t>
+              <a:t>3/25/2026</a:t>
             </a:fld>
             <a:endParaRPr lang="en-US"/>
           </a:p>
@@ -2104,7 +2104,7 @@
           <a:p>
             <a:fld id="{B6000E93-69C7-4C90-931E-A5484B820028}" type="datetimeFigureOut">
               <a:rPr lang="en-US" smtClean="0"/>
-              <a:t>3/23/2026</a:t>
+              <a:t>3/25/2026</a:t>
             </a:fld>
             <a:endParaRPr lang="en-US"/>
           </a:p>
@@ -2217,7 +2217,7 @@
           <a:p>
             <a:fld id="{B6000E93-69C7-4C90-931E-A5484B820028}" type="datetimeFigureOut">
               <a:rPr lang="en-US" smtClean="0"/>
-              <a:t>3/23/2026</a:t>
+              <a:t>3/25/2026</a:t>
             </a:fld>
             <a:endParaRPr lang="en-US"/>
           </a:p>
@@ -2528,7 +2528,7 @@
           <a:p>
             <a:fld id="{B6000E93-69C7-4C90-931E-A5484B820028}" type="datetimeFigureOut">
               <a:rPr lang="en-US" smtClean="0"/>
-              <a:t>3/23/2026</a:t>
+              <a:t>3/25/2026</a:t>
             </a:fld>
             <a:endParaRPr lang="en-US"/>
           </a:p>
@@ -2816,7 +2816,7 @@
           <a:p>
             <a:fld id="{B6000E93-69C7-4C90-931E-A5484B820028}" type="datetimeFigureOut">
               <a:rPr lang="en-US" smtClean="0"/>
-              <a:t>3/23/2026</a:t>
+              <a:t>3/25/2026</a:t>
             </a:fld>
             <a:endParaRPr lang="en-US"/>
           </a:p>
@@ -3057,7 +3057,7 @@
           <a:p>
             <a:fld id="{B6000E93-69C7-4C90-931E-A5484B820028}" type="datetimeFigureOut">
               <a:rPr lang="en-US" smtClean="0"/>
-              <a:t>3/23/2026</a:t>
+              <a:t>3/25/2026</a:t>
             </a:fld>
             <a:endParaRPr lang="en-US"/>
           </a:p>
@@ -3523,7 +3523,7 @@
         </p:nvSpPr>
         <p:spPr>
           <a:xfrm>
-            <a:off x="9703304" y="3150217"/>
+            <a:off x="7744473" y="6423404"/>
             <a:ext cx="1595535" cy="317241"/>
           </a:xfrm>
           <a:prstGeom prst="rect">
@@ -3590,7 +3590,7 @@
         </p:nvSpPr>
         <p:spPr>
           <a:xfrm>
-            <a:off x="3307337" y="603434"/>
+            <a:off x="245146" y="987219"/>
             <a:ext cx="1926144" cy="317241"/>
           </a:xfrm>
           <a:prstGeom prst="rect">
@@ -3657,7 +3657,7 @@
         </p:nvSpPr>
         <p:spPr>
           <a:xfrm>
-            <a:off x="8664034" y="603435"/>
+            <a:off x="9139825" y="2632710"/>
             <a:ext cx="2078544" cy="317241"/>
           </a:xfrm>
           <a:prstGeom prst="rect">
@@ -3724,7 +3724,7 @@
         </p:nvSpPr>
         <p:spPr>
           <a:xfrm>
-            <a:off x="5616035" y="603436"/>
+            <a:off x="1257530" y="2743827"/>
             <a:ext cx="2078544" cy="317241"/>
           </a:xfrm>
           <a:prstGeom prst="rect">
@@ -3791,8 +3791,8 @@
         </p:nvSpPr>
         <p:spPr>
           <a:xfrm>
-            <a:off x="9756775" y="5602431"/>
-            <a:ext cx="1595535" cy="317241"/>
+            <a:off x="8735624" y="4779053"/>
+            <a:ext cx="1595535" cy="449156"/>
           </a:xfrm>
           <a:prstGeom prst="rect">
             <a:avLst/>
@@ -3839,17 +3839,33 @@
                   <a:schemeClr val="tx2"/>
                 </a:solidFill>
               </a:rPr>
-              <a:t>Rotation</a:t>
-            </a:r>
-          </a:p>
-        </p:txBody>
-      </p:sp>
-      <p:sp>
-        <p:nvSpPr>
-          <p:cNvPr id="9" name="Rectangle 8">
-            <a:extLst>
-              <a:ext uri="{FF2B5EF4-FFF2-40B4-BE49-F238E27FC236}">
-                <a16:creationId xmlns:a16="http://schemas.microsoft.com/office/drawing/2014/main" id="{68BB9A10-267B-FE78-C476-8D2507C5A16A}"/>
+              <a:t>Rotation </a:t>
+            </a:r>
+          </a:p>
+          <a:p>
+            <a:pPr algn="ctr"/>
+            <a:r>
+              <a:rPr lang="en-US" sz="1100" dirty="0">
+                <a:solidFill>
+                  <a:schemeClr val="tx2"/>
+                </a:solidFill>
+              </a:rPr>
+              <a:t>(L-CCW, R-CW)</a:t>
+            </a:r>
+            <a:endParaRPr lang="en-US" dirty="0">
+              <a:solidFill>
+                <a:schemeClr val="tx2"/>
+              </a:solidFill>
+            </a:endParaRPr>
+          </a:p>
+        </p:txBody>
+      </p:sp>
+      <p:sp>
+        <p:nvSpPr>
+          <p:cNvPr id="10" name="Rectangle 9">
+            <a:extLst>
+              <a:ext uri="{FF2B5EF4-FFF2-40B4-BE49-F238E27FC236}">
+                <a16:creationId xmlns:a16="http://schemas.microsoft.com/office/drawing/2014/main" id="{55110AC5-3805-9140-9F6E-0AD3E1D52544}"/>
               </a:ext>
             </a:extLst>
           </p:cNvPr>
@@ -3858,8 +3874,8 @@
         </p:nvSpPr>
         <p:spPr>
           <a:xfrm>
-            <a:off x="332791" y="4152149"/>
-            <a:ext cx="1595535" cy="317241"/>
+            <a:off x="363632" y="1405289"/>
+            <a:ext cx="1807658" cy="317241"/>
           </a:xfrm>
           <a:prstGeom prst="rect">
             <a:avLst/>
@@ -3901,22 +3917,22 @@
           <a:p>
             <a:pPr algn="ctr"/>
             <a:r>
-              <a:rPr lang="en-US" dirty="0">
+              <a:rPr lang="en-US" sz="1600" dirty="0">
                 <a:solidFill>
                   <a:schemeClr val="tx2"/>
                 </a:solidFill>
               </a:rPr>
-              <a:t>Field Position</a:t>
-            </a:r>
-          </a:p>
-        </p:txBody>
-      </p:sp>
-      <p:sp>
-        <p:nvSpPr>
-          <p:cNvPr id="10" name="Rectangle 9">
-            <a:extLst>
-              <a:ext uri="{FF2B5EF4-FFF2-40B4-BE49-F238E27FC236}">
-                <a16:creationId xmlns:a16="http://schemas.microsoft.com/office/drawing/2014/main" id="{55110AC5-3805-9140-9F6E-0AD3E1D52544}"/>
+              <a:t>Approach Outpost</a:t>
+            </a:r>
+          </a:p>
+        </p:txBody>
+      </p:sp>
+      <p:sp>
+        <p:nvSpPr>
+          <p:cNvPr id="12" name="Rectangle 11">
+            <a:extLst>
+              <a:ext uri="{FF2B5EF4-FFF2-40B4-BE49-F238E27FC236}">
+                <a16:creationId xmlns:a16="http://schemas.microsoft.com/office/drawing/2014/main" id="{7E8685A9-97F2-E16B-0A3B-1D1D73FA3A0C}"/>
               </a:ext>
             </a:extLst>
           </p:cNvPr>
@@ -3925,8 +3941,8 @@
         </p:nvSpPr>
         <p:spPr>
           <a:xfrm>
-            <a:off x="3425823" y="1021504"/>
-            <a:ext cx="1807658" cy="317241"/>
+            <a:off x="2094029" y="5745829"/>
+            <a:ext cx="1595535" cy="317241"/>
           </a:xfrm>
           <a:prstGeom prst="rect">
             <a:avLst/>
@@ -3968,22 +3984,22 @@
           <a:p>
             <a:pPr algn="ctr"/>
             <a:r>
-              <a:rPr lang="en-US" sz="1600" dirty="0">
+              <a:rPr lang="en-US" dirty="0">
                 <a:solidFill>
                   <a:schemeClr val="tx2"/>
                 </a:solidFill>
               </a:rPr>
-              <a:t>Approach Outpost</a:t>
-            </a:r>
-          </a:p>
-        </p:txBody>
-      </p:sp>
-      <p:sp>
-        <p:nvSpPr>
-          <p:cNvPr id="11" name="Rectangle 10">
-            <a:extLst>
-              <a:ext uri="{FF2B5EF4-FFF2-40B4-BE49-F238E27FC236}">
-                <a16:creationId xmlns:a16="http://schemas.microsoft.com/office/drawing/2014/main" id="{9A026A4D-7363-5130-A509-061B8B56255E}"/>
+              <a:t>Goto Ladder</a:t>
+            </a:r>
+          </a:p>
+        </p:txBody>
+      </p:sp>
+      <p:sp>
+        <p:nvSpPr>
+          <p:cNvPr id="14" name="Rectangle 13">
+            <a:extLst>
+              <a:ext uri="{FF2B5EF4-FFF2-40B4-BE49-F238E27FC236}">
+                <a16:creationId xmlns:a16="http://schemas.microsoft.com/office/drawing/2014/main" id="{53A5126C-3CC9-34EA-C4A7-B54817482BDB}"/>
               </a:ext>
             </a:extLst>
           </p:cNvPr>
@@ -3992,7 +4008,7 @@
         </p:nvSpPr>
         <p:spPr>
           <a:xfrm>
-            <a:off x="4635229" y="1477373"/>
+            <a:off x="8869311" y="4079189"/>
             <a:ext cx="1595535" cy="317241"/>
           </a:xfrm>
           <a:prstGeom prst="rect">
@@ -4040,17 +4056,17 @@
                   <a:schemeClr val="tx2"/>
                 </a:solidFill>
               </a:rPr>
-              <a:t>Empty Fuel</a:t>
-            </a:r>
-          </a:p>
-        </p:txBody>
-      </p:sp>
-      <p:sp>
-        <p:nvSpPr>
-          <p:cNvPr id="12" name="Rectangle 11">
-            <a:extLst>
-              <a:ext uri="{FF2B5EF4-FFF2-40B4-BE49-F238E27FC236}">
-                <a16:creationId xmlns:a16="http://schemas.microsoft.com/office/drawing/2014/main" id="{7E8685A9-97F2-E16B-0A3B-1D1D73FA3A0C}"/>
+              <a:t>Brake</a:t>
+            </a:r>
+          </a:p>
+        </p:txBody>
+      </p:sp>
+      <p:sp>
+        <p:nvSpPr>
+          <p:cNvPr id="15" name="Rectangle 14">
+            <a:extLst>
+              <a:ext uri="{FF2B5EF4-FFF2-40B4-BE49-F238E27FC236}">
+                <a16:creationId xmlns:a16="http://schemas.microsoft.com/office/drawing/2014/main" id="{41C4C912-598C-BBCF-680E-57B389A7F861}"/>
               </a:ext>
             </a:extLst>
           </p:cNvPr>
@@ -4059,7 +4075,7 @@
         </p:nvSpPr>
         <p:spPr>
           <a:xfrm>
-            <a:off x="6663158" y="1139840"/>
+            <a:off x="169277" y="6287530"/>
             <a:ext cx="1595535" cy="317241"/>
           </a:xfrm>
           <a:prstGeom prst="rect">
@@ -4107,17 +4123,17 @@
                   <a:schemeClr val="tx2"/>
                 </a:solidFill>
               </a:rPr>
-              <a:t>Goto Climb</a:t>
-            </a:r>
-          </a:p>
-        </p:txBody>
-      </p:sp>
-      <p:sp>
-        <p:nvSpPr>
-          <p:cNvPr id="13" name="Rectangle 12">
-            <a:extLst>
-              <a:ext uri="{FF2B5EF4-FFF2-40B4-BE49-F238E27FC236}">
-                <a16:creationId xmlns:a16="http://schemas.microsoft.com/office/drawing/2014/main" id="{D73A1792-0975-06F2-DCDC-60A6DB1EF1B9}"/>
+              <a:t>Auto Climb</a:t>
+            </a:r>
+          </a:p>
+        </p:txBody>
+      </p:sp>
+      <p:sp>
+        <p:nvSpPr>
+          <p:cNvPr id="18" name="Rectangle 17">
+            <a:extLst>
+              <a:ext uri="{FF2B5EF4-FFF2-40B4-BE49-F238E27FC236}">
+                <a16:creationId xmlns:a16="http://schemas.microsoft.com/office/drawing/2014/main" id="{81898AE3-D9F1-A18D-B71E-C2D427EB2E75}"/>
               </a:ext>
             </a:extLst>
           </p:cNvPr>
@@ -4126,7 +4142,7 @@
         </p:nvSpPr>
         <p:spPr>
           <a:xfrm>
-            <a:off x="9703305" y="2348722"/>
+            <a:off x="193593" y="5713018"/>
             <a:ext cx="1595535" cy="317241"/>
           </a:xfrm>
           <a:prstGeom prst="rect">
@@ -4174,17 +4190,17 @@
                   <a:schemeClr val="tx2"/>
                 </a:solidFill>
               </a:rPr>
-              <a:t>Aim &amp; Shoot</a:t>
-            </a:r>
-          </a:p>
-        </p:txBody>
-      </p:sp>
-      <p:sp>
-        <p:nvSpPr>
-          <p:cNvPr id="14" name="Rectangle 13">
-            <a:extLst>
-              <a:ext uri="{FF2B5EF4-FFF2-40B4-BE49-F238E27FC236}">
-                <a16:creationId xmlns:a16="http://schemas.microsoft.com/office/drawing/2014/main" id="{53A5126C-3CC9-34EA-C4A7-B54817482BDB}"/>
+              <a:t>Get Off Fuel</a:t>
+            </a:r>
+          </a:p>
+        </p:txBody>
+      </p:sp>
+      <p:sp>
+        <p:nvSpPr>
+          <p:cNvPr id="19" name="Rectangle 18">
+            <a:extLst>
+              <a:ext uri="{FF2B5EF4-FFF2-40B4-BE49-F238E27FC236}">
+                <a16:creationId xmlns:a16="http://schemas.microsoft.com/office/drawing/2014/main" id="{B58506C8-F57E-39F8-A34E-828E8C47B467}"/>
               </a:ext>
             </a:extLst>
           </p:cNvPr>
@@ -4193,7 +4209,7 @@
         </p:nvSpPr>
         <p:spPr>
           <a:xfrm>
-            <a:off x="9703306" y="1477374"/>
+            <a:off x="9855703" y="444813"/>
             <a:ext cx="1595535" cy="317241"/>
           </a:xfrm>
           <a:prstGeom prst="rect">
@@ -4241,17 +4257,17 @@
                   <a:schemeClr val="tx2"/>
                 </a:solidFill>
               </a:rPr>
-              <a:t>Brake</a:t>
-            </a:r>
-          </a:p>
-        </p:txBody>
-      </p:sp>
-      <p:sp>
-        <p:nvSpPr>
-          <p:cNvPr id="15" name="Rectangle 14">
-            <a:extLst>
-              <a:ext uri="{FF2B5EF4-FFF2-40B4-BE49-F238E27FC236}">
-                <a16:creationId xmlns:a16="http://schemas.microsoft.com/office/drawing/2014/main" id="{41C4C912-598C-BBCF-680E-57B389A7F861}"/>
+              <a:t>Reset Position</a:t>
+            </a:r>
+          </a:p>
+        </p:txBody>
+      </p:sp>
+      <p:sp>
+        <p:nvSpPr>
+          <p:cNvPr id="26" name="Rectangle 25">
+            <a:extLst>
+              <a:ext uri="{FF2B5EF4-FFF2-40B4-BE49-F238E27FC236}">
+                <a16:creationId xmlns:a16="http://schemas.microsoft.com/office/drawing/2014/main" id="{34FDAC78-85A1-8FDA-45E0-4D17AD3E3FE7}"/>
               </a:ext>
             </a:extLst>
           </p:cNvPr>
@@ -4260,7 +4276,7 @@
         </p:nvSpPr>
         <p:spPr>
           <a:xfrm>
-            <a:off x="1830288" y="3676252"/>
+            <a:off x="3747765" y="1051247"/>
             <a:ext cx="1595535" cy="317241"/>
           </a:xfrm>
           <a:prstGeom prst="rect">
@@ -4308,17 +4324,17 @@
                   <a:schemeClr val="tx2"/>
                 </a:solidFill>
               </a:rPr>
-              <a:t>Auto Climb</a:t>
-            </a:r>
-          </a:p>
-        </p:txBody>
-      </p:sp>
-      <p:sp>
-        <p:nvSpPr>
-          <p:cNvPr id="16" name="Rectangle 15">
-            <a:extLst>
-              <a:ext uri="{FF2B5EF4-FFF2-40B4-BE49-F238E27FC236}">
-                <a16:creationId xmlns:a16="http://schemas.microsoft.com/office/drawing/2014/main" id="{1A62A4B6-A9C2-7AE0-777A-C5D06132EC4B}"/>
+              <a:t>Field-Relative</a:t>
+            </a:r>
+          </a:p>
+        </p:txBody>
+      </p:sp>
+      <p:sp>
+        <p:nvSpPr>
+          <p:cNvPr id="27" name="Rectangle 26">
+            <a:extLst>
+              <a:ext uri="{FF2B5EF4-FFF2-40B4-BE49-F238E27FC236}">
+                <a16:creationId xmlns:a16="http://schemas.microsoft.com/office/drawing/2014/main" id="{8ED871D7-CC1B-4507-C256-0656B10AA032}"/>
               </a:ext>
             </a:extLst>
           </p:cNvPr>
@@ -4327,7 +4343,7 @@
         </p:nvSpPr>
         <p:spPr>
           <a:xfrm>
-            <a:off x="2134344" y="2991597"/>
+            <a:off x="9756775" y="6030259"/>
             <a:ext cx="1595535" cy="317241"/>
           </a:xfrm>
           <a:prstGeom prst="rect">
@@ -4369,23 +4385,20 @@
           <a:lstStyle/>
           <a:p>
             <a:pPr algn="ctr"/>
-            <a:r>
-              <a:rPr lang="en-US" dirty="0">
-                <a:solidFill>
-                  <a:schemeClr val="tx2"/>
-                </a:solidFill>
-              </a:rPr>
-              <a:t>Override</a:t>
-            </a:r>
-          </a:p>
-        </p:txBody>
-      </p:sp>
-      <p:sp>
-        <p:nvSpPr>
-          <p:cNvPr id="17" name="Rectangle 16">
-            <a:extLst>
-              <a:ext uri="{FF2B5EF4-FFF2-40B4-BE49-F238E27FC236}">
-                <a16:creationId xmlns:a16="http://schemas.microsoft.com/office/drawing/2014/main" id="{D37E4E06-F17E-D198-EA49-12FD3963EB64}"/>
+            <a:endParaRPr lang="en-US" dirty="0">
+              <a:solidFill>
+                <a:schemeClr val="tx2"/>
+              </a:solidFill>
+            </a:endParaRPr>
+          </a:p>
+        </p:txBody>
+      </p:sp>
+      <p:sp>
+        <p:nvSpPr>
+          <p:cNvPr id="28" name="Rectangle 27">
+            <a:extLst>
+              <a:ext uri="{FF2B5EF4-FFF2-40B4-BE49-F238E27FC236}">
+                <a16:creationId xmlns:a16="http://schemas.microsoft.com/office/drawing/2014/main" id="{4995BC81-9903-6C07-5912-D3957C575183}"/>
               </a:ext>
             </a:extLst>
           </p:cNvPr>
@@ -4394,7 +4407,7 @@
         </p:nvSpPr>
         <p:spPr>
           <a:xfrm>
-            <a:off x="5432996" y="2738408"/>
+            <a:off x="9909175" y="6182659"/>
             <a:ext cx="1595535" cy="317241"/>
           </a:xfrm>
           <a:prstGeom prst="rect">
@@ -4436,23 +4449,20 @@
           <a:lstStyle/>
           <a:p>
             <a:pPr algn="ctr"/>
-            <a:r>
-              <a:rPr lang="en-US" dirty="0">
-                <a:solidFill>
-                  <a:schemeClr val="tx2"/>
-                </a:solidFill>
-              </a:rPr>
-              <a:t>Intake Fuel</a:t>
-            </a:r>
-          </a:p>
-        </p:txBody>
-      </p:sp>
-      <p:sp>
-        <p:nvSpPr>
-          <p:cNvPr id="18" name="Rectangle 17">
-            <a:extLst>
-              <a:ext uri="{FF2B5EF4-FFF2-40B4-BE49-F238E27FC236}">
-                <a16:creationId xmlns:a16="http://schemas.microsoft.com/office/drawing/2014/main" id="{81898AE3-D9F1-A18D-B71E-C2D427EB2E75}"/>
+            <a:endParaRPr lang="en-US" dirty="0">
+              <a:solidFill>
+                <a:schemeClr val="tx2"/>
+              </a:solidFill>
+            </a:endParaRPr>
+          </a:p>
+        </p:txBody>
+      </p:sp>
+      <p:sp>
+        <p:nvSpPr>
+          <p:cNvPr id="29" name="Rectangle 28">
+            <a:extLst>
+              <a:ext uri="{FF2B5EF4-FFF2-40B4-BE49-F238E27FC236}">
+                <a16:creationId xmlns:a16="http://schemas.microsoft.com/office/drawing/2014/main" id="{3D7A8DB9-C713-AA15-2812-CCC07794A7F1}"/>
               </a:ext>
             </a:extLst>
           </p:cNvPr>
@@ -4461,7 +4471,7 @@
         </p:nvSpPr>
         <p:spPr>
           <a:xfrm>
-            <a:off x="3837461" y="2250483"/>
+            <a:off x="10061575" y="6335059"/>
             <a:ext cx="1595535" cy="317241"/>
           </a:xfrm>
           <a:prstGeom prst="rect">
@@ -4503,23 +4513,20 @@
           <a:lstStyle/>
           <a:p>
             <a:pPr algn="ctr"/>
-            <a:r>
-              <a:rPr lang="en-US" dirty="0">
-                <a:solidFill>
-                  <a:schemeClr val="tx2"/>
-                </a:solidFill>
-              </a:rPr>
-              <a:t>Get Off Fuel</a:t>
-            </a:r>
-          </a:p>
-        </p:txBody>
-      </p:sp>
-      <p:sp>
-        <p:nvSpPr>
-          <p:cNvPr id="19" name="Rectangle 18">
-            <a:extLst>
-              <a:ext uri="{FF2B5EF4-FFF2-40B4-BE49-F238E27FC236}">
-                <a16:creationId xmlns:a16="http://schemas.microsoft.com/office/drawing/2014/main" id="{B58506C8-F57E-39F8-A34E-828E8C47B467}"/>
+            <a:endParaRPr lang="en-US" dirty="0">
+              <a:solidFill>
+                <a:schemeClr val="tx2"/>
+              </a:solidFill>
+            </a:endParaRPr>
+          </a:p>
+        </p:txBody>
+      </p:sp>
+      <p:sp>
+        <p:nvSpPr>
+          <p:cNvPr id="30" name="Rectangle 29">
+            <a:extLst>
+              <a:ext uri="{FF2B5EF4-FFF2-40B4-BE49-F238E27FC236}">
+                <a16:creationId xmlns:a16="http://schemas.microsoft.com/office/drawing/2014/main" id="{0F02DB40-516B-747B-A443-F6075F2E3035}"/>
               </a:ext>
             </a:extLst>
           </p:cNvPr>
@@ -4528,7 +4535,7 @@
         </p:nvSpPr>
         <p:spPr>
           <a:xfrm>
-            <a:off x="6468827" y="2038210"/>
+            <a:off x="1740539" y="3300259"/>
             <a:ext cx="1595535" cy="317241"/>
           </a:xfrm>
           <a:prstGeom prst="rect">
@@ -4576,663 +4583,8 @@
                   <a:schemeClr val="tx2"/>
                 </a:solidFill>
               </a:rPr>
-              <a:t>Reset Position</a:t>
-            </a:r>
-          </a:p>
-        </p:txBody>
-      </p:sp>
-      <p:sp>
-        <p:nvSpPr>
-          <p:cNvPr id="20" name="Rectangle 19">
-            <a:extLst>
-              <a:ext uri="{FF2B5EF4-FFF2-40B4-BE49-F238E27FC236}">
-                <a16:creationId xmlns:a16="http://schemas.microsoft.com/office/drawing/2014/main" id="{A0F0E149-60C3-3DE4-8C7B-AC39623BE23D}"/>
-              </a:ext>
-            </a:extLst>
-          </p:cNvPr>
-          <p:cNvSpPr/>
-          <p:nvPr/>
-        </p:nvSpPr>
-        <p:spPr>
-          <a:xfrm>
-            <a:off x="2093066" y="2525630"/>
-            <a:ext cx="1595535" cy="317241"/>
-          </a:xfrm>
-          <a:prstGeom prst="rect">
-            <a:avLst/>
-          </a:prstGeom>
-          <a:solidFill>
-            <a:schemeClr val="accent6">
-              <a:lumMod val="20000"/>
-              <a:lumOff val="80000"/>
-            </a:schemeClr>
-          </a:solidFill>
-          <a:ln>
-            <a:solidFill>
-              <a:schemeClr val="accent2">
-                <a:lumMod val="20000"/>
-                <a:lumOff val="80000"/>
-              </a:schemeClr>
-            </a:solidFill>
-          </a:ln>
-        </p:spPr>
-        <p:style>
-          <a:lnRef idx="2">
-            <a:schemeClr val="accent1">
-              <a:shade val="15000"/>
-            </a:schemeClr>
-          </a:lnRef>
-          <a:fillRef idx="1">
-            <a:schemeClr val="accent1"/>
-          </a:fillRef>
-          <a:effectRef idx="0">
-            <a:schemeClr val="accent1"/>
-          </a:effectRef>
-          <a:fontRef idx="minor">
-            <a:schemeClr val="lt1"/>
-          </a:fontRef>
-        </p:style>
-        <p:txBody>
-          <a:bodyPr rtlCol="0" anchor="ctr"/>
-          <a:lstStyle/>
-          <a:p>
-            <a:pPr algn="ctr"/>
-            <a:r>
-              <a:rPr lang="en-US" dirty="0">
-                <a:solidFill>
-                  <a:schemeClr val="tx2"/>
-                </a:solidFill>
-              </a:rPr>
-              <a:t>Just Shoot</a:t>
-            </a:r>
-          </a:p>
-        </p:txBody>
-      </p:sp>
-      <p:sp>
-        <p:nvSpPr>
-          <p:cNvPr id="21" name="Rectangle 20">
-            <a:extLst>
-              <a:ext uri="{FF2B5EF4-FFF2-40B4-BE49-F238E27FC236}">
-                <a16:creationId xmlns:a16="http://schemas.microsoft.com/office/drawing/2014/main" id="{9E799CFC-74FE-CB6D-7889-D1DA0A1C77BD}"/>
-              </a:ext>
-            </a:extLst>
-          </p:cNvPr>
-          <p:cNvSpPr/>
-          <p:nvPr/>
-        </p:nvSpPr>
-        <p:spPr>
-          <a:xfrm>
-            <a:off x="1316879" y="4668219"/>
-            <a:ext cx="1933508" cy="317241"/>
-          </a:xfrm>
-          <a:prstGeom prst="rect">
-            <a:avLst/>
-          </a:prstGeom>
-          <a:solidFill>
-            <a:schemeClr val="accent6">
-              <a:lumMod val="20000"/>
-              <a:lumOff val="80000"/>
-            </a:schemeClr>
-          </a:solidFill>
-          <a:ln>
-            <a:solidFill>
-              <a:schemeClr val="accent2">
-                <a:lumMod val="20000"/>
-                <a:lumOff val="80000"/>
-              </a:schemeClr>
-            </a:solidFill>
-          </a:ln>
-        </p:spPr>
-        <p:style>
-          <a:lnRef idx="2">
-            <a:schemeClr val="accent1">
-              <a:shade val="15000"/>
-            </a:schemeClr>
-          </a:lnRef>
-          <a:fillRef idx="1">
-            <a:schemeClr val="accent1"/>
-          </a:fillRef>
-          <a:effectRef idx="0">
-            <a:schemeClr val="accent1"/>
-          </a:effectRef>
-          <a:fontRef idx="minor">
-            <a:schemeClr val="lt1"/>
-          </a:fontRef>
-        </p:style>
-        <p:txBody>
-          <a:bodyPr rtlCol="0" anchor="ctr"/>
-          <a:lstStyle/>
-          <a:p>
-            <a:pPr algn="ctr"/>
-            <a:r>
-              <a:rPr lang="en-US" dirty="0">
-                <a:solidFill>
-                  <a:schemeClr val="tx2"/>
-                </a:solidFill>
-              </a:rPr>
-              <a:t>Straif Hub R -&gt; L</a:t>
-            </a:r>
-          </a:p>
-        </p:txBody>
-      </p:sp>
-      <p:sp>
-        <p:nvSpPr>
-          <p:cNvPr id="22" name="Rectangle 21">
-            <a:extLst>
-              <a:ext uri="{FF2B5EF4-FFF2-40B4-BE49-F238E27FC236}">
-                <a16:creationId xmlns:a16="http://schemas.microsoft.com/office/drawing/2014/main" id="{DCDB3440-602E-C7AF-02A4-01662A421BA1}"/>
-              </a:ext>
-            </a:extLst>
-          </p:cNvPr>
-          <p:cNvSpPr/>
-          <p:nvPr/>
-        </p:nvSpPr>
-        <p:spPr>
-          <a:xfrm>
-            <a:off x="738356" y="5228226"/>
-            <a:ext cx="1933508" cy="317241"/>
-          </a:xfrm>
-          <a:prstGeom prst="rect">
-            <a:avLst/>
-          </a:prstGeom>
-          <a:solidFill>
-            <a:schemeClr val="accent6">
-              <a:lumMod val="20000"/>
-              <a:lumOff val="80000"/>
-            </a:schemeClr>
-          </a:solidFill>
-          <a:ln>
-            <a:solidFill>
-              <a:schemeClr val="accent2">
-                <a:lumMod val="20000"/>
-                <a:lumOff val="80000"/>
-              </a:schemeClr>
-            </a:solidFill>
-          </a:ln>
-        </p:spPr>
-        <p:style>
-          <a:lnRef idx="2">
-            <a:schemeClr val="accent1">
-              <a:shade val="15000"/>
-            </a:schemeClr>
-          </a:lnRef>
-          <a:fillRef idx="1">
-            <a:schemeClr val="accent1"/>
-          </a:fillRef>
-          <a:effectRef idx="0">
-            <a:schemeClr val="accent1"/>
-          </a:effectRef>
-          <a:fontRef idx="minor">
-            <a:schemeClr val="lt1"/>
-          </a:fontRef>
-        </p:style>
-        <p:txBody>
-          <a:bodyPr rtlCol="0" anchor="ctr"/>
-          <a:lstStyle/>
-          <a:p>
-            <a:pPr algn="ctr"/>
-            <a:r>
-              <a:rPr lang="en-US" dirty="0">
-                <a:solidFill>
-                  <a:schemeClr val="tx2"/>
-                </a:solidFill>
-              </a:rPr>
-              <a:t>Straif Hub L-&gt;R</a:t>
-            </a:r>
-          </a:p>
-        </p:txBody>
-      </p:sp>
-      <p:sp>
-        <p:nvSpPr>
-          <p:cNvPr id="24" name="Rectangle 23">
-            <a:extLst>
-              <a:ext uri="{FF2B5EF4-FFF2-40B4-BE49-F238E27FC236}">
-                <a16:creationId xmlns:a16="http://schemas.microsoft.com/office/drawing/2014/main" id="{039706C2-21F2-96CA-4FF0-6CDC8E02EAF1}"/>
-              </a:ext>
-            </a:extLst>
-          </p:cNvPr>
-          <p:cNvSpPr/>
-          <p:nvPr/>
-        </p:nvSpPr>
-        <p:spPr>
-          <a:xfrm>
-            <a:off x="395447" y="1477373"/>
-            <a:ext cx="1776927" cy="317241"/>
-          </a:xfrm>
-          <a:prstGeom prst="rect">
-            <a:avLst/>
-          </a:prstGeom>
-          <a:solidFill>
-            <a:schemeClr val="accent6">
-              <a:lumMod val="20000"/>
-              <a:lumOff val="80000"/>
-            </a:schemeClr>
-          </a:solidFill>
-          <a:ln>
-            <a:solidFill>
-              <a:schemeClr val="accent2">
-                <a:lumMod val="20000"/>
-                <a:lumOff val="80000"/>
-              </a:schemeClr>
-            </a:solidFill>
-          </a:ln>
-        </p:spPr>
-        <p:style>
-          <a:lnRef idx="2">
-            <a:schemeClr val="accent1">
-              <a:shade val="15000"/>
-            </a:schemeClr>
-          </a:lnRef>
-          <a:fillRef idx="1">
-            <a:schemeClr val="accent1"/>
-          </a:fillRef>
-          <a:effectRef idx="0">
-            <a:schemeClr val="accent1"/>
-          </a:effectRef>
-          <a:fontRef idx="minor">
-            <a:schemeClr val="lt1"/>
-          </a:fontRef>
-        </p:style>
-        <p:txBody>
-          <a:bodyPr rtlCol="0" anchor="ctr"/>
-          <a:lstStyle/>
-          <a:p>
-            <a:pPr algn="ctr"/>
-            <a:r>
-              <a:rPr lang="en-US" dirty="0">
-                <a:solidFill>
-                  <a:schemeClr val="tx2"/>
-                </a:solidFill>
-              </a:rPr>
-              <a:t>Retract Climber</a:t>
-            </a:r>
-          </a:p>
-        </p:txBody>
-      </p:sp>
-      <p:sp>
-        <p:nvSpPr>
-          <p:cNvPr id="25" name="Rectangle 24">
-            <a:extLst>
-              <a:ext uri="{FF2B5EF4-FFF2-40B4-BE49-F238E27FC236}">
-                <a16:creationId xmlns:a16="http://schemas.microsoft.com/office/drawing/2014/main" id="{671EFF2D-521C-B3E4-0E30-0791FD9741D6}"/>
-              </a:ext>
-            </a:extLst>
-          </p:cNvPr>
-          <p:cNvSpPr/>
-          <p:nvPr/>
-        </p:nvSpPr>
-        <p:spPr>
-          <a:xfrm>
-            <a:off x="393959" y="1934506"/>
-            <a:ext cx="1776927" cy="317241"/>
-          </a:xfrm>
-          <a:prstGeom prst="rect">
-            <a:avLst/>
-          </a:prstGeom>
-          <a:solidFill>
-            <a:schemeClr val="accent6">
-              <a:lumMod val="20000"/>
-              <a:lumOff val="80000"/>
-            </a:schemeClr>
-          </a:solidFill>
-          <a:ln>
-            <a:solidFill>
-              <a:schemeClr val="accent2">
-                <a:lumMod val="20000"/>
-                <a:lumOff val="80000"/>
-              </a:schemeClr>
-            </a:solidFill>
-          </a:ln>
-        </p:spPr>
-        <p:style>
-          <a:lnRef idx="2">
-            <a:schemeClr val="accent1">
-              <a:shade val="15000"/>
-            </a:schemeClr>
-          </a:lnRef>
-          <a:fillRef idx="1">
-            <a:schemeClr val="accent1"/>
-          </a:fillRef>
-          <a:effectRef idx="0">
-            <a:schemeClr val="accent1"/>
-          </a:effectRef>
-          <a:fontRef idx="minor">
-            <a:schemeClr val="lt1"/>
-          </a:fontRef>
-        </p:style>
-        <p:txBody>
-          <a:bodyPr rtlCol="0" anchor="ctr"/>
-          <a:lstStyle/>
-          <a:p>
-            <a:pPr algn="ctr"/>
-            <a:r>
-              <a:rPr lang="en-US" dirty="0">
-                <a:solidFill>
-                  <a:schemeClr val="tx2"/>
-                </a:solidFill>
-              </a:rPr>
-              <a:t>Extend Climber</a:t>
-            </a:r>
-          </a:p>
-        </p:txBody>
-      </p:sp>
-      <p:sp>
-        <p:nvSpPr>
-          <p:cNvPr id="26" name="Rectangle 25">
-            <a:extLst>
-              <a:ext uri="{FF2B5EF4-FFF2-40B4-BE49-F238E27FC236}">
-                <a16:creationId xmlns:a16="http://schemas.microsoft.com/office/drawing/2014/main" id="{34FDAC78-85A1-8FDA-45E0-4D17AD3E3FE7}"/>
-              </a:ext>
-            </a:extLst>
-          </p:cNvPr>
-          <p:cNvSpPr/>
-          <p:nvPr/>
-        </p:nvSpPr>
-        <p:spPr>
-          <a:xfrm>
-            <a:off x="8905536" y="3874797"/>
-            <a:ext cx="1595535" cy="317241"/>
-          </a:xfrm>
-          <a:prstGeom prst="rect">
-            <a:avLst/>
-          </a:prstGeom>
-          <a:solidFill>
-            <a:schemeClr val="accent6">
-              <a:lumMod val="20000"/>
-              <a:lumOff val="80000"/>
-            </a:schemeClr>
-          </a:solidFill>
-          <a:ln>
-            <a:solidFill>
-              <a:schemeClr val="accent2">
-                <a:lumMod val="20000"/>
-                <a:lumOff val="80000"/>
-              </a:schemeClr>
-            </a:solidFill>
-          </a:ln>
-        </p:spPr>
-        <p:style>
-          <a:lnRef idx="2">
-            <a:schemeClr val="accent1">
-              <a:shade val="15000"/>
-            </a:schemeClr>
-          </a:lnRef>
-          <a:fillRef idx="1">
-            <a:schemeClr val="accent1"/>
-          </a:fillRef>
-          <a:effectRef idx="0">
-            <a:schemeClr val="accent1"/>
-          </a:effectRef>
-          <a:fontRef idx="minor">
-            <a:schemeClr val="lt1"/>
-          </a:fontRef>
-        </p:style>
-        <p:txBody>
-          <a:bodyPr rtlCol="0" anchor="ctr"/>
-          <a:lstStyle/>
-          <a:p>
-            <a:pPr algn="ctr"/>
-            <a:endParaRPr lang="en-US" dirty="0">
-              <a:solidFill>
-                <a:schemeClr val="tx2"/>
-              </a:solidFill>
-            </a:endParaRPr>
-          </a:p>
-        </p:txBody>
-      </p:sp>
-      <p:sp>
-        <p:nvSpPr>
-          <p:cNvPr id="27" name="Rectangle 26">
-            <a:extLst>
-              <a:ext uri="{FF2B5EF4-FFF2-40B4-BE49-F238E27FC236}">
-                <a16:creationId xmlns:a16="http://schemas.microsoft.com/office/drawing/2014/main" id="{8ED871D7-CC1B-4507-C256-0656B10AA032}"/>
-              </a:ext>
-            </a:extLst>
-          </p:cNvPr>
-          <p:cNvSpPr/>
-          <p:nvPr/>
-        </p:nvSpPr>
-        <p:spPr>
-          <a:xfrm>
-            <a:off x="9057936" y="4027197"/>
-            <a:ext cx="1595535" cy="317241"/>
-          </a:xfrm>
-          <a:prstGeom prst="rect">
-            <a:avLst/>
-          </a:prstGeom>
-          <a:solidFill>
-            <a:schemeClr val="accent6">
-              <a:lumMod val="20000"/>
-              <a:lumOff val="80000"/>
-            </a:schemeClr>
-          </a:solidFill>
-          <a:ln>
-            <a:solidFill>
-              <a:schemeClr val="accent2">
-                <a:lumMod val="20000"/>
-                <a:lumOff val="80000"/>
-              </a:schemeClr>
-            </a:solidFill>
-          </a:ln>
-        </p:spPr>
-        <p:style>
-          <a:lnRef idx="2">
-            <a:schemeClr val="accent1">
-              <a:shade val="15000"/>
-            </a:schemeClr>
-          </a:lnRef>
-          <a:fillRef idx="1">
-            <a:schemeClr val="accent1"/>
-          </a:fillRef>
-          <a:effectRef idx="0">
-            <a:schemeClr val="accent1"/>
-          </a:effectRef>
-          <a:fontRef idx="minor">
-            <a:schemeClr val="lt1"/>
-          </a:fontRef>
-        </p:style>
-        <p:txBody>
-          <a:bodyPr rtlCol="0" anchor="ctr"/>
-          <a:lstStyle/>
-          <a:p>
-            <a:pPr algn="ctr"/>
-            <a:endParaRPr lang="en-US" dirty="0">
-              <a:solidFill>
-                <a:schemeClr val="tx2"/>
-              </a:solidFill>
-            </a:endParaRPr>
-          </a:p>
-        </p:txBody>
-      </p:sp>
-      <p:sp>
-        <p:nvSpPr>
-          <p:cNvPr id="28" name="Rectangle 27">
-            <a:extLst>
-              <a:ext uri="{FF2B5EF4-FFF2-40B4-BE49-F238E27FC236}">
-                <a16:creationId xmlns:a16="http://schemas.microsoft.com/office/drawing/2014/main" id="{4995BC81-9903-6C07-5912-D3957C575183}"/>
-              </a:ext>
-            </a:extLst>
-          </p:cNvPr>
-          <p:cNvSpPr/>
-          <p:nvPr/>
-        </p:nvSpPr>
-        <p:spPr>
-          <a:xfrm>
-            <a:off x="9210336" y="4179597"/>
-            <a:ext cx="1595535" cy="317241"/>
-          </a:xfrm>
-          <a:prstGeom prst="rect">
-            <a:avLst/>
-          </a:prstGeom>
-          <a:solidFill>
-            <a:schemeClr val="accent6">
-              <a:lumMod val="20000"/>
-              <a:lumOff val="80000"/>
-            </a:schemeClr>
-          </a:solidFill>
-          <a:ln>
-            <a:solidFill>
-              <a:schemeClr val="accent2">
-                <a:lumMod val="20000"/>
-                <a:lumOff val="80000"/>
-              </a:schemeClr>
-            </a:solidFill>
-          </a:ln>
-        </p:spPr>
-        <p:style>
-          <a:lnRef idx="2">
-            <a:schemeClr val="accent1">
-              <a:shade val="15000"/>
-            </a:schemeClr>
-          </a:lnRef>
-          <a:fillRef idx="1">
-            <a:schemeClr val="accent1"/>
-          </a:fillRef>
-          <a:effectRef idx="0">
-            <a:schemeClr val="accent1"/>
-          </a:effectRef>
-          <a:fontRef idx="minor">
-            <a:schemeClr val="lt1"/>
-          </a:fontRef>
-        </p:style>
-        <p:txBody>
-          <a:bodyPr rtlCol="0" anchor="ctr"/>
-          <a:lstStyle/>
-          <a:p>
-            <a:pPr algn="ctr"/>
-            <a:endParaRPr lang="en-US" dirty="0">
-              <a:solidFill>
-                <a:schemeClr val="tx2"/>
-              </a:solidFill>
-            </a:endParaRPr>
-          </a:p>
-        </p:txBody>
-      </p:sp>
-      <p:sp>
-        <p:nvSpPr>
-          <p:cNvPr id="29" name="Rectangle 28">
-            <a:extLst>
-              <a:ext uri="{FF2B5EF4-FFF2-40B4-BE49-F238E27FC236}">
-                <a16:creationId xmlns:a16="http://schemas.microsoft.com/office/drawing/2014/main" id="{3D7A8DB9-C713-AA15-2812-CCC07794A7F1}"/>
-              </a:ext>
-            </a:extLst>
-          </p:cNvPr>
-          <p:cNvSpPr/>
-          <p:nvPr/>
-        </p:nvSpPr>
-        <p:spPr>
-          <a:xfrm>
-            <a:off x="9362736" y="4331997"/>
-            <a:ext cx="1595535" cy="317241"/>
-          </a:xfrm>
-          <a:prstGeom prst="rect">
-            <a:avLst/>
-          </a:prstGeom>
-          <a:solidFill>
-            <a:schemeClr val="accent6">
-              <a:lumMod val="20000"/>
-              <a:lumOff val="80000"/>
-            </a:schemeClr>
-          </a:solidFill>
-          <a:ln>
-            <a:solidFill>
-              <a:schemeClr val="accent2">
-                <a:lumMod val="20000"/>
-                <a:lumOff val="80000"/>
-              </a:schemeClr>
-            </a:solidFill>
-          </a:ln>
-        </p:spPr>
-        <p:style>
-          <a:lnRef idx="2">
-            <a:schemeClr val="accent1">
-              <a:shade val="15000"/>
-            </a:schemeClr>
-          </a:lnRef>
-          <a:fillRef idx="1">
-            <a:schemeClr val="accent1"/>
-          </a:fillRef>
-          <a:effectRef idx="0">
-            <a:schemeClr val="accent1"/>
-          </a:effectRef>
-          <a:fontRef idx="minor">
-            <a:schemeClr val="lt1"/>
-          </a:fontRef>
-        </p:style>
-        <p:txBody>
-          <a:bodyPr rtlCol="0" anchor="ctr"/>
-          <a:lstStyle/>
-          <a:p>
-            <a:pPr algn="ctr"/>
-            <a:endParaRPr lang="en-US" dirty="0">
-              <a:solidFill>
-                <a:schemeClr val="tx2"/>
-              </a:solidFill>
-            </a:endParaRPr>
-          </a:p>
-        </p:txBody>
-      </p:sp>
-      <p:sp>
-        <p:nvSpPr>
-          <p:cNvPr id="30" name="Rectangle 29">
-            <a:extLst>
-              <a:ext uri="{FF2B5EF4-FFF2-40B4-BE49-F238E27FC236}">
-                <a16:creationId xmlns:a16="http://schemas.microsoft.com/office/drawing/2014/main" id="{0F02DB40-516B-747B-A443-F6075F2E3035}"/>
-              </a:ext>
-            </a:extLst>
-          </p:cNvPr>
-          <p:cNvSpPr/>
-          <p:nvPr/>
-        </p:nvSpPr>
-        <p:spPr>
-          <a:xfrm>
-            <a:off x="9515136" y="4484397"/>
-            <a:ext cx="1595535" cy="317241"/>
-          </a:xfrm>
-          <a:prstGeom prst="rect">
-            <a:avLst/>
-          </a:prstGeom>
-          <a:solidFill>
-            <a:schemeClr val="accent6">
-              <a:lumMod val="20000"/>
-              <a:lumOff val="80000"/>
-            </a:schemeClr>
-          </a:solidFill>
-          <a:ln>
-            <a:solidFill>
-              <a:schemeClr val="accent2">
-                <a:lumMod val="20000"/>
-                <a:lumOff val="80000"/>
-              </a:schemeClr>
-            </a:solidFill>
-          </a:ln>
-        </p:spPr>
-        <p:style>
-          <a:lnRef idx="2">
-            <a:schemeClr val="accent1">
-              <a:shade val="15000"/>
-            </a:schemeClr>
-          </a:lnRef>
-          <a:fillRef idx="1">
-            <a:schemeClr val="accent1"/>
-          </a:fillRef>
-          <a:effectRef idx="0">
-            <a:schemeClr val="accent1"/>
-          </a:effectRef>
-          <a:fontRef idx="minor">
-            <a:schemeClr val="lt1"/>
-          </a:fontRef>
-        </p:style>
-        <p:txBody>
-          <a:bodyPr rtlCol="0" anchor="ctr"/>
-          <a:lstStyle/>
-          <a:p>
-            <a:pPr algn="ctr"/>
-            <a:endParaRPr lang="en-US" dirty="0">
-              <a:solidFill>
-                <a:schemeClr val="tx2"/>
-              </a:solidFill>
-            </a:endParaRPr>
+              <a:t>Drive</a:t>
+            </a:r>
           </a:p>
         </p:txBody>
       </p:sp>
@@ -5250,7 +4602,7 @@
         </p:nvGrpSpPr>
         <p:grpSpPr>
           <a:xfrm>
-            <a:off x="3674884" y="3283043"/>
+            <a:off x="3660904" y="2133543"/>
             <a:ext cx="4842232" cy="3404835"/>
             <a:chOff x="3674884" y="3283043"/>
             <a:chExt cx="4842232" cy="3404835"/>
@@ -5473,7 +4825,7 @@
         </p:nvSpPr>
         <p:spPr>
           <a:xfrm rot="5400000">
-            <a:off x="6374581" y="3926180"/>
+            <a:off x="6360601" y="2776680"/>
             <a:ext cx="276999" cy="306301"/>
           </a:xfrm>
           <a:prstGeom prst="rect">
@@ -5516,7 +4868,7 @@
         </p:nvSpPr>
         <p:spPr>
           <a:xfrm rot="5400000">
-            <a:off x="5583361" y="3917427"/>
+            <a:off x="5569381" y="2767927"/>
             <a:ext cx="276999" cy="323808"/>
           </a:xfrm>
           <a:prstGeom prst="rect">
@@ -5541,6 +4893,797 @@
                 </a:solidFill>
               </a:rPr>
               <a:t>back</a:t>
+            </a:r>
+          </a:p>
+        </p:txBody>
+      </p:sp>
+      <p:sp>
+        <p:nvSpPr>
+          <p:cNvPr id="36" name="Rectangle 35">
+            <a:extLst>
+              <a:ext uri="{FF2B5EF4-FFF2-40B4-BE49-F238E27FC236}">
+                <a16:creationId xmlns:a16="http://schemas.microsoft.com/office/drawing/2014/main" id="{98F4DC77-14B4-D867-E954-1B234E4EDBD0}"/>
+              </a:ext>
+            </a:extLst>
+          </p:cNvPr>
+          <p:cNvSpPr/>
+          <p:nvPr/>
+        </p:nvSpPr>
+        <p:spPr>
+          <a:xfrm>
+            <a:off x="6722878" y="1020293"/>
+            <a:ext cx="1687181" cy="317241"/>
+          </a:xfrm>
+          <a:prstGeom prst="rect">
+            <a:avLst/>
+          </a:prstGeom>
+          <a:solidFill>
+            <a:schemeClr val="accent6">
+              <a:lumMod val="20000"/>
+              <a:lumOff val="80000"/>
+            </a:schemeClr>
+          </a:solidFill>
+          <a:ln>
+            <a:solidFill>
+              <a:schemeClr val="accent2">
+                <a:lumMod val="20000"/>
+                <a:lumOff val="80000"/>
+              </a:schemeClr>
+            </a:solidFill>
+          </a:ln>
+        </p:spPr>
+        <p:style>
+          <a:lnRef idx="2">
+            <a:schemeClr val="accent1">
+              <a:shade val="15000"/>
+            </a:schemeClr>
+          </a:lnRef>
+          <a:fillRef idx="1">
+            <a:schemeClr val="accent1"/>
+          </a:fillRef>
+          <a:effectRef idx="0">
+            <a:schemeClr val="accent1"/>
+          </a:effectRef>
+          <a:fontRef idx="minor">
+            <a:schemeClr val="lt1"/>
+          </a:fontRef>
+        </p:style>
+        <p:txBody>
+          <a:bodyPr rtlCol="0" anchor="ctr"/>
+          <a:lstStyle/>
+          <a:p>
+            <a:pPr algn="ctr"/>
+            <a:r>
+              <a:rPr lang="en-US" dirty="0">
+                <a:solidFill>
+                  <a:schemeClr val="tx2"/>
+                </a:solidFill>
+              </a:rPr>
+              <a:t>Robot-Relative</a:t>
+            </a:r>
+          </a:p>
+        </p:txBody>
+      </p:sp>
+      <p:cxnSp>
+        <p:nvCxnSpPr>
+          <p:cNvPr id="39" name="Straight Arrow Connector 38">
+            <a:extLst>
+              <a:ext uri="{FF2B5EF4-FFF2-40B4-BE49-F238E27FC236}">
+                <a16:creationId xmlns:a16="http://schemas.microsoft.com/office/drawing/2014/main" id="{56F97E1E-75C5-461E-E6EC-03B9075E6AEA}"/>
+              </a:ext>
+            </a:extLst>
+          </p:cNvPr>
+          <p:cNvCxnSpPr>
+            <a:stCxn id="26" idx="2"/>
+          </p:cNvCxnSpPr>
+          <p:nvPr/>
+        </p:nvCxnSpPr>
+        <p:spPr>
+          <a:xfrm>
+            <a:off x="4545533" y="1368488"/>
+            <a:ext cx="400178" cy="829107"/>
+          </a:xfrm>
+          <a:prstGeom prst="straightConnector1">
+            <a:avLst/>
+          </a:prstGeom>
+          <a:ln>
+            <a:solidFill>
+              <a:srgbClr val="FF0000"/>
+            </a:solidFill>
+            <a:tailEnd type="triangle"/>
+          </a:ln>
+        </p:spPr>
+        <p:style>
+          <a:lnRef idx="2">
+            <a:schemeClr val="accent1"/>
+          </a:lnRef>
+          <a:fillRef idx="0">
+            <a:schemeClr val="accent1"/>
+          </a:fillRef>
+          <a:effectRef idx="1">
+            <a:schemeClr val="accent1"/>
+          </a:effectRef>
+          <a:fontRef idx="minor">
+            <a:schemeClr val="tx1"/>
+          </a:fontRef>
+        </p:style>
+      </p:cxnSp>
+      <p:cxnSp>
+        <p:nvCxnSpPr>
+          <p:cNvPr id="40" name="Straight Arrow Connector 39">
+            <a:extLst>
+              <a:ext uri="{FF2B5EF4-FFF2-40B4-BE49-F238E27FC236}">
+                <a16:creationId xmlns:a16="http://schemas.microsoft.com/office/drawing/2014/main" id="{C0E1B74C-561A-F049-5C9B-2C423E2B5572}"/>
+              </a:ext>
+            </a:extLst>
+          </p:cNvPr>
+          <p:cNvCxnSpPr/>
+          <p:nvPr/>
+        </p:nvCxnSpPr>
+        <p:spPr>
+          <a:xfrm>
+            <a:off x="5087469" y="5037559"/>
+            <a:ext cx="400178" cy="829107"/>
+          </a:xfrm>
+          <a:prstGeom prst="straightConnector1">
+            <a:avLst/>
+          </a:prstGeom>
+          <a:ln>
+            <a:solidFill>
+              <a:srgbClr val="FF0000"/>
+            </a:solidFill>
+            <a:tailEnd type="triangle"/>
+          </a:ln>
+        </p:spPr>
+        <p:style>
+          <a:lnRef idx="2">
+            <a:schemeClr val="accent1"/>
+          </a:lnRef>
+          <a:fillRef idx="0">
+            <a:schemeClr val="accent1"/>
+          </a:fillRef>
+          <a:effectRef idx="1">
+            <a:schemeClr val="accent1"/>
+          </a:effectRef>
+          <a:fontRef idx="minor">
+            <a:schemeClr val="tx1"/>
+          </a:fontRef>
+        </p:style>
+      </p:cxnSp>
+      <p:cxnSp>
+        <p:nvCxnSpPr>
+          <p:cNvPr id="43" name="Straight Arrow Connector 42">
+            <a:extLst>
+              <a:ext uri="{FF2B5EF4-FFF2-40B4-BE49-F238E27FC236}">
+                <a16:creationId xmlns:a16="http://schemas.microsoft.com/office/drawing/2014/main" id="{CE701173-F431-F91A-034A-F66624167200}"/>
+              </a:ext>
+            </a:extLst>
+          </p:cNvPr>
+          <p:cNvCxnSpPr/>
+          <p:nvPr/>
+        </p:nvCxnSpPr>
+        <p:spPr>
+          <a:xfrm>
+            <a:off x="5239869" y="5189959"/>
+            <a:ext cx="400178" cy="829107"/>
+          </a:xfrm>
+          <a:prstGeom prst="straightConnector1">
+            <a:avLst/>
+          </a:prstGeom>
+          <a:ln>
+            <a:solidFill>
+              <a:srgbClr val="FF0000"/>
+            </a:solidFill>
+            <a:tailEnd type="triangle"/>
+          </a:ln>
+        </p:spPr>
+        <p:style>
+          <a:lnRef idx="2">
+            <a:schemeClr val="accent1"/>
+          </a:lnRef>
+          <a:fillRef idx="0">
+            <a:schemeClr val="accent1"/>
+          </a:fillRef>
+          <a:effectRef idx="1">
+            <a:schemeClr val="accent1"/>
+          </a:effectRef>
+          <a:fontRef idx="minor">
+            <a:schemeClr val="tx1"/>
+          </a:fontRef>
+        </p:style>
+      </p:cxnSp>
+      <p:cxnSp>
+        <p:nvCxnSpPr>
+          <p:cNvPr id="44" name="Straight Arrow Connector 43">
+            <a:extLst>
+              <a:ext uri="{FF2B5EF4-FFF2-40B4-BE49-F238E27FC236}">
+                <a16:creationId xmlns:a16="http://schemas.microsoft.com/office/drawing/2014/main" id="{F4133359-D0CF-C887-FCE3-414E34E8221D}"/>
+              </a:ext>
+            </a:extLst>
+          </p:cNvPr>
+          <p:cNvCxnSpPr/>
+          <p:nvPr/>
+        </p:nvCxnSpPr>
+        <p:spPr>
+          <a:xfrm>
+            <a:off x="5392269" y="5342359"/>
+            <a:ext cx="400178" cy="829107"/>
+          </a:xfrm>
+          <a:prstGeom prst="straightConnector1">
+            <a:avLst/>
+          </a:prstGeom>
+          <a:ln>
+            <a:solidFill>
+              <a:srgbClr val="FF0000"/>
+            </a:solidFill>
+            <a:tailEnd type="triangle"/>
+          </a:ln>
+        </p:spPr>
+        <p:style>
+          <a:lnRef idx="2">
+            <a:schemeClr val="accent1"/>
+          </a:lnRef>
+          <a:fillRef idx="0">
+            <a:schemeClr val="accent1"/>
+          </a:fillRef>
+          <a:effectRef idx="1">
+            <a:schemeClr val="accent1"/>
+          </a:effectRef>
+          <a:fontRef idx="minor">
+            <a:schemeClr val="tx1"/>
+          </a:fontRef>
+        </p:style>
+      </p:cxnSp>
+      <p:cxnSp>
+        <p:nvCxnSpPr>
+          <p:cNvPr id="45" name="Straight Arrow Connector 44">
+            <a:extLst>
+              <a:ext uri="{FF2B5EF4-FFF2-40B4-BE49-F238E27FC236}">
+                <a16:creationId xmlns:a16="http://schemas.microsoft.com/office/drawing/2014/main" id="{C4E2AB78-90A6-7B1C-1664-FEA004EE1F36}"/>
+              </a:ext>
+            </a:extLst>
+          </p:cNvPr>
+          <p:cNvCxnSpPr/>
+          <p:nvPr/>
+        </p:nvCxnSpPr>
+        <p:spPr>
+          <a:xfrm>
+            <a:off x="5544669" y="5494759"/>
+            <a:ext cx="400178" cy="829107"/>
+          </a:xfrm>
+          <a:prstGeom prst="straightConnector1">
+            <a:avLst/>
+          </a:prstGeom>
+          <a:ln>
+            <a:solidFill>
+              <a:srgbClr val="FF0000"/>
+            </a:solidFill>
+            <a:tailEnd type="triangle"/>
+          </a:ln>
+        </p:spPr>
+        <p:style>
+          <a:lnRef idx="2">
+            <a:schemeClr val="accent1"/>
+          </a:lnRef>
+          <a:fillRef idx="0">
+            <a:schemeClr val="accent1"/>
+          </a:fillRef>
+          <a:effectRef idx="1">
+            <a:schemeClr val="accent1"/>
+          </a:effectRef>
+          <a:fontRef idx="minor">
+            <a:schemeClr val="tx1"/>
+          </a:fontRef>
+        </p:style>
+      </p:cxnSp>
+      <p:cxnSp>
+        <p:nvCxnSpPr>
+          <p:cNvPr id="46" name="Straight Arrow Connector 45">
+            <a:extLst>
+              <a:ext uri="{FF2B5EF4-FFF2-40B4-BE49-F238E27FC236}">
+                <a16:creationId xmlns:a16="http://schemas.microsoft.com/office/drawing/2014/main" id="{FAD30A46-DDCC-DBA8-9929-59497E804170}"/>
+              </a:ext>
+            </a:extLst>
+          </p:cNvPr>
+          <p:cNvCxnSpPr/>
+          <p:nvPr/>
+        </p:nvCxnSpPr>
+        <p:spPr>
+          <a:xfrm>
+            <a:off x="5697069" y="5647159"/>
+            <a:ext cx="400178" cy="829107"/>
+          </a:xfrm>
+          <a:prstGeom prst="straightConnector1">
+            <a:avLst/>
+          </a:prstGeom>
+          <a:ln>
+            <a:solidFill>
+              <a:srgbClr val="FF0000"/>
+            </a:solidFill>
+            <a:tailEnd type="triangle"/>
+          </a:ln>
+        </p:spPr>
+        <p:style>
+          <a:lnRef idx="2">
+            <a:schemeClr val="accent1"/>
+          </a:lnRef>
+          <a:fillRef idx="0">
+            <a:schemeClr val="accent1"/>
+          </a:fillRef>
+          <a:effectRef idx="1">
+            <a:schemeClr val="accent1"/>
+          </a:effectRef>
+          <a:fontRef idx="minor">
+            <a:schemeClr val="tx1"/>
+          </a:fontRef>
+        </p:style>
+      </p:cxnSp>
+      <p:cxnSp>
+        <p:nvCxnSpPr>
+          <p:cNvPr id="47" name="Straight Arrow Connector 46">
+            <a:extLst>
+              <a:ext uri="{FF2B5EF4-FFF2-40B4-BE49-F238E27FC236}">
+                <a16:creationId xmlns:a16="http://schemas.microsoft.com/office/drawing/2014/main" id="{900CB038-4AFE-976E-CF09-7D6B0F3F9207}"/>
+              </a:ext>
+            </a:extLst>
+          </p:cNvPr>
+          <p:cNvCxnSpPr/>
+          <p:nvPr/>
+        </p:nvCxnSpPr>
+        <p:spPr>
+          <a:xfrm>
+            <a:off x="5849469" y="5799559"/>
+            <a:ext cx="400178" cy="829107"/>
+          </a:xfrm>
+          <a:prstGeom prst="straightConnector1">
+            <a:avLst/>
+          </a:prstGeom>
+          <a:ln>
+            <a:solidFill>
+              <a:srgbClr val="FF0000"/>
+            </a:solidFill>
+            <a:tailEnd type="triangle"/>
+          </a:ln>
+        </p:spPr>
+        <p:style>
+          <a:lnRef idx="2">
+            <a:schemeClr val="accent1"/>
+          </a:lnRef>
+          <a:fillRef idx="0">
+            <a:schemeClr val="accent1"/>
+          </a:fillRef>
+          <a:effectRef idx="1">
+            <a:schemeClr val="accent1"/>
+          </a:effectRef>
+          <a:fontRef idx="minor">
+            <a:schemeClr val="tx1"/>
+          </a:fontRef>
+        </p:style>
+      </p:cxnSp>
+      <p:cxnSp>
+        <p:nvCxnSpPr>
+          <p:cNvPr id="48" name="Straight Arrow Connector 47">
+            <a:extLst>
+              <a:ext uri="{FF2B5EF4-FFF2-40B4-BE49-F238E27FC236}">
+                <a16:creationId xmlns:a16="http://schemas.microsoft.com/office/drawing/2014/main" id="{8384D7B3-2AEB-1EEF-C9DB-0AB1BF7730A0}"/>
+              </a:ext>
+            </a:extLst>
+          </p:cNvPr>
+          <p:cNvCxnSpPr/>
+          <p:nvPr/>
+        </p:nvCxnSpPr>
+        <p:spPr>
+          <a:xfrm>
+            <a:off x="6001869" y="5951959"/>
+            <a:ext cx="400178" cy="829107"/>
+          </a:xfrm>
+          <a:prstGeom prst="straightConnector1">
+            <a:avLst/>
+          </a:prstGeom>
+          <a:ln>
+            <a:solidFill>
+              <a:srgbClr val="FF0000"/>
+            </a:solidFill>
+            <a:tailEnd type="triangle"/>
+          </a:ln>
+        </p:spPr>
+        <p:style>
+          <a:lnRef idx="2">
+            <a:schemeClr val="accent1"/>
+          </a:lnRef>
+          <a:fillRef idx="0">
+            <a:schemeClr val="accent1"/>
+          </a:fillRef>
+          <a:effectRef idx="1">
+            <a:schemeClr val="accent1"/>
+          </a:effectRef>
+          <a:fontRef idx="minor">
+            <a:schemeClr val="tx1"/>
+          </a:fontRef>
+        </p:style>
+      </p:cxnSp>
+      <p:cxnSp>
+        <p:nvCxnSpPr>
+          <p:cNvPr id="49" name="Straight Arrow Connector 48">
+            <a:extLst>
+              <a:ext uri="{FF2B5EF4-FFF2-40B4-BE49-F238E27FC236}">
+                <a16:creationId xmlns:a16="http://schemas.microsoft.com/office/drawing/2014/main" id="{F426EFED-26EA-B86B-DC9B-D49764E3D7A2}"/>
+              </a:ext>
+            </a:extLst>
+          </p:cNvPr>
+          <p:cNvCxnSpPr>
+            <a:cxnSpLocks/>
+            <a:stCxn id="74" idx="2"/>
+            <a:endCxn id="37" idx="1"/>
+          </p:cNvCxnSpPr>
+          <p:nvPr/>
+        </p:nvCxnSpPr>
+        <p:spPr>
+          <a:xfrm flipH="1">
+            <a:off x="5707881" y="745588"/>
+            <a:ext cx="382255" cy="2045744"/>
+          </a:xfrm>
+          <a:prstGeom prst="straightConnector1">
+            <a:avLst/>
+          </a:prstGeom>
+          <a:ln>
+            <a:solidFill>
+              <a:srgbClr val="FF0000"/>
+            </a:solidFill>
+            <a:tailEnd type="triangle"/>
+          </a:ln>
+        </p:spPr>
+        <p:style>
+          <a:lnRef idx="2">
+            <a:schemeClr val="accent1"/>
+          </a:lnRef>
+          <a:fillRef idx="0">
+            <a:schemeClr val="accent1"/>
+          </a:fillRef>
+          <a:effectRef idx="1">
+            <a:schemeClr val="accent1"/>
+          </a:effectRef>
+          <a:fontRef idx="minor">
+            <a:schemeClr val="tx1"/>
+          </a:fontRef>
+        </p:style>
+      </p:cxnSp>
+      <p:cxnSp>
+        <p:nvCxnSpPr>
+          <p:cNvPr id="50" name="Straight Arrow Connector 49">
+            <a:extLst>
+              <a:ext uri="{FF2B5EF4-FFF2-40B4-BE49-F238E27FC236}">
+                <a16:creationId xmlns:a16="http://schemas.microsoft.com/office/drawing/2014/main" id="{0E3AE080-0BC1-7CB6-6FFA-5AC659E91337}"/>
+              </a:ext>
+            </a:extLst>
+          </p:cNvPr>
+          <p:cNvCxnSpPr>
+            <a:cxnSpLocks/>
+            <a:stCxn id="30" idx="3"/>
+          </p:cNvCxnSpPr>
+          <p:nvPr/>
+        </p:nvCxnSpPr>
+        <p:spPr>
+          <a:xfrm flipV="1">
+            <a:off x="3336074" y="3167015"/>
+            <a:ext cx="1528744" cy="291865"/>
+          </a:xfrm>
+          <a:prstGeom prst="straightConnector1">
+            <a:avLst/>
+          </a:prstGeom>
+          <a:ln>
+            <a:solidFill>
+              <a:srgbClr val="FF0000"/>
+            </a:solidFill>
+            <a:tailEnd type="triangle"/>
+          </a:ln>
+        </p:spPr>
+        <p:style>
+          <a:lnRef idx="2">
+            <a:schemeClr val="accent1"/>
+          </a:lnRef>
+          <a:fillRef idx="0">
+            <a:schemeClr val="accent1"/>
+          </a:fillRef>
+          <a:effectRef idx="1">
+            <a:schemeClr val="accent1"/>
+          </a:effectRef>
+          <a:fontRef idx="minor">
+            <a:schemeClr val="tx1"/>
+          </a:fontRef>
+        </p:style>
+      </p:cxnSp>
+      <p:cxnSp>
+        <p:nvCxnSpPr>
+          <p:cNvPr id="51" name="Straight Arrow Connector 50">
+            <a:extLst>
+              <a:ext uri="{FF2B5EF4-FFF2-40B4-BE49-F238E27FC236}">
+                <a16:creationId xmlns:a16="http://schemas.microsoft.com/office/drawing/2014/main" id="{110782EA-555F-7DFF-82BF-1C34DFDA346B}"/>
+              </a:ext>
+            </a:extLst>
+          </p:cNvPr>
+          <p:cNvCxnSpPr>
+            <a:cxnSpLocks/>
+            <a:stCxn id="7" idx="3"/>
+            <a:endCxn id="32" idx="1"/>
+          </p:cNvCxnSpPr>
+          <p:nvPr/>
+        </p:nvCxnSpPr>
+        <p:spPr>
+          <a:xfrm flipV="1">
+            <a:off x="3336074" y="2586215"/>
+            <a:ext cx="499586" cy="316233"/>
+          </a:xfrm>
+          <a:prstGeom prst="straightConnector1">
+            <a:avLst/>
+          </a:prstGeom>
+          <a:ln>
+            <a:solidFill>
+              <a:srgbClr val="FF0000"/>
+            </a:solidFill>
+            <a:tailEnd type="triangle"/>
+          </a:ln>
+        </p:spPr>
+        <p:style>
+          <a:lnRef idx="2">
+            <a:schemeClr val="accent1"/>
+          </a:lnRef>
+          <a:fillRef idx="0">
+            <a:schemeClr val="accent1"/>
+          </a:fillRef>
+          <a:effectRef idx="1">
+            <a:schemeClr val="accent1"/>
+          </a:effectRef>
+          <a:fontRef idx="minor">
+            <a:schemeClr val="tx1"/>
+          </a:fontRef>
+        </p:style>
+      </p:cxnSp>
+      <p:cxnSp>
+        <p:nvCxnSpPr>
+          <p:cNvPr id="52" name="Straight Arrow Connector 51">
+            <a:extLst>
+              <a:ext uri="{FF2B5EF4-FFF2-40B4-BE49-F238E27FC236}">
+                <a16:creationId xmlns:a16="http://schemas.microsoft.com/office/drawing/2014/main" id="{5A588EE6-085E-7BBE-3C24-E081ABD25E3B}"/>
+              </a:ext>
+            </a:extLst>
+          </p:cNvPr>
+          <p:cNvCxnSpPr>
+            <a:cxnSpLocks/>
+            <a:stCxn id="8" idx="1"/>
+          </p:cNvCxnSpPr>
+          <p:nvPr/>
+        </p:nvCxnSpPr>
+        <p:spPr>
+          <a:xfrm flipH="1" flipV="1">
+            <a:off x="6722878" y="3908309"/>
+            <a:ext cx="2012746" cy="1095322"/>
+          </a:xfrm>
+          <a:prstGeom prst="straightConnector1">
+            <a:avLst/>
+          </a:prstGeom>
+          <a:ln>
+            <a:solidFill>
+              <a:srgbClr val="FF0000"/>
+            </a:solidFill>
+            <a:tailEnd type="triangle"/>
+          </a:ln>
+        </p:spPr>
+        <p:style>
+          <a:lnRef idx="2">
+            <a:schemeClr val="accent1"/>
+          </a:lnRef>
+          <a:fillRef idx="0">
+            <a:schemeClr val="accent1"/>
+          </a:fillRef>
+          <a:effectRef idx="1">
+            <a:schemeClr val="accent1"/>
+          </a:effectRef>
+          <a:fontRef idx="minor">
+            <a:schemeClr val="tx1"/>
+          </a:fontRef>
+        </p:style>
+      </p:cxnSp>
+      <p:cxnSp>
+        <p:nvCxnSpPr>
+          <p:cNvPr id="53" name="Straight Arrow Connector 52">
+            <a:extLst>
+              <a:ext uri="{FF2B5EF4-FFF2-40B4-BE49-F238E27FC236}">
+                <a16:creationId xmlns:a16="http://schemas.microsoft.com/office/drawing/2014/main" id="{F1D0DB60-59AB-5C74-B81D-06A828838D36}"/>
+              </a:ext>
+            </a:extLst>
+          </p:cNvPr>
+          <p:cNvCxnSpPr>
+            <a:cxnSpLocks/>
+            <a:stCxn id="6" idx="1"/>
+            <a:endCxn id="31" idx="3"/>
+          </p:cNvCxnSpPr>
+          <p:nvPr/>
+        </p:nvCxnSpPr>
+        <p:spPr>
+          <a:xfrm flipH="1" flipV="1">
+            <a:off x="8410059" y="2601682"/>
+            <a:ext cx="729766" cy="189649"/>
+          </a:xfrm>
+          <a:prstGeom prst="straightConnector1">
+            <a:avLst/>
+          </a:prstGeom>
+          <a:ln>
+            <a:solidFill>
+              <a:srgbClr val="FF0000"/>
+            </a:solidFill>
+            <a:tailEnd type="triangle"/>
+          </a:ln>
+        </p:spPr>
+        <p:style>
+          <a:lnRef idx="2">
+            <a:schemeClr val="accent1"/>
+          </a:lnRef>
+          <a:fillRef idx="0">
+            <a:schemeClr val="accent1"/>
+          </a:fillRef>
+          <a:effectRef idx="1">
+            <a:schemeClr val="accent1"/>
+          </a:effectRef>
+          <a:fontRef idx="minor">
+            <a:schemeClr val="tx1"/>
+          </a:fontRef>
+        </p:style>
+      </p:cxnSp>
+      <p:cxnSp>
+        <p:nvCxnSpPr>
+          <p:cNvPr id="54" name="Straight Arrow Connector 53">
+            <a:extLst>
+              <a:ext uri="{FF2B5EF4-FFF2-40B4-BE49-F238E27FC236}">
+                <a16:creationId xmlns:a16="http://schemas.microsoft.com/office/drawing/2014/main" id="{70D9691E-59F8-E11A-89FE-06B226DE3C1D}"/>
+              </a:ext>
+            </a:extLst>
+          </p:cNvPr>
+          <p:cNvCxnSpPr>
+            <a:cxnSpLocks/>
+            <a:stCxn id="14" idx="1"/>
+          </p:cNvCxnSpPr>
+          <p:nvPr/>
+        </p:nvCxnSpPr>
+        <p:spPr>
+          <a:xfrm flipH="1" flipV="1">
+            <a:off x="7482254" y="3562318"/>
+            <a:ext cx="1387057" cy="675492"/>
+          </a:xfrm>
+          <a:prstGeom prst="straightConnector1">
+            <a:avLst/>
+          </a:prstGeom>
+          <a:ln>
+            <a:solidFill>
+              <a:srgbClr val="FF0000"/>
+            </a:solidFill>
+            <a:tailEnd type="triangle"/>
+          </a:ln>
+        </p:spPr>
+        <p:style>
+          <a:lnRef idx="2">
+            <a:schemeClr val="accent1"/>
+          </a:lnRef>
+          <a:fillRef idx="0">
+            <a:schemeClr val="accent1"/>
+          </a:fillRef>
+          <a:effectRef idx="1">
+            <a:schemeClr val="accent1"/>
+          </a:effectRef>
+          <a:fontRef idx="minor">
+            <a:schemeClr val="tx1"/>
+          </a:fontRef>
+        </p:style>
+      </p:cxnSp>
+      <p:cxnSp>
+        <p:nvCxnSpPr>
+          <p:cNvPr id="55" name="Straight Arrow Connector 54">
+            <a:extLst>
+              <a:ext uri="{FF2B5EF4-FFF2-40B4-BE49-F238E27FC236}">
+                <a16:creationId xmlns:a16="http://schemas.microsoft.com/office/drawing/2014/main" id="{43FEF709-E2F1-26B3-F185-7DF6A2381934}"/>
+              </a:ext>
+            </a:extLst>
+          </p:cNvPr>
+          <p:cNvCxnSpPr>
+            <a:cxnSpLocks/>
+            <a:stCxn id="36" idx="2"/>
+            <a:endCxn id="33" idx="1"/>
+          </p:cNvCxnSpPr>
+          <p:nvPr/>
+        </p:nvCxnSpPr>
+        <p:spPr>
+          <a:xfrm flipH="1">
+            <a:off x="7301235" y="1337534"/>
+            <a:ext cx="265234" cy="860062"/>
+          </a:xfrm>
+          <a:prstGeom prst="straightConnector1">
+            <a:avLst/>
+          </a:prstGeom>
+          <a:ln>
+            <a:solidFill>
+              <a:srgbClr val="FF0000"/>
+            </a:solidFill>
+            <a:tailEnd type="triangle"/>
+          </a:ln>
+        </p:spPr>
+        <p:style>
+          <a:lnRef idx="2">
+            <a:schemeClr val="accent1"/>
+          </a:lnRef>
+          <a:fillRef idx="0">
+            <a:schemeClr val="accent1"/>
+          </a:fillRef>
+          <a:effectRef idx="1">
+            <a:schemeClr val="accent1"/>
+          </a:effectRef>
+          <a:fontRef idx="minor">
+            <a:schemeClr val="tx1"/>
+          </a:fontRef>
+        </p:style>
+      </p:cxnSp>
+      <p:sp>
+        <p:nvSpPr>
+          <p:cNvPr id="74" name="Rectangle 73">
+            <a:extLst>
+              <a:ext uri="{FF2B5EF4-FFF2-40B4-BE49-F238E27FC236}">
+                <a16:creationId xmlns:a16="http://schemas.microsoft.com/office/drawing/2014/main" id="{A7A1E1CB-F062-0156-02CE-6B56496102B7}"/>
+              </a:ext>
+            </a:extLst>
+          </p:cNvPr>
+          <p:cNvSpPr/>
+          <p:nvPr/>
+        </p:nvSpPr>
+        <p:spPr>
+          <a:xfrm>
+            <a:off x="5261047" y="283923"/>
+            <a:ext cx="1658178" cy="461665"/>
+          </a:xfrm>
+          <a:prstGeom prst="rect">
+            <a:avLst/>
+          </a:prstGeom>
+          <a:solidFill>
+            <a:schemeClr val="accent6">
+              <a:lumMod val="20000"/>
+              <a:lumOff val="80000"/>
+            </a:schemeClr>
+          </a:solidFill>
+          <a:ln>
+            <a:solidFill>
+              <a:schemeClr val="accent2">
+                <a:lumMod val="20000"/>
+                <a:lumOff val="80000"/>
+              </a:schemeClr>
+            </a:solidFill>
+          </a:ln>
+        </p:spPr>
+        <p:style>
+          <a:lnRef idx="2">
+            <a:schemeClr val="accent1">
+              <a:shade val="15000"/>
+            </a:schemeClr>
+          </a:lnRef>
+          <a:fillRef idx="1">
+            <a:schemeClr val="accent1"/>
+          </a:fillRef>
+          <a:effectRef idx="0">
+            <a:schemeClr val="accent1"/>
+          </a:effectRef>
+          <a:fontRef idx="minor">
+            <a:schemeClr val="lt1"/>
+          </a:fontRef>
+        </p:style>
+        <p:txBody>
+          <a:bodyPr rtlCol="0" anchor="ctr"/>
+          <a:lstStyle/>
+          <a:p>
+            <a:pPr algn="ctr"/>
+            <a:r>
+              <a:rPr lang="en-US" sz="1600" dirty="0">
+                <a:solidFill>
+                  <a:schemeClr val="tx2"/>
+                </a:solidFill>
+              </a:rPr>
+              <a:t>Override some commands</a:t>
             </a:r>
           </a:p>
         </p:txBody>
@@ -5603,7 +5746,7 @@
         </p:blipFill>
         <p:spPr>
           <a:xfrm>
-            <a:off x="3545728" y="3255682"/>
+            <a:off x="3500312" y="1477474"/>
             <a:ext cx="5100544" cy="3602318"/>
           </a:xfrm>
           <a:prstGeom prst="rect">
@@ -5660,7 +5803,7 @@
         </p:nvSpPr>
         <p:spPr>
           <a:xfrm>
-            <a:off x="9703304" y="3150217"/>
+            <a:off x="9437998" y="4069318"/>
             <a:ext cx="1595535" cy="317241"/>
           </a:xfrm>
           <a:prstGeom prst="rect">
@@ -5727,7 +5870,7 @@
         </p:nvSpPr>
         <p:spPr>
           <a:xfrm>
-            <a:off x="3307337" y="603434"/>
+            <a:off x="66708" y="5670953"/>
             <a:ext cx="1926144" cy="317241"/>
           </a:xfrm>
           <a:prstGeom prst="rect">
@@ -5782,10 +5925,10 @@
       </p:sp>
       <p:sp>
         <p:nvSpPr>
-          <p:cNvPr id="5" name="Rectangle 4">
-            <a:extLst>
-              <a:ext uri="{FF2B5EF4-FFF2-40B4-BE49-F238E27FC236}">
-                <a16:creationId xmlns:a16="http://schemas.microsoft.com/office/drawing/2014/main" id="{AB91D089-99E6-4C80-CEDD-42DC02C41662}"/>
+          <p:cNvPr id="10" name="Rectangle 9">
+            <a:extLst>
+              <a:ext uri="{FF2B5EF4-FFF2-40B4-BE49-F238E27FC236}">
+                <a16:creationId xmlns:a16="http://schemas.microsoft.com/office/drawing/2014/main" id="{6526CD50-9017-5B4D-4931-DC8A76551DCD}"/>
               </a:ext>
             </a:extLst>
           </p:cNvPr>
@@ -5794,8 +5937,8 @@
         </p:nvSpPr>
         <p:spPr>
           <a:xfrm>
-            <a:off x="8664034" y="603435"/>
-            <a:ext cx="2078544" cy="317241"/>
+            <a:off x="185194" y="6089023"/>
+            <a:ext cx="1807658" cy="317241"/>
           </a:xfrm>
           <a:prstGeom prst="rect">
             <a:avLst/>
@@ -5837,22 +5980,22 @@
           <a:p>
             <a:pPr algn="ctr"/>
             <a:r>
-              <a:rPr lang="en-US" dirty="0">
+              <a:rPr lang="en-US" sz="1600" dirty="0">
                 <a:solidFill>
                   <a:schemeClr val="tx2"/>
                 </a:solidFill>
               </a:rPr>
-              <a:t>Right Bump Drive</a:t>
-            </a:r>
-          </a:p>
-        </p:txBody>
-      </p:sp>
-      <p:sp>
-        <p:nvSpPr>
-          <p:cNvPr id="6" name="Rectangle 5">
-            <a:extLst>
-              <a:ext uri="{FF2B5EF4-FFF2-40B4-BE49-F238E27FC236}">
-                <a16:creationId xmlns:a16="http://schemas.microsoft.com/office/drawing/2014/main" id="{A6C29E48-BE65-CBBC-E66E-A7B03C987EF2}"/>
+              <a:t>Approach Outpost</a:t>
+            </a:r>
+          </a:p>
+        </p:txBody>
+      </p:sp>
+      <p:sp>
+        <p:nvSpPr>
+          <p:cNvPr id="11" name="Rectangle 10">
+            <a:extLst>
+              <a:ext uri="{FF2B5EF4-FFF2-40B4-BE49-F238E27FC236}">
+                <a16:creationId xmlns:a16="http://schemas.microsoft.com/office/drawing/2014/main" id="{9CBDD6F5-47EB-E31A-2443-482B3C29A23F}"/>
               </a:ext>
             </a:extLst>
           </p:cNvPr>
@@ -5861,8 +6004,8 @@
         </p:nvSpPr>
         <p:spPr>
           <a:xfrm>
-            <a:off x="5616035" y="603436"/>
-            <a:ext cx="2078544" cy="317241"/>
+            <a:off x="1480739" y="2324249"/>
+            <a:ext cx="1595535" cy="492798"/>
           </a:xfrm>
           <a:prstGeom prst="rect">
             <a:avLst/>
@@ -5909,17 +6052,28 @@
                   <a:schemeClr val="tx2"/>
                 </a:solidFill>
               </a:rPr>
-              <a:t>Left Bump Drive</a:t>
-            </a:r>
-          </a:p>
-        </p:txBody>
-      </p:sp>
-      <p:sp>
-        <p:nvSpPr>
-          <p:cNvPr id="7" name="Rectangle 6">
-            <a:extLst>
-              <a:ext uri="{FF2B5EF4-FFF2-40B4-BE49-F238E27FC236}">
-                <a16:creationId xmlns:a16="http://schemas.microsoft.com/office/drawing/2014/main" id="{44ECC727-D0C1-834D-267E-C1B975329CC9}"/>
+              <a:t>Empty Fuel</a:t>
+            </a:r>
+          </a:p>
+          <a:p>
+            <a:pPr algn="ctr"/>
+            <a:r>
+              <a:rPr lang="en-US" sz="1200" dirty="0">
+                <a:solidFill>
+                  <a:schemeClr val="tx2"/>
+                </a:solidFill>
+              </a:rPr>
+              <a:t>(back pressed)</a:t>
+            </a:r>
+          </a:p>
+        </p:txBody>
+      </p:sp>
+      <p:sp>
+        <p:nvSpPr>
+          <p:cNvPr id="12" name="Rectangle 11">
+            <a:extLst>
+              <a:ext uri="{FF2B5EF4-FFF2-40B4-BE49-F238E27FC236}">
+                <a16:creationId xmlns:a16="http://schemas.microsoft.com/office/drawing/2014/main" id="{C02DC017-BF61-5880-3824-D65FA1623FD7}"/>
               </a:ext>
             </a:extLst>
           </p:cNvPr>
@@ -5928,7 +6082,7 @@
         </p:nvSpPr>
         <p:spPr>
           <a:xfrm>
-            <a:off x="9756775" y="5602431"/>
+            <a:off x="9855703" y="5501336"/>
             <a:ext cx="1595535" cy="317241"/>
           </a:xfrm>
           <a:prstGeom prst="rect">
@@ -5976,17 +6130,17 @@
                   <a:schemeClr val="tx2"/>
                 </a:solidFill>
               </a:rPr>
-              <a:t>Rotation</a:t>
-            </a:r>
-          </a:p>
-        </p:txBody>
-      </p:sp>
-      <p:sp>
-        <p:nvSpPr>
-          <p:cNvPr id="8" name="Rectangle 7">
-            <a:extLst>
-              <a:ext uri="{FF2B5EF4-FFF2-40B4-BE49-F238E27FC236}">
-                <a16:creationId xmlns:a16="http://schemas.microsoft.com/office/drawing/2014/main" id="{FCFEEF3F-66DA-06E9-853D-91A7DA5105F0}"/>
+              <a:t>Goto Climb</a:t>
+            </a:r>
+          </a:p>
+        </p:txBody>
+      </p:sp>
+      <p:sp>
+        <p:nvSpPr>
+          <p:cNvPr id="13" name="Rectangle 12">
+            <a:extLst>
+              <a:ext uri="{FF2B5EF4-FFF2-40B4-BE49-F238E27FC236}">
+                <a16:creationId xmlns:a16="http://schemas.microsoft.com/office/drawing/2014/main" id="{438E3938-169E-DBC2-8D39-5A597345AB0B}"/>
               </a:ext>
             </a:extLst>
           </p:cNvPr>
@@ -5995,7 +6149,7 @@
         </p:nvSpPr>
         <p:spPr>
           <a:xfrm>
-            <a:off x="332791" y="4152149"/>
+            <a:off x="9071415" y="1465331"/>
             <a:ext cx="1595535" cy="317241"/>
           </a:xfrm>
           <a:prstGeom prst="rect">
@@ -6043,17 +6197,17 @@
                   <a:schemeClr val="tx2"/>
                 </a:solidFill>
               </a:rPr>
-              <a:t>Field Position</a:t>
-            </a:r>
-          </a:p>
-        </p:txBody>
-      </p:sp>
-      <p:sp>
-        <p:nvSpPr>
-          <p:cNvPr id="10" name="Rectangle 9">
-            <a:extLst>
-              <a:ext uri="{FF2B5EF4-FFF2-40B4-BE49-F238E27FC236}">
-                <a16:creationId xmlns:a16="http://schemas.microsoft.com/office/drawing/2014/main" id="{6526CD50-9017-5B4D-4931-DC8A76551DCD}"/>
+              <a:t>Aim &amp; Shoot</a:t>
+            </a:r>
+          </a:p>
+        </p:txBody>
+      </p:sp>
+      <p:sp>
+        <p:nvSpPr>
+          <p:cNvPr id="14" name="Rectangle 13">
+            <a:extLst>
+              <a:ext uri="{FF2B5EF4-FFF2-40B4-BE49-F238E27FC236}">
+                <a16:creationId xmlns:a16="http://schemas.microsoft.com/office/drawing/2014/main" id="{CE6234B4-0847-FA69-7472-3D7D0AE90631}"/>
               </a:ext>
             </a:extLst>
           </p:cNvPr>
@@ -6062,8 +6216,8 @@
         </p:nvSpPr>
         <p:spPr>
           <a:xfrm>
-            <a:off x="3425823" y="1021504"/>
-            <a:ext cx="1807658" cy="317241"/>
+            <a:off x="9131026" y="3350062"/>
+            <a:ext cx="1595535" cy="317241"/>
           </a:xfrm>
           <a:prstGeom prst="rect">
             <a:avLst/>
@@ -6105,22 +6259,22 @@
           <a:p>
             <a:pPr algn="ctr"/>
             <a:r>
-              <a:rPr lang="en-US" sz="1600" dirty="0">
+              <a:rPr lang="en-US" dirty="0">
                 <a:solidFill>
                   <a:schemeClr val="tx2"/>
                 </a:solidFill>
               </a:rPr>
-              <a:t>Approach Outpost</a:t>
-            </a:r>
-          </a:p>
-        </p:txBody>
-      </p:sp>
-      <p:sp>
-        <p:nvSpPr>
-          <p:cNvPr id="11" name="Rectangle 10">
-            <a:extLst>
-              <a:ext uri="{FF2B5EF4-FFF2-40B4-BE49-F238E27FC236}">
-                <a16:creationId xmlns:a16="http://schemas.microsoft.com/office/drawing/2014/main" id="{9CBDD6F5-47EB-E31A-2443-482B3C29A23F}"/>
+              <a:t>Brake</a:t>
+            </a:r>
+          </a:p>
+        </p:txBody>
+      </p:sp>
+      <p:sp>
+        <p:nvSpPr>
+          <p:cNvPr id="15" name="Rectangle 14">
+            <a:extLst>
+              <a:ext uri="{FF2B5EF4-FFF2-40B4-BE49-F238E27FC236}">
+                <a16:creationId xmlns:a16="http://schemas.microsoft.com/office/drawing/2014/main" id="{4263266B-6E03-53D4-97FE-499955BC35DA}"/>
               </a:ext>
             </a:extLst>
           </p:cNvPr>
@@ -6129,7 +6283,7 @@
         </p:nvSpPr>
         <p:spPr>
           <a:xfrm>
-            <a:off x="4635229" y="1477373"/>
+            <a:off x="50877" y="5186557"/>
             <a:ext cx="1595535" cy="317241"/>
           </a:xfrm>
           <a:prstGeom prst="rect">
@@ -6177,17 +6331,17 @@
                   <a:schemeClr val="tx2"/>
                 </a:solidFill>
               </a:rPr>
-              <a:t>Empty Fuel</a:t>
-            </a:r>
-          </a:p>
-        </p:txBody>
-      </p:sp>
-      <p:sp>
-        <p:nvSpPr>
-          <p:cNvPr id="12" name="Rectangle 11">
-            <a:extLst>
-              <a:ext uri="{FF2B5EF4-FFF2-40B4-BE49-F238E27FC236}">
-                <a16:creationId xmlns:a16="http://schemas.microsoft.com/office/drawing/2014/main" id="{C02DC017-BF61-5880-3824-D65FA1623FD7}"/>
+              <a:t>Auto Climb</a:t>
+            </a:r>
+          </a:p>
+        </p:txBody>
+      </p:sp>
+      <p:sp>
+        <p:nvSpPr>
+          <p:cNvPr id="16" name="Rectangle 15">
+            <a:extLst>
+              <a:ext uri="{FF2B5EF4-FFF2-40B4-BE49-F238E27FC236}">
+                <a16:creationId xmlns:a16="http://schemas.microsoft.com/office/drawing/2014/main" id="{F54D5F66-778A-A89F-468A-3E6C9511C581}"/>
               </a:ext>
             </a:extLst>
           </p:cNvPr>
@@ -6196,8 +6350,8 @@
         </p:nvSpPr>
         <p:spPr>
           <a:xfrm>
-            <a:off x="6770384" y="1489643"/>
-            <a:ext cx="1595535" cy="317241"/>
+            <a:off x="5177206" y="238595"/>
+            <a:ext cx="1658178" cy="461665"/>
           </a:xfrm>
           <a:prstGeom prst="rect">
             <a:avLst/>
@@ -6239,22 +6393,22 @@
           <a:p>
             <a:pPr algn="ctr"/>
             <a:r>
-              <a:rPr lang="en-US" dirty="0">
+              <a:rPr lang="en-US" sz="1600" dirty="0">
                 <a:solidFill>
                   <a:schemeClr val="tx2"/>
                 </a:solidFill>
               </a:rPr>
-              <a:t>Goto Climb</a:t>
-            </a:r>
-          </a:p>
-        </p:txBody>
-      </p:sp>
-      <p:sp>
-        <p:nvSpPr>
-          <p:cNvPr id="13" name="Rectangle 12">
-            <a:extLst>
-              <a:ext uri="{FF2B5EF4-FFF2-40B4-BE49-F238E27FC236}">
-                <a16:creationId xmlns:a16="http://schemas.microsoft.com/office/drawing/2014/main" id="{438E3938-169E-DBC2-8D39-5A597345AB0B}"/>
+              <a:t>Override some commands</a:t>
+            </a:r>
+          </a:p>
+        </p:txBody>
+      </p:sp>
+      <p:sp>
+        <p:nvSpPr>
+          <p:cNvPr id="17" name="Rectangle 16">
+            <a:extLst>
+              <a:ext uri="{FF2B5EF4-FFF2-40B4-BE49-F238E27FC236}">
+                <a16:creationId xmlns:a16="http://schemas.microsoft.com/office/drawing/2014/main" id="{D169B6A3-0DA2-9D96-0351-4045F2E2F1E1}"/>
               </a:ext>
             </a:extLst>
           </p:cNvPr>
@@ -6263,7 +6417,7 @@
         </p:nvSpPr>
         <p:spPr>
           <a:xfrm>
-            <a:off x="9703305" y="2348722"/>
+            <a:off x="1449753" y="1612910"/>
             <a:ext cx="1595535" cy="317241"/>
           </a:xfrm>
           <a:prstGeom prst="rect">
@@ -6311,17 +6465,17 @@
                   <a:schemeClr val="tx2"/>
                 </a:solidFill>
               </a:rPr>
-              <a:t>Aim &amp; Shoot</a:t>
-            </a:r>
-          </a:p>
-        </p:txBody>
-      </p:sp>
-      <p:sp>
-        <p:nvSpPr>
-          <p:cNvPr id="14" name="Rectangle 13">
-            <a:extLst>
-              <a:ext uri="{FF2B5EF4-FFF2-40B4-BE49-F238E27FC236}">
-                <a16:creationId xmlns:a16="http://schemas.microsoft.com/office/drawing/2014/main" id="{CE6234B4-0847-FA69-7472-3D7D0AE90631}"/>
+              <a:t>Intake Fuel</a:t>
+            </a:r>
+          </a:p>
+        </p:txBody>
+      </p:sp>
+      <p:sp>
+        <p:nvSpPr>
+          <p:cNvPr id="18" name="Rectangle 17">
+            <a:extLst>
+              <a:ext uri="{FF2B5EF4-FFF2-40B4-BE49-F238E27FC236}">
+                <a16:creationId xmlns:a16="http://schemas.microsoft.com/office/drawing/2014/main" id="{B0136852-C263-58AE-B3A2-82BE180C50B1}"/>
               </a:ext>
             </a:extLst>
           </p:cNvPr>
@@ -6330,7 +6484,7 @@
         </p:nvSpPr>
         <p:spPr>
           <a:xfrm>
-            <a:off x="9703306" y="1477374"/>
+            <a:off x="9057935" y="6503461"/>
             <a:ext cx="1595535" cy="317241"/>
           </a:xfrm>
           <a:prstGeom prst="rect">
@@ -6378,17 +6532,17 @@
                   <a:schemeClr val="tx2"/>
                 </a:solidFill>
               </a:rPr>
-              <a:t>Brake</a:t>
-            </a:r>
-          </a:p>
-        </p:txBody>
-      </p:sp>
-      <p:sp>
-        <p:nvSpPr>
-          <p:cNvPr id="15" name="Rectangle 14">
-            <a:extLst>
-              <a:ext uri="{FF2B5EF4-FFF2-40B4-BE49-F238E27FC236}">
-                <a16:creationId xmlns:a16="http://schemas.microsoft.com/office/drawing/2014/main" id="{4263266B-6E03-53D4-97FE-499955BC35DA}"/>
+              <a:t>Get Off Fuel</a:t>
+            </a:r>
+          </a:p>
+        </p:txBody>
+      </p:sp>
+      <p:sp>
+        <p:nvSpPr>
+          <p:cNvPr id="19" name="Rectangle 18">
+            <a:extLst>
+              <a:ext uri="{FF2B5EF4-FFF2-40B4-BE49-F238E27FC236}">
+                <a16:creationId xmlns:a16="http://schemas.microsoft.com/office/drawing/2014/main" id="{5887B5D4-8008-9128-F533-C1E35FE5B92C}"/>
               </a:ext>
             </a:extLst>
           </p:cNvPr>
@@ -6397,7 +6551,7 @@
         </p:nvSpPr>
         <p:spPr>
           <a:xfrm>
-            <a:off x="1830288" y="3676252"/>
+            <a:off x="9554146" y="6049903"/>
             <a:ext cx="1595535" cy="317241"/>
           </a:xfrm>
           <a:prstGeom prst="rect">
@@ -6445,17 +6599,17 @@
                   <a:schemeClr val="tx2"/>
                 </a:solidFill>
               </a:rPr>
-              <a:t>Auto Climb</a:t>
-            </a:r>
-          </a:p>
-        </p:txBody>
-      </p:sp>
-      <p:sp>
-        <p:nvSpPr>
-          <p:cNvPr id="16" name="Rectangle 15">
-            <a:extLst>
-              <a:ext uri="{FF2B5EF4-FFF2-40B4-BE49-F238E27FC236}">
-                <a16:creationId xmlns:a16="http://schemas.microsoft.com/office/drawing/2014/main" id="{F54D5F66-778A-A89F-468A-3E6C9511C581}"/>
+              <a:t>Reset Position</a:t>
+            </a:r>
+          </a:p>
+        </p:txBody>
+      </p:sp>
+      <p:sp>
+        <p:nvSpPr>
+          <p:cNvPr id="20" name="Rectangle 19">
+            <a:extLst>
+              <a:ext uri="{FF2B5EF4-FFF2-40B4-BE49-F238E27FC236}">
+                <a16:creationId xmlns:a16="http://schemas.microsoft.com/office/drawing/2014/main" id="{310EA12B-9AD3-C372-4AAA-ACD138FBBC4C}"/>
               </a:ext>
             </a:extLst>
           </p:cNvPr>
@@ -6464,8 +6618,8 @@
         </p:nvSpPr>
         <p:spPr>
           <a:xfrm>
-            <a:off x="2134344" y="2991597"/>
-            <a:ext cx="1595535" cy="317241"/>
+            <a:off x="9100369" y="1963707"/>
+            <a:ext cx="1595535" cy="445758"/>
           </a:xfrm>
           <a:prstGeom prst="rect">
             <a:avLst/>
@@ -6512,17 +6666,33 @@
                   <a:schemeClr val="tx2"/>
                 </a:solidFill>
               </a:rPr>
-              <a:t>Override</a:t>
-            </a:r>
-          </a:p>
-        </p:txBody>
-      </p:sp>
-      <p:sp>
-        <p:nvSpPr>
-          <p:cNvPr id="17" name="Rectangle 16">
-            <a:extLst>
-              <a:ext uri="{FF2B5EF4-FFF2-40B4-BE49-F238E27FC236}">
-                <a16:creationId xmlns:a16="http://schemas.microsoft.com/office/drawing/2014/main" id="{D169B6A3-0DA2-9D96-0351-4045F2E2F1E1}"/>
+              <a:t>Just Shoot</a:t>
+            </a:r>
+          </a:p>
+          <a:p>
+            <a:pPr algn="ctr"/>
+            <a:r>
+              <a:rPr lang="en-US" sz="1200" dirty="0">
+                <a:solidFill>
+                  <a:schemeClr val="tx2"/>
+                </a:solidFill>
+              </a:rPr>
+              <a:t>(back pressed)</a:t>
+            </a:r>
+            <a:endParaRPr lang="en-US" dirty="0">
+              <a:solidFill>
+                <a:schemeClr val="tx2"/>
+              </a:solidFill>
+            </a:endParaRPr>
+          </a:p>
+        </p:txBody>
+      </p:sp>
+      <p:sp>
+        <p:nvSpPr>
+          <p:cNvPr id="23" name="Rectangle 22">
+            <a:extLst>
+              <a:ext uri="{FF2B5EF4-FFF2-40B4-BE49-F238E27FC236}">
+                <a16:creationId xmlns:a16="http://schemas.microsoft.com/office/drawing/2014/main" id="{6FB3F50A-FFA8-E4EA-EA5C-F47592E5A084}"/>
               </a:ext>
             </a:extLst>
           </p:cNvPr>
@@ -6531,8 +6701,8 @@
         </p:nvSpPr>
         <p:spPr>
           <a:xfrm>
-            <a:off x="5432996" y="2738408"/>
-            <a:ext cx="1595535" cy="317241"/>
+            <a:off x="2276769" y="3904199"/>
+            <a:ext cx="1776927" cy="317241"/>
           </a:xfrm>
           <a:prstGeom prst="rect">
             <a:avLst/>
@@ -6579,17 +6749,17 @@
                   <a:schemeClr val="tx2"/>
                 </a:solidFill>
               </a:rPr>
-              <a:t>Intake Fuel</a:t>
-            </a:r>
-          </a:p>
-        </p:txBody>
-      </p:sp>
-      <p:sp>
-        <p:nvSpPr>
-          <p:cNvPr id="18" name="Rectangle 17">
-            <a:extLst>
-              <a:ext uri="{FF2B5EF4-FFF2-40B4-BE49-F238E27FC236}">
-                <a16:creationId xmlns:a16="http://schemas.microsoft.com/office/drawing/2014/main" id="{B0136852-C263-58AE-B3A2-82BE180C50B1}"/>
+              <a:t>Retract Climber</a:t>
+            </a:r>
+          </a:p>
+        </p:txBody>
+      </p:sp>
+      <p:sp>
+        <p:nvSpPr>
+          <p:cNvPr id="24" name="Rectangle 23">
+            <a:extLst>
+              <a:ext uri="{FF2B5EF4-FFF2-40B4-BE49-F238E27FC236}">
+                <a16:creationId xmlns:a16="http://schemas.microsoft.com/office/drawing/2014/main" id="{9FC38623-D4B1-E2FF-6BA6-B423FA6F1473}"/>
               </a:ext>
             </a:extLst>
           </p:cNvPr>
@@ -6598,8 +6768,8 @@
         </p:nvSpPr>
         <p:spPr>
           <a:xfrm>
-            <a:off x="3837461" y="2250483"/>
-            <a:ext cx="1595535" cy="317241"/>
+            <a:off x="2276769" y="3429000"/>
+            <a:ext cx="1776927" cy="317241"/>
           </a:xfrm>
           <a:prstGeom prst="rect">
             <a:avLst/>
@@ -6646,17 +6816,17 @@
                   <a:schemeClr val="tx2"/>
                 </a:solidFill>
               </a:rPr>
-              <a:t>Get Off Fuel</a:t>
-            </a:r>
-          </a:p>
-        </p:txBody>
-      </p:sp>
-      <p:sp>
-        <p:nvSpPr>
-          <p:cNvPr id="19" name="Rectangle 18">
-            <a:extLst>
-              <a:ext uri="{FF2B5EF4-FFF2-40B4-BE49-F238E27FC236}">
-                <a16:creationId xmlns:a16="http://schemas.microsoft.com/office/drawing/2014/main" id="{5887B5D4-8008-9128-F533-C1E35FE5B92C}"/>
+              <a:t>Extend Climber</a:t>
+            </a:r>
+          </a:p>
+        </p:txBody>
+      </p:sp>
+      <p:sp>
+        <p:nvSpPr>
+          <p:cNvPr id="26" name="Rectangle 25">
+            <a:extLst>
+              <a:ext uri="{FF2B5EF4-FFF2-40B4-BE49-F238E27FC236}">
+                <a16:creationId xmlns:a16="http://schemas.microsoft.com/office/drawing/2014/main" id="{6B6E82EA-1AE1-CFB3-BE12-C33072D8CBE7}"/>
               </a:ext>
             </a:extLst>
           </p:cNvPr>
@@ -6665,7 +6835,7 @@
         </p:nvSpPr>
         <p:spPr>
           <a:xfrm>
-            <a:off x="6468827" y="2038210"/>
+            <a:off x="2771474" y="5914229"/>
             <a:ext cx="1595535" cy="317241"/>
           </a:xfrm>
           <a:prstGeom prst="rect">
@@ -6707,23 +6877,20 @@
           <a:lstStyle/>
           <a:p>
             <a:pPr algn="ctr"/>
-            <a:r>
-              <a:rPr lang="en-US" dirty="0">
-                <a:solidFill>
-                  <a:schemeClr val="tx2"/>
-                </a:solidFill>
-              </a:rPr>
-              <a:t>Reset Position</a:t>
-            </a:r>
-          </a:p>
-        </p:txBody>
-      </p:sp>
-      <p:sp>
-        <p:nvSpPr>
-          <p:cNvPr id="20" name="Rectangle 19">
-            <a:extLst>
-              <a:ext uri="{FF2B5EF4-FFF2-40B4-BE49-F238E27FC236}">
-                <a16:creationId xmlns:a16="http://schemas.microsoft.com/office/drawing/2014/main" id="{310EA12B-9AD3-C372-4AAA-ACD138FBBC4C}"/>
+            <a:endParaRPr lang="en-US" dirty="0">
+              <a:solidFill>
+                <a:schemeClr val="tx2"/>
+              </a:solidFill>
+            </a:endParaRPr>
+          </a:p>
+        </p:txBody>
+      </p:sp>
+      <p:sp>
+        <p:nvSpPr>
+          <p:cNvPr id="27" name="Rectangle 26">
+            <a:extLst>
+              <a:ext uri="{FF2B5EF4-FFF2-40B4-BE49-F238E27FC236}">
+                <a16:creationId xmlns:a16="http://schemas.microsoft.com/office/drawing/2014/main" id="{536CB937-8976-AE7B-7FE7-929F24F3C592}"/>
               </a:ext>
             </a:extLst>
           </p:cNvPr>
@@ -6732,7 +6899,7 @@
         </p:nvSpPr>
         <p:spPr>
           <a:xfrm>
-            <a:off x="2093066" y="2525630"/>
+            <a:off x="2923874" y="6066629"/>
             <a:ext cx="1595535" cy="317241"/>
           </a:xfrm>
           <a:prstGeom prst="rect">
@@ -6774,23 +6941,20 @@
           <a:lstStyle/>
           <a:p>
             <a:pPr algn="ctr"/>
-            <a:r>
-              <a:rPr lang="en-US" dirty="0">
-                <a:solidFill>
-                  <a:schemeClr val="tx2"/>
-                </a:solidFill>
-              </a:rPr>
-              <a:t>Just Shoot</a:t>
-            </a:r>
-          </a:p>
-        </p:txBody>
-      </p:sp>
-      <p:sp>
-        <p:nvSpPr>
-          <p:cNvPr id="21" name="Rectangle 20">
-            <a:extLst>
-              <a:ext uri="{FF2B5EF4-FFF2-40B4-BE49-F238E27FC236}">
-                <a16:creationId xmlns:a16="http://schemas.microsoft.com/office/drawing/2014/main" id="{C2D4B113-BD39-01A3-8819-0D80F850C080}"/>
+            <a:endParaRPr lang="en-US" dirty="0">
+              <a:solidFill>
+                <a:schemeClr val="tx2"/>
+              </a:solidFill>
+            </a:endParaRPr>
+          </a:p>
+        </p:txBody>
+      </p:sp>
+      <p:sp>
+        <p:nvSpPr>
+          <p:cNvPr id="28" name="Rectangle 27">
+            <a:extLst>
+              <a:ext uri="{FF2B5EF4-FFF2-40B4-BE49-F238E27FC236}">
+                <a16:creationId xmlns:a16="http://schemas.microsoft.com/office/drawing/2014/main" id="{2313DCAD-124D-5850-AD89-3AB6441F9862}"/>
               </a:ext>
             </a:extLst>
           </p:cNvPr>
@@ -6799,8 +6963,8 @@
         </p:nvSpPr>
         <p:spPr>
           <a:xfrm>
-            <a:off x="1316879" y="4668219"/>
-            <a:ext cx="1933508" cy="317241"/>
+            <a:off x="3076274" y="6219029"/>
+            <a:ext cx="1595535" cy="317241"/>
           </a:xfrm>
           <a:prstGeom prst="rect">
             <a:avLst/>
@@ -6841,23 +7005,20 @@
           <a:lstStyle/>
           <a:p>
             <a:pPr algn="ctr"/>
-            <a:r>
-              <a:rPr lang="en-US" dirty="0">
-                <a:solidFill>
-                  <a:schemeClr val="tx2"/>
-                </a:solidFill>
-              </a:rPr>
-              <a:t>Straif Hub R -&gt; L</a:t>
-            </a:r>
-          </a:p>
-        </p:txBody>
-      </p:sp>
-      <p:sp>
-        <p:nvSpPr>
-          <p:cNvPr id="22" name="Rectangle 21">
-            <a:extLst>
-              <a:ext uri="{FF2B5EF4-FFF2-40B4-BE49-F238E27FC236}">
-                <a16:creationId xmlns:a16="http://schemas.microsoft.com/office/drawing/2014/main" id="{5C75FC37-3304-3838-2E62-DFA6B8BCE1F4}"/>
+            <a:endParaRPr lang="en-US" dirty="0">
+              <a:solidFill>
+                <a:schemeClr val="tx2"/>
+              </a:solidFill>
+            </a:endParaRPr>
+          </a:p>
+        </p:txBody>
+      </p:sp>
+      <p:sp>
+        <p:nvSpPr>
+          <p:cNvPr id="29" name="Rectangle 28">
+            <a:extLst>
+              <a:ext uri="{FF2B5EF4-FFF2-40B4-BE49-F238E27FC236}">
+                <a16:creationId xmlns:a16="http://schemas.microsoft.com/office/drawing/2014/main" id="{530B3026-3929-68C0-D9CA-51C0578C6396}"/>
               </a:ext>
             </a:extLst>
           </p:cNvPr>
@@ -6866,8 +7027,8 @@
         </p:nvSpPr>
         <p:spPr>
           <a:xfrm>
-            <a:off x="738356" y="5228226"/>
-            <a:ext cx="1933508" cy="317241"/>
+            <a:off x="3076274" y="5268629"/>
+            <a:ext cx="1595535" cy="490853"/>
           </a:xfrm>
           <a:prstGeom prst="rect">
             <a:avLst/>
@@ -6914,17 +7075,771 @@
                   <a:schemeClr val="tx2"/>
                 </a:solidFill>
               </a:rPr>
-              <a:t>Straif Hub L-&gt;R</a:t>
-            </a:r>
-          </a:p>
-        </p:txBody>
-      </p:sp>
-      <p:sp>
-        <p:nvSpPr>
-          <p:cNvPr id="23" name="Rectangle 22">
-            <a:extLst>
-              <a:ext uri="{FF2B5EF4-FFF2-40B4-BE49-F238E27FC236}">
-                <a16:creationId xmlns:a16="http://schemas.microsoft.com/office/drawing/2014/main" id="{6FB3F50A-FFA8-E4EA-EA5C-F47592E5A084}"/>
+              <a:t>Retract Intake </a:t>
+            </a:r>
+            <a:r>
+              <a:rPr lang="en-US" sz="1200" dirty="0">
+                <a:solidFill>
+                  <a:schemeClr val="tx2"/>
+                </a:solidFill>
+              </a:rPr>
+              <a:t>(up)</a:t>
+            </a:r>
+            <a:endParaRPr lang="en-US" dirty="0">
+              <a:solidFill>
+                <a:schemeClr val="tx2"/>
+              </a:solidFill>
+            </a:endParaRPr>
+          </a:p>
+        </p:txBody>
+      </p:sp>
+      <p:sp>
+        <p:nvSpPr>
+          <p:cNvPr id="37" name="TextBox 36">
+            <a:extLst>
+              <a:ext uri="{FF2B5EF4-FFF2-40B4-BE49-F238E27FC236}">
+                <a16:creationId xmlns:a16="http://schemas.microsoft.com/office/drawing/2014/main" id="{DB13644A-9285-9111-3BBE-6AB488C981FF}"/>
+              </a:ext>
+            </a:extLst>
+          </p:cNvPr>
+          <p:cNvSpPr txBox="1"/>
+          <p:nvPr/>
+        </p:nvSpPr>
+        <p:spPr>
+          <a:xfrm>
+            <a:off x="4410360" y="1516588"/>
+            <a:ext cx="977220" cy="369332"/>
+          </a:xfrm>
+          <a:prstGeom prst="rect">
+            <a:avLst/>
+          </a:prstGeom>
+          <a:noFill/>
+        </p:spPr>
+        <p:txBody>
+          <a:bodyPr wrap="square">
+            <a:spAutoFit/>
+          </a:bodyPr>
+          <a:lstStyle/>
+          <a:p>
+            <a:pPr algn="ctr"/>
+            <a:r>
+              <a:rPr lang="en-US" sz="1800" dirty="0">
+                <a:solidFill>
+                  <a:schemeClr val="accent2">
+                    <a:lumMod val="60000"/>
+                    <a:lumOff val="40000"/>
+                  </a:schemeClr>
+                </a:solidFill>
+              </a:rPr>
+              <a:t>Bumper</a:t>
+            </a:r>
+          </a:p>
+        </p:txBody>
+      </p:sp>
+      <p:sp>
+        <p:nvSpPr>
+          <p:cNvPr id="38" name="TextBox 37">
+            <a:extLst>
+              <a:ext uri="{FF2B5EF4-FFF2-40B4-BE49-F238E27FC236}">
+                <a16:creationId xmlns:a16="http://schemas.microsoft.com/office/drawing/2014/main" id="{663C2E0C-F6E9-C73C-F7F2-26D2724A3EC5}"/>
+              </a:ext>
+            </a:extLst>
+          </p:cNvPr>
+          <p:cNvSpPr txBox="1"/>
+          <p:nvPr/>
+        </p:nvSpPr>
+        <p:spPr>
+          <a:xfrm>
+            <a:off x="6879240" y="1504584"/>
+            <a:ext cx="977220" cy="369332"/>
+          </a:xfrm>
+          <a:prstGeom prst="rect">
+            <a:avLst/>
+          </a:prstGeom>
+          <a:noFill/>
+        </p:spPr>
+        <p:txBody>
+          <a:bodyPr wrap="square">
+            <a:spAutoFit/>
+          </a:bodyPr>
+          <a:lstStyle/>
+          <a:p>
+            <a:pPr algn="ctr"/>
+            <a:r>
+              <a:rPr lang="en-US" sz="1800" dirty="0">
+                <a:solidFill>
+                  <a:schemeClr val="accent2">
+                    <a:lumMod val="60000"/>
+                    <a:lumOff val="40000"/>
+                  </a:schemeClr>
+                </a:solidFill>
+              </a:rPr>
+              <a:t>Bumper</a:t>
+            </a:r>
+          </a:p>
+        </p:txBody>
+      </p:sp>
+      <p:sp>
+        <p:nvSpPr>
+          <p:cNvPr id="40" name="TextBox 39">
+            <a:extLst>
+              <a:ext uri="{FF2B5EF4-FFF2-40B4-BE49-F238E27FC236}">
+                <a16:creationId xmlns:a16="http://schemas.microsoft.com/office/drawing/2014/main" id="{5FC26886-D16D-E4C3-22DA-B6459CC232DD}"/>
+              </a:ext>
+            </a:extLst>
+          </p:cNvPr>
+          <p:cNvSpPr txBox="1"/>
+          <p:nvPr/>
+        </p:nvSpPr>
+        <p:spPr>
+          <a:xfrm>
+            <a:off x="3743261" y="1667107"/>
+            <a:ext cx="338554" cy="580800"/>
+          </a:xfrm>
+          <a:prstGeom prst="rect">
+            <a:avLst/>
+          </a:prstGeom>
+          <a:noFill/>
+        </p:spPr>
+        <p:txBody>
+          <a:bodyPr vert="vert270" wrap="none" lIns="0" tIns="0" rIns="91440" bIns="0" rtlCol="0">
+            <a:spAutoFit/>
+          </a:bodyPr>
+          <a:lstStyle/>
+          <a:p>
+            <a:pPr algn="ctr"/>
+            <a:r>
+              <a:rPr lang="en-US" sz="1600" dirty="0">
+                <a:solidFill>
+                  <a:schemeClr val="bg2"/>
+                </a:solidFill>
+              </a:rPr>
+              <a:t>Trigger</a:t>
+            </a:r>
+          </a:p>
+        </p:txBody>
+      </p:sp>
+      <p:sp>
+        <p:nvSpPr>
+          <p:cNvPr id="41" name="TextBox 40">
+            <a:extLst>
+              <a:ext uri="{FF2B5EF4-FFF2-40B4-BE49-F238E27FC236}">
+                <a16:creationId xmlns:a16="http://schemas.microsoft.com/office/drawing/2014/main" id="{4AAA1677-C84E-01A0-4838-DEC253AEDD33}"/>
+              </a:ext>
+            </a:extLst>
+          </p:cNvPr>
+          <p:cNvSpPr txBox="1"/>
+          <p:nvPr/>
+        </p:nvSpPr>
+        <p:spPr>
+          <a:xfrm>
+            <a:off x="8169225" y="1650792"/>
+            <a:ext cx="338554" cy="580800"/>
+          </a:xfrm>
+          <a:prstGeom prst="rect">
+            <a:avLst/>
+          </a:prstGeom>
+          <a:noFill/>
+        </p:spPr>
+        <p:txBody>
+          <a:bodyPr vert="vert270" wrap="none" lIns="0" tIns="0" rIns="91440" bIns="0" rtlCol="0">
+            <a:spAutoFit/>
+          </a:bodyPr>
+          <a:lstStyle/>
+          <a:p>
+            <a:pPr algn="ctr"/>
+            <a:r>
+              <a:rPr lang="en-US" sz="1600" dirty="0">
+                <a:solidFill>
+                  <a:schemeClr val="bg2"/>
+                </a:solidFill>
+              </a:rPr>
+              <a:t>Trigger</a:t>
+            </a:r>
+          </a:p>
+        </p:txBody>
+      </p:sp>
+      <p:sp>
+        <p:nvSpPr>
+          <p:cNvPr id="30" name="TextBox 29">
+            <a:extLst>
+              <a:ext uri="{FF2B5EF4-FFF2-40B4-BE49-F238E27FC236}">
+                <a16:creationId xmlns:a16="http://schemas.microsoft.com/office/drawing/2014/main" id="{4DD483E6-0944-EC88-9A25-F3839E12ED50}"/>
+              </a:ext>
+            </a:extLst>
+          </p:cNvPr>
+          <p:cNvSpPr txBox="1"/>
+          <p:nvPr/>
+        </p:nvSpPr>
+        <p:spPr>
+          <a:xfrm rot="5400000">
+            <a:off x="6410673" y="2179293"/>
+            <a:ext cx="276999" cy="306301"/>
+          </a:xfrm>
+          <a:prstGeom prst="rect">
+            <a:avLst/>
+          </a:prstGeom>
+          <a:noFill/>
+        </p:spPr>
+        <p:txBody>
+          <a:bodyPr vert="vert270" wrap="none" lIns="0" tIns="0" rIns="91440" bIns="0" rtlCol="0">
+            <a:spAutoFit/>
+          </a:bodyPr>
+          <a:lstStyle/>
+          <a:p>
+            <a:pPr algn="ctr"/>
+            <a:r>
+              <a:rPr lang="en-US" sz="1200" dirty="0">
+                <a:solidFill>
+                  <a:schemeClr val="accent2">
+                    <a:lumMod val="60000"/>
+                    <a:lumOff val="40000"/>
+                  </a:schemeClr>
+                </a:solidFill>
+              </a:rPr>
+              <a:t>start</a:t>
+            </a:r>
+          </a:p>
+        </p:txBody>
+      </p:sp>
+      <p:sp>
+        <p:nvSpPr>
+          <p:cNvPr id="31" name="TextBox 30">
+            <a:extLst>
+              <a:ext uri="{FF2B5EF4-FFF2-40B4-BE49-F238E27FC236}">
+                <a16:creationId xmlns:a16="http://schemas.microsoft.com/office/drawing/2014/main" id="{2E389938-BC74-9774-0C0E-5E96467866AF}"/>
+              </a:ext>
+            </a:extLst>
+          </p:cNvPr>
+          <p:cNvSpPr txBox="1"/>
+          <p:nvPr/>
+        </p:nvSpPr>
+        <p:spPr>
+          <a:xfrm rot="5400000">
+            <a:off x="5470425" y="2191881"/>
+            <a:ext cx="276999" cy="323808"/>
+          </a:xfrm>
+          <a:prstGeom prst="rect">
+            <a:avLst/>
+          </a:prstGeom>
+          <a:noFill/>
+        </p:spPr>
+        <p:txBody>
+          <a:bodyPr vert="vert270" wrap="none" lIns="0" tIns="0" rIns="91440" bIns="0" rtlCol="0">
+            <a:spAutoFit/>
+          </a:bodyPr>
+          <a:lstStyle/>
+          <a:p>
+            <a:pPr algn="ctr"/>
+            <a:r>
+              <a:rPr lang="en-US" sz="1200" dirty="0">
+                <a:solidFill>
+                  <a:schemeClr val="accent2">
+                    <a:lumMod val="60000"/>
+                    <a:lumOff val="40000"/>
+                  </a:schemeClr>
+                </a:solidFill>
+              </a:rPr>
+              <a:t>back</a:t>
+            </a:r>
+          </a:p>
+        </p:txBody>
+      </p:sp>
+      <p:cxnSp>
+        <p:nvCxnSpPr>
+          <p:cNvPr id="32" name="Straight Arrow Connector 31">
+            <a:extLst>
+              <a:ext uri="{FF2B5EF4-FFF2-40B4-BE49-F238E27FC236}">
+                <a16:creationId xmlns:a16="http://schemas.microsoft.com/office/drawing/2014/main" id="{B3C5C913-85F8-2C50-28A3-5D5BB59BBE80}"/>
+              </a:ext>
+            </a:extLst>
+          </p:cNvPr>
+          <p:cNvCxnSpPr>
+            <a:cxnSpLocks/>
+            <a:stCxn id="11" idx="3"/>
+            <a:endCxn id="40" idx="1"/>
+          </p:cNvCxnSpPr>
+          <p:nvPr/>
+        </p:nvCxnSpPr>
+        <p:spPr>
+          <a:xfrm flipV="1">
+            <a:off x="3076274" y="1957507"/>
+            <a:ext cx="666987" cy="613141"/>
+          </a:xfrm>
+          <a:prstGeom prst="straightConnector1">
+            <a:avLst/>
+          </a:prstGeom>
+          <a:ln>
+            <a:solidFill>
+              <a:srgbClr val="FF0000"/>
+            </a:solidFill>
+            <a:tailEnd type="triangle"/>
+          </a:ln>
+        </p:spPr>
+        <p:style>
+          <a:lnRef idx="2">
+            <a:schemeClr val="accent1"/>
+          </a:lnRef>
+          <a:fillRef idx="0">
+            <a:schemeClr val="accent1"/>
+          </a:fillRef>
+          <a:effectRef idx="1">
+            <a:schemeClr val="accent1"/>
+          </a:effectRef>
+          <a:fontRef idx="minor">
+            <a:schemeClr val="tx1"/>
+          </a:fontRef>
+        </p:style>
+      </p:cxnSp>
+      <p:cxnSp>
+        <p:nvCxnSpPr>
+          <p:cNvPr id="33" name="Straight Arrow Connector 32">
+            <a:extLst>
+              <a:ext uri="{FF2B5EF4-FFF2-40B4-BE49-F238E27FC236}">
+                <a16:creationId xmlns:a16="http://schemas.microsoft.com/office/drawing/2014/main" id="{D0DEA290-90F8-28D1-6CBD-C733FE940D32}"/>
+              </a:ext>
+            </a:extLst>
+          </p:cNvPr>
+          <p:cNvCxnSpPr>
+            <a:cxnSpLocks/>
+            <a:stCxn id="16" idx="2"/>
+            <a:endCxn id="31" idx="1"/>
+          </p:cNvCxnSpPr>
+          <p:nvPr/>
+        </p:nvCxnSpPr>
+        <p:spPr>
+          <a:xfrm flipH="1">
+            <a:off x="5608925" y="700260"/>
+            <a:ext cx="397370" cy="1515026"/>
+          </a:xfrm>
+          <a:prstGeom prst="straightConnector1">
+            <a:avLst/>
+          </a:prstGeom>
+          <a:ln>
+            <a:solidFill>
+              <a:srgbClr val="FF0000"/>
+            </a:solidFill>
+            <a:tailEnd type="triangle"/>
+          </a:ln>
+        </p:spPr>
+        <p:style>
+          <a:lnRef idx="2">
+            <a:schemeClr val="accent1"/>
+          </a:lnRef>
+          <a:fillRef idx="0">
+            <a:schemeClr val="accent1"/>
+          </a:fillRef>
+          <a:effectRef idx="1">
+            <a:schemeClr val="accent1"/>
+          </a:effectRef>
+          <a:fontRef idx="minor">
+            <a:schemeClr val="tx1"/>
+          </a:fontRef>
+        </p:style>
+      </p:cxnSp>
+      <p:cxnSp>
+        <p:nvCxnSpPr>
+          <p:cNvPr id="34" name="Straight Arrow Connector 33">
+            <a:extLst>
+              <a:ext uri="{FF2B5EF4-FFF2-40B4-BE49-F238E27FC236}">
+                <a16:creationId xmlns:a16="http://schemas.microsoft.com/office/drawing/2014/main" id="{D4880E23-506E-F8A1-178D-DD14868625AA}"/>
+              </a:ext>
+            </a:extLst>
+          </p:cNvPr>
+          <p:cNvCxnSpPr/>
+          <p:nvPr/>
+        </p:nvCxnSpPr>
+        <p:spPr>
+          <a:xfrm>
+            <a:off x="10021583" y="4194873"/>
+            <a:ext cx="400178" cy="829107"/>
+          </a:xfrm>
+          <a:prstGeom prst="straightConnector1">
+            <a:avLst/>
+          </a:prstGeom>
+          <a:ln>
+            <a:solidFill>
+              <a:srgbClr val="FF0000"/>
+            </a:solidFill>
+            <a:tailEnd type="triangle"/>
+          </a:ln>
+        </p:spPr>
+        <p:style>
+          <a:lnRef idx="2">
+            <a:schemeClr val="accent1"/>
+          </a:lnRef>
+          <a:fillRef idx="0">
+            <a:schemeClr val="accent1"/>
+          </a:fillRef>
+          <a:effectRef idx="1">
+            <a:schemeClr val="accent1"/>
+          </a:effectRef>
+          <a:fontRef idx="minor">
+            <a:schemeClr val="tx1"/>
+          </a:fontRef>
+        </p:style>
+      </p:cxnSp>
+      <p:cxnSp>
+        <p:nvCxnSpPr>
+          <p:cNvPr id="35" name="Straight Arrow Connector 34">
+            <a:extLst>
+              <a:ext uri="{FF2B5EF4-FFF2-40B4-BE49-F238E27FC236}">
+                <a16:creationId xmlns:a16="http://schemas.microsoft.com/office/drawing/2014/main" id="{1CBE9FD5-C548-4E8D-1796-AB52E919A60F}"/>
+              </a:ext>
+            </a:extLst>
+          </p:cNvPr>
+          <p:cNvCxnSpPr/>
+          <p:nvPr/>
+        </p:nvCxnSpPr>
+        <p:spPr>
+          <a:xfrm>
+            <a:off x="10173983" y="4347273"/>
+            <a:ext cx="400178" cy="829107"/>
+          </a:xfrm>
+          <a:prstGeom prst="straightConnector1">
+            <a:avLst/>
+          </a:prstGeom>
+          <a:ln>
+            <a:solidFill>
+              <a:srgbClr val="FF0000"/>
+            </a:solidFill>
+            <a:tailEnd type="triangle"/>
+          </a:ln>
+        </p:spPr>
+        <p:style>
+          <a:lnRef idx="2">
+            <a:schemeClr val="accent1"/>
+          </a:lnRef>
+          <a:fillRef idx="0">
+            <a:schemeClr val="accent1"/>
+          </a:fillRef>
+          <a:effectRef idx="1">
+            <a:schemeClr val="accent1"/>
+          </a:effectRef>
+          <a:fontRef idx="minor">
+            <a:schemeClr val="tx1"/>
+          </a:fontRef>
+        </p:style>
+      </p:cxnSp>
+      <p:cxnSp>
+        <p:nvCxnSpPr>
+          <p:cNvPr id="36" name="Straight Arrow Connector 35">
+            <a:extLst>
+              <a:ext uri="{FF2B5EF4-FFF2-40B4-BE49-F238E27FC236}">
+                <a16:creationId xmlns:a16="http://schemas.microsoft.com/office/drawing/2014/main" id="{9A5A32E0-CA1D-F4D9-E93F-E30902460FBC}"/>
+              </a:ext>
+            </a:extLst>
+          </p:cNvPr>
+          <p:cNvCxnSpPr/>
+          <p:nvPr/>
+        </p:nvCxnSpPr>
+        <p:spPr>
+          <a:xfrm>
+            <a:off x="10326383" y="4499673"/>
+            <a:ext cx="400178" cy="829107"/>
+          </a:xfrm>
+          <a:prstGeom prst="straightConnector1">
+            <a:avLst/>
+          </a:prstGeom>
+          <a:ln>
+            <a:solidFill>
+              <a:srgbClr val="FF0000"/>
+            </a:solidFill>
+            <a:tailEnd type="triangle"/>
+          </a:ln>
+        </p:spPr>
+        <p:style>
+          <a:lnRef idx="2">
+            <a:schemeClr val="accent1"/>
+          </a:lnRef>
+          <a:fillRef idx="0">
+            <a:schemeClr val="accent1"/>
+          </a:fillRef>
+          <a:effectRef idx="1">
+            <a:schemeClr val="accent1"/>
+          </a:effectRef>
+          <a:fontRef idx="minor">
+            <a:schemeClr val="tx1"/>
+          </a:fontRef>
+        </p:style>
+      </p:cxnSp>
+      <p:cxnSp>
+        <p:nvCxnSpPr>
+          <p:cNvPr id="39" name="Straight Arrow Connector 38">
+            <a:extLst>
+              <a:ext uri="{FF2B5EF4-FFF2-40B4-BE49-F238E27FC236}">
+                <a16:creationId xmlns:a16="http://schemas.microsoft.com/office/drawing/2014/main" id="{7CC5CA1E-2771-5D66-2E70-B26BC853E70E}"/>
+              </a:ext>
+            </a:extLst>
+          </p:cNvPr>
+          <p:cNvCxnSpPr>
+            <a:cxnSpLocks/>
+            <a:stCxn id="24" idx="3"/>
+          </p:cNvCxnSpPr>
+          <p:nvPr/>
+        </p:nvCxnSpPr>
+        <p:spPr>
+          <a:xfrm flipV="1">
+            <a:off x="4053696" y="3074498"/>
+            <a:ext cx="1326482" cy="513123"/>
+          </a:xfrm>
+          <a:prstGeom prst="straightConnector1">
+            <a:avLst/>
+          </a:prstGeom>
+          <a:ln>
+            <a:solidFill>
+              <a:srgbClr val="FF0000"/>
+            </a:solidFill>
+            <a:tailEnd type="triangle"/>
+          </a:ln>
+        </p:spPr>
+        <p:style>
+          <a:lnRef idx="2">
+            <a:schemeClr val="accent1"/>
+          </a:lnRef>
+          <a:fillRef idx="0">
+            <a:schemeClr val="accent1"/>
+          </a:fillRef>
+          <a:effectRef idx="1">
+            <a:schemeClr val="accent1"/>
+          </a:effectRef>
+          <a:fontRef idx="minor">
+            <a:schemeClr val="tx1"/>
+          </a:fontRef>
+        </p:style>
+      </p:cxnSp>
+      <p:cxnSp>
+        <p:nvCxnSpPr>
+          <p:cNvPr id="42" name="Straight Arrow Connector 41">
+            <a:extLst>
+              <a:ext uri="{FF2B5EF4-FFF2-40B4-BE49-F238E27FC236}">
+                <a16:creationId xmlns:a16="http://schemas.microsoft.com/office/drawing/2014/main" id="{C523899B-4D9D-5339-9C5E-BFA19B705426}"/>
+              </a:ext>
+            </a:extLst>
+          </p:cNvPr>
+          <p:cNvCxnSpPr>
+            <a:cxnSpLocks/>
+            <a:stCxn id="23" idx="3"/>
+          </p:cNvCxnSpPr>
+          <p:nvPr/>
+        </p:nvCxnSpPr>
+        <p:spPr>
+          <a:xfrm flipV="1">
+            <a:off x="4053696" y="3604556"/>
+            <a:ext cx="1333884" cy="458264"/>
+          </a:xfrm>
+          <a:prstGeom prst="straightConnector1">
+            <a:avLst/>
+          </a:prstGeom>
+          <a:ln>
+            <a:solidFill>
+              <a:srgbClr val="FF0000"/>
+            </a:solidFill>
+            <a:tailEnd type="triangle"/>
+          </a:ln>
+        </p:spPr>
+        <p:style>
+          <a:lnRef idx="2">
+            <a:schemeClr val="accent1"/>
+          </a:lnRef>
+          <a:fillRef idx="0">
+            <a:schemeClr val="accent1"/>
+          </a:fillRef>
+          <a:effectRef idx="1">
+            <a:schemeClr val="accent1"/>
+          </a:effectRef>
+          <a:fontRef idx="minor">
+            <a:schemeClr val="tx1"/>
+          </a:fontRef>
+        </p:style>
+      </p:cxnSp>
+      <p:cxnSp>
+        <p:nvCxnSpPr>
+          <p:cNvPr id="43" name="Straight Arrow Connector 42">
+            <a:extLst>
+              <a:ext uri="{FF2B5EF4-FFF2-40B4-BE49-F238E27FC236}">
+                <a16:creationId xmlns:a16="http://schemas.microsoft.com/office/drawing/2014/main" id="{8BB9347A-1448-9C36-E156-00C8C555592D}"/>
+              </a:ext>
+            </a:extLst>
+          </p:cNvPr>
+          <p:cNvCxnSpPr>
+            <a:cxnSpLocks/>
+            <a:stCxn id="17" idx="3"/>
+            <a:endCxn id="40" idx="1"/>
+          </p:cNvCxnSpPr>
+          <p:nvPr/>
+        </p:nvCxnSpPr>
+        <p:spPr>
+          <a:xfrm>
+            <a:off x="3045288" y="1771531"/>
+            <a:ext cx="697973" cy="185976"/>
+          </a:xfrm>
+          <a:prstGeom prst="straightConnector1">
+            <a:avLst/>
+          </a:prstGeom>
+          <a:ln>
+            <a:solidFill>
+              <a:srgbClr val="FF0000"/>
+            </a:solidFill>
+            <a:tailEnd type="triangle"/>
+          </a:ln>
+        </p:spPr>
+        <p:style>
+          <a:lnRef idx="2">
+            <a:schemeClr val="accent1"/>
+          </a:lnRef>
+          <a:fillRef idx="0">
+            <a:schemeClr val="accent1"/>
+          </a:fillRef>
+          <a:effectRef idx="1">
+            <a:schemeClr val="accent1"/>
+          </a:effectRef>
+          <a:fontRef idx="minor">
+            <a:schemeClr val="tx1"/>
+          </a:fontRef>
+        </p:style>
+      </p:cxnSp>
+      <p:cxnSp>
+        <p:nvCxnSpPr>
+          <p:cNvPr id="44" name="Straight Arrow Connector 43">
+            <a:extLst>
+              <a:ext uri="{FF2B5EF4-FFF2-40B4-BE49-F238E27FC236}">
+                <a16:creationId xmlns:a16="http://schemas.microsoft.com/office/drawing/2014/main" id="{73E7EA0A-B3C2-81CC-41E8-496E73B19E76}"/>
+              </a:ext>
+            </a:extLst>
+          </p:cNvPr>
+          <p:cNvCxnSpPr>
+            <a:cxnSpLocks/>
+            <a:stCxn id="29" idx="0"/>
+          </p:cNvCxnSpPr>
+          <p:nvPr/>
+        </p:nvCxnSpPr>
+        <p:spPr>
+          <a:xfrm flipV="1">
+            <a:off x="3874042" y="3350062"/>
+            <a:ext cx="1303164" cy="1918567"/>
+          </a:xfrm>
+          <a:prstGeom prst="straightConnector1">
+            <a:avLst/>
+          </a:prstGeom>
+          <a:ln>
+            <a:solidFill>
+              <a:srgbClr val="FF0000"/>
+            </a:solidFill>
+            <a:tailEnd type="triangle"/>
+          </a:ln>
+        </p:spPr>
+        <p:style>
+          <a:lnRef idx="2">
+            <a:schemeClr val="accent1"/>
+          </a:lnRef>
+          <a:fillRef idx="0">
+            <a:schemeClr val="accent1"/>
+          </a:fillRef>
+          <a:effectRef idx="1">
+            <a:schemeClr val="accent1"/>
+          </a:effectRef>
+          <a:fontRef idx="minor">
+            <a:schemeClr val="tx1"/>
+          </a:fontRef>
+        </p:style>
+      </p:cxnSp>
+      <p:cxnSp>
+        <p:nvCxnSpPr>
+          <p:cNvPr id="45" name="Straight Arrow Connector 44">
+            <a:extLst>
+              <a:ext uri="{FF2B5EF4-FFF2-40B4-BE49-F238E27FC236}">
+                <a16:creationId xmlns:a16="http://schemas.microsoft.com/office/drawing/2014/main" id="{8DDF0C2D-32E3-CA34-48C3-798CBE854D40}"/>
+              </a:ext>
+            </a:extLst>
+          </p:cNvPr>
+          <p:cNvCxnSpPr>
+            <a:cxnSpLocks/>
+            <a:stCxn id="49" idx="0"/>
+          </p:cNvCxnSpPr>
+          <p:nvPr/>
+        </p:nvCxnSpPr>
+        <p:spPr>
+          <a:xfrm flipH="1" flipV="1">
+            <a:off x="5696657" y="3350062"/>
+            <a:ext cx="6847" cy="1957340"/>
+          </a:xfrm>
+          <a:prstGeom prst="straightConnector1">
+            <a:avLst/>
+          </a:prstGeom>
+          <a:ln>
+            <a:solidFill>
+              <a:srgbClr val="FF0000"/>
+            </a:solidFill>
+            <a:tailEnd type="triangle"/>
+          </a:ln>
+        </p:spPr>
+        <p:style>
+          <a:lnRef idx="2">
+            <a:schemeClr val="accent1"/>
+          </a:lnRef>
+          <a:fillRef idx="0">
+            <a:schemeClr val="accent1"/>
+          </a:fillRef>
+          <a:effectRef idx="1">
+            <a:schemeClr val="accent1"/>
+          </a:effectRef>
+          <a:fontRef idx="minor">
+            <a:schemeClr val="tx1"/>
+          </a:fontRef>
+        </p:style>
+      </p:cxnSp>
+      <p:cxnSp>
+        <p:nvCxnSpPr>
+          <p:cNvPr id="46" name="Straight Arrow Connector 45">
+            <a:extLst>
+              <a:ext uri="{FF2B5EF4-FFF2-40B4-BE49-F238E27FC236}">
+                <a16:creationId xmlns:a16="http://schemas.microsoft.com/office/drawing/2014/main" id="{B2325063-E19B-E3AD-067B-B0DBB5BA31A5}"/>
+              </a:ext>
+            </a:extLst>
+          </p:cNvPr>
+          <p:cNvCxnSpPr>
+            <a:cxnSpLocks/>
+            <a:stCxn id="14" idx="1"/>
+          </p:cNvCxnSpPr>
+          <p:nvPr/>
+        </p:nvCxnSpPr>
+        <p:spPr>
+          <a:xfrm flipH="1" flipV="1">
+            <a:off x="7482254" y="2969062"/>
+            <a:ext cx="1648772" cy="539621"/>
+          </a:xfrm>
+          <a:prstGeom prst="straightConnector1">
+            <a:avLst/>
+          </a:prstGeom>
+          <a:ln>
+            <a:solidFill>
+              <a:srgbClr val="FF0000"/>
+            </a:solidFill>
+            <a:tailEnd type="triangle"/>
+          </a:ln>
+        </p:spPr>
+        <p:style>
+          <a:lnRef idx="2">
+            <a:schemeClr val="accent1"/>
+          </a:lnRef>
+          <a:fillRef idx="0">
+            <a:schemeClr val="accent1"/>
+          </a:fillRef>
+          <a:effectRef idx="1">
+            <a:schemeClr val="accent1"/>
+          </a:effectRef>
+          <a:fontRef idx="minor">
+            <a:schemeClr val="tx1"/>
+          </a:fontRef>
+        </p:style>
+      </p:cxnSp>
+      <p:sp>
+        <p:nvSpPr>
+          <p:cNvPr id="49" name="Rectangle 48">
+            <a:extLst>
+              <a:ext uri="{FF2B5EF4-FFF2-40B4-BE49-F238E27FC236}">
+                <a16:creationId xmlns:a16="http://schemas.microsoft.com/office/drawing/2014/main" id="{0E13D29F-7527-67DC-910F-7C75EBB88EAA}"/>
               </a:ext>
             </a:extLst>
           </p:cNvPr>
@@ -6933,8 +7848,8 @@
         </p:nvSpPr>
         <p:spPr>
           <a:xfrm>
-            <a:off x="395447" y="1477373"/>
-            <a:ext cx="1776927" cy="317241"/>
+            <a:off x="4905736" y="5307402"/>
+            <a:ext cx="1595535" cy="471859"/>
           </a:xfrm>
           <a:prstGeom prst="rect">
             <a:avLst/>
@@ -6981,134 +7896,16 @@
                   <a:schemeClr val="tx2"/>
                 </a:solidFill>
               </a:rPr>
-              <a:t>Retract Climber</a:t>
-            </a:r>
-          </a:p>
-        </p:txBody>
-      </p:sp>
-      <p:sp>
-        <p:nvSpPr>
-          <p:cNvPr id="24" name="Rectangle 23">
-            <a:extLst>
-              <a:ext uri="{FF2B5EF4-FFF2-40B4-BE49-F238E27FC236}">
-                <a16:creationId xmlns:a16="http://schemas.microsoft.com/office/drawing/2014/main" id="{9FC38623-D4B1-E2FF-6BA6-B423FA6F1473}"/>
-              </a:ext>
-            </a:extLst>
-          </p:cNvPr>
-          <p:cNvSpPr/>
-          <p:nvPr/>
-        </p:nvSpPr>
-        <p:spPr>
-          <a:xfrm>
-            <a:off x="393959" y="1934506"/>
-            <a:ext cx="1776927" cy="317241"/>
-          </a:xfrm>
-          <a:prstGeom prst="rect">
-            <a:avLst/>
-          </a:prstGeom>
-          <a:solidFill>
-            <a:schemeClr val="accent6">
-              <a:lumMod val="20000"/>
-              <a:lumOff val="80000"/>
-            </a:schemeClr>
-          </a:solidFill>
-          <a:ln>
-            <a:solidFill>
-              <a:schemeClr val="accent2">
-                <a:lumMod val="20000"/>
-                <a:lumOff val="80000"/>
-              </a:schemeClr>
-            </a:solidFill>
-          </a:ln>
-        </p:spPr>
-        <p:style>
-          <a:lnRef idx="2">
-            <a:schemeClr val="accent1">
-              <a:shade val="15000"/>
-            </a:schemeClr>
-          </a:lnRef>
-          <a:fillRef idx="1">
-            <a:schemeClr val="accent1"/>
-          </a:fillRef>
-          <a:effectRef idx="0">
-            <a:schemeClr val="accent1"/>
-          </a:effectRef>
-          <a:fontRef idx="minor">
-            <a:schemeClr val="lt1"/>
-          </a:fontRef>
-        </p:style>
-        <p:txBody>
-          <a:bodyPr rtlCol="0" anchor="ctr"/>
-          <a:lstStyle/>
-          <a:p>
-            <a:pPr algn="ctr"/>
-            <a:r>
-              <a:rPr lang="en-US" dirty="0">
+              <a:t>Deploy Intake </a:t>
+            </a:r>
+            <a:r>
+              <a:rPr lang="en-US" sz="1200" dirty="0">
                 <a:solidFill>
                   <a:schemeClr val="tx2"/>
                 </a:solidFill>
               </a:rPr>
-              <a:t>Extend Climber</a:t>
-            </a:r>
-          </a:p>
-        </p:txBody>
-      </p:sp>
-      <p:sp>
-        <p:nvSpPr>
-          <p:cNvPr id="25" name="Rectangle 24">
-            <a:extLst>
-              <a:ext uri="{FF2B5EF4-FFF2-40B4-BE49-F238E27FC236}">
-                <a16:creationId xmlns:a16="http://schemas.microsoft.com/office/drawing/2014/main" id="{652C7253-60E3-A184-4D6E-E07579E3A8CC}"/>
-              </a:ext>
-            </a:extLst>
-          </p:cNvPr>
-          <p:cNvSpPr/>
-          <p:nvPr/>
-        </p:nvSpPr>
-        <p:spPr>
-          <a:xfrm>
-            <a:off x="8905536" y="3874797"/>
-            <a:ext cx="1595535" cy="317241"/>
-          </a:xfrm>
-          <a:prstGeom prst="rect">
-            <a:avLst/>
-          </a:prstGeom>
-          <a:solidFill>
-            <a:schemeClr val="accent6">
-              <a:lumMod val="20000"/>
-              <a:lumOff val="80000"/>
-            </a:schemeClr>
-          </a:solidFill>
-          <a:ln>
-            <a:solidFill>
-              <a:schemeClr val="accent2">
-                <a:lumMod val="20000"/>
-                <a:lumOff val="80000"/>
-              </a:schemeClr>
-            </a:solidFill>
-          </a:ln>
-        </p:spPr>
-        <p:style>
-          <a:lnRef idx="2">
-            <a:schemeClr val="accent1">
-              <a:shade val="15000"/>
-            </a:schemeClr>
-          </a:lnRef>
-          <a:fillRef idx="1">
-            <a:schemeClr val="accent1"/>
-          </a:fillRef>
-          <a:effectRef idx="0">
-            <a:schemeClr val="accent1"/>
-          </a:effectRef>
-          <a:fontRef idx="minor">
-            <a:schemeClr val="lt1"/>
-          </a:fontRef>
-        </p:style>
-        <p:txBody>
-          <a:bodyPr rtlCol="0" anchor="ctr"/>
-          <a:lstStyle/>
-          <a:p>
-            <a:pPr algn="ctr"/>
+              <a:t>(down)</a:t>
+            </a:r>
             <a:endParaRPr lang="en-US" dirty="0">
               <a:solidFill>
                 <a:schemeClr val="tx2"/>
@@ -7117,268 +7914,310 @@
           </a:p>
         </p:txBody>
       </p:sp>
-      <p:sp>
-        <p:nvSpPr>
-          <p:cNvPr id="26" name="Rectangle 25">
-            <a:extLst>
-              <a:ext uri="{FF2B5EF4-FFF2-40B4-BE49-F238E27FC236}">
-                <a16:creationId xmlns:a16="http://schemas.microsoft.com/office/drawing/2014/main" id="{6B6E82EA-1AE1-CFB3-BE12-C33072D8CBE7}"/>
-              </a:ext>
-            </a:extLst>
-          </p:cNvPr>
-          <p:cNvSpPr/>
-          <p:nvPr/>
-        </p:nvSpPr>
-        <p:spPr>
-          <a:xfrm>
-            <a:off x="9057936" y="4027197"/>
-            <a:ext cx="1595535" cy="317241"/>
-          </a:xfrm>
-          <a:prstGeom prst="rect">
-            <a:avLst/>
-          </a:prstGeom>
-          <a:solidFill>
-            <a:schemeClr val="accent6">
-              <a:lumMod val="20000"/>
-              <a:lumOff val="80000"/>
-            </a:schemeClr>
-          </a:solidFill>
+      <p:cxnSp>
+        <p:nvCxnSpPr>
+          <p:cNvPr id="57" name="Straight Arrow Connector 56">
+            <a:extLst>
+              <a:ext uri="{FF2B5EF4-FFF2-40B4-BE49-F238E27FC236}">
+                <a16:creationId xmlns:a16="http://schemas.microsoft.com/office/drawing/2014/main" id="{47B6922E-B551-616F-95A0-C704B3DA611B}"/>
+              </a:ext>
+            </a:extLst>
+          </p:cNvPr>
+          <p:cNvCxnSpPr/>
+          <p:nvPr/>
+        </p:nvCxnSpPr>
+        <p:spPr>
+          <a:xfrm>
+            <a:off x="10881133" y="3859790"/>
+            <a:ext cx="400178" cy="829107"/>
+          </a:xfrm>
+          <a:prstGeom prst="straightConnector1">
+            <a:avLst/>
+          </a:prstGeom>
           <a:ln>
             <a:solidFill>
-              <a:schemeClr val="accent2">
-                <a:lumMod val="20000"/>
-                <a:lumOff val="80000"/>
-              </a:schemeClr>
+              <a:srgbClr val="FF0000"/>
             </a:solidFill>
+            <a:tailEnd type="triangle"/>
           </a:ln>
         </p:spPr>
         <p:style>
           <a:lnRef idx="2">
-            <a:schemeClr val="accent1">
-              <a:shade val="15000"/>
-            </a:schemeClr>
-          </a:lnRef>
-          <a:fillRef idx="1">
-            <a:schemeClr val="accent1"/>
-          </a:fillRef>
-          <a:effectRef idx="0">
-            <a:schemeClr val="accent1"/>
-          </a:effectRef>
-          <a:fontRef idx="minor">
-            <a:schemeClr val="lt1"/>
-          </a:fontRef>
-        </p:style>
-        <p:txBody>
-          <a:bodyPr rtlCol="0" anchor="ctr"/>
-          <a:lstStyle/>
-          <a:p>
-            <a:pPr algn="ctr"/>
-            <a:endParaRPr lang="en-US" dirty="0">
-              <a:solidFill>
-                <a:schemeClr val="tx2"/>
-              </a:solidFill>
-            </a:endParaRPr>
-          </a:p>
-        </p:txBody>
-      </p:sp>
-      <p:sp>
-        <p:nvSpPr>
-          <p:cNvPr id="27" name="Rectangle 26">
-            <a:extLst>
-              <a:ext uri="{FF2B5EF4-FFF2-40B4-BE49-F238E27FC236}">
-                <a16:creationId xmlns:a16="http://schemas.microsoft.com/office/drawing/2014/main" id="{536CB937-8976-AE7B-7FE7-929F24F3C592}"/>
-              </a:ext>
-            </a:extLst>
-          </p:cNvPr>
-          <p:cNvSpPr/>
-          <p:nvPr/>
-        </p:nvSpPr>
-        <p:spPr>
-          <a:xfrm>
-            <a:off x="9210336" y="4179597"/>
-            <a:ext cx="1595535" cy="317241"/>
-          </a:xfrm>
-          <a:prstGeom prst="rect">
-            <a:avLst/>
-          </a:prstGeom>
-          <a:solidFill>
-            <a:schemeClr val="accent6">
-              <a:lumMod val="20000"/>
-              <a:lumOff val="80000"/>
-            </a:schemeClr>
-          </a:solidFill>
+            <a:schemeClr val="accent1"/>
+          </a:lnRef>
+          <a:fillRef idx="0">
+            <a:schemeClr val="accent1"/>
+          </a:fillRef>
+          <a:effectRef idx="1">
+            <a:schemeClr val="accent1"/>
+          </a:effectRef>
+          <a:fontRef idx="minor">
+            <a:schemeClr val="tx1"/>
+          </a:fontRef>
+        </p:style>
+      </p:cxnSp>
+      <p:cxnSp>
+        <p:nvCxnSpPr>
+          <p:cNvPr id="58" name="Straight Arrow Connector 57">
+            <a:extLst>
+              <a:ext uri="{FF2B5EF4-FFF2-40B4-BE49-F238E27FC236}">
+                <a16:creationId xmlns:a16="http://schemas.microsoft.com/office/drawing/2014/main" id="{9D2BFB52-60A8-3EDA-BAB7-FAF1E5BB88C4}"/>
+              </a:ext>
+            </a:extLst>
+          </p:cNvPr>
+          <p:cNvCxnSpPr/>
+          <p:nvPr/>
+        </p:nvCxnSpPr>
+        <p:spPr>
+          <a:xfrm>
+            <a:off x="11033533" y="4012190"/>
+            <a:ext cx="400178" cy="829107"/>
+          </a:xfrm>
+          <a:prstGeom prst="straightConnector1">
+            <a:avLst/>
+          </a:prstGeom>
           <a:ln>
             <a:solidFill>
-              <a:schemeClr val="accent2">
-                <a:lumMod val="20000"/>
-                <a:lumOff val="80000"/>
-              </a:schemeClr>
+              <a:srgbClr val="FF0000"/>
             </a:solidFill>
+            <a:tailEnd type="triangle"/>
           </a:ln>
         </p:spPr>
         <p:style>
           <a:lnRef idx="2">
-            <a:schemeClr val="accent1">
-              <a:shade val="15000"/>
-            </a:schemeClr>
-          </a:lnRef>
-          <a:fillRef idx="1">
-            <a:schemeClr val="accent1"/>
-          </a:fillRef>
-          <a:effectRef idx="0">
-            <a:schemeClr val="accent1"/>
-          </a:effectRef>
-          <a:fontRef idx="minor">
-            <a:schemeClr val="lt1"/>
-          </a:fontRef>
-        </p:style>
-        <p:txBody>
-          <a:bodyPr rtlCol="0" anchor="ctr"/>
-          <a:lstStyle/>
-          <a:p>
-            <a:pPr algn="ctr"/>
-            <a:endParaRPr lang="en-US" dirty="0">
-              <a:solidFill>
-                <a:schemeClr val="tx2"/>
-              </a:solidFill>
-            </a:endParaRPr>
-          </a:p>
-        </p:txBody>
-      </p:sp>
-      <p:sp>
-        <p:nvSpPr>
-          <p:cNvPr id="28" name="Rectangle 27">
-            <a:extLst>
-              <a:ext uri="{FF2B5EF4-FFF2-40B4-BE49-F238E27FC236}">
-                <a16:creationId xmlns:a16="http://schemas.microsoft.com/office/drawing/2014/main" id="{2313DCAD-124D-5850-AD89-3AB6441F9862}"/>
-              </a:ext>
-            </a:extLst>
-          </p:cNvPr>
-          <p:cNvSpPr/>
-          <p:nvPr/>
-        </p:nvSpPr>
-        <p:spPr>
-          <a:xfrm>
-            <a:off x="9362736" y="4331997"/>
-            <a:ext cx="1595535" cy="317241"/>
-          </a:xfrm>
-          <a:prstGeom prst="rect">
-            <a:avLst/>
-          </a:prstGeom>
-          <a:solidFill>
-            <a:schemeClr val="accent6">
-              <a:lumMod val="20000"/>
-              <a:lumOff val="80000"/>
-            </a:schemeClr>
-          </a:solidFill>
+            <a:schemeClr val="accent1"/>
+          </a:lnRef>
+          <a:fillRef idx="0">
+            <a:schemeClr val="accent1"/>
+          </a:fillRef>
+          <a:effectRef idx="1">
+            <a:schemeClr val="accent1"/>
+          </a:effectRef>
+          <a:fontRef idx="minor">
+            <a:schemeClr val="tx1"/>
+          </a:fontRef>
+        </p:style>
+      </p:cxnSp>
+      <p:cxnSp>
+        <p:nvCxnSpPr>
+          <p:cNvPr id="59" name="Straight Arrow Connector 58">
+            <a:extLst>
+              <a:ext uri="{FF2B5EF4-FFF2-40B4-BE49-F238E27FC236}">
+                <a16:creationId xmlns:a16="http://schemas.microsoft.com/office/drawing/2014/main" id="{02DB378A-D1BC-64C7-3E13-6875826B9912}"/>
+              </a:ext>
+            </a:extLst>
+          </p:cNvPr>
+          <p:cNvCxnSpPr/>
+          <p:nvPr/>
+        </p:nvCxnSpPr>
+        <p:spPr>
+          <a:xfrm>
+            <a:off x="11185933" y="4164590"/>
+            <a:ext cx="400178" cy="829107"/>
+          </a:xfrm>
+          <a:prstGeom prst="straightConnector1">
+            <a:avLst/>
+          </a:prstGeom>
           <a:ln>
             <a:solidFill>
-              <a:schemeClr val="accent2">
-                <a:lumMod val="20000"/>
-                <a:lumOff val="80000"/>
-              </a:schemeClr>
+              <a:srgbClr val="FF0000"/>
             </a:solidFill>
+            <a:tailEnd type="triangle"/>
           </a:ln>
         </p:spPr>
         <p:style>
           <a:lnRef idx="2">
-            <a:schemeClr val="accent1">
-              <a:shade val="15000"/>
-            </a:schemeClr>
-          </a:lnRef>
-          <a:fillRef idx="1">
-            <a:schemeClr val="accent1"/>
-          </a:fillRef>
-          <a:effectRef idx="0">
-            <a:schemeClr val="accent1"/>
-          </a:effectRef>
-          <a:fontRef idx="minor">
-            <a:schemeClr val="lt1"/>
-          </a:fontRef>
-        </p:style>
-        <p:txBody>
-          <a:bodyPr rtlCol="0" anchor="ctr"/>
-          <a:lstStyle/>
-          <a:p>
-            <a:pPr algn="ctr"/>
-            <a:endParaRPr lang="en-US" dirty="0">
-              <a:solidFill>
-                <a:schemeClr val="tx2"/>
-              </a:solidFill>
-            </a:endParaRPr>
-          </a:p>
-        </p:txBody>
-      </p:sp>
-      <p:sp>
-        <p:nvSpPr>
-          <p:cNvPr id="29" name="Rectangle 28">
-            <a:extLst>
-              <a:ext uri="{FF2B5EF4-FFF2-40B4-BE49-F238E27FC236}">
-                <a16:creationId xmlns:a16="http://schemas.microsoft.com/office/drawing/2014/main" id="{530B3026-3929-68C0-D9CA-51C0578C6396}"/>
-              </a:ext>
-            </a:extLst>
-          </p:cNvPr>
-          <p:cNvSpPr/>
-          <p:nvPr/>
-        </p:nvSpPr>
-        <p:spPr>
-          <a:xfrm>
-            <a:off x="9515136" y="4484397"/>
-            <a:ext cx="1595535" cy="317241"/>
-          </a:xfrm>
-          <a:prstGeom prst="rect">
-            <a:avLst/>
-          </a:prstGeom>
-          <a:solidFill>
-            <a:schemeClr val="accent6">
-              <a:lumMod val="20000"/>
-              <a:lumOff val="80000"/>
-            </a:schemeClr>
-          </a:solidFill>
+            <a:schemeClr val="accent1"/>
+          </a:lnRef>
+          <a:fillRef idx="0">
+            <a:schemeClr val="accent1"/>
+          </a:fillRef>
+          <a:effectRef idx="1">
+            <a:schemeClr val="accent1"/>
+          </a:effectRef>
+          <a:fontRef idx="minor">
+            <a:schemeClr val="tx1"/>
+          </a:fontRef>
+        </p:style>
+      </p:cxnSp>
+      <p:cxnSp>
+        <p:nvCxnSpPr>
+          <p:cNvPr id="61" name="Straight Arrow Connector 60">
+            <a:extLst>
+              <a:ext uri="{FF2B5EF4-FFF2-40B4-BE49-F238E27FC236}">
+                <a16:creationId xmlns:a16="http://schemas.microsoft.com/office/drawing/2014/main" id="{A40DC03C-2D5E-A001-64E3-E19D2B3E612C}"/>
+              </a:ext>
+            </a:extLst>
+          </p:cNvPr>
+          <p:cNvCxnSpPr>
+            <a:cxnSpLocks/>
+            <a:stCxn id="13" idx="1"/>
+            <a:endCxn id="41" idx="3"/>
+          </p:cNvCxnSpPr>
+          <p:nvPr/>
+        </p:nvCxnSpPr>
+        <p:spPr>
+          <a:xfrm flipH="1">
+            <a:off x="8507779" y="1623952"/>
+            <a:ext cx="563636" cy="317240"/>
+          </a:xfrm>
+          <a:prstGeom prst="straightConnector1">
+            <a:avLst/>
+          </a:prstGeom>
           <a:ln>
             <a:solidFill>
-              <a:schemeClr val="accent2">
-                <a:lumMod val="20000"/>
-                <a:lumOff val="80000"/>
-              </a:schemeClr>
+              <a:srgbClr val="FF0000"/>
             </a:solidFill>
+            <a:tailEnd type="triangle"/>
           </a:ln>
         </p:spPr>
         <p:style>
           <a:lnRef idx="2">
-            <a:schemeClr val="accent1">
-              <a:shade val="15000"/>
-            </a:schemeClr>
-          </a:lnRef>
-          <a:fillRef idx="1">
-            <a:schemeClr val="accent1"/>
-          </a:fillRef>
-          <a:effectRef idx="0">
-            <a:schemeClr val="accent1"/>
-          </a:effectRef>
-          <a:fontRef idx="minor">
-            <a:schemeClr val="lt1"/>
-          </a:fontRef>
-        </p:style>
-        <p:txBody>
-          <a:bodyPr rtlCol="0" anchor="ctr"/>
-          <a:lstStyle/>
-          <a:p>
-            <a:pPr algn="ctr"/>
-            <a:endParaRPr lang="en-US" dirty="0">
-              <a:solidFill>
-                <a:schemeClr val="tx2"/>
-              </a:solidFill>
-            </a:endParaRPr>
-          </a:p>
-        </p:txBody>
-      </p:sp>
-      <p:sp>
-        <p:nvSpPr>
-          <p:cNvPr id="37" name="TextBox 36">
-            <a:extLst>
-              <a:ext uri="{FF2B5EF4-FFF2-40B4-BE49-F238E27FC236}">
-                <a16:creationId xmlns:a16="http://schemas.microsoft.com/office/drawing/2014/main" id="{DB13644A-9285-9111-3BBE-6AB488C981FF}"/>
+            <a:schemeClr val="accent1"/>
+          </a:lnRef>
+          <a:fillRef idx="0">
+            <a:schemeClr val="accent1"/>
+          </a:fillRef>
+          <a:effectRef idx="1">
+            <a:schemeClr val="accent1"/>
+          </a:effectRef>
+          <a:fontRef idx="minor">
+            <a:schemeClr val="tx1"/>
+          </a:fontRef>
+        </p:style>
+      </p:cxnSp>
+      <p:cxnSp>
+        <p:nvCxnSpPr>
+          <p:cNvPr id="62" name="Straight Arrow Connector 61">
+            <a:extLst>
+              <a:ext uri="{FF2B5EF4-FFF2-40B4-BE49-F238E27FC236}">
+                <a16:creationId xmlns:a16="http://schemas.microsoft.com/office/drawing/2014/main" id="{46CC430F-1C96-F7AF-802B-18DA56C6B849}"/>
+              </a:ext>
+            </a:extLst>
+          </p:cNvPr>
+          <p:cNvCxnSpPr/>
+          <p:nvPr/>
+        </p:nvCxnSpPr>
+        <p:spPr>
+          <a:xfrm>
+            <a:off x="10734261" y="4154321"/>
+            <a:ext cx="400178" cy="829107"/>
+          </a:xfrm>
+          <a:prstGeom prst="straightConnector1">
+            <a:avLst/>
+          </a:prstGeom>
+          <a:ln>
+            <a:solidFill>
+              <a:srgbClr val="FF0000"/>
+            </a:solidFill>
+            <a:tailEnd type="triangle"/>
+          </a:ln>
+        </p:spPr>
+        <p:style>
+          <a:lnRef idx="2">
+            <a:schemeClr val="accent1"/>
+          </a:lnRef>
+          <a:fillRef idx="0">
+            <a:schemeClr val="accent1"/>
+          </a:fillRef>
+          <a:effectRef idx="1">
+            <a:schemeClr val="accent1"/>
+          </a:effectRef>
+          <a:fontRef idx="minor">
+            <a:schemeClr val="tx1"/>
+          </a:fontRef>
+        </p:style>
+      </p:cxnSp>
+      <p:cxnSp>
+        <p:nvCxnSpPr>
+          <p:cNvPr id="63" name="Straight Arrow Connector 62">
+            <a:extLst>
+              <a:ext uri="{FF2B5EF4-FFF2-40B4-BE49-F238E27FC236}">
+                <a16:creationId xmlns:a16="http://schemas.microsoft.com/office/drawing/2014/main" id="{1397F8D8-E9D4-512A-2BA5-F56ACE47DAC8}"/>
+              </a:ext>
+            </a:extLst>
+          </p:cNvPr>
+          <p:cNvCxnSpPr/>
+          <p:nvPr/>
+        </p:nvCxnSpPr>
+        <p:spPr>
+          <a:xfrm>
+            <a:off x="10595539" y="4529394"/>
+            <a:ext cx="400178" cy="829107"/>
+          </a:xfrm>
+          <a:prstGeom prst="straightConnector1">
+            <a:avLst/>
+          </a:prstGeom>
+          <a:ln>
+            <a:solidFill>
+              <a:srgbClr val="FF0000"/>
+            </a:solidFill>
+            <a:tailEnd type="triangle"/>
+          </a:ln>
+        </p:spPr>
+        <p:style>
+          <a:lnRef idx="2">
+            <a:schemeClr val="accent1"/>
+          </a:lnRef>
+          <a:fillRef idx="0">
+            <a:schemeClr val="accent1"/>
+          </a:fillRef>
+          <a:effectRef idx="1">
+            <a:schemeClr val="accent1"/>
+          </a:effectRef>
+          <a:fontRef idx="minor">
+            <a:schemeClr val="tx1"/>
+          </a:fontRef>
+        </p:style>
+      </p:cxnSp>
+      <p:cxnSp>
+        <p:nvCxnSpPr>
+          <p:cNvPr id="64" name="Straight Arrow Connector 63">
+            <a:extLst>
+              <a:ext uri="{FF2B5EF4-FFF2-40B4-BE49-F238E27FC236}">
+                <a16:creationId xmlns:a16="http://schemas.microsoft.com/office/drawing/2014/main" id="{7C20C0ED-A4F3-F9CE-CA48-769B7B374086}"/>
+              </a:ext>
+            </a:extLst>
+          </p:cNvPr>
+          <p:cNvCxnSpPr/>
+          <p:nvPr/>
+        </p:nvCxnSpPr>
+        <p:spPr>
+          <a:xfrm>
+            <a:off x="11125784" y="4650568"/>
+            <a:ext cx="400178" cy="829107"/>
+          </a:xfrm>
+          <a:prstGeom prst="straightConnector1">
+            <a:avLst/>
+          </a:prstGeom>
+          <a:ln>
+            <a:solidFill>
+              <a:srgbClr val="FF0000"/>
+            </a:solidFill>
+            <a:tailEnd type="triangle"/>
+          </a:ln>
+        </p:spPr>
+        <p:style>
+          <a:lnRef idx="2">
+            <a:schemeClr val="accent1"/>
+          </a:lnRef>
+          <a:fillRef idx="0">
+            <a:schemeClr val="accent1"/>
+          </a:fillRef>
+          <a:effectRef idx="1">
+            <a:schemeClr val="accent1"/>
+          </a:effectRef>
+          <a:fontRef idx="minor">
+            <a:schemeClr val="tx1"/>
+          </a:fontRef>
+        </p:style>
+      </p:cxnSp>
+      <p:sp>
+        <p:nvSpPr>
+          <p:cNvPr id="86" name="TextBox 85">
+            <a:extLst>
+              <a:ext uri="{FF2B5EF4-FFF2-40B4-BE49-F238E27FC236}">
+                <a16:creationId xmlns:a16="http://schemas.microsoft.com/office/drawing/2014/main" id="{64FF40F8-86DB-E873-9B59-C8FF4F75FB8F}"/>
               </a:ext>
             </a:extLst>
           </p:cNvPr>
@@ -7387,8 +8226,8 @@
         </p:nvSpPr>
         <p:spPr>
           <a:xfrm>
-            <a:off x="4455776" y="3294796"/>
-            <a:ext cx="977220" cy="369332"/>
+            <a:off x="10764045" y="1040863"/>
+            <a:ext cx="1238289" cy="769441"/>
           </a:xfrm>
           <a:prstGeom prst="rect">
             <a:avLst/>
@@ -7396,32 +8235,24 @@
           <a:noFill/>
         </p:spPr>
         <p:txBody>
-          <a:bodyPr wrap="square">
+          <a:bodyPr wrap="square" rtlCol="0">
             <a:spAutoFit/>
           </a:bodyPr>
           <a:lstStyle/>
           <a:p>
-            <a:pPr algn="ctr"/>
-            <a:r>
-              <a:rPr lang="en-US" sz="1800" dirty="0">
-                <a:solidFill>
-                  <a:schemeClr val="accent2">
-                    <a:lumMod val="60000"/>
-                    <a:lumOff val="40000"/>
-                  </a:schemeClr>
-                </a:solidFill>
-              </a:rPr>
-              <a:t>Bumper</a:t>
-            </a:r>
-          </a:p>
-        </p:txBody>
-      </p:sp>
-      <p:sp>
-        <p:nvSpPr>
-          <p:cNvPr id="38" name="TextBox 37">
-            <a:extLst>
-              <a:ext uri="{FF2B5EF4-FFF2-40B4-BE49-F238E27FC236}">
-                <a16:creationId xmlns:a16="http://schemas.microsoft.com/office/drawing/2014/main" id="{663C2E0C-F6E9-C73C-F7F2-26D2724A3EC5}"/>
+            <a:r>
+              <a:rPr lang="en-US" sz="1100" dirty="0"/>
+              <a:t>Goto a good location, aim, engage brake, and shoot all fuel</a:t>
+            </a:r>
+          </a:p>
+        </p:txBody>
+      </p:sp>
+      <p:sp>
+        <p:nvSpPr>
+          <p:cNvPr id="93" name="TextBox 92">
+            <a:extLst>
+              <a:ext uri="{FF2B5EF4-FFF2-40B4-BE49-F238E27FC236}">
+                <a16:creationId xmlns:a16="http://schemas.microsoft.com/office/drawing/2014/main" id="{EA9B908C-C2A5-4AFB-330F-1619EF2A4E93}"/>
               </a:ext>
             </a:extLst>
           </p:cNvPr>
@@ -7430,8 +8261,8 @@
         </p:nvSpPr>
         <p:spPr>
           <a:xfrm>
-            <a:off x="6924656" y="3282792"/>
-            <a:ext cx="977220" cy="369332"/>
+            <a:off x="10745448" y="1886504"/>
+            <a:ext cx="1469585" cy="600164"/>
           </a:xfrm>
           <a:prstGeom prst="rect">
             <a:avLst/>
@@ -7439,188 +8270,14 @@
           <a:noFill/>
         </p:spPr>
         <p:txBody>
-          <a:bodyPr wrap="square">
+          <a:bodyPr wrap="square" rtlCol="0">
             <a:spAutoFit/>
           </a:bodyPr>
           <a:lstStyle/>
           <a:p>
-            <a:pPr algn="ctr"/>
-            <a:r>
-              <a:rPr lang="en-US" sz="1800" dirty="0">
-                <a:solidFill>
-                  <a:schemeClr val="accent2">
-                    <a:lumMod val="60000"/>
-                    <a:lumOff val="40000"/>
-                  </a:schemeClr>
-                </a:solidFill>
-              </a:rPr>
-              <a:t>Bumper</a:t>
-            </a:r>
-          </a:p>
-        </p:txBody>
-      </p:sp>
-      <p:sp>
-        <p:nvSpPr>
-          <p:cNvPr id="40" name="TextBox 39">
-            <a:extLst>
-              <a:ext uri="{FF2B5EF4-FFF2-40B4-BE49-F238E27FC236}">
-                <a16:creationId xmlns:a16="http://schemas.microsoft.com/office/drawing/2014/main" id="{5FC26886-D16D-E4C3-22DA-B6459CC232DD}"/>
-              </a:ext>
-            </a:extLst>
-          </p:cNvPr>
-          <p:cNvSpPr txBox="1"/>
-          <p:nvPr/>
-        </p:nvSpPr>
-        <p:spPr>
-          <a:xfrm>
-            <a:off x="3788677" y="3445315"/>
-            <a:ext cx="338554" cy="580800"/>
-          </a:xfrm>
-          <a:prstGeom prst="rect">
-            <a:avLst/>
-          </a:prstGeom>
-          <a:noFill/>
-        </p:spPr>
-        <p:txBody>
-          <a:bodyPr vert="vert270" wrap="none" lIns="0" tIns="0" rIns="91440" bIns="0" rtlCol="0">
-            <a:spAutoFit/>
-          </a:bodyPr>
-          <a:lstStyle/>
-          <a:p>
-            <a:pPr algn="ctr"/>
-            <a:r>
-              <a:rPr lang="en-US" sz="1600" dirty="0">
-                <a:solidFill>
-                  <a:schemeClr val="bg2"/>
-                </a:solidFill>
-              </a:rPr>
-              <a:t>Trigger</a:t>
-            </a:r>
-          </a:p>
-        </p:txBody>
-      </p:sp>
-      <p:sp>
-        <p:nvSpPr>
-          <p:cNvPr id="41" name="TextBox 40">
-            <a:extLst>
-              <a:ext uri="{FF2B5EF4-FFF2-40B4-BE49-F238E27FC236}">
-                <a16:creationId xmlns:a16="http://schemas.microsoft.com/office/drawing/2014/main" id="{4AAA1677-C84E-01A0-4838-DEC253AEDD33}"/>
-              </a:ext>
-            </a:extLst>
-          </p:cNvPr>
-          <p:cNvSpPr txBox="1"/>
-          <p:nvPr/>
-        </p:nvSpPr>
-        <p:spPr>
-          <a:xfrm>
-            <a:off x="8214641" y="3429000"/>
-            <a:ext cx="338554" cy="580800"/>
-          </a:xfrm>
-          <a:prstGeom prst="rect">
-            <a:avLst/>
-          </a:prstGeom>
-          <a:noFill/>
-        </p:spPr>
-        <p:txBody>
-          <a:bodyPr vert="vert270" wrap="none" lIns="0" tIns="0" rIns="91440" bIns="0" rtlCol="0">
-            <a:spAutoFit/>
-          </a:bodyPr>
-          <a:lstStyle/>
-          <a:p>
-            <a:pPr algn="ctr"/>
-            <a:r>
-              <a:rPr lang="en-US" sz="1600" dirty="0">
-                <a:solidFill>
-                  <a:schemeClr val="bg2"/>
-                </a:solidFill>
-              </a:rPr>
-              <a:t>Trigger</a:t>
-            </a:r>
-          </a:p>
-        </p:txBody>
-      </p:sp>
-      <p:sp>
-        <p:nvSpPr>
-          <p:cNvPr id="30" name="TextBox 29">
-            <a:extLst>
-              <a:ext uri="{FF2B5EF4-FFF2-40B4-BE49-F238E27FC236}">
-                <a16:creationId xmlns:a16="http://schemas.microsoft.com/office/drawing/2014/main" id="{4DD483E6-0944-EC88-9A25-F3839E12ED50}"/>
-              </a:ext>
-            </a:extLst>
-          </p:cNvPr>
-          <p:cNvSpPr txBox="1"/>
-          <p:nvPr/>
-        </p:nvSpPr>
-        <p:spPr>
-          <a:xfrm rot="5400000">
-            <a:off x="6456089" y="3957501"/>
-            <a:ext cx="276999" cy="306301"/>
-          </a:xfrm>
-          <a:prstGeom prst="rect">
-            <a:avLst/>
-          </a:prstGeom>
-          <a:noFill/>
-        </p:spPr>
-        <p:txBody>
-          <a:bodyPr vert="vert270" wrap="none" lIns="0" tIns="0" rIns="91440" bIns="0" rtlCol="0">
-            <a:spAutoFit/>
-          </a:bodyPr>
-          <a:lstStyle/>
-          <a:p>
-            <a:pPr algn="ctr"/>
-            <a:r>
-              <a:rPr lang="en-US" sz="1200" dirty="0">
-                <a:solidFill>
-                  <a:schemeClr val="accent2">
-                    <a:lumMod val="60000"/>
-                    <a:lumOff val="40000"/>
-                  </a:schemeClr>
-                </a:solidFill>
-              </a:rPr>
-              <a:t>start</a:t>
-            </a:r>
-          </a:p>
-        </p:txBody>
-      </p:sp>
-      <p:sp>
-        <p:nvSpPr>
-          <p:cNvPr id="31" name="TextBox 30">
-            <a:extLst>
-              <a:ext uri="{FF2B5EF4-FFF2-40B4-BE49-F238E27FC236}">
-                <a16:creationId xmlns:a16="http://schemas.microsoft.com/office/drawing/2014/main" id="{2E389938-BC74-9774-0C0E-5E96467866AF}"/>
-              </a:ext>
-            </a:extLst>
-          </p:cNvPr>
-          <p:cNvSpPr txBox="1"/>
-          <p:nvPr/>
-        </p:nvSpPr>
-        <p:spPr>
-          <a:xfrm rot="5400000">
-            <a:off x="5515841" y="3970089"/>
-            <a:ext cx="276999" cy="323808"/>
-          </a:xfrm>
-          <a:prstGeom prst="rect">
-            <a:avLst/>
-          </a:prstGeom>
-          <a:noFill/>
-        </p:spPr>
-        <p:txBody>
-          <a:bodyPr vert="vert270" wrap="none" lIns="0" tIns="0" rIns="91440" bIns="0" rtlCol="0">
-            <a:spAutoFit/>
-          </a:bodyPr>
-          <a:lstStyle/>
-          <a:p>
-            <a:pPr algn="ctr"/>
-            <a:r>
-              <a:rPr lang="en-US" sz="1200" dirty="0">
-                <a:solidFill>
-                  <a:schemeClr val="accent2">
-                    <a:lumMod val="60000"/>
-                    <a:lumOff val="40000"/>
-                  </a:schemeClr>
-                </a:solidFill>
-              </a:rPr>
-              <a:t>back</a:t>
+            <a:r>
+              <a:rPr lang="en-US" sz="1100" dirty="0"/>
+              <a:t>Maintains aim and shoot all fuel. Can be moving…</a:t>
             </a:r>
           </a:p>
         </p:txBody>

--- a/docs/Controller Mappings & Paths.pptx
+++ b/docs/Controller Mappings & Paths.pptx
@@ -407,7 +407,7 @@
           <a:p>
             <a:fld id="{B6000E93-69C7-4C90-931E-A5484B820028}" type="datetimeFigureOut">
               <a:rPr lang="en-US" smtClean="0"/>
-              <a:t>3/25/2026</a:t>
+              <a:t>3/26/2026</a:t>
             </a:fld>
             <a:endParaRPr lang="en-US"/>
           </a:p>
@@ -605,7 +605,7 @@
           <a:p>
             <a:fld id="{B6000E93-69C7-4C90-931E-A5484B820028}" type="datetimeFigureOut">
               <a:rPr lang="en-US" smtClean="0"/>
-              <a:t>3/25/2026</a:t>
+              <a:t>3/26/2026</a:t>
             </a:fld>
             <a:endParaRPr lang="en-US"/>
           </a:p>
@@ -813,7 +813,7 @@
           <a:p>
             <a:fld id="{B6000E93-69C7-4C90-931E-A5484B820028}" type="datetimeFigureOut">
               <a:rPr lang="en-US" smtClean="0"/>
-              <a:t>3/25/2026</a:t>
+              <a:t>3/26/2026</a:t>
             </a:fld>
             <a:endParaRPr lang="en-US"/>
           </a:p>
@@ -1011,7 +1011,7 @@
           <a:p>
             <a:fld id="{B6000E93-69C7-4C90-931E-A5484B820028}" type="datetimeFigureOut">
               <a:rPr lang="en-US" smtClean="0"/>
-              <a:t>3/25/2026</a:t>
+              <a:t>3/26/2026</a:t>
             </a:fld>
             <a:endParaRPr lang="en-US"/>
           </a:p>
@@ -1286,7 +1286,7 @@
           <a:p>
             <a:fld id="{B6000E93-69C7-4C90-931E-A5484B820028}" type="datetimeFigureOut">
               <a:rPr lang="en-US" smtClean="0"/>
-              <a:t>3/25/2026</a:t>
+              <a:t>3/26/2026</a:t>
             </a:fld>
             <a:endParaRPr lang="en-US"/>
           </a:p>
@@ -1551,7 +1551,7 @@
           <a:p>
             <a:fld id="{B6000E93-69C7-4C90-931E-A5484B820028}" type="datetimeFigureOut">
               <a:rPr lang="en-US" smtClean="0"/>
-              <a:t>3/25/2026</a:t>
+              <a:t>3/26/2026</a:t>
             </a:fld>
             <a:endParaRPr lang="en-US"/>
           </a:p>
@@ -1963,7 +1963,7 @@
           <a:p>
             <a:fld id="{B6000E93-69C7-4C90-931E-A5484B820028}" type="datetimeFigureOut">
               <a:rPr lang="en-US" smtClean="0"/>
-              <a:t>3/25/2026</a:t>
+              <a:t>3/26/2026</a:t>
             </a:fld>
             <a:endParaRPr lang="en-US"/>
           </a:p>
@@ -2104,7 +2104,7 @@
           <a:p>
             <a:fld id="{B6000E93-69C7-4C90-931E-A5484B820028}" type="datetimeFigureOut">
               <a:rPr lang="en-US" smtClean="0"/>
-              <a:t>3/25/2026</a:t>
+              <a:t>3/26/2026</a:t>
             </a:fld>
             <a:endParaRPr lang="en-US"/>
           </a:p>
@@ -2217,7 +2217,7 @@
           <a:p>
             <a:fld id="{B6000E93-69C7-4C90-931E-A5484B820028}" type="datetimeFigureOut">
               <a:rPr lang="en-US" smtClean="0"/>
-              <a:t>3/25/2026</a:t>
+              <a:t>3/26/2026</a:t>
             </a:fld>
             <a:endParaRPr lang="en-US"/>
           </a:p>
@@ -2528,7 +2528,7 @@
           <a:p>
             <a:fld id="{B6000E93-69C7-4C90-931E-A5484B820028}" type="datetimeFigureOut">
               <a:rPr lang="en-US" smtClean="0"/>
-              <a:t>3/25/2026</a:t>
+              <a:t>3/26/2026</a:t>
             </a:fld>
             <a:endParaRPr lang="en-US"/>
           </a:p>
@@ -2816,7 +2816,7 @@
           <a:p>
             <a:fld id="{B6000E93-69C7-4C90-931E-A5484B820028}" type="datetimeFigureOut">
               <a:rPr lang="en-US" smtClean="0"/>
-              <a:t>3/25/2026</a:t>
+              <a:t>3/26/2026</a:t>
             </a:fld>
             <a:endParaRPr lang="en-US"/>
           </a:p>
@@ -3057,7 +3057,7 @@
           <a:p>
             <a:fld id="{B6000E93-69C7-4C90-931E-A5484B820028}" type="datetimeFigureOut">
               <a:rPr lang="en-US" smtClean="0"/>
-              <a:t>3/25/2026</a:t>
+              <a:t>3/26/2026</a:t>
             </a:fld>
             <a:endParaRPr lang="en-US"/>
           </a:p>
@@ -3523,7 +3523,559 @@
         </p:nvSpPr>
         <p:spPr>
           <a:xfrm>
-            <a:off x="7744473" y="6423404"/>
+            <a:off x="9855703" y="1286788"/>
+            <a:ext cx="1595535" cy="317241"/>
+          </a:xfrm>
+          <a:prstGeom prst="rect">
+            <a:avLst/>
+          </a:prstGeom>
+          <a:solidFill>
+            <a:schemeClr val="accent4">
+              <a:lumMod val="20000"/>
+              <a:lumOff val="80000"/>
+            </a:schemeClr>
+          </a:solidFill>
+          <a:ln>
+            <a:solidFill>
+              <a:schemeClr val="accent2">
+                <a:lumMod val="20000"/>
+                <a:lumOff val="80000"/>
+              </a:schemeClr>
+            </a:solidFill>
+          </a:ln>
+        </p:spPr>
+        <p:style>
+          <a:lnRef idx="2">
+            <a:schemeClr val="accent1">
+              <a:shade val="15000"/>
+            </a:schemeClr>
+          </a:lnRef>
+          <a:fillRef idx="1">
+            <a:schemeClr val="accent1"/>
+          </a:fillRef>
+          <a:effectRef idx="0">
+            <a:schemeClr val="accent1"/>
+          </a:effectRef>
+          <a:fontRef idx="minor">
+            <a:schemeClr val="lt1"/>
+          </a:fontRef>
+        </p:style>
+        <p:txBody>
+          <a:bodyPr rtlCol="0" anchor="ctr"/>
+          <a:lstStyle/>
+          <a:p>
+            <a:pPr algn="ctr"/>
+            <a:r>
+              <a:rPr lang="en-US" dirty="0">
+                <a:solidFill>
+                  <a:schemeClr val="tx2"/>
+                </a:solidFill>
+              </a:rPr>
+              <a:t>Ladder Align</a:t>
+            </a:r>
+          </a:p>
+        </p:txBody>
+      </p:sp>
+      <p:sp>
+        <p:nvSpPr>
+          <p:cNvPr id="4" name="Rectangle 3">
+            <a:extLst>
+              <a:ext uri="{FF2B5EF4-FFF2-40B4-BE49-F238E27FC236}">
+                <a16:creationId xmlns:a16="http://schemas.microsoft.com/office/drawing/2014/main" id="{35A05582-EF86-6C17-A39A-AC3BF0D8F848}"/>
+              </a:ext>
+            </a:extLst>
+          </p:cNvPr>
+          <p:cNvSpPr/>
+          <p:nvPr/>
+        </p:nvSpPr>
+        <p:spPr>
+          <a:xfrm>
+            <a:off x="245146" y="987219"/>
+            <a:ext cx="1926144" cy="317241"/>
+          </a:xfrm>
+          <a:prstGeom prst="rect">
+            <a:avLst/>
+          </a:prstGeom>
+          <a:solidFill>
+            <a:schemeClr val="accent4">
+              <a:lumMod val="20000"/>
+              <a:lumOff val="80000"/>
+            </a:schemeClr>
+          </a:solidFill>
+          <a:ln>
+            <a:solidFill>
+              <a:schemeClr val="accent2">
+                <a:lumMod val="20000"/>
+                <a:lumOff val="80000"/>
+              </a:schemeClr>
+            </a:solidFill>
+          </a:ln>
+        </p:spPr>
+        <p:style>
+          <a:lnRef idx="2">
+            <a:schemeClr val="accent1">
+              <a:shade val="15000"/>
+            </a:schemeClr>
+          </a:lnRef>
+          <a:fillRef idx="1">
+            <a:schemeClr val="accent1"/>
+          </a:fillRef>
+          <a:effectRef idx="0">
+            <a:schemeClr val="accent1"/>
+          </a:effectRef>
+          <a:fontRef idx="minor">
+            <a:schemeClr val="lt1"/>
+          </a:fontRef>
+        </p:style>
+        <p:txBody>
+          <a:bodyPr rtlCol="0" anchor="ctr"/>
+          <a:lstStyle/>
+          <a:p>
+            <a:pPr algn="ctr"/>
+            <a:r>
+              <a:rPr lang="en-US" dirty="0">
+                <a:solidFill>
+                  <a:schemeClr val="tx2"/>
+                </a:solidFill>
+              </a:rPr>
+              <a:t>Approach Depot</a:t>
+            </a:r>
+          </a:p>
+        </p:txBody>
+      </p:sp>
+      <p:sp>
+        <p:nvSpPr>
+          <p:cNvPr id="6" name="Rectangle 5">
+            <a:extLst>
+              <a:ext uri="{FF2B5EF4-FFF2-40B4-BE49-F238E27FC236}">
+                <a16:creationId xmlns:a16="http://schemas.microsoft.com/office/drawing/2014/main" id="{FBB8A222-1AE1-5821-9AE3-A23E99456EFB}"/>
+              </a:ext>
+            </a:extLst>
+          </p:cNvPr>
+          <p:cNvSpPr/>
+          <p:nvPr/>
+        </p:nvSpPr>
+        <p:spPr>
+          <a:xfrm>
+            <a:off x="9139825" y="2632710"/>
+            <a:ext cx="2078544" cy="317241"/>
+          </a:xfrm>
+          <a:prstGeom prst="rect">
+            <a:avLst/>
+          </a:prstGeom>
+          <a:solidFill>
+            <a:schemeClr val="accent4">
+              <a:lumMod val="20000"/>
+              <a:lumOff val="80000"/>
+            </a:schemeClr>
+          </a:solidFill>
+          <a:ln>
+            <a:solidFill>
+              <a:schemeClr val="accent2">
+                <a:lumMod val="20000"/>
+                <a:lumOff val="80000"/>
+              </a:schemeClr>
+            </a:solidFill>
+          </a:ln>
+        </p:spPr>
+        <p:style>
+          <a:lnRef idx="2">
+            <a:schemeClr val="accent1">
+              <a:shade val="15000"/>
+            </a:schemeClr>
+          </a:lnRef>
+          <a:fillRef idx="1">
+            <a:schemeClr val="accent1"/>
+          </a:fillRef>
+          <a:effectRef idx="0">
+            <a:schemeClr val="accent1"/>
+          </a:effectRef>
+          <a:fontRef idx="minor">
+            <a:schemeClr val="lt1"/>
+          </a:fontRef>
+        </p:style>
+        <p:txBody>
+          <a:bodyPr rtlCol="0" anchor="ctr"/>
+          <a:lstStyle/>
+          <a:p>
+            <a:pPr algn="ctr"/>
+            <a:r>
+              <a:rPr lang="en-US" dirty="0">
+                <a:solidFill>
+                  <a:schemeClr val="tx2"/>
+                </a:solidFill>
+              </a:rPr>
+              <a:t>Right Bump Drive</a:t>
+            </a:r>
+          </a:p>
+        </p:txBody>
+      </p:sp>
+      <p:sp>
+        <p:nvSpPr>
+          <p:cNvPr id="7" name="Rectangle 6">
+            <a:extLst>
+              <a:ext uri="{FF2B5EF4-FFF2-40B4-BE49-F238E27FC236}">
+                <a16:creationId xmlns:a16="http://schemas.microsoft.com/office/drawing/2014/main" id="{68EAFFFD-7FFA-DF97-8D6F-163DB410D776}"/>
+              </a:ext>
+            </a:extLst>
+          </p:cNvPr>
+          <p:cNvSpPr/>
+          <p:nvPr/>
+        </p:nvSpPr>
+        <p:spPr>
+          <a:xfrm>
+            <a:off x="1257530" y="2743827"/>
+            <a:ext cx="2078544" cy="317241"/>
+          </a:xfrm>
+          <a:prstGeom prst="rect">
+            <a:avLst/>
+          </a:prstGeom>
+          <a:solidFill>
+            <a:schemeClr val="accent4">
+              <a:lumMod val="20000"/>
+              <a:lumOff val="80000"/>
+            </a:schemeClr>
+          </a:solidFill>
+          <a:ln>
+            <a:solidFill>
+              <a:schemeClr val="accent2">
+                <a:lumMod val="20000"/>
+                <a:lumOff val="80000"/>
+              </a:schemeClr>
+            </a:solidFill>
+          </a:ln>
+        </p:spPr>
+        <p:style>
+          <a:lnRef idx="2">
+            <a:schemeClr val="accent1">
+              <a:shade val="15000"/>
+            </a:schemeClr>
+          </a:lnRef>
+          <a:fillRef idx="1">
+            <a:schemeClr val="accent1"/>
+          </a:fillRef>
+          <a:effectRef idx="0">
+            <a:schemeClr val="accent1"/>
+          </a:effectRef>
+          <a:fontRef idx="minor">
+            <a:schemeClr val="lt1"/>
+          </a:fontRef>
+        </p:style>
+        <p:txBody>
+          <a:bodyPr rtlCol="0" anchor="ctr"/>
+          <a:lstStyle/>
+          <a:p>
+            <a:pPr algn="ctr"/>
+            <a:r>
+              <a:rPr lang="en-US" dirty="0">
+                <a:solidFill>
+                  <a:schemeClr val="tx2"/>
+                </a:solidFill>
+              </a:rPr>
+              <a:t>Left Bump Drive</a:t>
+            </a:r>
+          </a:p>
+        </p:txBody>
+      </p:sp>
+      <p:sp>
+        <p:nvSpPr>
+          <p:cNvPr id="8" name="Rectangle 7">
+            <a:extLst>
+              <a:ext uri="{FF2B5EF4-FFF2-40B4-BE49-F238E27FC236}">
+                <a16:creationId xmlns:a16="http://schemas.microsoft.com/office/drawing/2014/main" id="{DD3BA39E-8E6C-2C2D-0878-EFC168040B5D}"/>
+              </a:ext>
+            </a:extLst>
+          </p:cNvPr>
+          <p:cNvSpPr/>
+          <p:nvPr/>
+        </p:nvSpPr>
+        <p:spPr>
+          <a:xfrm>
+            <a:off x="8735624" y="4779053"/>
+            <a:ext cx="1595535" cy="449156"/>
+          </a:xfrm>
+          <a:prstGeom prst="rect">
+            <a:avLst/>
+          </a:prstGeom>
+          <a:solidFill>
+            <a:schemeClr val="accent4">
+              <a:lumMod val="20000"/>
+              <a:lumOff val="80000"/>
+            </a:schemeClr>
+          </a:solidFill>
+          <a:ln>
+            <a:solidFill>
+              <a:schemeClr val="accent2">
+                <a:lumMod val="20000"/>
+                <a:lumOff val="80000"/>
+              </a:schemeClr>
+            </a:solidFill>
+          </a:ln>
+        </p:spPr>
+        <p:style>
+          <a:lnRef idx="2">
+            <a:schemeClr val="accent1">
+              <a:shade val="15000"/>
+            </a:schemeClr>
+          </a:lnRef>
+          <a:fillRef idx="1">
+            <a:schemeClr val="accent1"/>
+          </a:fillRef>
+          <a:effectRef idx="0">
+            <a:schemeClr val="accent1"/>
+          </a:effectRef>
+          <a:fontRef idx="minor">
+            <a:schemeClr val="lt1"/>
+          </a:fontRef>
+        </p:style>
+        <p:txBody>
+          <a:bodyPr rtlCol="0" anchor="ctr"/>
+          <a:lstStyle/>
+          <a:p>
+            <a:pPr algn="ctr"/>
+            <a:r>
+              <a:rPr lang="en-US" dirty="0">
+                <a:solidFill>
+                  <a:schemeClr val="tx2"/>
+                </a:solidFill>
+              </a:rPr>
+              <a:t>Rotation </a:t>
+            </a:r>
+          </a:p>
+          <a:p>
+            <a:pPr algn="ctr"/>
+            <a:r>
+              <a:rPr lang="en-US" sz="1100" dirty="0">
+                <a:solidFill>
+                  <a:schemeClr val="tx2"/>
+                </a:solidFill>
+              </a:rPr>
+              <a:t>(L-CCW, R-CW)</a:t>
+            </a:r>
+            <a:endParaRPr lang="en-US" dirty="0">
+              <a:solidFill>
+                <a:schemeClr val="tx2"/>
+              </a:solidFill>
+            </a:endParaRPr>
+          </a:p>
+        </p:txBody>
+      </p:sp>
+      <p:sp>
+        <p:nvSpPr>
+          <p:cNvPr id="10" name="Rectangle 9">
+            <a:extLst>
+              <a:ext uri="{FF2B5EF4-FFF2-40B4-BE49-F238E27FC236}">
+                <a16:creationId xmlns:a16="http://schemas.microsoft.com/office/drawing/2014/main" id="{55110AC5-3805-9140-9F6E-0AD3E1D52544}"/>
+              </a:ext>
+            </a:extLst>
+          </p:cNvPr>
+          <p:cNvSpPr/>
+          <p:nvPr/>
+        </p:nvSpPr>
+        <p:spPr>
+          <a:xfrm>
+            <a:off x="345233" y="1465800"/>
+            <a:ext cx="1807658" cy="317241"/>
+          </a:xfrm>
+          <a:prstGeom prst="rect">
+            <a:avLst/>
+          </a:prstGeom>
+          <a:solidFill>
+            <a:schemeClr val="accent4">
+              <a:lumMod val="20000"/>
+              <a:lumOff val="80000"/>
+            </a:schemeClr>
+          </a:solidFill>
+          <a:ln>
+            <a:solidFill>
+              <a:schemeClr val="accent2">
+                <a:lumMod val="20000"/>
+                <a:lumOff val="80000"/>
+              </a:schemeClr>
+            </a:solidFill>
+          </a:ln>
+        </p:spPr>
+        <p:style>
+          <a:lnRef idx="2">
+            <a:schemeClr val="accent1">
+              <a:shade val="15000"/>
+            </a:schemeClr>
+          </a:lnRef>
+          <a:fillRef idx="1">
+            <a:schemeClr val="accent1"/>
+          </a:fillRef>
+          <a:effectRef idx="0">
+            <a:schemeClr val="accent1"/>
+          </a:effectRef>
+          <a:fontRef idx="minor">
+            <a:schemeClr val="lt1"/>
+          </a:fontRef>
+        </p:style>
+        <p:txBody>
+          <a:bodyPr rtlCol="0" anchor="ctr"/>
+          <a:lstStyle/>
+          <a:p>
+            <a:pPr algn="ctr"/>
+            <a:r>
+              <a:rPr lang="en-US" sz="1600" dirty="0">
+                <a:solidFill>
+                  <a:schemeClr val="tx2"/>
+                </a:solidFill>
+              </a:rPr>
+              <a:t>Approach Outpost</a:t>
+            </a:r>
+          </a:p>
+        </p:txBody>
+      </p:sp>
+      <p:sp>
+        <p:nvSpPr>
+          <p:cNvPr id="12" name="Rectangle 11">
+            <a:extLst>
+              <a:ext uri="{FF2B5EF4-FFF2-40B4-BE49-F238E27FC236}">
+                <a16:creationId xmlns:a16="http://schemas.microsoft.com/office/drawing/2014/main" id="{7E8685A9-97F2-E16B-0A3B-1D1D73FA3A0C}"/>
+              </a:ext>
+            </a:extLst>
+          </p:cNvPr>
+          <p:cNvSpPr/>
+          <p:nvPr/>
+        </p:nvSpPr>
+        <p:spPr>
+          <a:xfrm>
+            <a:off x="9855703" y="914454"/>
+            <a:ext cx="1595535" cy="317241"/>
+          </a:xfrm>
+          <a:prstGeom prst="rect">
+            <a:avLst/>
+          </a:prstGeom>
+          <a:solidFill>
+            <a:schemeClr val="accent4">
+              <a:lumMod val="20000"/>
+              <a:lumOff val="80000"/>
+            </a:schemeClr>
+          </a:solidFill>
+          <a:ln>
+            <a:solidFill>
+              <a:schemeClr val="accent2">
+                <a:lumMod val="20000"/>
+                <a:lumOff val="80000"/>
+              </a:schemeClr>
+            </a:solidFill>
+          </a:ln>
+        </p:spPr>
+        <p:style>
+          <a:lnRef idx="2">
+            <a:schemeClr val="accent1">
+              <a:shade val="15000"/>
+            </a:schemeClr>
+          </a:lnRef>
+          <a:fillRef idx="1">
+            <a:schemeClr val="accent1"/>
+          </a:fillRef>
+          <a:effectRef idx="0">
+            <a:schemeClr val="accent1"/>
+          </a:effectRef>
+          <a:fontRef idx="minor">
+            <a:schemeClr val="lt1"/>
+          </a:fontRef>
+        </p:style>
+        <p:txBody>
+          <a:bodyPr rtlCol="0" anchor="ctr"/>
+          <a:lstStyle/>
+          <a:p>
+            <a:pPr algn="ctr"/>
+            <a:r>
+              <a:rPr lang="en-US" dirty="0">
+                <a:solidFill>
+                  <a:schemeClr val="tx2"/>
+                </a:solidFill>
+              </a:rPr>
+              <a:t>Goto Ladder</a:t>
+            </a:r>
+          </a:p>
+        </p:txBody>
+      </p:sp>
+      <p:sp>
+        <p:nvSpPr>
+          <p:cNvPr id="14" name="Rectangle 13">
+            <a:extLst>
+              <a:ext uri="{FF2B5EF4-FFF2-40B4-BE49-F238E27FC236}">
+                <a16:creationId xmlns:a16="http://schemas.microsoft.com/office/drawing/2014/main" id="{53A5126C-3CC9-34EA-C4A7-B54817482BDB}"/>
+              </a:ext>
+            </a:extLst>
+          </p:cNvPr>
+          <p:cNvSpPr/>
+          <p:nvPr/>
+        </p:nvSpPr>
+        <p:spPr>
+          <a:xfrm>
+            <a:off x="8869311" y="4079189"/>
+            <a:ext cx="1595535" cy="317241"/>
+          </a:xfrm>
+          <a:prstGeom prst="rect">
+            <a:avLst/>
+          </a:prstGeom>
+          <a:solidFill>
+            <a:schemeClr val="accent4">
+              <a:lumMod val="20000"/>
+              <a:lumOff val="80000"/>
+            </a:schemeClr>
+          </a:solidFill>
+          <a:ln>
+            <a:solidFill>
+              <a:schemeClr val="accent2">
+                <a:lumMod val="20000"/>
+                <a:lumOff val="80000"/>
+              </a:schemeClr>
+            </a:solidFill>
+          </a:ln>
+        </p:spPr>
+        <p:style>
+          <a:lnRef idx="2">
+            <a:schemeClr val="accent1">
+              <a:shade val="15000"/>
+            </a:schemeClr>
+          </a:lnRef>
+          <a:fillRef idx="1">
+            <a:schemeClr val="accent1"/>
+          </a:fillRef>
+          <a:effectRef idx="0">
+            <a:schemeClr val="accent1"/>
+          </a:effectRef>
+          <a:fontRef idx="minor">
+            <a:schemeClr val="lt1"/>
+          </a:fontRef>
+        </p:style>
+        <p:txBody>
+          <a:bodyPr rtlCol="0" anchor="ctr"/>
+          <a:lstStyle/>
+          <a:p>
+            <a:pPr algn="ctr"/>
+            <a:r>
+              <a:rPr lang="en-US" dirty="0">
+                <a:solidFill>
+                  <a:schemeClr val="tx2"/>
+                </a:solidFill>
+              </a:rPr>
+              <a:t>Brake</a:t>
+            </a:r>
+          </a:p>
+        </p:txBody>
+      </p:sp>
+      <p:sp>
+        <p:nvSpPr>
+          <p:cNvPr id="18" name="Rectangle 17">
+            <a:extLst>
+              <a:ext uri="{FF2B5EF4-FFF2-40B4-BE49-F238E27FC236}">
+                <a16:creationId xmlns:a16="http://schemas.microsoft.com/office/drawing/2014/main" id="{81898AE3-D9F1-A18D-B71E-C2D427EB2E75}"/>
+              </a:ext>
+            </a:extLst>
+          </p:cNvPr>
+          <p:cNvSpPr/>
+          <p:nvPr/>
+        </p:nvSpPr>
+        <p:spPr>
+          <a:xfrm>
+            <a:off x="10352397" y="1783041"/>
             <a:ext cx="1595535" cy="317241"/>
           </a:xfrm>
           <a:prstGeom prst="rect">
@@ -3571,17 +4123,17 @@
                   <a:schemeClr val="tx2"/>
                 </a:solidFill>
               </a:rPr>
-              <a:t>Face Ladder</a:t>
-            </a:r>
-          </a:p>
-        </p:txBody>
-      </p:sp>
-      <p:sp>
-        <p:nvSpPr>
-          <p:cNvPr id="4" name="Rectangle 3">
-            <a:extLst>
-              <a:ext uri="{FF2B5EF4-FFF2-40B4-BE49-F238E27FC236}">
-                <a16:creationId xmlns:a16="http://schemas.microsoft.com/office/drawing/2014/main" id="{35A05582-EF86-6C17-A39A-AC3BF0D8F848}"/>
+              <a:t>Get Off Fuel</a:t>
+            </a:r>
+          </a:p>
+        </p:txBody>
+      </p:sp>
+      <p:sp>
+        <p:nvSpPr>
+          <p:cNvPr id="19" name="Rectangle 18">
+            <a:extLst>
+              <a:ext uri="{FF2B5EF4-FFF2-40B4-BE49-F238E27FC236}">
+                <a16:creationId xmlns:a16="http://schemas.microsoft.com/office/drawing/2014/main" id="{B58506C8-F57E-39F8-A34E-828E8C47B467}"/>
               </a:ext>
             </a:extLst>
           </p:cNvPr>
@@ -3590,8 +4142,8 @@
         </p:nvSpPr>
         <p:spPr>
           <a:xfrm>
-            <a:off x="245146" y="987219"/>
-            <a:ext cx="1926144" cy="317241"/>
+            <a:off x="9855703" y="444813"/>
+            <a:ext cx="1595535" cy="317241"/>
           </a:xfrm>
           <a:prstGeom prst="rect">
             <a:avLst/>
@@ -3638,17 +4190,17 @@
                   <a:schemeClr val="tx2"/>
                 </a:solidFill>
               </a:rPr>
-              <a:t>Approach Depot</a:t>
-            </a:r>
-          </a:p>
-        </p:txBody>
-      </p:sp>
-      <p:sp>
-        <p:nvSpPr>
-          <p:cNvPr id="6" name="Rectangle 5">
-            <a:extLst>
-              <a:ext uri="{FF2B5EF4-FFF2-40B4-BE49-F238E27FC236}">
-                <a16:creationId xmlns:a16="http://schemas.microsoft.com/office/drawing/2014/main" id="{FBB8A222-1AE1-5821-9AE3-A23E99456EFB}"/>
+              <a:t>Reset Position</a:t>
+            </a:r>
+          </a:p>
+        </p:txBody>
+      </p:sp>
+      <p:sp>
+        <p:nvSpPr>
+          <p:cNvPr id="26" name="Rectangle 25">
+            <a:extLst>
+              <a:ext uri="{FF2B5EF4-FFF2-40B4-BE49-F238E27FC236}">
+                <a16:creationId xmlns:a16="http://schemas.microsoft.com/office/drawing/2014/main" id="{34FDAC78-85A1-8FDA-45E0-4D17AD3E3FE7}"/>
               </a:ext>
             </a:extLst>
           </p:cNvPr>
@@ -3657,8 +4209,8 @@
         </p:nvSpPr>
         <p:spPr>
           <a:xfrm>
-            <a:off x="9139825" y="2632710"/>
-            <a:ext cx="2078544" cy="317241"/>
+            <a:off x="3747765" y="1051247"/>
+            <a:ext cx="1595535" cy="317241"/>
           </a:xfrm>
           <a:prstGeom prst="rect">
             <a:avLst/>
@@ -3705,17 +4257,17 @@
                   <a:schemeClr val="tx2"/>
                 </a:solidFill>
               </a:rPr>
-              <a:t>Right Bump Drive</a:t>
-            </a:r>
-          </a:p>
-        </p:txBody>
-      </p:sp>
-      <p:sp>
-        <p:nvSpPr>
-          <p:cNvPr id="7" name="Rectangle 6">
-            <a:extLst>
-              <a:ext uri="{FF2B5EF4-FFF2-40B4-BE49-F238E27FC236}">
-                <a16:creationId xmlns:a16="http://schemas.microsoft.com/office/drawing/2014/main" id="{68EAFFFD-7FFA-DF97-8D6F-163DB410D776}"/>
+              <a:t>Field-Relative</a:t>
+            </a:r>
+          </a:p>
+        </p:txBody>
+      </p:sp>
+      <p:sp>
+        <p:nvSpPr>
+          <p:cNvPr id="27" name="Rectangle 26">
+            <a:extLst>
+              <a:ext uri="{FF2B5EF4-FFF2-40B4-BE49-F238E27FC236}">
+                <a16:creationId xmlns:a16="http://schemas.microsoft.com/office/drawing/2014/main" id="{8ED871D7-CC1B-4507-C256-0656B10AA032}"/>
               </a:ext>
             </a:extLst>
           </p:cNvPr>
@@ -3724,8 +4276,8 @@
         </p:nvSpPr>
         <p:spPr>
           <a:xfrm>
-            <a:off x="1257530" y="2743827"/>
-            <a:ext cx="2078544" cy="317241"/>
+            <a:off x="9756775" y="6030259"/>
+            <a:ext cx="1595535" cy="317241"/>
           </a:xfrm>
           <a:prstGeom prst="rect">
             <a:avLst/>
@@ -3766,23 +4318,20 @@
           <a:lstStyle/>
           <a:p>
             <a:pPr algn="ctr"/>
-            <a:r>
-              <a:rPr lang="en-US" dirty="0">
-                <a:solidFill>
-                  <a:schemeClr val="tx2"/>
-                </a:solidFill>
-              </a:rPr>
-              <a:t>Left Bump Drive</a:t>
-            </a:r>
-          </a:p>
-        </p:txBody>
-      </p:sp>
-      <p:sp>
-        <p:nvSpPr>
-          <p:cNvPr id="8" name="Rectangle 7">
-            <a:extLst>
-              <a:ext uri="{FF2B5EF4-FFF2-40B4-BE49-F238E27FC236}">
-                <a16:creationId xmlns:a16="http://schemas.microsoft.com/office/drawing/2014/main" id="{DD3BA39E-8E6C-2C2D-0878-EFC168040B5D}"/>
+            <a:endParaRPr lang="en-US" dirty="0">
+              <a:solidFill>
+                <a:schemeClr val="tx2"/>
+              </a:solidFill>
+            </a:endParaRPr>
+          </a:p>
+        </p:txBody>
+      </p:sp>
+      <p:sp>
+        <p:nvSpPr>
+          <p:cNvPr id="28" name="Rectangle 27">
+            <a:extLst>
+              <a:ext uri="{FF2B5EF4-FFF2-40B4-BE49-F238E27FC236}">
+                <a16:creationId xmlns:a16="http://schemas.microsoft.com/office/drawing/2014/main" id="{4995BC81-9903-6C07-5912-D3957C575183}"/>
               </a:ext>
             </a:extLst>
           </p:cNvPr>
@@ -3791,8 +4340,8 @@
         </p:nvSpPr>
         <p:spPr>
           <a:xfrm>
-            <a:off x="8735624" y="4779053"/>
-            <a:ext cx="1595535" cy="449156"/>
+            <a:off x="9909175" y="6182659"/>
+            <a:ext cx="1595535" cy="317241"/>
           </a:xfrm>
           <a:prstGeom prst="rect">
             <a:avLst/>
@@ -3833,25 +4382,6 @@
           <a:lstStyle/>
           <a:p>
             <a:pPr algn="ctr"/>
-            <a:r>
-              <a:rPr lang="en-US" dirty="0">
-                <a:solidFill>
-                  <a:schemeClr val="tx2"/>
-                </a:solidFill>
-              </a:rPr>
-              <a:t>Rotation </a:t>
-            </a:r>
-          </a:p>
-          <a:p>
-            <a:pPr algn="ctr"/>
-            <a:r>
-              <a:rPr lang="en-US" sz="1100" dirty="0">
-                <a:solidFill>
-                  <a:schemeClr val="tx2"/>
-                </a:solidFill>
-              </a:rPr>
-              <a:t>(L-CCW, R-CW)</a:t>
-            </a:r>
             <a:endParaRPr lang="en-US" dirty="0">
               <a:solidFill>
                 <a:schemeClr val="tx2"/>
@@ -3862,10 +4392,10 @@
       </p:sp>
       <p:sp>
         <p:nvSpPr>
-          <p:cNvPr id="10" name="Rectangle 9">
-            <a:extLst>
-              <a:ext uri="{FF2B5EF4-FFF2-40B4-BE49-F238E27FC236}">
-                <a16:creationId xmlns:a16="http://schemas.microsoft.com/office/drawing/2014/main" id="{55110AC5-3805-9140-9F6E-0AD3E1D52544}"/>
+          <p:cNvPr id="29" name="Rectangle 28">
+            <a:extLst>
+              <a:ext uri="{FF2B5EF4-FFF2-40B4-BE49-F238E27FC236}">
+                <a16:creationId xmlns:a16="http://schemas.microsoft.com/office/drawing/2014/main" id="{3D7A8DB9-C713-AA15-2812-CCC07794A7F1}"/>
               </a:ext>
             </a:extLst>
           </p:cNvPr>
@@ -3874,8 +4404,8 @@
         </p:nvSpPr>
         <p:spPr>
           <a:xfrm>
-            <a:off x="363632" y="1405289"/>
-            <a:ext cx="1807658" cy="317241"/>
+            <a:off x="10061575" y="6335059"/>
+            <a:ext cx="1595535" cy="317241"/>
           </a:xfrm>
           <a:prstGeom prst="rect">
             <a:avLst/>
@@ -3916,475 +4446,6 @@
           <a:lstStyle/>
           <a:p>
             <a:pPr algn="ctr"/>
-            <a:r>
-              <a:rPr lang="en-US" sz="1600" dirty="0">
-                <a:solidFill>
-                  <a:schemeClr val="tx2"/>
-                </a:solidFill>
-              </a:rPr>
-              <a:t>Approach Outpost</a:t>
-            </a:r>
-          </a:p>
-        </p:txBody>
-      </p:sp>
-      <p:sp>
-        <p:nvSpPr>
-          <p:cNvPr id="12" name="Rectangle 11">
-            <a:extLst>
-              <a:ext uri="{FF2B5EF4-FFF2-40B4-BE49-F238E27FC236}">
-                <a16:creationId xmlns:a16="http://schemas.microsoft.com/office/drawing/2014/main" id="{7E8685A9-97F2-E16B-0A3B-1D1D73FA3A0C}"/>
-              </a:ext>
-            </a:extLst>
-          </p:cNvPr>
-          <p:cNvSpPr/>
-          <p:nvPr/>
-        </p:nvSpPr>
-        <p:spPr>
-          <a:xfrm>
-            <a:off x="2094029" y="5745829"/>
-            <a:ext cx="1595535" cy="317241"/>
-          </a:xfrm>
-          <a:prstGeom prst="rect">
-            <a:avLst/>
-          </a:prstGeom>
-          <a:solidFill>
-            <a:schemeClr val="accent6">
-              <a:lumMod val="20000"/>
-              <a:lumOff val="80000"/>
-            </a:schemeClr>
-          </a:solidFill>
-          <a:ln>
-            <a:solidFill>
-              <a:schemeClr val="accent2">
-                <a:lumMod val="20000"/>
-                <a:lumOff val="80000"/>
-              </a:schemeClr>
-            </a:solidFill>
-          </a:ln>
-        </p:spPr>
-        <p:style>
-          <a:lnRef idx="2">
-            <a:schemeClr val="accent1">
-              <a:shade val="15000"/>
-            </a:schemeClr>
-          </a:lnRef>
-          <a:fillRef idx="1">
-            <a:schemeClr val="accent1"/>
-          </a:fillRef>
-          <a:effectRef idx="0">
-            <a:schemeClr val="accent1"/>
-          </a:effectRef>
-          <a:fontRef idx="minor">
-            <a:schemeClr val="lt1"/>
-          </a:fontRef>
-        </p:style>
-        <p:txBody>
-          <a:bodyPr rtlCol="0" anchor="ctr"/>
-          <a:lstStyle/>
-          <a:p>
-            <a:pPr algn="ctr"/>
-            <a:r>
-              <a:rPr lang="en-US" dirty="0">
-                <a:solidFill>
-                  <a:schemeClr val="tx2"/>
-                </a:solidFill>
-              </a:rPr>
-              <a:t>Goto Ladder</a:t>
-            </a:r>
-          </a:p>
-        </p:txBody>
-      </p:sp>
-      <p:sp>
-        <p:nvSpPr>
-          <p:cNvPr id="14" name="Rectangle 13">
-            <a:extLst>
-              <a:ext uri="{FF2B5EF4-FFF2-40B4-BE49-F238E27FC236}">
-                <a16:creationId xmlns:a16="http://schemas.microsoft.com/office/drawing/2014/main" id="{53A5126C-3CC9-34EA-C4A7-B54817482BDB}"/>
-              </a:ext>
-            </a:extLst>
-          </p:cNvPr>
-          <p:cNvSpPr/>
-          <p:nvPr/>
-        </p:nvSpPr>
-        <p:spPr>
-          <a:xfrm>
-            <a:off x="8869311" y="4079189"/>
-            <a:ext cx="1595535" cy="317241"/>
-          </a:xfrm>
-          <a:prstGeom prst="rect">
-            <a:avLst/>
-          </a:prstGeom>
-          <a:solidFill>
-            <a:schemeClr val="accent6">
-              <a:lumMod val="20000"/>
-              <a:lumOff val="80000"/>
-            </a:schemeClr>
-          </a:solidFill>
-          <a:ln>
-            <a:solidFill>
-              <a:schemeClr val="accent2">
-                <a:lumMod val="20000"/>
-                <a:lumOff val="80000"/>
-              </a:schemeClr>
-            </a:solidFill>
-          </a:ln>
-        </p:spPr>
-        <p:style>
-          <a:lnRef idx="2">
-            <a:schemeClr val="accent1">
-              <a:shade val="15000"/>
-            </a:schemeClr>
-          </a:lnRef>
-          <a:fillRef idx="1">
-            <a:schemeClr val="accent1"/>
-          </a:fillRef>
-          <a:effectRef idx="0">
-            <a:schemeClr val="accent1"/>
-          </a:effectRef>
-          <a:fontRef idx="minor">
-            <a:schemeClr val="lt1"/>
-          </a:fontRef>
-        </p:style>
-        <p:txBody>
-          <a:bodyPr rtlCol="0" anchor="ctr"/>
-          <a:lstStyle/>
-          <a:p>
-            <a:pPr algn="ctr"/>
-            <a:r>
-              <a:rPr lang="en-US" dirty="0">
-                <a:solidFill>
-                  <a:schemeClr val="tx2"/>
-                </a:solidFill>
-              </a:rPr>
-              <a:t>Brake</a:t>
-            </a:r>
-          </a:p>
-        </p:txBody>
-      </p:sp>
-      <p:sp>
-        <p:nvSpPr>
-          <p:cNvPr id="15" name="Rectangle 14">
-            <a:extLst>
-              <a:ext uri="{FF2B5EF4-FFF2-40B4-BE49-F238E27FC236}">
-                <a16:creationId xmlns:a16="http://schemas.microsoft.com/office/drawing/2014/main" id="{41C4C912-598C-BBCF-680E-57B389A7F861}"/>
-              </a:ext>
-            </a:extLst>
-          </p:cNvPr>
-          <p:cNvSpPr/>
-          <p:nvPr/>
-        </p:nvSpPr>
-        <p:spPr>
-          <a:xfrm>
-            <a:off x="169277" y="6287530"/>
-            <a:ext cx="1595535" cy="317241"/>
-          </a:xfrm>
-          <a:prstGeom prst="rect">
-            <a:avLst/>
-          </a:prstGeom>
-          <a:solidFill>
-            <a:schemeClr val="accent6">
-              <a:lumMod val="20000"/>
-              <a:lumOff val="80000"/>
-            </a:schemeClr>
-          </a:solidFill>
-          <a:ln>
-            <a:solidFill>
-              <a:schemeClr val="accent2">
-                <a:lumMod val="20000"/>
-                <a:lumOff val="80000"/>
-              </a:schemeClr>
-            </a:solidFill>
-          </a:ln>
-        </p:spPr>
-        <p:style>
-          <a:lnRef idx="2">
-            <a:schemeClr val="accent1">
-              <a:shade val="15000"/>
-            </a:schemeClr>
-          </a:lnRef>
-          <a:fillRef idx="1">
-            <a:schemeClr val="accent1"/>
-          </a:fillRef>
-          <a:effectRef idx="0">
-            <a:schemeClr val="accent1"/>
-          </a:effectRef>
-          <a:fontRef idx="minor">
-            <a:schemeClr val="lt1"/>
-          </a:fontRef>
-        </p:style>
-        <p:txBody>
-          <a:bodyPr rtlCol="0" anchor="ctr"/>
-          <a:lstStyle/>
-          <a:p>
-            <a:pPr algn="ctr"/>
-            <a:r>
-              <a:rPr lang="en-US" dirty="0">
-                <a:solidFill>
-                  <a:schemeClr val="tx2"/>
-                </a:solidFill>
-              </a:rPr>
-              <a:t>Auto Climb</a:t>
-            </a:r>
-          </a:p>
-        </p:txBody>
-      </p:sp>
-      <p:sp>
-        <p:nvSpPr>
-          <p:cNvPr id="18" name="Rectangle 17">
-            <a:extLst>
-              <a:ext uri="{FF2B5EF4-FFF2-40B4-BE49-F238E27FC236}">
-                <a16:creationId xmlns:a16="http://schemas.microsoft.com/office/drawing/2014/main" id="{81898AE3-D9F1-A18D-B71E-C2D427EB2E75}"/>
-              </a:ext>
-            </a:extLst>
-          </p:cNvPr>
-          <p:cNvSpPr/>
-          <p:nvPr/>
-        </p:nvSpPr>
-        <p:spPr>
-          <a:xfrm>
-            <a:off x="193593" y="5713018"/>
-            <a:ext cx="1595535" cy="317241"/>
-          </a:xfrm>
-          <a:prstGeom prst="rect">
-            <a:avLst/>
-          </a:prstGeom>
-          <a:solidFill>
-            <a:schemeClr val="accent6">
-              <a:lumMod val="20000"/>
-              <a:lumOff val="80000"/>
-            </a:schemeClr>
-          </a:solidFill>
-          <a:ln>
-            <a:solidFill>
-              <a:schemeClr val="accent2">
-                <a:lumMod val="20000"/>
-                <a:lumOff val="80000"/>
-              </a:schemeClr>
-            </a:solidFill>
-          </a:ln>
-        </p:spPr>
-        <p:style>
-          <a:lnRef idx="2">
-            <a:schemeClr val="accent1">
-              <a:shade val="15000"/>
-            </a:schemeClr>
-          </a:lnRef>
-          <a:fillRef idx="1">
-            <a:schemeClr val="accent1"/>
-          </a:fillRef>
-          <a:effectRef idx="0">
-            <a:schemeClr val="accent1"/>
-          </a:effectRef>
-          <a:fontRef idx="minor">
-            <a:schemeClr val="lt1"/>
-          </a:fontRef>
-        </p:style>
-        <p:txBody>
-          <a:bodyPr rtlCol="0" anchor="ctr"/>
-          <a:lstStyle/>
-          <a:p>
-            <a:pPr algn="ctr"/>
-            <a:r>
-              <a:rPr lang="en-US" dirty="0">
-                <a:solidFill>
-                  <a:schemeClr val="tx2"/>
-                </a:solidFill>
-              </a:rPr>
-              <a:t>Get Off Fuel</a:t>
-            </a:r>
-          </a:p>
-        </p:txBody>
-      </p:sp>
-      <p:sp>
-        <p:nvSpPr>
-          <p:cNvPr id="19" name="Rectangle 18">
-            <a:extLst>
-              <a:ext uri="{FF2B5EF4-FFF2-40B4-BE49-F238E27FC236}">
-                <a16:creationId xmlns:a16="http://schemas.microsoft.com/office/drawing/2014/main" id="{B58506C8-F57E-39F8-A34E-828E8C47B467}"/>
-              </a:ext>
-            </a:extLst>
-          </p:cNvPr>
-          <p:cNvSpPr/>
-          <p:nvPr/>
-        </p:nvSpPr>
-        <p:spPr>
-          <a:xfrm>
-            <a:off x="9855703" y="444813"/>
-            <a:ext cx="1595535" cy="317241"/>
-          </a:xfrm>
-          <a:prstGeom prst="rect">
-            <a:avLst/>
-          </a:prstGeom>
-          <a:solidFill>
-            <a:schemeClr val="accent6">
-              <a:lumMod val="20000"/>
-              <a:lumOff val="80000"/>
-            </a:schemeClr>
-          </a:solidFill>
-          <a:ln>
-            <a:solidFill>
-              <a:schemeClr val="accent2">
-                <a:lumMod val="20000"/>
-                <a:lumOff val="80000"/>
-              </a:schemeClr>
-            </a:solidFill>
-          </a:ln>
-        </p:spPr>
-        <p:style>
-          <a:lnRef idx="2">
-            <a:schemeClr val="accent1">
-              <a:shade val="15000"/>
-            </a:schemeClr>
-          </a:lnRef>
-          <a:fillRef idx="1">
-            <a:schemeClr val="accent1"/>
-          </a:fillRef>
-          <a:effectRef idx="0">
-            <a:schemeClr val="accent1"/>
-          </a:effectRef>
-          <a:fontRef idx="minor">
-            <a:schemeClr val="lt1"/>
-          </a:fontRef>
-        </p:style>
-        <p:txBody>
-          <a:bodyPr rtlCol="0" anchor="ctr"/>
-          <a:lstStyle/>
-          <a:p>
-            <a:pPr algn="ctr"/>
-            <a:r>
-              <a:rPr lang="en-US" dirty="0">
-                <a:solidFill>
-                  <a:schemeClr val="tx2"/>
-                </a:solidFill>
-              </a:rPr>
-              <a:t>Reset Position</a:t>
-            </a:r>
-          </a:p>
-        </p:txBody>
-      </p:sp>
-      <p:sp>
-        <p:nvSpPr>
-          <p:cNvPr id="26" name="Rectangle 25">
-            <a:extLst>
-              <a:ext uri="{FF2B5EF4-FFF2-40B4-BE49-F238E27FC236}">
-                <a16:creationId xmlns:a16="http://schemas.microsoft.com/office/drawing/2014/main" id="{34FDAC78-85A1-8FDA-45E0-4D17AD3E3FE7}"/>
-              </a:ext>
-            </a:extLst>
-          </p:cNvPr>
-          <p:cNvSpPr/>
-          <p:nvPr/>
-        </p:nvSpPr>
-        <p:spPr>
-          <a:xfrm>
-            <a:off x="3747765" y="1051247"/>
-            <a:ext cx="1595535" cy="317241"/>
-          </a:xfrm>
-          <a:prstGeom prst="rect">
-            <a:avLst/>
-          </a:prstGeom>
-          <a:solidFill>
-            <a:schemeClr val="accent6">
-              <a:lumMod val="20000"/>
-              <a:lumOff val="80000"/>
-            </a:schemeClr>
-          </a:solidFill>
-          <a:ln>
-            <a:solidFill>
-              <a:schemeClr val="accent2">
-                <a:lumMod val="20000"/>
-                <a:lumOff val="80000"/>
-              </a:schemeClr>
-            </a:solidFill>
-          </a:ln>
-        </p:spPr>
-        <p:style>
-          <a:lnRef idx="2">
-            <a:schemeClr val="accent1">
-              <a:shade val="15000"/>
-            </a:schemeClr>
-          </a:lnRef>
-          <a:fillRef idx="1">
-            <a:schemeClr val="accent1"/>
-          </a:fillRef>
-          <a:effectRef idx="0">
-            <a:schemeClr val="accent1"/>
-          </a:effectRef>
-          <a:fontRef idx="minor">
-            <a:schemeClr val="lt1"/>
-          </a:fontRef>
-        </p:style>
-        <p:txBody>
-          <a:bodyPr rtlCol="0" anchor="ctr"/>
-          <a:lstStyle/>
-          <a:p>
-            <a:pPr algn="ctr"/>
-            <a:r>
-              <a:rPr lang="en-US" dirty="0">
-                <a:solidFill>
-                  <a:schemeClr val="tx2"/>
-                </a:solidFill>
-              </a:rPr>
-              <a:t>Field-Relative</a:t>
-            </a:r>
-          </a:p>
-        </p:txBody>
-      </p:sp>
-      <p:sp>
-        <p:nvSpPr>
-          <p:cNvPr id="27" name="Rectangle 26">
-            <a:extLst>
-              <a:ext uri="{FF2B5EF4-FFF2-40B4-BE49-F238E27FC236}">
-                <a16:creationId xmlns:a16="http://schemas.microsoft.com/office/drawing/2014/main" id="{8ED871D7-CC1B-4507-C256-0656B10AA032}"/>
-              </a:ext>
-            </a:extLst>
-          </p:cNvPr>
-          <p:cNvSpPr/>
-          <p:nvPr/>
-        </p:nvSpPr>
-        <p:spPr>
-          <a:xfrm>
-            <a:off x="9756775" y="6030259"/>
-            <a:ext cx="1595535" cy="317241"/>
-          </a:xfrm>
-          <a:prstGeom prst="rect">
-            <a:avLst/>
-          </a:prstGeom>
-          <a:solidFill>
-            <a:schemeClr val="accent6">
-              <a:lumMod val="20000"/>
-              <a:lumOff val="80000"/>
-            </a:schemeClr>
-          </a:solidFill>
-          <a:ln>
-            <a:solidFill>
-              <a:schemeClr val="accent2">
-                <a:lumMod val="20000"/>
-                <a:lumOff val="80000"/>
-              </a:schemeClr>
-            </a:solidFill>
-          </a:ln>
-        </p:spPr>
-        <p:style>
-          <a:lnRef idx="2">
-            <a:schemeClr val="accent1">
-              <a:shade val="15000"/>
-            </a:schemeClr>
-          </a:lnRef>
-          <a:fillRef idx="1">
-            <a:schemeClr val="accent1"/>
-          </a:fillRef>
-          <a:effectRef idx="0">
-            <a:schemeClr val="accent1"/>
-          </a:effectRef>
-          <a:fontRef idx="minor">
-            <a:schemeClr val="lt1"/>
-          </a:fontRef>
-        </p:style>
-        <p:txBody>
-          <a:bodyPr rtlCol="0" anchor="ctr"/>
-          <a:lstStyle/>
-          <a:p>
-            <a:pPr algn="ctr"/>
             <a:endParaRPr lang="en-US" dirty="0">
               <a:solidFill>
                 <a:schemeClr val="tx2"/>
@@ -4395,134 +4456,6 @@
       </p:sp>
       <p:sp>
         <p:nvSpPr>
-          <p:cNvPr id="28" name="Rectangle 27">
-            <a:extLst>
-              <a:ext uri="{FF2B5EF4-FFF2-40B4-BE49-F238E27FC236}">
-                <a16:creationId xmlns:a16="http://schemas.microsoft.com/office/drawing/2014/main" id="{4995BC81-9903-6C07-5912-D3957C575183}"/>
-              </a:ext>
-            </a:extLst>
-          </p:cNvPr>
-          <p:cNvSpPr/>
-          <p:nvPr/>
-        </p:nvSpPr>
-        <p:spPr>
-          <a:xfrm>
-            <a:off x="9909175" y="6182659"/>
-            <a:ext cx="1595535" cy="317241"/>
-          </a:xfrm>
-          <a:prstGeom prst="rect">
-            <a:avLst/>
-          </a:prstGeom>
-          <a:solidFill>
-            <a:schemeClr val="accent6">
-              <a:lumMod val="20000"/>
-              <a:lumOff val="80000"/>
-            </a:schemeClr>
-          </a:solidFill>
-          <a:ln>
-            <a:solidFill>
-              <a:schemeClr val="accent2">
-                <a:lumMod val="20000"/>
-                <a:lumOff val="80000"/>
-              </a:schemeClr>
-            </a:solidFill>
-          </a:ln>
-        </p:spPr>
-        <p:style>
-          <a:lnRef idx="2">
-            <a:schemeClr val="accent1">
-              <a:shade val="15000"/>
-            </a:schemeClr>
-          </a:lnRef>
-          <a:fillRef idx="1">
-            <a:schemeClr val="accent1"/>
-          </a:fillRef>
-          <a:effectRef idx="0">
-            <a:schemeClr val="accent1"/>
-          </a:effectRef>
-          <a:fontRef idx="minor">
-            <a:schemeClr val="lt1"/>
-          </a:fontRef>
-        </p:style>
-        <p:txBody>
-          <a:bodyPr rtlCol="0" anchor="ctr"/>
-          <a:lstStyle/>
-          <a:p>
-            <a:pPr algn="ctr"/>
-            <a:endParaRPr lang="en-US" dirty="0">
-              <a:solidFill>
-                <a:schemeClr val="tx2"/>
-              </a:solidFill>
-            </a:endParaRPr>
-          </a:p>
-        </p:txBody>
-      </p:sp>
-      <p:sp>
-        <p:nvSpPr>
-          <p:cNvPr id="29" name="Rectangle 28">
-            <a:extLst>
-              <a:ext uri="{FF2B5EF4-FFF2-40B4-BE49-F238E27FC236}">
-                <a16:creationId xmlns:a16="http://schemas.microsoft.com/office/drawing/2014/main" id="{3D7A8DB9-C713-AA15-2812-CCC07794A7F1}"/>
-              </a:ext>
-            </a:extLst>
-          </p:cNvPr>
-          <p:cNvSpPr/>
-          <p:nvPr/>
-        </p:nvSpPr>
-        <p:spPr>
-          <a:xfrm>
-            <a:off x="10061575" y="6335059"/>
-            <a:ext cx="1595535" cy="317241"/>
-          </a:xfrm>
-          <a:prstGeom prst="rect">
-            <a:avLst/>
-          </a:prstGeom>
-          <a:solidFill>
-            <a:schemeClr val="accent6">
-              <a:lumMod val="20000"/>
-              <a:lumOff val="80000"/>
-            </a:schemeClr>
-          </a:solidFill>
-          <a:ln>
-            <a:solidFill>
-              <a:schemeClr val="accent2">
-                <a:lumMod val="20000"/>
-                <a:lumOff val="80000"/>
-              </a:schemeClr>
-            </a:solidFill>
-          </a:ln>
-        </p:spPr>
-        <p:style>
-          <a:lnRef idx="2">
-            <a:schemeClr val="accent1">
-              <a:shade val="15000"/>
-            </a:schemeClr>
-          </a:lnRef>
-          <a:fillRef idx="1">
-            <a:schemeClr val="accent1"/>
-          </a:fillRef>
-          <a:effectRef idx="0">
-            <a:schemeClr val="accent1"/>
-          </a:effectRef>
-          <a:fontRef idx="minor">
-            <a:schemeClr val="lt1"/>
-          </a:fontRef>
-        </p:style>
-        <p:txBody>
-          <a:bodyPr rtlCol="0" anchor="ctr"/>
-          <a:lstStyle/>
-          <a:p>
-            <a:pPr algn="ctr"/>
-            <a:endParaRPr lang="en-US" dirty="0">
-              <a:solidFill>
-                <a:schemeClr val="tx2"/>
-              </a:solidFill>
-            </a:endParaRPr>
-          </a:p>
-        </p:txBody>
-      </p:sp>
-      <p:sp>
-        <p:nvSpPr>
           <p:cNvPr id="30" name="Rectangle 29">
             <a:extLst>
               <a:ext uri="{FF2B5EF4-FFF2-40B4-BE49-F238E27FC236}">
@@ -4542,7 +4475,7 @@
             <a:avLst/>
           </a:prstGeom>
           <a:solidFill>
-            <a:schemeClr val="accent6">
+            <a:schemeClr val="accent4">
               <a:lumMod val="20000"/>
               <a:lumOff val="80000"/>
             </a:schemeClr>
@@ -5642,6 +5575,73 @@
             <a:avLst/>
           </a:prstGeom>
           <a:solidFill>
+            <a:schemeClr val="accent4">
+              <a:lumMod val="20000"/>
+              <a:lumOff val="80000"/>
+            </a:schemeClr>
+          </a:solidFill>
+          <a:ln>
+            <a:solidFill>
+              <a:schemeClr val="accent2">
+                <a:lumMod val="20000"/>
+                <a:lumOff val="80000"/>
+              </a:schemeClr>
+            </a:solidFill>
+          </a:ln>
+        </p:spPr>
+        <p:style>
+          <a:lnRef idx="2">
+            <a:schemeClr val="accent1">
+              <a:shade val="15000"/>
+            </a:schemeClr>
+          </a:lnRef>
+          <a:fillRef idx="1">
+            <a:schemeClr val="accent1"/>
+          </a:fillRef>
+          <a:effectRef idx="0">
+            <a:schemeClr val="accent1"/>
+          </a:effectRef>
+          <a:fontRef idx="minor">
+            <a:schemeClr val="lt1"/>
+          </a:fontRef>
+        </p:style>
+        <p:txBody>
+          <a:bodyPr rtlCol="0" anchor="ctr"/>
+          <a:lstStyle/>
+          <a:p>
+            <a:pPr algn="ctr"/>
+            <a:r>
+              <a:rPr lang="en-US" sz="1600" dirty="0">
+                <a:solidFill>
+                  <a:schemeClr val="tx2"/>
+                </a:solidFill>
+              </a:rPr>
+              <a:t>Override some commands</a:t>
+            </a:r>
+          </a:p>
+        </p:txBody>
+      </p:sp>
+      <p:sp>
+        <p:nvSpPr>
+          <p:cNvPr id="13" name="Rectangle 12">
+            <a:extLst>
+              <a:ext uri="{FF2B5EF4-FFF2-40B4-BE49-F238E27FC236}">
+                <a16:creationId xmlns:a16="http://schemas.microsoft.com/office/drawing/2014/main" id="{E21C7D74-9E42-EFEA-80F6-1D133A9F6B34}"/>
+              </a:ext>
+            </a:extLst>
+          </p:cNvPr>
+          <p:cNvSpPr/>
+          <p:nvPr/>
+        </p:nvSpPr>
+        <p:spPr>
+          <a:xfrm>
+            <a:off x="2266769" y="4456722"/>
+            <a:ext cx="1776927" cy="317241"/>
+          </a:xfrm>
+          <a:prstGeom prst="rect">
+            <a:avLst/>
+          </a:prstGeom>
+          <a:solidFill>
             <a:schemeClr val="accent6">
               <a:lumMod val="20000"/>
               <a:lumOff val="80000"/>
@@ -5678,16 +5678,374 @@
           <a:p>
             <a:pPr algn="ctr"/>
             <a:r>
-              <a:rPr lang="en-US" sz="1600" dirty="0">
+              <a:rPr lang="en-US" dirty="0">
                 <a:solidFill>
                   <a:schemeClr val="tx2"/>
                 </a:solidFill>
               </a:rPr>
-              <a:t>Override some commands</a:t>
-            </a:r>
-          </a:p>
-        </p:txBody>
-      </p:sp>
+              <a:t>Retract Climber</a:t>
+            </a:r>
+          </a:p>
+        </p:txBody>
+      </p:sp>
+      <p:sp>
+        <p:nvSpPr>
+          <p:cNvPr id="16" name="Rectangle 15">
+            <a:extLst>
+              <a:ext uri="{FF2B5EF4-FFF2-40B4-BE49-F238E27FC236}">
+                <a16:creationId xmlns:a16="http://schemas.microsoft.com/office/drawing/2014/main" id="{7673C7B7-06E6-1A95-7898-3C959F4A95F3}"/>
+              </a:ext>
+            </a:extLst>
+          </p:cNvPr>
+          <p:cNvSpPr/>
+          <p:nvPr/>
+        </p:nvSpPr>
+        <p:spPr>
+          <a:xfrm>
+            <a:off x="2266769" y="3981523"/>
+            <a:ext cx="1776927" cy="317241"/>
+          </a:xfrm>
+          <a:prstGeom prst="rect">
+            <a:avLst/>
+          </a:prstGeom>
+          <a:solidFill>
+            <a:schemeClr val="accent6">
+              <a:lumMod val="20000"/>
+              <a:lumOff val="80000"/>
+            </a:schemeClr>
+          </a:solidFill>
+          <a:ln>
+            <a:solidFill>
+              <a:schemeClr val="accent2">
+                <a:lumMod val="20000"/>
+                <a:lumOff val="80000"/>
+              </a:schemeClr>
+            </a:solidFill>
+          </a:ln>
+        </p:spPr>
+        <p:style>
+          <a:lnRef idx="2">
+            <a:schemeClr val="accent1">
+              <a:shade val="15000"/>
+            </a:schemeClr>
+          </a:lnRef>
+          <a:fillRef idx="1">
+            <a:schemeClr val="accent1"/>
+          </a:fillRef>
+          <a:effectRef idx="0">
+            <a:schemeClr val="accent1"/>
+          </a:effectRef>
+          <a:fontRef idx="minor">
+            <a:schemeClr val="lt1"/>
+          </a:fontRef>
+        </p:style>
+        <p:txBody>
+          <a:bodyPr rtlCol="0" anchor="ctr"/>
+          <a:lstStyle/>
+          <a:p>
+            <a:pPr algn="ctr"/>
+            <a:r>
+              <a:rPr lang="en-US" dirty="0">
+                <a:solidFill>
+                  <a:schemeClr val="tx2"/>
+                </a:solidFill>
+              </a:rPr>
+              <a:t>Extend Climber</a:t>
+            </a:r>
+          </a:p>
+        </p:txBody>
+      </p:sp>
+      <p:cxnSp>
+        <p:nvCxnSpPr>
+          <p:cNvPr id="17" name="Straight Arrow Connector 16">
+            <a:extLst>
+              <a:ext uri="{FF2B5EF4-FFF2-40B4-BE49-F238E27FC236}">
+                <a16:creationId xmlns:a16="http://schemas.microsoft.com/office/drawing/2014/main" id="{53987952-B928-FA1B-E6F3-06B1BE551BC8}"/>
+              </a:ext>
+            </a:extLst>
+          </p:cNvPr>
+          <p:cNvCxnSpPr>
+            <a:cxnSpLocks/>
+            <a:stCxn id="16" idx="3"/>
+          </p:cNvCxnSpPr>
+          <p:nvPr/>
+        </p:nvCxnSpPr>
+        <p:spPr>
+          <a:xfrm flipV="1">
+            <a:off x="4043696" y="3713584"/>
+            <a:ext cx="1425427" cy="426560"/>
+          </a:xfrm>
+          <a:prstGeom prst="straightConnector1">
+            <a:avLst/>
+          </a:prstGeom>
+          <a:ln>
+            <a:solidFill>
+              <a:srgbClr val="FF0000"/>
+            </a:solidFill>
+            <a:tailEnd type="triangle"/>
+          </a:ln>
+        </p:spPr>
+        <p:style>
+          <a:lnRef idx="2">
+            <a:schemeClr val="accent1"/>
+          </a:lnRef>
+          <a:fillRef idx="0">
+            <a:schemeClr val="accent1"/>
+          </a:fillRef>
+          <a:effectRef idx="1">
+            <a:schemeClr val="accent1"/>
+          </a:effectRef>
+          <a:fontRef idx="minor">
+            <a:schemeClr val="tx1"/>
+          </a:fontRef>
+        </p:style>
+      </p:cxnSp>
+      <p:cxnSp>
+        <p:nvCxnSpPr>
+          <p:cNvPr id="20" name="Straight Arrow Connector 19">
+            <a:extLst>
+              <a:ext uri="{FF2B5EF4-FFF2-40B4-BE49-F238E27FC236}">
+                <a16:creationId xmlns:a16="http://schemas.microsoft.com/office/drawing/2014/main" id="{019A9B10-6C2A-AF35-03AB-3041901E7DD5}"/>
+              </a:ext>
+            </a:extLst>
+          </p:cNvPr>
+          <p:cNvCxnSpPr>
+            <a:cxnSpLocks/>
+            <a:stCxn id="13" idx="3"/>
+          </p:cNvCxnSpPr>
+          <p:nvPr/>
+        </p:nvCxnSpPr>
+        <p:spPr>
+          <a:xfrm flipV="1">
+            <a:off x="4043696" y="4237810"/>
+            <a:ext cx="1443951" cy="377533"/>
+          </a:xfrm>
+          <a:prstGeom prst="straightConnector1">
+            <a:avLst/>
+          </a:prstGeom>
+          <a:ln>
+            <a:solidFill>
+              <a:srgbClr val="FF0000"/>
+            </a:solidFill>
+            <a:tailEnd type="triangle"/>
+          </a:ln>
+        </p:spPr>
+        <p:style>
+          <a:lnRef idx="2">
+            <a:schemeClr val="accent1"/>
+          </a:lnRef>
+          <a:fillRef idx="0">
+            <a:schemeClr val="accent1"/>
+          </a:fillRef>
+          <a:effectRef idx="1">
+            <a:schemeClr val="accent1"/>
+          </a:effectRef>
+          <a:fontRef idx="minor">
+            <a:schemeClr val="tx1"/>
+          </a:fontRef>
+        </p:style>
+      </p:cxnSp>
+      <p:grpSp>
+        <p:nvGrpSpPr>
+          <p:cNvPr id="21" name="Group 20">
+            <a:extLst>
+              <a:ext uri="{FF2B5EF4-FFF2-40B4-BE49-F238E27FC236}">
+                <a16:creationId xmlns:a16="http://schemas.microsoft.com/office/drawing/2014/main" id="{22AF6C74-82F6-134D-1AF5-C2B55EE27074}"/>
+              </a:ext>
+            </a:extLst>
+          </p:cNvPr>
+          <p:cNvGrpSpPr/>
+          <p:nvPr/>
+        </p:nvGrpSpPr>
+        <p:grpSpPr>
+          <a:xfrm>
+            <a:off x="240991" y="5477120"/>
+            <a:ext cx="1914612" cy="1145565"/>
+            <a:chOff x="1959429" y="0"/>
+            <a:chExt cx="1914612" cy="1145565"/>
+          </a:xfrm>
+        </p:grpSpPr>
+        <p:sp>
+          <p:nvSpPr>
+            <p:cNvPr id="22" name="Rectangle 21">
+              <a:extLst>
+                <a:ext uri="{FF2B5EF4-FFF2-40B4-BE49-F238E27FC236}">
+                  <a16:creationId xmlns:a16="http://schemas.microsoft.com/office/drawing/2014/main" id="{71634ECF-E2DC-5F54-F63A-C8EC68B7BCF1}"/>
+                </a:ext>
+              </a:extLst>
+            </p:cNvPr>
+            <p:cNvSpPr/>
+            <p:nvPr/>
+          </p:nvSpPr>
+          <p:spPr>
+            <a:xfrm>
+              <a:off x="1959429" y="0"/>
+              <a:ext cx="1914612" cy="1145565"/>
+            </a:xfrm>
+            <a:prstGeom prst="rect">
+              <a:avLst/>
+            </a:prstGeom>
+          </p:spPr>
+          <p:style>
+            <a:lnRef idx="2">
+              <a:schemeClr val="accent1">
+                <a:shade val="15000"/>
+              </a:schemeClr>
+            </a:lnRef>
+            <a:fillRef idx="1">
+              <a:schemeClr val="accent1"/>
+            </a:fillRef>
+            <a:effectRef idx="0">
+              <a:schemeClr val="accent1"/>
+            </a:effectRef>
+            <a:fontRef idx="minor">
+              <a:schemeClr val="lt1"/>
+            </a:fontRef>
+          </p:style>
+          <p:txBody>
+            <a:bodyPr rtlCol="0" anchor="ctr"/>
+            <a:lstStyle/>
+            <a:p>
+              <a:pPr algn="ctr"/>
+              <a:endParaRPr lang="en-US"/>
+            </a:p>
+          </p:txBody>
+        </p:sp>
+        <p:sp>
+          <p:nvSpPr>
+            <p:cNvPr id="25" name="Rectangle 24">
+              <a:extLst>
+                <a:ext uri="{FF2B5EF4-FFF2-40B4-BE49-F238E27FC236}">
+                  <a16:creationId xmlns:a16="http://schemas.microsoft.com/office/drawing/2014/main" id="{8C10AFCA-A67C-8398-62E8-31E063D300A1}"/>
+                </a:ext>
+              </a:extLst>
+            </p:cNvPr>
+            <p:cNvSpPr/>
+            <p:nvPr/>
+          </p:nvSpPr>
+          <p:spPr>
+            <a:xfrm>
+              <a:off x="2132044" y="162049"/>
+              <a:ext cx="1595535" cy="317241"/>
+            </a:xfrm>
+            <a:prstGeom prst="rect">
+              <a:avLst/>
+            </a:prstGeom>
+            <a:solidFill>
+              <a:schemeClr val="accent6">
+                <a:lumMod val="20000"/>
+                <a:lumOff val="80000"/>
+              </a:schemeClr>
+            </a:solidFill>
+            <a:ln>
+              <a:solidFill>
+                <a:schemeClr val="accent2">
+                  <a:lumMod val="20000"/>
+                  <a:lumOff val="80000"/>
+                </a:schemeClr>
+              </a:solidFill>
+            </a:ln>
+          </p:spPr>
+          <p:style>
+            <a:lnRef idx="2">
+              <a:schemeClr val="accent1">
+                <a:shade val="15000"/>
+              </a:schemeClr>
+            </a:lnRef>
+            <a:fillRef idx="1">
+              <a:schemeClr val="accent1"/>
+            </a:fillRef>
+            <a:effectRef idx="0">
+              <a:schemeClr val="accent1"/>
+            </a:effectRef>
+            <a:fontRef idx="minor">
+              <a:schemeClr val="lt1"/>
+            </a:fontRef>
+          </p:style>
+          <p:txBody>
+            <a:bodyPr rtlCol="0" anchor="ctr"/>
+            <a:lstStyle/>
+            <a:p>
+              <a:pPr algn="ctr"/>
+              <a:r>
+                <a:rPr lang="en-US" dirty="0">
+                  <a:solidFill>
+                    <a:schemeClr val="tx2"/>
+                  </a:solidFill>
+                </a:rPr>
+                <a:t>One-Shot</a:t>
+              </a:r>
+            </a:p>
+          </p:txBody>
+        </p:sp>
+        <p:sp>
+          <p:nvSpPr>
+            <p:cNvPr id="38" name="Rectangle 37">
+              <a:extLst>
+                <a:ext uri="{FF2B5EF4-FFF2-40B4-BE49-F238E27FC236}">
+                  <a16:creationId xmlns:a16="http://schemas.microsoft.com/office/drawing/2014/main" id="{A33D9434-D197-083D-72CA-B83B5FEB5E04}"/>
+                </a:ext>
+              </a:extLst>
+            </p:cNvPr>
+            <p:cNvSpPr/>
+            <p:nvPr/>
+          </p:nvSpPr>
+          <p:spPr>
+            <a:xfrm>
+              <a:off x="2132044" y="700932"/>
+              <a:ext cx="1595535" cy="317241"/>
+            </a:xfrm>
+            <a:prstGeom prst="rect">
+              <a:avLst/>
+            </a:prstGeom>
+            <a:solidFill>
+              <a:schemeClr val="accent4">
+                <a:lumMod val="20000"/>
+                <a:lumOff val="80000"/>
+              </a:schemeClr>
+            </a:solidFill>
+            <a:ln>
+              <a:solidFill>
+                <a:schemeClr val="accent2">
+                  <a:lumMod val="20000"/>
+                  <a:lumOff val="80000"/>
+                </a:schemeClr>
+              </a:solidFill>
+            </a:ln>
+          </p:spPr>
+          <p:style>
+            <a:lnRef idx="2">
+              <a:schemeClr val="accent1">
+                <a:shade val="15000"/>
+              </a:schemeClr>
+            </a:lnRef>
+            <a:fillRef idx="1">
+              <a:schemeClr val="accent1"/>
+            </a:fillRef>
+            <a:effectRef idx="0">
+              <a:schemeClr val="accent1"/>
+            </a:effectRef>
+            <a:fontRef idx="minor">
+              <a:schemeClr val="lt1"/>
+            </a:fontRef>
+          </p:style>
+          <p:txBody>
+            <a:bodyPr rtlCol="0" anchor="ctr"/>
+            <a:lstStyle/>
+            <a:p>
+              <a:pPr algn="ctr"/>
+              <a:r>
+                <a:rPr lang="en-US" dirty="0">
+                  <a:solidFill>
+                    <a:schemeClr val="tx2"/>
+                  </a:solidFill>
+                </a:rPr>
+                <a:t>While Pressed</a:t>
+              </a:r>
+            </a:p>
+          </p:txBody>
+        </p:sp>
+      </p:grpSp>
     </p:spTree>
     <p:extLst>
       <p:ext uri="{BB962C8B-B14F-4D97-AF65-F5344CB8AC3E}">
@@ -5803,7 +6161,688 @@
         </p:nvSpPr>
         <p:spPr>
           <a:xfrm>
-            <a:off x="9437998" y="4069318"/>
+            <a:off x="8600856" y="6478616"/>
+            <a:ext cx="1595535" cy="317241"/>
+          </a:xfrm>
+          <a:prstGeom prst="rect">
+            <a:avLst/>
+          </a:prstGeom>
+          <a:solidFill>
+            <a:schemeClr val="accent4">
+              <a:lumMod val="20000"/>
+              <a:lumOff val="80000"/>
+            </a:schemeClr>
+          </a:solidFill>
+          <a:ln>
+            <a:solidFill>
+              <a:schemeClr val="accent2">
+                <a:lumMod val="20000"/>
+                <a:lumOff val="80000"/>
+              </a:schemeClr>
+            </a:solidFill>
+          </a:ln>
+        </p:spPr>
+        <p:style>
+          <a:lnRef idx="2">
+            <a:schemeClr val="accent1">
+              <a:shade val="15000"/>
+            </a:schemeClr>
+          </a:lnRef>
+          <a:fillRef idx="1">
+            <a:schemeClr val="accent1"/>
+          </a:fillRef>
+          <a:effectRef idx="0">
+            <a:schemeClr val="accent1"/>
+          </a:effectRef>
+          <a:fontRef idx="minor">
+            <a:schemeClr val="lt1"/>
+          </a:fontRef>
+        </p:style>
+        <p:txBody>
+          <a:bodyPr rtlCol="0" anchor="ctr"/>
+          <a:lstStyle/>
+          <a:p>
+            <a:pPr algn="ctr"/>
+            <a:r>
+              <a:rPr lang="en-US" dirty="0">
+                <a:solidFill>
+                  <a:schemeClr val="tx2"/>
+                </a:solidFill>
+              </a:rPr>
+              <a:t>Ladder Align</a:t>
+            </a:r>
+          </a:p>
+        </p:txBody>
+      </p:sp>
+      <p:sp>
+        <p:nvSpPr>
+          <p:cNvPr id="4" name="Rectangle 3">
+            <a:extLst>
+              <a:ext uri="{FF2B5EF4-FFF2-40B4-BE49-F238E27FC236}">
+                <a16:creationId xmlns:a16="http://schemas.microsoft.com/office/drawing/2014/main" id="{4D68B21B-BC45-4D8E-3E39-987DC3CFE410}"/>
+              </a:ext>
+            </a:extLst>
+          </p:cNvPr>
+          <p:cNvSpPr/>
+          <p:nvPr/>
+        </p:nvSpPr>
+        <p:spPr>
+          <a:xfrm>
+            <a:off x="7153705" y="5917027"/>
+            <a:ext cx="1926144" cy="317241"/>
+          </a:xfrm>
+          <a:prstGeom prst="rect">
+            <a:avLst/>
+          </a:prstGeom>
+          <a:solidFill>
+            <a:schemeClr val="accent4">
+              <a:lumMod val="20000"/>
+              <a:lumOff val="80000"/>
+            </a:schemeClr>
+          </a:solidFill>
+          <a:ln>
+            <a:solidFill>
+              <a:schemeClr val="accent2">
+                <a:lumMod val="20000"/>
+                <a:lumOff val="80000"/>
+              </a:schemeClr>
+            </a:solidFill>
+          </a:ln>
+        </p:spPr>
+        <p:style>
+          <a:lnRef idx="2">
+            <a:schemeClr val="accent1">
+              <a:shade val="15000"/>
+            </a:schemeClr>
+          </a:lnRef>
+          <a:fillRef idx="1">
+            <a:schemeClr val="accent1"/>
+          </a:fillRef>
+          <a:effectRef idx="0">
+            <a:schemeClr val="accent1"/>
+          </a:effectRef>
+          <a:fontRef idx="minor">
+            <a:schemeClr val="lt1"/>
+          </a:fontRef>
+        </p:style>
+        <p:txBody>
+          <a:bodyPr rtlCol="0" anchor="ctr"/>
+          <a:lstStyle/>
+          <a:p>
+            <a:pPr algn="ctr"/>
+            <a:r>
+              <a:rPr lang="en-US" dirty="0">
+                <a:solidFill>
+                  <a:schemeClr val="tx2"/>
+                </a:solidFill>
+              </a:rPr>
+              <a:t>Approach Depot</a:t>
+            </a:r>
+          </a:p>
+        </p:txBody>
+      </p:sp>
+      <p:sp>
+        <p:nvSpPr>
+          <p:cNvPr id="10" name="Rectangle 9">
+            <a:extLst>
+              <a:ext uri="{FF2B5EF4-FFF2-40B4-BE49-F238E27FC236}">
+                <a16:creationId xmlns:a16="http://schemas.microsoft.com/office/drawing/2014/main" id="{6526CD50-9017-5B4D-4931-DC8A76551DCD}"/>
+              </a:ext>
+            </a:extLst>
+          </p:cNvPr>
+          <p:cNvSpPr/>
+          <p:nvPr/>
+        </p:nvSpPr>
+        <p:spPr>
+          <a:xfrm>
+            <a:off x="6758819" y="6377649"/>
+            <a:ext cx="1807658" cy="317241"/>
+          </a:xfrm>
+          <a:prstGeom prst="rect">
+            <a:avLst/>
+          </a:prstGeom>
+          <a:solidFill>
+            <a:schemeClr val="accent4">
+              <a:lumMod val="20000"/>
+              <a:lumOff val="80000"/>
+            </a:schemeClr>
+          </a:solidFill>
+          <a:ln>
+            <a:solidFill>
+              <a:schemeClr val="accent2">
+                <a:lumMod val="20000"/>
+                <a:lumOff val="80000"/>
+              </a:schemeClr>
+            </a:solidFill>
+          </a:ln>
+        </p:spPr>
+        <p:style>
+          <a:lnRef idx="2">
+            <a:schemeClr val="accent1">
+              <a:shade val="15000"/>
+            </a:schemeClr>
+          </a:lnRef>
+          <a:fillRef idx="1">
+            <a:schemeClr val="accent1"/>
+          </a:fillRef>
+          <a:effectRef idx="0">
+            <a:schemeClr val="accent1"/>
+          </a:effectRef>
+          <a:fontRef idx="minor">
+            <a:schemeClr val="lt1"/>
+          </a:fontRef>
+        </p:style>
+        <p:txBody>
+          <a:bodyPr rtlCol="0" anchor="ctr"/>
+          <a:lstStyle/>
+          <a:p>
+            <a:pPr algn="ctr"/>
+            <a:r>
+              <a:rPr lang="en-US" sz="1600" dirty="0">
+                <a:solidFill>
+                  <a:schemeClr val="tx2"/>
+                </a:solidFill>
+              </a:rPr>
+              <a:t>Approach Outpost</a:t>
+            </a:r>
+          </a:p>
+        </p:txBody>
+      </p:sp>
+      <p:sp>
+        <p:nvSpPr>
+          <p:cNvPr id="11" name="Rectangle 10">
+            <a:extLst>
+              <a:ext uri="{FF2B5EF4-FFF2-40B4-BE49-F238E27FC236}">
+                <a16:creationId xmlns:a16="http://schemas.microsoft.com/office/drawing/2014/main" id="{9CBDD6F5-47EB-E31A-2443-482B3C29A23F}"/>
+              </a:ext>
+            </a:extLst>
+          </p:cNvPr>
+          <p:cNvSpPr/>
+          <p:nvPr/>
+        </p:nvSpPr>
+        <p:spPr>
+          <a:xfrm>
+            <a:off x="1480739" y="2324249"/>
+            <a:ext cx="1595535" cy="492798"/>
+          </a:xfrm>
+          <a:prstGeom prst="rect">
+            <a:avLst/>
+          </a:prstGeom>
+          <a:solidFill>
+            <a:schemeClr val="accent4">
+              <a:lumMod val="20000"/>
+              <a:lumOff val="80000"/>
+            </a:schemeClr>
+          </a:solidFill>
+          <a:ln>
+            <a:solidFill>
+              <a:schemeClr val="accent2">
+                <a:lumMod val="20000"/>
+                <a:lumOff val="80000"/>
+              </a:schemeClr>
+            </a:solidFill>
+          </a:ln>
+        </p:spPr>
+        <p:style>
+          <a:lnRef idx="2">
+            <a:schemeClr val="accent1">
+              <a:shade val="15000"/>
+            </a:schemeClr>
+          </a:lnRef>
+          <a:fillRef idx="1">
+            <a:schemeClr val="accent1"/>
+          </a:fillRef>
+          <a:effectRef idx="0">
+            <a:schemeClr val="accent1"/>
+          </a:effectRef>
+          <a:fontRef idx="minor">
+            <a:schemeClr val="lt1"/>
+          </a:fontRef>
+        </p:style>
+        <p:txBody>
+          <a:bodyPr rtlCol="0" anchor="ctr"/>
+          <a:lstStyle/>
+          <a:p>
+            <a:pPr algn="ctr"/>
+            <a:r>
+              <a:rPr lang="en-US" dirty="0">
+                <a:solidFill>
+                  <a:schemeClr val="tx2"/>
+                </a:solidFill>
+              </a:rPr>
+              <a:t>Empty Fuel</a:t>
+            </a:r>
+          </a:p>
+          <a:p>
+            <a:pPr algn="ctr"/>
+            <a:r>
+              <a:rPr lang="en-US" sz="1200" dirty="0">
+                <a:solidFill>
+                  <a:schemeClr val="tx2"/>
+                </a:solidFill>
+              </a:rPr>
+              <a:t>(back pressed)</a:t>
+            </a:r>
+          </a:p>
+        </p:txBody>
+      </p:sp>
+      <p:sp>
+        <p:nvSpPr>
+          <p:cNvPr id="12" name="Rectangle 11">
+            <a:extLst>
+              <a:ext uri="{FF2B5EF4-FFF2-40B4-BE49-F238E27FC236}">
+                <a16:creationId xmlns:a16="http://schemas.microsoft.com/office/drawing/2014/main" id="{C02DC017-BF61-5880-3824-D65FA1623FD7}"/>
+              </a:ext>
+            </a:extLst>
+          </p:cNvPr>
+          <p:cNvSpPr/>
+          <p:nvPr/>
+        </p:nvSpPr>
+        <p:spPr>
+          <a:xfrm>
+            <a:off x="9855703" y="5501336"/>
+            <a:ext cx="1595535" cy="317241"/>
+          </a:xfrm>
+          <a:prstGeom prst="rect">
+            <a:avLst/>
+          </a:prstGeom>
+          <a:solidFill>
+            <a:schemeClr val="accent4">
+              <a:lumMod val="20000"/>
+              <a:lumOff val="80000"/>
+            </a:schemeClr>
+          </a:solidFill>
+          <a:ln>
+            <a:solidFill>
+              <a:schemeClr val="accent2">
+                <a:lumMod val="20000"/>
+                <a:lumOff val="80000"/>
+              </a:schemeClr>
+            </a:solidFill>
+          </a:ln>
+        </p:spPr>
+        <p:style>
+          <a:lnRef idx="2">
+            <a:schemeClr val="accent1">
+              <a:shade val="15000"/>
+            </a:schemeClr>
+          </a:lnRef>
+          <a:fillRef idx="1">
+            <a:schemeClr val="accent1"/>
+          </a:fillRef>
+          <a:effectRef idx="0">
+            <a:schemeClr val="accent1"/>
+          </a:effectRef>
+          <a:fontRef idx="minor">
+            <a:schemeClr val="lt1"/>
+          </a:fontRef>
+        </p:style>
+        <p:txBody>
+          <a:bodyPr rtlCol="0" anchor="ctr"/>
+          <a:lstStyle/>
+          <a:p>
+            <a:pPr algn="ctr"/>
+            <a:r>
+              <a:rPr lang="en-US" dirty="0">
+                <a:solidFill>
+                  <a:schemeClr val="tx2"/>
+                </a:solidFill>
+              </a:rPr>
+              <a:t>Goto Climb</a:t>
+            </a:r>
+          </a:p>
+        </p:txBody>
+      </p:sp>
+      <p:sp>
+        <p:nvSpPr>
+          <p:cNvPr id="13" name="Rectangle 12">
+            <a:extLst>
+              <a:ext uri="{FF2B5EF4-FFF2-40B4-BE49-F238E27FC236}">
+                <a16:creationId xmlns:a16="http://schemas.microsoft.com/office/drawing/2014/main" id="{438E3938-169E-DBC2-8D39-5A597345AB0B}"/>
+              </a:ext>
+            </a:extLst>
+          </p:cNvPr>
+          <p:cNvSpPr/>
+          <p:nvPr/>
+        </p:nvSpPr>
+        <p:spPr>
+          <a:xfrm>
+            <a:off x="9071415" y="1465331"/>
+            <a:ext cx="1595535" cy="317241"/>
+          </a:xfrm>
+          <a:prstGeom prst="rect">
+            <a:avLst/>
+          </a:prstGeom>
+          <a:solidFill>
+            <a:schemeClr val="accent4">
+              <a:lumMod val="20000"/>
+              <a:lumOff val="80000"/>
+            </a:schemeClr>
+          </a:solidFill>
+          <a:ln>
+            <a:solidFill>
+              <a:schemeClr val="accent2">
+                <a:lumMod val="20000"/>
+                <a:lumOff val="80000"/>
+              </a:schemeClr>
+            </a:solidFill>
+          </a:ln>
+        </p:spPr>
+        <p:style>
+          <a:lnRef idx="2">
+            <a:schemeClr val="accent1">
+              <a:shade val="15000"/>
+            </a:schemeClr>
+          </a:lnRef>
+          <a:fillRef idx="1">
+            <a:schemeClr val="accent1"/>
+          </a:fillRef>
+          <a:effectRef idx="0">
+            <a:schemeClr val="accent1"/>
+          </a:effectRef>
+          <a:fontRef idx="minor">
+            <a:schemeClr val="lt1"/>
+          </a:fontRef>
+        </p:style>
+        <p:txBody>
+          <a:bodyPr rtlCol="0" anchor="ctr"/>
+          <a:lstStyle/>
+          <a:p>
+            <a:pPr algn="ctr"/>
+            <a:r>
+              <a:rPr lang="en-US" dirty="0">
+                <a:solidFill>
+                  <a:schemeClr val="tx2"/>
+                </a:solidFill>
+              </a:rPr>
+              <a:t>Aim &amp; Shoot</a:t>
+            </a:r>
+          </a:p>
+        </p:txBody>
+      </p:sp>
+      <p:sp>
+        <p:nvSpPr>
+          <p:cNvPr id="14" name="Rectangle 13">
+            <a:extLst>
+              <a:ext uri="{FF2B5EF4-FFF2-40B4-BE49-F238E27FC236}">
+                <a16:creationId xmlns:a16="http://schemas.microsoft.com/office/drawing/2014/main" id="{CE6234B4-0847-FA69-7472-3D7D0AE90631}"/>
+              </a:ext>
+            </a:extLst>
+          </p:cNvPr>
+          <p:cNvSpPr/>
+          <p:nvPr/>
+        </p:nvSpPr>
+        <p:spPr>
+          <a:xfrm>
+            <a:off x="9131026" y="3350062"/>
+            <a:ext cx="1595535" cy="317241"/>
+          </a:xfrm>
+          <a:prstGeom prst="rect">
+            <a:avLst/>
+          </a:prstGeom>
+          <a:solidFill>
+            <a:schemeClr val="accent4">
+              <a:lumMod val="20000"/>
+              <a:lumOff val="80000"/>
+            </a:schemeClr>
+          </a:solidFill>
+          <a:ln>
+            <a:solidFill>
+              <a:schemeClr val="accent2">
+                <a:lumMod val="20000"/>
+                <a:lumOff val="80000"/>
+              </a:schemeClr>
+            </a:solidFill>
+          </a:ln>
+        </p:spPr>
+        <p:style>
+          <a:lnRef idx="2">
+            <a:schemeClr val="accent1">
+              <a:shade val="15000"/>
+            </a:schemeClr>
+          </a:lnRef>
+          <a:fillRef idx="1">
+            <a:schemeClr val="accent1"/>
+          </a:fillRef>
+          <a:effectRef idx="0">
+            <a:schemeClr val="accent1"/>
+          </a:effectRef>
+          <a:fontRef idx="minor">
+            <a:schemeClr val="lt1"/>
+          </a:fontRef>
+        </p:style>
+        <p:txBody>
+          <a:bodyPr rtlCol="0" anchor="ctr"/>
+          <a:lstStyle/>
+          <a:p>
+            <a:pPr algn="ctr"/>
+            <a:r>
+              <a:rPr lang="en-US" dirty="0">
+                <a:solidFill>
+                  <a:schemeClr val="tx2"/>
+                </a:solidFill>
+              </a:rPr>
+              <a:t>Brake</a:t>
+            </a:r>
+          </a:p>
+        </p:txBody>
+      </p:sp>
+      <p:sp>
+        <p:nvSpPr>
+          <p:cNvPr id="16" name="Rectangle 15">
+            <a:extLst>
+              <a:ext uri="{FF2B5EF4-FFF2-40B4-BE49-F238E27FC236}">
+                <a16:creationId xmlns:a16="http://schemas.microsoft.com/office/drawing/2014/main" id="{F54D5F66-778A-A89F-468A-3E6C9511C581}"/>
+              </a:ext>
+            </a:extLst>
+          </p:cNvPr>
+          <p:cNvSpPr/>
+          <p:nvPr/>
+        </p:nvSpPr>
+        <p:spPr>
+          <a:xfrm>
+            <a:off x="5177206" y="238595"/>
+            <a:ext cx="1658178" cy="461665"/>
+          </a:xfrm>
+          <a:prstGeom prst="rect">
+            <a:avLst/>
+          </a:prstGeom>
+          <a:solidFill>
+            <a:schemeClr val="accent4">
+              <a:lumMod val="20000"/>
+              <a:lumOff val="80000"/>
+            </a:schemeClr>
+          </a:solidFill>
+          <a:ln>
+            <a:solidFill>
+              <a:schemeClr val="accent2">
+                <a:lumMod val="20000"/>
+                <a:lumOff val="80000"/>
+              </a:schemeClr>
+            </a:solidFill>
+          </a:ln>
+        </p:spPr>
+        <p:style>
+          <a:lnRef idx="2">
+            <a:schemeClr val="accent1">
+              <a:shade val="15000"/>
+            </a:schemeClr>
+          </a:lnRef>
+          <a:fillRef idx="1">
+            <a:schemeClr val="accent1"/>
+          </a:fillRef>
+          <a:effectRef idx="0">
+            <a:schemeClr val="accent1"/>
+          </a:effectRef>
+          <a:fontRef idx="minor">
+            <a:schemeClr val="lt1"/>
+          </a:fontRef>
+        </p:style>
+        <p:txBody>
+          <a:bodyPr rtlCol="0" anchor="ctr"/>
+          <a:lstStyle/>
+          <a:p>
+            <a:pPr algn="ctr"/>
+            <a:r>
+              <a:rPr lang="en-US" sz="1600" dirty="0">
+                <a:solidFill>
+                  <a:schemeClr val="tx2"/>
+                </a:solidFill>
+              </a:rPr>
+              <a:t>Override some commands</a:t>
+            </a:r>
+          </a:p>
+        </p:txBody>
+      </p:sp>
+      <p:sp>
+        <p:nvSpPr>
+          <p:cNvPr id="17" name="Rectangle 16">
+            <a:extLst>
+              <a:ext uri="{FF2B5EF4-FFF2-40B4-BE49-F238E27FC236}">
+                <a16:creationId xmlns:a16="http://schemas.microsoft.com/office/drawing/2014/main" id="{D169B6A3-0DA2-9D96-0351-4045F2E2F1E1}"/>
+              </a:ext>
+            </a:extLst>
+          </p:cNvPr>
+          <p:cNvSpPr/>
+          <p:nvPr/>
+        </p:nvSpPr>
+        <p:spPr>
+          <a:xfrm>
+            <a:off x="1449753" y="1612910"/>
+            <a:ext cx="1595535" cy="317241"/>
+          </a:xfrm>
+          <a:prstGeom prst="rect">
+            <a:avLst/>
+          </a:prstGeom>
+          <a:solidFill>
+            <a:schemeClr val="accent4">
+              <a:lumMod val="20000"/>
+              <a:lumOff val="80000"/>
+            </a:schemeClr>
+          </a:solidFill>
+          <a:ln>
+            <a:solidFill>
+              <a:schemeClr val="accent2">
+                <a:lumMod val="20000"/>
+                <a:lumOff val="80000"/>
+              </a:schemeClr>
+            </a:solidFill>
+          </a:ln>
+        </p:spPr>
+        <p:style>
+          <a:lnRef idx="2">
+            <a:schemeClr val="accent1">
+              <a:shade val="15000"/>
+            </a:schemeClr>
+          </a:lnRef>
+          <a:fillRef idx="1">
+            <a:schemeClr val="accent1"/>
+          </a:fillRef>
+          <a:effectRef idx="0">
+            <a:schemeClr val="accent1"/>
+          </a:effectRef>
+          <a:fontRef idx="minor">
+            <a:schemeClr val="lt1"/>
+          </a:fontRef>
+        </p:style>
+        <p:txBody>
+          <a:bodyPr rtlCol="0" anchor="ctr"/>
+          <a:lstStyle/>
+          <a:p>
+            <a:pPr algn="ctr"/>
+            <a:r>
+              <a:rPr lang="en-US" dirty="0">
+                <a:solidFill>
+                  <a:schemeClr val="tx2"/>
+                </a:solidFill>
+              </a:rPr>
+              <a:t>Intake Fuel</a:t>
+            </a:r>
+          </a:p>
+        </p:txBody>
+      </p:sp>
+      <p:sp>
+        <p:nvSpPr>
+          <p:cNvPr id="18" name="Rectangle 17">
+            <a:extLst>
+              <a:ext uri="{FF2B5EF4-FFF2-40B4-BE49-F238E27FC236}">
+                <a16:creationId xmlns:a16="http://schemas.microsoft.com/office/drawing/2014/main" id="{B0136852-C263-58AE-B3A2-82BE180C50B1}"/>
+              </a:ext>
+            </a:extLst>
+          </p:cNvPr>
+          <p:cNvSpPr/>
+          <p:nvPr/>
+        </p:nvSpPr>
+        <p:spPr>
+          <a:xfrm>
+            <a:off x="10326383" y="6423947"/>
+            <a:ext cx="1595535" cy="317241"/>
+          </a:xfrm>
+          <a:prstGeom prst="rect">
+            <a:avLst/>
+          </a:prstGeom>
+          <a:solidFill>
+            <a:schemeClr val="accent4">
+              <a:lumMod val="20000"/>
+              <a:lumOff val="80000"/>
+            </a:schemeClr>
+          </a:solidFill>
+          <a:ln>
+            <a:solidFill>
+              <a:schemeClr val="accent2">
+                <a:lumMod val="20000"/>
+                <a:lumOff val="80000"/>
+              </a:schemeClr>
+            </a:solidFill>
+          </a:ln>
+        </p:spPr>
+        <p:style>
+          <a:lnRef idx="2">
+            <a:schemeClr val="accent1">
+              <a:shade val="15000"/>
+            </a:schemeClr>
+          </a:lnRef>
+          <a:fillRef idx="1">
+            <a:schemeClr val="accent1"/>
+          </a:fillRef>
+          <a:effectRef idx="0">
+            <a:schemeClr val="accent1"/>
+          </a:effectRef>
+          <a:fontRef idx="minor">
+            <a:schemeClr val="lt1"/>
+          </a:fontRef>
+        </p:style>
+        <p:txBody>
+          <a:bodyPr rtlCol="0" anchor="ctr"/>
+          <a:lstStyle/>
+          <a:p>
+            <a:pPr algn="ctr"/>
+            <a:r>
+              <a:rPr lang="en-US" dirty="0">
+                <a:solidFill>
+                  <a:schemeClr val="tx2"/>
+                </a:solidFill>
+              </a:rPr>
+              <a:t>Get Off Fuel</a:t>
+            </a:r>
+          </a:p>
+        </p:txBody>
+      </p:sp>
+      <p:sp>
+        <p:nvSpPr>
+          <p:cNvPr id="19" name="Rectangle 18">
+            <a:extLst>
+              <a:ext uri="{FF2B5EF4-FFF2-40B4-BE49-F238E27FC236}">
+                <a16:creationId xmlns:a16="http://schemas.microsoft.com/office/drawing/2014/main" id="{5887B5D4-8008-9128-F533-C1E35FE5B92C}"/>
+              </a:ext>
+            </a:extLst>
+          </p:cNvPr>
+          <p:cNvSpPr/>
+          <p:nvPr/>
+        </p:nvSpPr>
+        <p:spPr>
+          <a:xfrm>
+            <a:off x="9554146" y="6049903"/>
             <a:ext cx="1595535" cy="317241"/>
           </a:xfrm>
           <a:prstGeom prst="rect">
@@ -5851,17 +6890,17 @@
                   <a:schemeClr val="tx2"/>
                 </a:solidFill>
               </a:rPr>
-              <a:t>Face Ladder</a:t>
-            </a:r>
-          </a:p>
-        </p:txBody>
-      </p:sp>
-      <p:sp>
-        <p:nvSpPr>
-          <p:cNvPr id="4" name="Rectangle 3">
-            <a:extLst>
-              <a:ext uri="{FF2B5EF4-FFF2-40B4-BE49-F238E27FC236}">
-                <a16:creationId xmlns:a16="http://schemas.microsoft.com/office/drawing/2014/main" id="{4D68B21B-BC45-4D8E-3E39-987DC3CFE410}"/>
+              <a:t>Reset Position</a:t>
+            </a:r>
+          </a:p>
+        </p:txBody>
+      </p:sp>
+      <p:sp>
+        <p:nvSpPr>
+          <p:cNvPr id="20" name="Rectangle 19">
+            <a:extLst>
+              <a:ext uri="{FF2B5EF4-FFF2-40B4-BE49-F238E27FC236}">
+                <a16:creationId xmlns:a16="http://schemas.microsoft.com/office/drawing/2014/main" id="{310EA12B-9AD3-C372-4AAA-ACD138FBBC4C}"/>
               </a:ext>
             </a:extLst>
           </p:cNvPr>
@@ -5870,8 +6909,292 @@
         </p:nvSpPr>
         <p:spPr>
           <a:xfrm>
-            <a:off x="66708" y="5670953"/>
-            <a:ext cx="1926144" cy="317241"/>
+            <a:off x="9100369" y="1963707"/>
+            <a:ext cx="1595535" cy="445758"/>
+          </a:xfrm>
+          <a:prstGeom prst="rect">
+            <a:avLst/>
+          </a:prstGeom>
+          <a:solidFill>
+            <a:schemeClr val="accent4">
+              <a:lumMod val="20000"/>
+              <a:lumOff val="80000"/>
+            </a:schemeClr>
+          </a:solidFill>
+          <a:ln>
+            <a:solidFill>
+              <a:schemeClr val="accent2">
+                <a:lumMod val="20000"/>
+                <a:lumOff val="80000"/>
+              </a:schemeClr>
+            </a:solidFill>
+          </a:ln>
+        </p:spPr>
+        <p:style>
+          <a:lnRef idx="2">
+            <a:schemeClr val="accent1">
+              <a:shade val="15000"/>
+            </a:schemeClr>
+          </a:lnRef>
+          <a:fillRef idx="1">
+            <a:schemeClr val="accent1"/>
+          </a:fillRef>
+          <a:effectRef idx="0">
+            <a:schemeClr val="accent1"/>
+          </a:effectRef>
+          <a:fontRef idx="minor">
+            <a:schemeClr val="lt1"/>
+          </a:fontRef>
+        </p:style>
+        <p:txBody>
+          <a:bodyPr rtlCol="0" anchor="ctr"/>
+          <a:lstStyle/>
+          <a:p>
+            <a:pPr algn="ctr"/>
+            <a:r>
+              <a:rPr lang="en-US" dirty="0">
+                <a:solidFill>
+                  <a:schemeClr val="tx2"/>
+                </a:solidFill>
+              </a:rPr>
+              <a:t>Just Shoot</a:t>
+            </a:r>
+          </a:p>
+          <a:p>
+            <a:pPr algn="ctr"/>
+            <a:r>
+              <a:rPr lang="en-US" sz="1200" dirty="0">
+                <a:solidFill>
+                  <a:schemeClr val="tx2"/>
+                </a:solidFill>
+              </a:rPr>
+              <a:t>(back pressed)</a:t>
+            </a:r>
+            <a:endParaRPr lang="en-US" dirty="0">
+              <a:solidFill>
+                <a:schemeClr val="tx2"/>
+              </a:solidFill>
+            </a:endParaRPr>
+          </a:p>
+        </p:txBody>
+      </p:sp>
+      <p:grpSp>
+        <p:nvGrpSpPr>
+          <p:cNvPr id="48" name="Group 47">
+            <a:extLst>
+              <a:ext uri="{FF2B5EF4-FFF2-40B4-BE49-F238E27FC236}">
+                <a16:creationId xmlns:a16="http://schemas.microsoft.com/office/drawing/2014/main" id="{1265B6DA-041B-8198-F0A6-2EA5AED2C066}"/>
+              </a:ext>
+            </a:extLst>
+          </p:cNvPr>
+          <p:cNvGrpSpPr/>
+          <p:nvPr/>
+        </p:nvGrpSpPr>
+        <p:grpSpPr>
+          <a:xfrm>
+            <a:off x="240991" y="5477120"/>
+            <a:ext cx="1914612" cy="1145565"/>
+            <a:chOff x="1959429" y="0"/>
+            <a:chExt cx="1914612" cy="1145565"/>
+          </a:xfrm>
+        </p:grpSpPr>
+        <p:sp>
+          <p:nvSpPr>
+            <p:cNvPr id="47" name="Rectangle 46">
+              <a:extLst>
+                <a:ext uri="{FF2B5EF4-FFF2-40B4-BE49-F238E27FC236}">
+                  <a16:creationId xmlns:a16="http://schemas.microsoft.com/office/drawing/2014/main" id="{D23CAAF7-2E86-FCE3-436F-A19A04CE88D0}"/>
+                </a:ext>
+              </a:extLst>
+            </p:cNvPr>
+            <p:cNvSpPr/>
+            <p:nvPr/>
+          </p:nvSpPr>
+          <p:spPr>
+            <a:xfrm>
+              <a:off x="1959429" y="0"/>
+              <a:ext cx="1914612" cy="1145565"/>
+            </a:xfrm>
+            <a:prstGeom prst="rect">
+              <a:avLst/>
+            </a:prstGeom>
+          </p:spPr>
+          <p:style>
+            <a:lnRef idx="2">
+              <a:schemeClr val="accent1">
+                <a:shade val="15000"/>
+              </a:schemeClr>
+            </a:lnRef>
+            <a:fillRef idx="1">
+              <a:schemeClr val="accent1"/>
+            </a:fillRef>
+            <a:effectRef idx="0">
+              <a:schemeClr val="accent1"/>
+            </a:effectRef>
+            <a:fontRef idx="minor">
+              <a:schemeClr val="lt1"/>
+            </a:fontRef>
+          </p:style>
+          <p:txBody>
+            <a:bodyPr rtlCol="0" anchor="ctr"/>
+            <a:lstStyle/>
+            <a:p>
+              <a:pPr algn="ctr"/>
+              <a:endParaRPr lang="en-US"/>
+            </a:p>
+          </p:txBody>
+        </p:sp>
+        <p:sp>
+          <p:nvSpPr>
+            <p:cNvPr id="26" name="Rectangle 25">
+              <a:extLst>
+                <a:ext uri="{FF2B5EF4-FFF2-40B4-BE49-F238E27FC236}">
+                  <a16:creationId xmlns:a16="http://schemas.microsoft.com/office/drawing/2014/main" id="{6B6E82EA-1AE1-CFB3-BE12-C33072D8CBE7}"/>
+                </a:ext>
+              </a:extLst>
+            </p:cNvPr>
+            <p:cNvSpPr/>
+            <p:nvPr/>
+          </p:nvSpPr>
+          <p:spPr>
+            <a:xfrm>
+              <a:off x="2132044" y="162049"/>
+              <a:ext cx="1595535" cy="317241"/>
+            </a:xfrm>
+            <a:prstGeom prst="rect">
+              <a:avLst/>
+            </a:prstGeom>
+            <a:solidFill>
+              <a:schemeClr val="accent6">
+                <a:lumMod val="20000"/>
+                <a:lumOff val="80000"/>
+              </a:schemeClr>
+            </a:solidFill>
+            <a:ln>
+              <a:solidFill>
+                <a:schemeClr val="accent2">
+                  <a:lumMod val="20000"/>
+                  <a:lumOff val="80000"/>
+                </a:schemeClr>
+              </a:solidFill>
+            </a:ln>
+          </p:spPr>
+          <p:style>
+            <a:lnRef idx="2">
+              <a:schemeClr val="accent1">
+                <a:shade val="15000"/>
+              </a:schemeClr>
+            </a:lnRef>
+            <a:fillRef idx="1">
+              <a:schemeClr val="accent1"/>
+            </a:fillRef>
+            <a:effectRef idx="0">
+              <a:schemeClr val="accent1"/>
+            </a:effectRef>
+            <a:fontRef idx="minor">
+              <a:schemeClr val="lt1"/>
+            </a:fontRef>
+          </p:style>
+          <p:txBody>
+            <a:bodyPr rtlCol="0" anchor="ctr"/>
+            <a:lstStyle/>
+            <a:p>
+              <a:pPr algn="ctr"/>
+              <a:r>
+                <a:rPr lang="en-US" dirty="0">
+                  <a:solidFill>
+                    <a:schemeClr val="tx2"/>
+                  </a:solidFill>
+                </a:rPr>
+                <a:t>One-Shot</a:t>
+              </a:r>
+            </a:p>
+          </p:txBody>
+        </p:sp>
+        <p:sp>
+          <p:nvSpPr>
+            <p:cNvPr id="27" name="Rectangle 26">
+              <a:extLst>
+                <a:ext uri="{FF2B5EF4-FFF2-40B4-BE49-F238E27FC236}">
+                  <a16:creationId xmlns:a16="http://schemas.microsoft.com/office/drawing/2014/main" id="{536CB937-8976-AE7B-7FE7-929F24F3C592}"/>
+                </a:ext>
+              </a:extLst>
+            </p:cNvPr>
+            <p:cNvSpPr/>
+            <p:nvPr/>
+          </p:nvSpPr>
+          <p:spPr>
+            <a:xfrm>
+              <a:off x="2132044" y="700932"/>
+              <a:ext cx="1595535" cy="317241"/>
+            </a:xfrm>
+            <a:prstGeom prst="rect">
+              <a:avLst/>
+            </a:prstGeom>
+            <a:solidFill>
+              <a:schemeClr val="accent4">
+                <a:lumMod val="20000"/>
+                <a:lumOff val="80000"/>
+              </a:schemeClr>
+            </a:solidFill>
+            <a:ln>
+              <a:solidFill>
+                <a:schemeClr val="accent2">
+                  <a:lumMod val="20000"/>
+                  <a:lumOff val="80000"/>
+                </a:schemeClr>
+              </a:solidFill>
+            </a:ln>
+          </p:spPr>
+          <p:style>
+            <a:lnRef idx="2">
+              <a:schemeClr val="accent1">
+                <a:shade val="15000"/>
+              </a:schemeClr>
+            </a:lnRef>
+            <a:fillRef idx="1">
+              <a:schemeClr val="accent1"/>
+            </a:fillRef>
+            <a:effectRef idx="0">
+              <a:schemeClr val="accent1"/>
+            </a:effectRef>
+            <a:fontRef idx="minor">
+              <a:schemeClr val="lt1"/>
+            </a:fontRef>
+          </p:style>
+          <p:txBody>
+            <a:bodyPr rtlCol="0" anchor="ctr"/>
+            <a:lstStyle/>
+            <a:p>
+              <a:pPr algn="ctr"/>
+              <a:r>
+                <a:rPr lang="en-US" dirty="0">
+                  <a:solidFill>
+                    <a:schemeClr val="tx2"/>
+                  </a:solidFill>
+                </a:rPr>
+                <a:t>While Pressed</a:t>
+              </a:r>
+            </a:p>
+          </p:txBody>
+        </p:sp>
+      </p:grpSp>
+      <p:sp>
+        <p:nvSpPr>
+          <p:cNvPr id="28" name="Rectangle 27">
+            <a:extLst>
+              <a:ext uri="{FF2B5EF4-FFF2-40B4-BE49-F238E27FC236}">
+                <a16:creationId xmlns:a16="http://schemas.microsoft.com/office/drawing/2014/main" id="{2313DCAD-124D-5850-AD89-3AB6441F9862}"/>
+              </a:ext>
+            </a:extLst>
+          </p:cNvPr>
+          <p:cNvSpPr/>
+          <p:nvPr/>
+        </p:nvSpPr>
+        <p:spPr>
+          <a:xfrm>
+            <a:off x="3076274" y="6219029"/>
+            <a:ext cx="1595535" cy="317241"/>
           </a:xfrm>
           <a:prstGeom prst="rect">
             <a:avLst/>
@@ -5912,23 +7235,20 @@
           <a:lstStyle/>
           <a:p>
             <a:pPr algn="ctr"/>
-            <a:r>
-              <a:rPr lang="en-US" dirty="0">
-                <a:solidFill>
-                  <a:schemeClr val="tx2"/>
-                </a:solidFill>
-              </a:rPr>
-              <a:t>Approach Depot</a:t>
-            </a:r>
-          </a:p>
-        </p:txBody>
-      </p:sp>
-      <p:sp>
-        <p:nvSpPr>
-          <p:cNvPr id="10" name="Rectangle 9">
-            <a:extLst>
-              <a:ext uri="{FF2B5EF4-FFF2-40B4-BE49-F238E27FC236}">
-                <a16:creationId xmlns:a16="http://schemas.microsoft.com/office/drawing/2014/main" id="{6526CD50-9017-5B4D-4931-DC8A76551DCD}"/>
+            <a:endParaRPr lang="en-US" dirty="0">
+              <a:solidFill>
+                <a:schemeClr val="tx2"/>
+              </a:solidFill>
+            </a:endParaRPr>
+          </a:p>
+        </p:txBody>
+      </p:sp>
+      <p:sp>
+        <p:nvSpPr>
+          <p:cNvPr id="29" name="Rectangle 28">
+            <a:extLst>
+              <a:ext uri="{FF2B5EF4-FFF2-40B4-BE49-F238E27FC236}">
+                <a16:creationId xmlns:a16="http://schemas.microsoft.com/office/drawing/2014/main" id="{530B3026-3929-68C0-D9CA-51C0578C6396}"/>
               </a:ext>
             </a:extLst>
           </p:cNvPr>
@@ -5937,8 +7257,8 @@
         </p:nvSpPr>
         <p:spPr>
           <a:xfrm>
-            <a:off x="185194" y="6089023"/>
-            <a:ext cx="1807658" cy="317241"/>
+            <a:off x="1532803" y="3312058"/>
+            <a:ext cx="1595535" cy="490853"/>
           </a:xfrm>
           <a:prstGeom prst="rect">
             <a:avLst/>
@@ -5980,22 +7300,690 @@
           <a:p>
             <a:pPr algn="ctr"/>
             <a:r>
-              <a:rPr lang="en-US" sz="1600" dirty="0">
+              <a:rPr lang="en-US" dirty="0">
                 <a:solidFill>
                   <a:schemeClr val="tx2"/>
                 </a:solidFill>
               </a:rPr>
-              <a:t>Approach Outpost</a:t>
-            </a:r>
-          </a:p>
-        </p:txBody>
-      </p:sp>
-      <p:sp>
-        <p:nvSpPr>
-          <p:cNvPr id="11" name="Rectangle 10">
-            <a:extLst>
-              <a:ext uri="{FF2B5EF4-FFF2-40B4-BE49-F238E27FC236}">
-                <a16:creationId xmlns:a16="http://schemas.microsoft.com/office/drawing/2014/main" id="{9CBDD6F5-47EB-E31A-2443-482B3C29A23F}"/>
+              <a:t>Retract Intake </a:t>
+            </a:r>
+            <a:r>
+              <a:rPr lang="en-US" sz="1200" dirty="0">
+                <a:solidFill>
+                  <a:schemeClr val="tx2"/>
+                </a:solidFill>
+              </a:rPr>
+              <a:t>(up)</a:t>
+            </a:r>
+            <a:endParaRPr lang="en-US" dirty="0">
+              <a:solidFill>
+                <a:schemeClr val="tx2"/>
+              </a:solidFill>
+            </a:endParaRPr>
+          </a:p>
+        </p:txBody>
+      </p:sp>
+      <p:sp>
+        <p:nvSpPr>
+          <p:cNvPr id="37" name="TextBox 36">
+            <a:extLst>
+              <a:ext uri="{FF2B5EF4-FFF2-40B4-BE49-F238E27FC236}">
+                <a16:creationId xmlns:a16="http://schemas.microsoft.com/office/drawing/2014/main" id="{DB13644A-9285-9111-3BBE-6AB488C981FF}"/>
+              </a:ext>
+            </a:extLst>
+          </p:cNvPr>
+          <p:cNvSpPr txBox="1"/>
+          <p:nvPr/>
+        </p:nvSpPr>
+        <p:spPr>
+          <a:xfrm>
+            <a:off x="4410360" y="1516588"/>
+            <a:ext cx="977220" cy="369332"/>
+          </a:xfrm>
+          <a:prstGeom prst="rect">
+            <a:avLst/>
+          </a:prstGeom>
+          <a:noFill/>
+        </p:spPr>
+        <p:txBody>
+          <a:bodyPr wrap="square">
+            <a:spAutoFit/>
+          </a:bodyPr>
+          <a:lstStyle/>
+          <a:p>
+            <a:pPr algn="ctr"/>
+            <a:r>
+              <a:rPr lang="en-US" sz="1800" dirty="0">
+                <a:solidFill>
+                  <a:schemeClr val="accent2">
+                    <a:lumMod val="60000"/>
+                    <a:lumOff val="40000"/>
+                  </a:schemeClr>
+                </a:solidFill>
+              </a:rPr>
+              <a:t>Bumper</a:t>
+            </a:r>
+          </a:p>
+        </p:txBody>
+      </p:sp>
+      <p:sp>
+        <p:nvSpPr>
+          <p:cNvPr id="38" name="TextBox 37">
+            <a:extLst>
+              <a:ext uri="{FF2B5EF4-FFF2-40B4-BE49-F238E27FC236}">
+                <a16:creationId xmlns:a16="http://schemas.microsoft.com/office/drawing/2014/main" id="{663C2E0C-F6E9-C73C-F7F2-26D2724A3EC5}"/>
+              </a:ext>
+            </a:extLst>
+          </p:cNvPr>
+          <p:cNvSpPr txBox="1"/>
+          <p:nvPr/>
+        </p:nvSpPr>
+        <p:spPr>
+          <a:xfrm>
+            <a:off x="6879240" y="1504584"/>
+            <a:ext cx="977220" cy="369332"/>
+          </a:xfrm>
+          <a:prstGeom prst="rect">
+            <a:avLst/>
+          </a:prstGeom>
+          <a:noFill/>
+        </p:spPr>
+        <p:txBody>
+          <a:bodyPr wrap="square">
+            <a:spAutoFit/>
+          </a:bodyPr>
+          <a:lstStyle/>
+          <a:p>
+            <a:pPr algn="ctr"/>
+            <a:r>
+              <a:rPr lang="en-US" sz="1800" dirty="0">
+                <a:solidFill>
+                  <a:schemeClr val="accent2">
+                    <a:lumMod val="60000"/>
+                    <a:lumOff val="40000"/>
+                  </a:schemeClr>
+                </a:solidFill>
+              </a:rPr>
+              <a:t>Bumper</a:t>
+            </a:r>
+          </a:p>
+        </p:txBody>
+      </p:sp>
+      <p:sp>
+        <p:nvSpPr>
+          <p:cNvPr id="40" name="TextBox 39">
+            <a:extLst>
+              <a:ext uri="{FF2B5EF4-FFF2-40B4-BE49-F238E27FC236}">
+                <a16:creationId xmlns:a16="http://schemas.microsoft.com/office/drawing/2014/main" id="{5FC26886-D16D-E4C3-22DA-B6459CC232DD}"/>
+              </a:ext>
+            </a:extLst>
+          </p:cNvPr>
+          <p:cNvSpPr txBox="1"/>
+          <p:nvPr/>
+        </p:nvSpPr>
+        <p:spPr>
+          <a:xfrm>
+            <a:off x="3743261" y="1667107"/>
+            <a:ext cx="338554" cy="580800"/>
+          </a:xfrm>
+          <a:prstGeom prst="rect">
+            <a:avLst/>
+          </a:prstGeom>
+          <a:noFill/>
+        </p:spPr>
+        <p:txBody>
+          <a:bodyPr vert="vert270" wrap="none" lIns="0" tIns="0" rIns="91440" bIns="0" rtlCol="0">
+            <a:spAutoFit/>
+          </a:bodyPr>
+          <a:lstStyle/>
+          <a:p>
+            <a:pPr algn="ctr"/>
+            <a:r>
+              <a:rPr lang="en-US" sz="1600" dirty="0">
+                <a:solidFill>
+                  <a:schemeClr val="bg2"/>
+                </a:solidFill>
+              </a:rPr>
+              <a:t>Trigger</a:t>
+            </a:r>
+          </a:p>
+        </p:txBody>
+      </p:sp>
+      <p:sp>
+        <p:nvSpPr>
+          <p:cNvPr id="41" name="TextBox 40">
+            <a:extLst>
+              <a:ext uri="{FF2B5EF4-FFF2-40B4-BE49-F238E27FC236}">
+                <a16:creationId xmlns:a16="http://schemas.microsoft.com/office/drawing/2014/main" id="{4AAA1677-C84E-01A0-4838-DEC253AEDD33}"/>
+              </a:ext>
+            </a:extLst>
+          </p:cNvPr>
+          <p:cNvSpPr txBox="1"/>
+          <p:nvPr/>
+        </p:nvSpPr>
+        <p:spPr>
+          <a:xfrm>
+            <a:off x="8169225" y="1650792"/>
+            <a:ext cx="338554" cy="580800"/>
+          </a:xfrm>
+          <a:prstGeom prst="rect">
+            <a:avLst/>
+          </a:prstGeom>
+          <a:noFill/>
+        </p:spPr>
+        <p:txBody>
+          <a:bodyPr vert="vert270" wrap="none" lIns="0" tIns="0" rIns="91440" bIns="0" rtlCol="0">
+            <a:spAutoFit/>
+          </a:bodyPr>
+          <a:lstStyle/>
+          <a:p>
+            <a:pPr algn="ctr"/>
+            <a:r>
+              <a:rPr lang="en-US" sz="1600" dirty="0">
+                <a:solidFill>
+                  <a:schemeClr val="bg2"/>
+                </a:solidFill>
+              </a:rPr>
+              <a:t>Trigger</a:t>
+            </a:r>
+          </a:p>
+        </p:txBody>
+      </p:sp>
+      <p:sp>
+        <p:nvSpPr>
+          <p:cNvPr id="30" name="TextBox 29">
+            <a:extLst>
+              <a:ext uri="{FF2B5EF4-FFF2-40B4-BE49-F238E27FC236}">
+                <a16:creationId xmlns:a16="http://schemas.microsoft.com/office/drawing/2014/main" id="{4DD483E6-0944-EC88-9A25-F3839E12ED50}"/>
+              </a:ext>
+            </a:extLst>
+          </p:cNvPr>
+          <p:cNvSpPr txBox="1"/>
+          <p:nvPr/>
+        </p:nvSpPr>
+        <p:spPr>
+          <a:xfrm rot="5400000">
+            <a:off x="6410673" y="2179293"/>
+            <a:ext cx="276999" cy="306301"/>
+          </a:xfrm>
+          <a:prstGeom prst="rect">
+            <a:avLst/>
+          </a:prstGeom>
+          <a:noFill/>
+        </p:spPr>
+        <p:txBody>
+          <a:bodyPr vert="vert270" wrap="none" lIns="0" tIns="0" rIns="91440" bIns="0" rtlCol="0">
+            <a:spAutoFit/>
+          </a:bodyPr>
+          <a:lstStyle/>
+          <a:p>
+            <a:pPr algn="ctr"/>
+            <a:r>
+              <a:rPr lang="en-US" sz="1200" dirty="0">
+                <a:solidFill>
+                  <a:schemeClr val="accent2">
+                    <a:lumMod val="60000"/>
+                    <a:lumOff val="40000"/>
+                  </a:schemeClr>
+                </a:solidFill>
+              </a:rPr>
+              <a:t>start</a:t>
+            </a:r>
+          </a:p>
+        </p:txBody>
+      </p:sp>
+      <p:sp>
+        <p:nvSpPr>
+          <p:cNvPr id="31" name="TextBox 30">
+            <a:extLst>
+              <a:ext uri="{FF2B5EF4-FFF2-40B4-BE49-F238E27FC236}">
+                <a16:creationId xmlns:a16="http://schemas.microsoft.com/office/drawing/2014/main" id="{2E389938-BC74-9774-0C0E-5E96467866AF}"/>
+              </a:ext>
+            </a:extLst>
+          </p:cNvPr>
+          <p:cNvSpPr txBox="1"/>
+          <p:nvPr/>
+        </p:nvSpPr>
+        <p:spPr>
+          <a:xfrm rot="5400000">
+            <a:off x="5470425" y="2191881"/>
+            <a:ext cx="276999" cy="323808"/>
+          </a:xfrm>
+          <a:prstGeom prst="rect">
+            <a:avLst/>
+          </a:prstGeom>
+          <a:noFill/>
+        </p:spPr>
+        <p:txBody>
+          <a:bodyPr vert="vert270" wrap="none" lIns="0" tIns="0" rIns="91440" bIns="0" rtlCol="0">
+            <a:spAutoFit/>
+          </a:bodyPr>
+          <a:lstStyle/>
+          <a:p>
+            <a:pPr algn="ctr"/>
+            <a:r>
+              <a:rPr lang="en-US" sz="1200" dirty="0">
+                <a:solidFill>
+                  <a:schemeClr val="accent2">
+                    <a:lumMod val="60000"/>
+                    <a:lumOff val="40000"/>
+                  </a:schemeClr>
+                </a:solidFill>
+              </a:rPr>
+              <a:t>back</a:t>
+            </a:r>
+          </a:p>
+        </p:txBody>
+      </p:sp>
+      <p:cxnSp>
+        <p:nvCxnSpPr>
+          <p:cNvPr id="32" name="Straight Arrow Connector 31">
+            <a:extLst>
+              <a:ext uri="{FF2B5EF4-FFF2-40B4-BE49-F238E27FC236}">
+                <a16:creationId xmlns:a16="http://schemas.microsoft.com/office/drawing/2014/main" id="{B3C5C913-85F8-2C50-28A3-5D5BB59BBE80}"/>
+              </a:ext>
+            </a:extLst>
+          </p:cNvPr>
+          <p:cNvCxnSpPr>
+            <a:cxnSpLocks/>
+            <a:stCxn id="11" idx="3"/>
+            <a:endCxn id="40" idx="1"/>
+          </p:cNvCxnSpPr>
+          <p:nvPr/>
+        </p:nvCxnSpPr>
+        <p:spPr>
+          <a:xfrm flipV="1">
+            <a:off x="3076274" y="1957507"/>
+            <a:ext cx="666987" cy="613141"/>
+          </a:xfrm>
+          <a:prstGeom prst="straightConnector1">
+            <a:avLst/>
+          </a:prstGeom>
+          <a:ln>
+            <a:solidFill>
+              <a:srgbClr val="FF0000"/>
+            </a:solidFill>
+            <a:tailEnd type="triangle"/>
+          </a:ln>
+        </p:spPr>
+        <p:style>
+          <a:lnRef idx="2">
+            <a:schemeClr val="accent1"/>
+          </a:lnRef>
+          <a:fillRef idx="0">
+            <a:schemeClr val="accent1"/>
+          </a:fillRef>
+          <a:effectRef idx="1">
+            <a:schemeClr val="accent1"/>
+          </a:effectRef>
+          <a:fontRef idx="minor">
+            <a:schemeClr val="tx1"/>
+          </a:fontRef>
+        </p:style>
+      </p:cxnSp>
+      <p:cxnSp>
+        <p:nvCxnSpPr>
+          <p:cNvPr id="33" name="Straight Arrow Connector 32">
+            <a:extLst>
+              <a:ext uri="{FF2B5EF4-FFF2-40B4-BE49-F238E27FC236}">
+                <a16:creationId xmlns:a16="http://schemas.microsoft.com/office/drawing/2014/main" id="{D0DEA290-90F8-28D1-6CBD-C733FE940D32}"/>
+              </a:ext>
+            </a:extLst>
+          </p:cNvPr>
+          <p:cNvCxnSpPr>
+            <a:cxnSpLocks/>
+            <a:stCxn id="16" idx="2"/>
+            <a:endCxn id="31" idx="1"/>
+          </p:cNvCxnSpPr>
+          <p:nvPr/>
+        </p:nvCxnSpPr>
+        <p:spPr>
+          <a:xfrm flipH="1">
+            <a:off x="5608925" y="700260"/>
+            <a:ext cx="397370" cy="1515026"/>
+          </a:xfrm>
+          <a:prstGeom prst="straightConnector1">
+            <a:avLst/>
+          </a:prstGeom>
+          <a:ln>
+            <a:solidFill>
+              <a:srgbClr val="FF0000"/>
+            </a:solidFill>
+            <a:tailEnd type="triangle"/>
+          </a:ln>
+        </p:spPr>
+        <p:style>
+          <a:lnRef idx="2">
+            <a:schemeClr val="accent1"/>
+          </a:lnRef>
+          <a:fillRef idx="0">
+            <a:schemeClr val="accent1"/>
+          </a:fillRef>
+          <a:effectRef idx="1">
+            <a:schemeClr val="accent1"/>
+          </a:effectRef>
+          <a:fontRef idx="minor">
+            <a:schemeClr val="tx1"/>
+          </a:fontRef>
+        </p:style>
+      </p:cxnSp>
+      <p:cxnSp>
+        <p:nvCxnSpPr>
+          <p:cNvPr id="34" name="Straight Arrow Connector 33">
+            <a:extLst>
+              <a:ext uri="{FF2B5EF4-FFF2-40B4-BE49-F238E27FC236}">
+                <a16:creationId xmlns:a16="http://schemas.microsoft.com/office/drawing/2014/main" id="{D4880E23-506E-F8A1-178D-DD14868625AA}"/>
+              </a:ext>
+            </a:extLst>
+          </p:cNvPr>
+          <p:cNvCxnSpPr/>
+          <p:nvPr/>
+        </p:nvCxnSpPr>
+        <p:spPr>
+          <a:xfrm>
+            <a:off x="10021583" y="4194873"/>
+            <a:ext cx="400178" cy="829107"/>
+          </a:xfrm>
+          <a:prstGeom prst="straightConnector1">
+            <a:avLst/>
+          </a:prstGeom>
+          <a:ln>
+            <a:solidFill>
+              <a:srgbClr val="FF0000"/>
+            </a:solidFill>
+            <a:tailEnd type="triangle"/>
+          </a:ln>
+        </p:spPr>
+        <p:style>
+          <a:lnRef idx="2">
+            <a:schemeClr val="accent1"/>
+          </a:lnRef>
+          <a:fillRef idx="0">
+            <a:schemeClr val="accent1"/>
+          </a:fillRef>
+          <a:effectRef idx="1">
+            <a:schemeClr val="accent1"/>
+          </a:effectRef>
+          <a:fontRef idx="minor">
+            <a:schemeClr val="tx1"/>
+          </a:fontRef>
+        </p:style>
+      </p:cxnSp>
+      <p:cxnSp>
+        <p:nvCxnSpPr>
+          <p:cNvPr id="35" name="Straight Arrow Connector 34">
+            <a:extLst>
+              <a:ext uri="{FF2B5EF4-FFF2-40B4-BE49-F238E27FC236}">
+                <a16:creationId xmlns:a16="http://schemas.microsoft.com/office/drawing/2014/main" id="{1CBE9FD5-C548-4E8D-1796-AB52E919A60F}"/>
+              </a:ext>
+            </a:extLst>
+          </p:cNvPr>
+          <p:cNvCxnSpPr/>
+          <p:nvPr/>
+        </p:nvCxnSpPr>
+        <p:spPr>
+          <a:xfrm>
+            <a:off x="10173983" y="4347273"/>
+            <a:ext cx="400178" cy="829107"/>
+          </a:xfrm>
+          <a:prstGeom prst="straightConnector1">
+            <a:avLst/>
+          </a:prstGeom>
+          <a:ln>
+            <a:solidFill>
+              <a:srgbClr val="FF0000"/>
+            </a:solidFill>
+            <a:tailEnd type="triangle"/>
+          </a:ln>
+        </p:spPr>
+        <p:style>
+          <a:lnRef idx="2">
+            <a:schemeClr val="accent1"/>
+          </a:lnRef>
+          <a:fillRef idx="0">
+            <a:schemeClr val="accent1"/>
+          </a:fillRef>
+          <a:effectRef idx="1">
+            <a:schemeClr val="accent1"/>
+          </a:effectRef>
+          <a:fontRef idx="minor">
+            <a:schemeClr val="tx1"/>
+          </a:fontRef>
+        </p:style>
+      </p:cxnSp>
+      <p:cxnSp>
+        <p:nvCxnSpPr>
+          <p:cNvPr id="36" name="Straight Arrow Connector 35">
+            <a:extLst>
+              <a:ext uri="{FF2B5EF4-FFF2-40B4-BE49-F238E27FC236}">
+                <a16:creationId xmlns:a16="http://schemas.microsoft.com/office/drawing/2014/main" id="{9A5A32E0-CA1D-F4D9-E93F-E30902460FBC}"/>
+              </a:ext>
+            </a:extLst>
+          </p:cNvPr>
+          <p:cNvCxnSpPr>
+            <a:cxnSpLocks/>
+            <a:stCxn id="66" idx="3"/>
+            <a:endCxn id="11" idx="1"/>
+          </p:cNvCxnSpPr>
+          <p:nvPr/>
+        </p:nvCxnSpPr>
+        <p:spPr>
+          <a:xfrm flipV="1">
+            <a:off x="1119611" y="2570648"/>
+            <a:ext cx="361128" cy="308177"/>
+          </a:xfrm>
+          <a:prstGeom prst="straightConnector1">
+            <a:avLst/>
+          </a:prstGeom>
+          <a:ln>
+            <a:solidFill>
+              <a:srgbClr val="FF0000"/>
+            </a:solidFill>
+            <a:tailEnd type="triangle"/>
+          </a:ln>
+        </p:spPr>
+        <p:style>
+          <a:lnRef idx="2">
+            <a:schemeClr val="accent1"/>
+          </a:lnRef>
+          <a:fillRef idx="0">
+            <a:schemeClr val="accent1"/>
+          </a:fillRef>
+          <a:effectRef idx="1">
+            <a:schemeClr val="accent1"/>
+          </a:effectRef>
+          <a:fontRef idx="minor">
+            <a:schemeClr val="tx1"/>
+          </a:fontRef>
+        </p:style>
+      </p:cxnSp>
+      <p:cxnSp>
+        <p:nvCxnSpPr>
+          <p:cNvPr id="43" name="Straight Arrow Connector 42">
+            <a:extLst>
+              <a:ext uri="{FF2B5EF4-FFF2-40B4-BE49-F238E27FC236}">
+                <a16:creationId xmlns:a16="http://schemas.microsoft.com/office/drawing/2014/main" id="{8BB9347A-1448-9C36-E156-00C8C555592D}"/>
+              </a:ext>
+            </a:extLst>
+          </p:cNvPr>
+          <p:cNvCxnSpPr>
+            <a:cxnSpLocks/>
+            <a:stCxn id="17" idx="3"/>
+            <a:endCxn id="40" idx="1"/>
+          </p:cNvCxnSpPr>
+          <p:nvPr/>
+        </p:nvCxnSpPr>
+        <p:spPr>
+          <a:xfrm>
+            <a:off x="3045288" y="1771531"/>
+            <a:ext cx="697973" cy="185976"/>
+          </a:xfrm>
+          <a:prstGeom prst="straightConnector1">
+            <a:avLst/>
+          </a:prstGeom>
+          <a:ln>
+            <a:solidFill>
+              <a:srgbClr val="FF0000"/>
+            </a:solidFill>
+            <a:tailEnd type="triangle"/>
+          </a:ln>
+        </p:spPr>
+        <p:style>
+          <a:lnRef idx="2">
+            <a:schemeClr val="accent1"/>
+          </a:lnRef>
+          <a:fillRef idx="0">
+            <a:schemeClr val="accent1"/>
+          </a:fillRef>
+          <a:effectRef idx="1">
+            <a:schemeClr val="accent1"/>
+          </a:effectRef>
+          <a:fontRef idx="minor">
+            <a:schemeClr val="tx1"/>
+          </a:fontRef>
+        </p:style>
+      </p:cxnSp>
+      <p:cxnSp>
+        <p:nvCxnSpPr>
+          <p:cNvPr id="44" name="Straight Arrow Connector 43">
+            <a:extLst>
+              <a:ext uri="{FF2B5EF4-FFF2-40B4-BE49-F238E27FC236}">
+                <a16:creationId xmlns:a16="http://schemas.microsoft.com/office/drawing/2014/main" id="{73E7EA0A-B3C2-81CC-41E8-496E73B19E76}"/>
+              </a:ext>
+            </a:extLst>
+          </p:cNvPr>
+          <p:cNvCxnSpPr>
+            <a:cxnSpLocks/>
+            <a:stCxn id="29" idx="3"/>
+          </p:cNvCxnSpPr>
+          <p:nvPr/>
+        </p:nvCxnSpPr>
+        <p:spPr>
+          <a:xfrm flipV="1">
+            <a:off x="3128338" y="3092190"/>
+            <a:ext cx="2269138" cy="465295"/>
+          </a:xfrm>
+          <a:prstGeom prst="straightConnector1">
+            <a:avLst/>
+          </a:prstGeom>
+          <a:ln>
+            <a:solidFill>
+              <a:srgbClr val="FF0000"/>
+            </a:solidFill>
+            <a:tailEnd type="triangle"/>
+          </a:ln>
+        </p:spPr>
+        <p:style>
+          <a:lnRef idx="2">
+            <a:schemeClr val="accent1"/>
+          </a:lnRef>
+          <a:fillRef idx="0">
+            <a:schemeClr val="accent1"/>
+          </a:fillRef>
+          <a:effectRef idx="1">
+            <a:schemeClr val="accent1"/>
+          </a:effectRef>
+          <a:fontRef idx="minor">
+            <a:schemeClr val="tx1"/>
+          </a:fontRef>
+        </p:style>
+      </p:cxnSp>
+      <p:cxnSp>
+        <p:nvCxnSpPr>
+          <p:cNvPr id="45" name="Straight Arrow Connector 44">
+            <a:extLst>
+              <a:ext uri="{FF2B5EF4-FFF2-40B4-BE49-F238E27FC236}">
+                <a16:creationId xmlns:a16="http://schemas.microsoft.com/office/drawing/2014/main" id="{8DDF0C2D-32E3-CA34-48C3-798CBE854D40}"/>
+              </a:ext>
+            </a:extLst>
+          </p:cNvPr>
+          <p:cNvCxnSpPr>
+            <a:cxnSpLocks/>
+            <a:stCxn id="49" idx="3"/>
+          </p:cNvCxnSpPr>
+          <p:nvPr/>
+        </p:nvCxnSpPr>
+        <p:spPr>
+          <a:xfrm flipV="1">
+            <a:off x="3128338" y="3625693"/>
+            <a:ext cx="2269138" cy="534844"/>
+          </a:xfrm>
+          <a:prstGeom prst="straightConnector1">
+            <a:avLst/>
+          </a:prstGeom>
+          <a:ln>
+            <a:solidFill>
+              <a:srgbClr val="FF0000"/>
+            </a:solidFill>
+            <a:tailEnd type="triangle"/>
+          </a:ln>
+        </p:spPr>
+        <p:style>
+          <a:lnRef idx="2">
+            <a:schemeClr val="accent1"/>
+          </a:lnRef>
+          <a:fillRef idx="0">
+            <a:schemeClr val="accent1"/>
+          </a:fillRef>
+          <a:effectRef idx="1">
+            <a:schemeClr val="accent1"/>
+          </a:effectRef>
+          <a:fontRef idx="minor">
+            <a:schemeClr val="tx1"/>
+          </a:fontRef>
+        </p:style>
+      </p:cxnSp>
+      <p:cxnSp>
+        <p:nvCxnSpPr>
+          <p:cNvPr id="46" name="Straight Arrow Connector 45">
+            <a:extLst>
+              <a:ext uri="{FF2B5EF4-FFF2-40B4-BE49-F238E27FC236}">
+                <a16:creationId xmlns:a16="http://schemas.microsoft.com/office/drawing/2014/main" id="{B2325063-E19B-E3AD-067B-B0DBB5BA31A5}"/>
+              </a:ext>
+            </a:extLst>
+          </p:cNvPr>
+          <p:cNvCxnSpPr>
+            <a:cxnSpLocks/>
+            <a:stCxn id="14" idx="1"/>
+          </p:cNvCxnSpPr>
+          <p:nvPr/>
+        </p:nvCxnSpPr>
+        <p:spPr>
+          <a:xfrm flipH="1" flipV="1">
+            <a:off x="7482254" y="2969062"/>
+            <a:ext cx="1648772" cy="539621"/>
+          </a:xfrm>
+          <a:prstGeom prst="straightConnector1">
+            <a:avLst/>
+          </a:prstGeom>
+          <a:ln>
+            <a:solidFill>
+              <a:srgbClr val="FF0000"/>
+            </a:solidFill>
+            <a:tailEnd type="triangle"/>
+          </a:ln>
+        </p:spPr>
+        <p:style>
+          <a:lnRef idx="2">
+            <a:schemeClr val="accent1"/>
+          </a:lnRef>
+          <a:fillRef idx="0">
+            <a:schemeClr val="accent1"/>
+          </a:fillRef>
+          <a:effectRef idx="1">
+            <a:schemeClr val="accent1"/>
+          </a:effectRef>
+          <a:fontRef idx="minor">
+            <a:schemeClr val="tx1"/>
+          </a:fontRef>
+        </p:style>
+      </p:cxnSp>
+      <p:sp>
+        <p:nvSpPr>
+          <p:cNvPr id="49" name="Rectangle 48">
+            <a:extLst>
+              <a:ext uri="{FF2B5EF4-FFF2-40B4-BE49-F238E27FC236}">
+                <a16:creationId xmlns:a16="http://schemas.microsoft.com/office/drawing/2014/main" id="{0E13D29F-7527-67DC-910F-7C75EBB88EAA}"/>
               </a:ext>
             </a:extLst>
           </p:cNvPr>
@@ -6004,8 +7992,8 @@
         </p:nvSpPr>
         <p:spPr>
           <a:xfrm>
-            <a:off x="1480739" y="2324249"/>
-            <a:ext cx="1595535" cy="492798"/>
+            <a:off x="1532803" y="3924607"/>
+            <a:ext cx="1595535" cy="471859"/>
           </a:xfrm>
           <a:prstGeom prst="rect">
             <a:avLst/>
@@ -6052,28 +8040,407 @@
                   <a:schemeClr val="tx2"/>
                 </a:solidFill>
               </a:rPr>
-              <a:t>Empty Fuel</a:t>
-            </a:r>
-          </a:p>
-          <a:p>
-            <a:pPr algn="ctr"/>
+              <a:t>Deploy Intake </a:t>
+            </a:r>
             <a:r>
               <a:rPr lang="en-US" sz="1200" dirty="0">
                 <a:solidFill>
                   <a:schemeClr val="tx2"/>
                 </a:solidFill>
               </a:rPr>
-              <a:t>(back pressed)</a:t>
-            </a:r>
-          </a:p>
-        </p:txBody>
-      </p:sp>
-      <p:sp>
-        <p:nvSpPr>
-          <p:cNvPr id="12" name="Rectangle 11">
-            <a:extLst>
-              <a:ext uri="{FF2B5EF4-FFF2-40B4-BE49-F238E27FC236}">
-                <a16:creationId xmlns:a16="http://schemas.microsoft.com/office/drawing/2014/main" id="{C02DC017-BF61-5880-3824-D65FA1623FD7}"/>
+              <a:t>(down)</a:t>
+            </a:r>
+            <a:endParaRPr lang="en-US" dirty="0">
+              <a:solidFill>
+                <a:schemeClr val="tx2"/>
+              </a:solidFill>
+            </a:endParaRPr>
+          </a:p>
+        </p:txBody>
+      </p:sp>
+      <p:cxnSp>
+        <p:nvCxnSpPr>
+          <p:cNvPr id="57" name="Straight Arrow Connector 56">
+            <a:extLst>
+              <a:ext uri="{FF2B5EF4-FFF2-40B4-BE49-F238E27FC236}">
+                <a16:creationId xmlns:a16="http://schemas.microsoft.com/office/drawing/2014/main" id="{47B6922E-B551-616F-95A0-C704B3DA611B}"/>
+              </a:ext>
+            </a:extLst>
+          </p:cNvPr>
+          <p:cNvCxnSpPr>
+            <a:cxnSpLocks/>
+            <a:endCxn id="13" idx="0"/>
+          </p:cNvCxnSpPr>
+          <p:nvPr/>
+        </p:nvCxnSpPr>
+        <p:spPr>
+          <a:xfrm>
+            <a:off x="9741159" y="706857"/>
+            <a:ext cx="128024" cy="758474"/>
+          </a:xfrm>
+          <a:prstGeom prst="straightConnector1">
+            <a:avLst/>
+          </a:prstGeom>
+          <a:ln>
+            <a:solidFill>
+              <a:srgbClr val="FF0000"/>
+            </a:solidFill>
+            <a:tailEnd type="triangle"/>
+          </a:ln>
+        </p:spPr>
+        <p:style>
+          <a:lnRef idx="2">
+            <a:schemeClr val="accent1"/>
+          </a:lnRef>
+          <a:fillRef idx="0">
+            <a:schemeClr val="accent1"/>
+          </a:fillRef>
+          <a:effectRef idx="1">
+            <a:schemeClr val="accent1"/>
+          </a:effectRef>
+          <a:fontRef idx="minor">
+            <a:schemeClr val="tx1"/>
+          </a:fontRef>
+        </p:style>
+      </p:cxnSp>
+      <p:cxnSp>
+        <p:nvCxnSpPr>
+          <p:cNvPr id="58" name="Straight Arrow Connector 57">
+            <a:extLst>
+              <a:ext uri="{FF2B5EF4-FFF2-40B4-BE49-F238E27FC236}">
+                <a16:creationId xmlns:a16="http://schemas.microsoft.com/office/drawing/2014/main" id="{9D2BFB52-60A8-3EDA-BAB7-FAF1E5BB88C4}"/>
+              </a:ext>
+            </a:extLst>
+          </p:cNvPr>
+          <p:cNvCxnSpPr/>
+          <p:nvPr/>
+        </p:nvCxnSpPr>
+        <p:spPr>
+          <a:xfrm>
+            <a:off x="11033533" y="4012190"/>
+            <a:ext cx="400178" cy="829107"/>
+          </a:xfrm>
+          <a:prstGeom prst="straightConnector1">
+            <a:avLst/>
+          </a:prstGeom>
+          <a:ln>
+            <a:solidFill>
+              <a:srgbClr val="FF0000"/>
+            </a:solidFill>
+            <a:tailEnd type="triangle"/>
+          </a:ln>
+        </p:spPr>
+        <p:style>
+          <a:lnRef idx="2">
+            <a:schemeClr val="accent1"/>
+          </a:lnRef>
+          <a:fillRef idx="0">
+            <a:schemeClr val="accent1"/>
+          </a:fillRef>
+          <a:effectRef idx="1">
+            <a:schemeClr val="accent1"/>
+          </a:effectRef>
+          <a:fontRef idx="minor">
+            <a:schemeClr val="tx1"/>
+          </a:fontRef>
+        </p:style>
+      </p:cxnSp>
+      <p:cxnSp>
+        <p:nvCxnSpPr>
+          <p:cNvPr id="59" name="Straight Arrow Connector 58">
+            <a:extLst>
+              <a:ext uri="{FF2B5EF4-FFF2-40B4-BE49-F238E27FC236}">
+                <a16:creationId xmlns:a16="http://schemas.microsoft.com/office/drawing/2014/main" id="{02DB378A-D1BC-64C7-3E13-6875826B9912}"/>
+              </a:ext>
+            </a:extLst>
+          </p:cNvPr>
+          <p:cNvCxnSpPr/>
+          <p:nvPr/>
+        </p:nvCxnSpPr>
+        <p:spPr>
+          <a:xfrm>
+            <a:off x="11185933" y="4164590"/>
+            <a:ext cx="400178" cy="829107"/>
+          </a:xfrm>
+          <a:prstGeom prst="straightConnector1">
+            <a:avLst/>
+          </a:prstGeom>
+          <a:ln>
+            <a:solidFill>
+              <a:srgbClr val="FF0000"/>
+            </a:solidFill>
+            <a:tailEnd type="triangle"/>
+          </a:ln>
+        </p:spPr>
+        <p:style>
+          <a:lnRef idx="2">
+            <a:schemeClr val="accent1"/>
+          </a:lnRef>
+          <a:fillRef idx="0">
+            <a:schemeClr val="accent1"/>
+          </a:fillRef>
+          <a:effectRef idx="1">
+            <a:schemeClr val="accent1"/>
+          </a:effectRef>
+          <a:fontRef idx="minor">
+            <a:schemeClr val="tx1"/>
+          </a:fontRef>
+        </p:style>
+      </p:cxnSp>
+      <p:cxnSp>
+        <p:nvCxnSpPr>
+          <p:cNvPr id="61" name="Straight Arrow Connector 60">
+            <a:extLst>
+              <a:ext uri="{FF2B5EF4-FFF2-40B4-BE49-F238E27FC236}">
+                <a16:creationId xmlns:a16="http://schemas.microsoft.com/office/drawing/2014/main" id="{A40DC03C-2D5E-A001-64E3-E19D2B3E612C}"/>
+              </a:ext>
+            </a:extLst>
+          </p:cNvPr>
+          <p:cNvCxnSpPr>
+            <a:cxnSpLocks/>
+            <a:stCxn id="13" idx="1"/>
+            <a:endCxn id="41" idx="3"/>
+          </p:cNvCxnSpPr>
+          <p:nvPr/>
+        </p:nvCxnSpPr>
+        <p:spPr>
+          <a:xfrm flipH="1">
+            <a:off x="8507779" y="1623952"/>
+            <a:ext cx="563636" cy="317240"/>
+          </a:xfrm>
+          <a:prstGeom prst="straightConnector1">
+            <a:avLst/>
+          </a:prstGeom>
+          <a:ln>
+            <a:solidFill>
+              <a:srgbClr val="FF0000"/>
+            </a:solidFill>
+            <a:tailEnd type="triangle"/>
+          </a:ln>
+        </p:spPr>
+        <p:style>
+          <a:lnRef idx="2">
+            <a:schemeClr val="accent1"/>
+          </a:lnRef>
+          <a:fillRef idx="0">
+            <a:schemeClr val="accent1"/>
+          </a:fillRef>
+          <a:effectRef idx="1">
+            <a:schemeClr val="accent1"/>
+          </a:effectRef>
+          <a:fontRef idx="minor">
+            <a:schemeClr val="tx1"/>
+          </a:fontRef>
+        </p:style>
+      </p:cxnSp>
+      <p:cxnSp>
+        <p:nvCxnSpPr>
+          <p:cNvPr id="62" name="Straight Arrow Connector 61">
+            <a:extLst>
+              <a:ext uri="{FF2B5EF4-FFF2-40B4-BE49-F238E27FC236}">
+                <a16:creationId xmlns:a16="http://schemas.microsoft.com/office/drawing/2014/main" id="{46CC430F-1C96-F7AF-802B-18DA56C6B849}"/>
+              </a:ext>
+            </a:extLst>
+          </p:cNvPr>
+          <p:cNvCxnSpPr/>
+          <p:nvPr/>
+        </p:nvCxnSpPr>
+        <p:spPr>
+          <a:xfrm>
+            <a:off x="10734261" y="4154321"/>
+            <a:ext cx="400178" cy="829107"/>
+          </a:xfrm>
+          <a:prstGeom prst="straightConnector1">
+            <a:avLst/>
+          </a:prstGeom>
+          <a:ln>
+            <a:solidFill>
+              <a:srgbClr val="FF0000"/>
+            </a:solidFill>
+            <a:tailEnd type="triangle"/>
+          </a:ln>
+        </p:spPr>
+        <p:style>
+          <a:lnRef idx="2">
+            <a:schemeClr val="accent1"/>
+          </a:lnRef>
+          <a:fillRef idx="0">
+            <a:schemeClr val="accent1"/>
+          </a:fillRef>
+          <a:effectRef idx="1">
+            <a:schemeClr val="accent1"/>
+          </a:effectRef>
+          <a:fontRef idx="minor">
+            <a:schemeClr val="tx1"/>
+          </a:fontRef>
+        </p:style>
+      </p:cxnSp>
+      <p:cxnSp>
+        <p:nvCxnSpPr>
+          <p:cNvPr id="63" name="Straight Arrow Connector 62">
+            <a:extLst>
+              <a:ext uri="{FF2B5EF4-FFF2-40B4-BE49-F238E27FC236}">
+                <a16:creationId xmlns:a16="http://schemas.microsoft.com/office/drawing/2014/main" id="{1397F8D8-E9D4-512A-2BA5-F56ACE47DAC8}"/>
+              </a:ext>
+            </a:extLst>
+          </p:cNvPr>
+          <p:cNvCxnSpPr>
+            <a:cxnSpLocks/>
+            <a:stCxn id="51" idx="0"/>
+          </p:cNvCxnSpPr>
+          <p:nvPr/>
+        </p:nvCxnSpPr>
+        <p:spPr>
+          <a:xfrm flipH="1" flipV="1">
+            <a:off x="5757841" y="3350062"/>
+            <a:ext cx="715232" cy="1628013"/>
+          </a:xfrm>
+          <a:prstGeom prst="straightConnector1">
+            <a:avLst/>
+          </a:prstGeom>
+          <a:ln>
+            <a:solidFill>
+              <a:srgbClr val="FF0000"/>
+            </a:solidFill>
+            <a:tailEnd type="triangle"/>
+          </a:ln>
+        </p:spPr>
+        <p:style>
+          <a:lnRef idx="2">
+            <a:schemeClr val="accent1"/>
+          </a:lnRef>
+          <a:fillRef idx="0">
+            <a:schemeClr val="accent1"/>
+          </a:fillRef>
+          <a:effectRef idx="1">
+            <a:schemeClr val="accent1"/>
+          </a:effectRef>
+          <a:fontRef idx="minor">
+            <a:schemeClr val="tx1"/>
+          </a:fontRef>
+        </p:style>
+      </p:cxnSp>
+      <p:cxnSp>
+        <p:nvCxnSpPr>
+          <p:cNvPr id="64" name="Straight Arrow Connector 63">
+            <a:extLst>
+              <a:ext uri="{FF2B5EF4-FFF2-40B4-BE49-F238E27FC236}">
+                <a16:creationId xmlns:a16="http://schemas.microsoft.com/office/drawing/2014/main" id="{7C20C0ED-A4F3-F9CE-CA48-769B7B374086}"/>
+              </a:ext>
+            </a:extLst>
+          </p:cNvPr>
+          <p:cNvCxnSpPr>
+            <a:cxnSpLocks/>
+            <a:stCxn id="50" idx="0"/>
+          </p:cNvCxnSpPr>
+          <p:nvPr/>
+        </p:nvCxnSpPr>
+        <p:spPr>
+          <a:xfrm flipV="1">
+            <a:off x="4761512" y="3350062"/>
+            <a:ext cx="415694" cy="1905168"/>
+          </a:xfrm>
+          <a:prstGeom prst="straightConnector1">
+            <a:avLst/>
+          </a:prstGeom>
+          <a:ln>
+            <a:solidFill>
+              <a:srgbClr val="FF0000"/>
+            </a:solidFill>
+            <a:tailEnd type="triangle"/>
+          </a:ln>
+        </p:spPr>
+        <p:style>
+          <a:lnRef idx="2">
+            <a:schemeClr val="accent1"/>
+          </a:lnRef>
+          <a:fillRef idx="0">
+            <a:schemeClr val="accent1"/>
+          </a:fillRef>
+          <a:effectRef idx="1">
+            <a:schemeClr val="accent1"/>
+          </a:effectRef>
+          <a:fontRef idx="minor">
+            <a:schemeClr val="tx1"/>
+          </a:fontRef>
+        </p:style>
+      </p:cxnSp>
+      <p:sp>
+        <p:nvSpPr>
+          <p:cNvPr id="86" name="TextBox 85">
+            <a:extLst>
+              <a:ext uri="{FF2B5EF4-FFF2-40B4-BE49-F238E27FC236}">
+                <a16:creationId xmlns:a16="http://schemas.microsoft.com/office/drawing/2014/main" id="{64FF40F8-86DB-E873-9B59-C8FF4F75FB8F}"/>
+              </a:ext>
+            </a:extLst>
+          </p:cNvPr>
+          <p:cNvSpPr txBox="1"/>
+          <p:nvPr/>
+        </p:nvSpPr>
+        <p:spPr>
+          <a:xfrm>
+            <a:off x="10764045" y="1040863"/>
+            <a:ext cx="1238289" cy="769441"/>
+          </a:xfrm>
+          <a:prstGeom prst="rect">
+            <a:avLst/>
+          </a:prstGeom>
+          <a:noFill/>
+        </p:spPr>
+        <p:txBody>
+          <a:bodyPr wrap="square" rtlCol="0">
+            <a:spAutoFit/>
+          </a:bodyPr>
+          <a:lstStyle/>
+          <a:p>
+            <a:r>
+              <a:rPr lang="en-US" sz="1100" dirty="0"/>
+              <a:t>Goto a good location, aim, engage brake, and shoot all fuel</a:t>
+            </a:r>
+          </a:p>
+        </p:txBody>
+      </p:sp>
+      <p:sp>
+        <p:nvSpPr>
+          <p:cNvPr id="93" name="TextBox 92">
+            <a:extLst>
+              <a:ext uri="{FF2B5EF4-FFF2-40B4-BE49-F238E27FC236}">
+                <a16:creationId xmlns:a16="http://schemas.microsoft.com/office/drawing/2014/main" id="{EA9B908C-C2A5-4AFB-330F-1619EF2A4E93}"/>
+              </a:ext>
+            </a:extLst>
+          </p:cNvPr>
+          <p:cNvSpPr txBox="1"/>
+          <p:nvPr/>
+        </p:nvSpPr>
+        <p:spPr>
+          <a:xfrm>
+            <a:off x="10745448" y="1886504"/>
+            <a:ext cx="1469585" cy="600164"/>
+          </a:xfrm>
+          <a:prstGeom prst="rect">
+            <a:avLst/>
+          </a:prstGeom>
+          <a:noFill/>
+        </p:spPr>
+        <p:txBody>
+          <a:bodyPr wrap="square" rtlCol="0">
+            <a:spAutoFit/>
+          </a:bodyPr>
+          <a:lstStyle/>
+          <a:p>
+            <a:r>
+              <a:rPr lang="en-US" sz="1100" dirty="0"/>
+              <a:t>Maintains aim and shoot all fuel. Can be moving…</a:t>
+            </a:r>
+          </a:p>
+        </p:txBody>
+      </p:sp>
+      <p:sp>
+        <p:nvSpPr>
+          <p:cNvPr id="50" name="Rectangle 49">
+            <a:extLst>
+              <a:ext uri="{FF2B5EF4-FFF2-40B4-BE49-F238E27FC236}">
+                <a16:creationId xmlns:a16="http://schemas.microsoft.com/office/drawing/2014/main" id="{9167FDAB-D148-693D-B4C4-C0546E0CF5E2}"/>
               </a:ext>
             </a:extLst>
           </p:cNvPr>
@@ -6082,8 +8449,8 @@
         </p:nvSpPr>
         <p:spPr>
           <a:xfrm>
-            <a:off x="9855703" y="5501336"/>
-            <a:ext cx="1595535" cy="317241"/>
+            <a:off x="3963744" y="5255230"/>
+            <a:ext cx="1595535" cy="490853"/>
           </a:xfrm>
           <a:prstGeom prst="rect">
             <a:avLst/>
@@ -6130,17 +8497,30 @@
                   <a:schemeClr val="tx2"/>
                 </a:solidFill>
               </a:rPr>
-              <a:t>Goto Climb</a:t>
-            </a:r>
-          </a:p>
-        </p:txBody>
-      </p:sp>
-      <p:sp>
-        <p:nvSpPr>
-          <p:cNvPr id="13" name="Rectangle 12">
-            <a:extLst>
-              <a:ext uri="{FF2B5EF4-FFF2-40B4-BE49-F238E27FC236}">
-                <a16:creationId xmlns:a16="http://schemas.microsoft.com/office/drawing/2014/main" id="{438E3938-169E-DBC2-8D39-5A597345AB0B}"/>
+              <a:t>Tweak Intake </a:t>
+            </a:r>
+            <a:r>
+              <a:rPr lang="en-US" sz="1200" dirty="0">
+                <a:solidFill>
+                  <a:schemeClr val="tx2"/>
+                </a:solidFill>
+              </a:rPr>
+              <a:t>(up)</a:t>
+            </a:r>
+            <a:endParaRPr lang="en-US" dirty="0">
+              <a:solidFill>
+                <a:schemeClr val="tx2"/>
+              </a:solidFill>
+            </a:endParaRPr>
+          </a:p>
+        </p:txBody>
+      </p:sp>
+      <p:sp>
+        <p:nvSpPr>
+          <p:cNvPr id="51" name="Rectangle 50">
+            <a:extLst>
+              <a:ext uri="{FF2B5EF4-FFF2-40B4-BE49-F238E27FC236}">
+                <a16:creationId xmlns:a16="http://schemas.microsoft.com/office/drawing/2014/main" id="{FEFAA101-9AC4-2FA0-4D53-CAE7BB8F0112}"/>
               </a:ext>
             </a:extLst>
           </p:cNvPr>
@@ -6149,8 +8529,8 @@
         </p:nvSpPr>
         <p:spPr>
           <a:xfrm>
-            <a:off x="9071415" y="1465331"/>
-            <a:ext cx="1595535" cy="317241"/>
+            <a:off x="5675305" y="4978075"/>
+            <a:ext cx="1595535" cy="490853"/>
           </a:xfrm>
           <a:prstGeom prst="rect">
             <a:avLst/>
@@ -6197,1706 +8577,7 @@
                   <a:schemeClr val="tx2"/>
                 </a:solidFill>
               </a:rPr>
-              <a:t>Aim &amp; Shoot</a:t>
-            </a:r>
-          </a:p>
-        </p:txBody>
-      </p:sp>
-      <p:sp>
-        <p:nvSpPr>
-          <p:cNvPr id="14" name="Rectangle 13">
-            <a:extLst>
-              <a:ext uri="{FF2B5EF4-FFF2-40B4-BE49-F238E27FC236}">
-                <a16:creationId xmlns:a16="http://schemas.microsoft.com/office/drawing/2014/main" id="{CE6234B4-0847-FA69-7472-3D7D0AE90631}"/>
-              </a:ext>
-            </a:extLst>
-          </p:cNvPr>
-          <p:cNvSpPr/>
-          <p:nvPr/>
-        </p:nvSpPr>
-        <p:spPr>
-          <a:xfrm>
-            <a:off x="9131026" y="3350062"/>
-            <a:ext cx="1595535" cy="317241"/>
-          </a:xfrm>
-          <a:prstGeom prst="rect">
-            <a:avLst/>
-          </a:prstGeom>
-          <a:solidFill>
-            <a:schemeClr val="accent6">
-              <a:lumMod val="20000"/>
-              <a:lumOff val="80000"/>
-            </a:schemeClr>
-          </a:solidFill>
-          <a:ln>
-            <a:solidFill>
-              <a:schemeClr val="accent2">
-                <a:lumMod val="20000"/>
-                <a:lumOff val="80000"/>
-              </a:schemeClr>
-            </a:solidFill>
-          </a:ln>
-        </p:spPr>
-        <p:style>
-          <a:lnRef idx="2">
-            <a:schemeClr val="accent1">
-              <a:shade val="15000"/>
-            </a:schemeClr>
-          </a:lnRef>
-          <a:fillRef idx="1">
-            <a:schemeClr val="accent1"/>
-          </a:fillRef>
-          <a:effectRef idx="0">
-            <a:schemeClr val="accent1"/>
-          </a:effectRef>
-          <a:fontRef idx="minor">
-            <a:schemeClr val="lt1"/>
-          </a:fontRef>
-        </p:style>
-        <p:txBody>
-          <a:bodyPr rtlCol="0" anchor="ctr"/>
-          <a:lstStyle/>
-          <a:p>
-            <a:pPr algn="ctr"/>
-            <a:r>
-              <a:rPr lang="en-US" dirty="0">
-                <a:solidFill>
-                  <a:schemeClr val="tx2"/>
-                </a:solidFill>
-              </a:rPr>
-              <a:t>Brake</a:t>
-            </a:r>
-          </a:p>
-        </p:txBody>
-      </p:sp>
-      <p:sp>
-        <p:nvSpPr>
-          <p:cNvPr id="15" name="Rectangle 14">
-            <a:extLst>
-              <a:ext uri="{FF2B5EF4-FFF2-40B4-BE49-F238E27FC236}">
-                <a16:creationId xmlns:a16="http://schemas.microsoft.com/office/drawing/2014/main" id="{4263266B-6E03-53D4-97FE-499955BC35DA}"/>
-              </a:ext>
-            </a:extLst>
-          </p:cNvPr>
-          <p:cNvSpPr/>
-          <p:nvPr/>
-        </p:nvSpPr>
-        <p:spPr>
-          <a:xfrm>
-            <a:off x="50877" y="5186557"/>
-            <a:ext cx="1595535" cy="317241"/>
-          </a:xfrm>
-          <a:prstGeom prst="rect">
-            <a:avLst/>
-          </a:prstGeom>
-          <a:solidFill>
-            <a:schemeClr val="accent6">
-              <a:lumMod val="20000"/>
-              <a:lumOff val="80000"/>
-            </a:schemeClr>
-          </a:solidFill>
-          <a:ln>
-            <a:solidFill>
-              <a:schemeClr val="accent2">
-                <a:lumMod val="20000"/>
-                <a:lumOff val="80000"/>
-              </a:schemeClr>
-            </a:solidFill>
-          </a:ln>
-        </p:spPr>
-        <p:style>
-          <a:lnRef idx="2">
-            <a:schemeClr val="accent1">
-              <a:shade val="15000"/>
-            </a:schemeClr>
-          </a:lnRef>
-          <a:fillRef idx="1">
-            <a:schemeClr val="accent1"/>
-          </a:fillRef>
-          <a:effectRef idx="0">
-            <a:schemeClr val="accent1"/>
-          </a:effectRef>
-          <a:fontRef idx="minor">
-            <a:schemeClr val="lt1"/>
-          </a:fontRef>
-        </p:style>
-        <p:txBody>
-          <a:bodyPr rtlCol="0" anchor="ctr"/>
-          <a:lstStyle/>
-          <a:p>
-            <a:pPr algn="ctr"/>
-            <a:r>
-              <a:rPr lang="en-US" dirty="0">
-                <a:solidFill>
-                  <a:schemeClr val="tx2"/>
-                </a:solidFill>
-              </a:rPr>
-              <a:t>Auto Climb</a:t>
-            </a:r>
-          </a:p>
-        </p:txBody>
-      </p:sp>
-      <p:sp>
-        <p:nvSpPr>
-          <p:cNvPr id="16" name="Rectangle 15">
-            <a:extLst>
-              <a:ext uri="{FF2B5EF4-FFF2-40B4-BE49-F238E27FC236}">
-                <a16:creationId xmlns:a16="http://schemas.microsoft.com/office/drawing/2014/main" id="{F54D5F66-778A-A89F-468A-3E6C9511C581}"/>
-              </a:ext>
-            </a:extLst>
-          </p:cNvPr>
-          <p:cNvSpPr/>
-          <p:nvPr/>
-        </p:nvSpPr>
-        <p:spPr>
-          <a:xfrm>
-            <a:off x="5177206" y="238595"/>
-            <a:ext cx="1658178" cy="461665"/>
-          </a:xfrm>
-          <a:prstGeom prst="rect">
-            <a:avLst/>
-          </a:prstGeom>
-          <a:solidFill>
-            <a:schemeClr val="accent6">
-              <a:lumMod val="20000"/>
-              <a:lumOff val="80000"/>
-            </a:schemeClr>
-          </a:solidFill>
-          <a:ln>
-            <a:solidFill>
-              <a:schemeClr val="accent2">
-                <a:lumMod val="20000"/>
-                <a:lumOff val="80000"/>
-              </a:schemeClr>
-            </a:solidFill>
-          </a:ln>
-        </p:spPr>
-        <p:style>
-          <a:lnRef idx="2">
-            <a:schemeClr val="accent1">
-              <a:shade val="15000"/>
-            </a:schemeClr>
-          </a:lnRef>
-          <a:fillRef idx="1">
-            <a:schemeClr val="accent1"/>
-          </a:fillRef>
-          <a:effectRef idx="0">
-            <a:schemeClr val="accent1"/>
-          </a:effectRef>
-          <a:fontRef idx="minor">
-            <a:schemeClr val="lt1"/>
-          </a:fontRef>
-        </p:style>
-        <p:txBody>
-          <a:bodyPr rtlCol="0" anchor="ctr"/>
-          <a:lstStyle/>
-          <a:p>
-            <a:pPr algn="ctr"/>
-            <a:r>
-              <a:rPr lang="en-US" sz="1600" dirty="0">
-                <a:solidFill>
-                  <a:schemeClr val="tx2"/>
-                </a:solidFill>
-              </a:rPr>
-              <a:t>Override some commands</a:t>
-            </a:r>
-          </a:p>
-        </p:txBody>
-      </p:sp>
-      <p:sp>
-        <p:nvSpPr>
-          <p:cNvPr id="17" name="Rectangle 16">
-            <a:extLst>
-              <a:ext uri="{FF2B5EF4-FFF2-40B4-BE49-F238E27FC236}">
-                <a16:creationId xmlns:a16="http://schemas.microsoft.com/office/drawing/2014/main" id="{D169B6A3-0DA2-9D96-0351-4045F2E2F1E1}"/>
-              </a:ext>
-            </a:extLst>
-          </p:cNvPr>
-          <p:cNvSpPr/>
-          <p:nvPr/>
-        </p:nvSpPr>
-        <p:spPr>
-          <a:xfrm>
-            <a:off x="1449753" y="1612910"/>
-            <a:ext cx="1595535" cy="317241"/>
-          </a:xfrm>
-          <a:prstGeom prst="rect">
-            <a:avLst/>
-          </a:prstGeom>
-          <a:solidFill>
-            <a:schemeClr val="accent6">
-              <a:lumMod val="20000"/>
-              <a:lumOff val="80000"/>
-            </a:schemeClr>
-          </a:solidFill>
-          <a:ln>
-            <a:solidFill>
-              <a:schemeClr val="accent2">
-                <a:lumMod val="20000"/>
-                <a:lumOff val="80000"/>
-              </a:schemeClr>
-            </a:solidFill>
-          </a:ln>
-        </p:spPr>
-        <p:style>
-          <a:lnRef idx="2">
-            <a:schemeClr val="accent1">
-              <a:shade val="15000"/>
-            </a:schemeClr>
-          </a:lnRef>
-          <a:fillRef idx="1">
-            <a:schemeClr val="accent1"/>
-          </a:fillRef>
-          <a:effectRef idx="0">
-            <a:schemeClr val="accent1"/>
-          </a:effectRef>
-          <a:fontRef idx="minor">
-            <a:schemeClr val="lt1"/>
-          </a:fontRef>
-        </p:style>
-        <p:txBody>
-          <a:bodyPr rtlCol="0" anchor="ctr"/>
-          <a:lstStyle/>
-          <a:p>
-            <a:pPr algn="ctr"/>
-            <a:r>
-              <a:rPr lang="en-US" dirty="0">
-                <a:solidFill>
-                  <a:schemeClr val="tx2"/>
-                </a:solidFill>
-              </a:rPr>
-              <a:t>Intake Fuel</a:t>
-            </a:r>
-          </a:p>
-        </p:txBody>
-      </p:sp>
-      <p:sp>
-        <p:nvSpPr>
-          <p:cNvPr id="18" name="Rectangle 17">
-            <a:extLst>
-              <a:ext uri="{FF2B5EF4-FFF2-40B4-BE49-F238E27FC236}">
-                <a16:creationId xmlns:a16="http://schemas.microsoft.com/office/drawing/2014/main" id="{B0136852-C263-58AE-B3A2-82BE180C50B1}"/>
-              </a:ext>
-            </a:extLst>
-          </p:cNvPr>
-          <p:cNvSpPr/>
-          <p:nvPr/>
-        </p:nvSpPr>
-        <p:spPr>
-          <a:xfrm>
-            <a:off x="9057935" y="6503461"/>
-            <a:ext cx="1595535" cy="317241"/>
-          </a:xfrm>
-          <a:prstGeom prst="rect">
-            <a:avLst/>
-          </a:prstGeom>
-          <a:solidFill>
-            <a:schemeClr val="accent6">
-              <a:lumMod val="20000"/>
-              <a:lumOff val="80000"/>
-            </a:schemeClr>
-          </a:solidFill>
-          <a:ln>
-            <a:solidFill>
-              <a:schemeClr val="accent2">
-                <a:lumMod val="20000"/>
-                <a:lumOff val="80000"/>
-              </a:schemeClr>
-            </a:solidFill>
-          </a:ln>
-        </p:spPr>
-        <p:style>
-          <a:lnRef idx="2">
-            <a:schemeClr val="accent1">
-              <a:shade val="15000"/>
-            </a:schemeClr>
-          </a:lnRef>
-          <a:fillRef idx="1">
-            <a:schemeClr val="accent1"/>
-          </a:fillRef>
-          <a:effectRef idx="0">
-            <a:schemeClr val="accent1"/>
-          </a:effectRef>
-          <a:fontRef idx="minor">
-            <a:schemeClr val="lt1"/>
-          </a:fontRef>
-        </p:style>
-        <p:txBody>
-          <a:bodyPr rtlCol="0" anchor="ctr"/>
-          <a:lstStyle/>
-          <a:p>
-            <a:pPr algn="ctr"/>
-            <a:r>
-              <a:rPr lang="en-US" dirty="0">
-                <a:solidFill>
-                  <a:schemeClr val="tx2"/>
-                </a:solidFill>
-              </a:rPr>
-              <a:t>Get Off Fuel</a:t>
-            </a:r>
-          </a:p>
-        </p:txBody>
-      </p:sp>
-      <p:sp>
-        <p:nvSpPr>
-          <p:cNvPr id="19" name="Rectangle 18">
-            <a:extLst>
-              <a:ext uri="{FF2B5EF4-FFF2-40B4-BE49-F238E27FC236}">
-                <a16:creationId xmlns:a16="http://schemas.microsoft.com/office/drawing/2014/main" id="{5887B5D4-8008-9128-F533-C1E35FE5B92C}"/>
-              </a:ext>
-            </a:extLst>
-          </p:cNvPr>
-          <p:cNvSpPr/>
-          <p:nvPr/>
-        </p:nvSpPr>
-        <p:spPr>
-          <a:xfrm>
-            <a:off x="9554146" y="6049903"/>
-            <a:ext cx="1595535" cy="317241"/>
-          </a:xfrm>
-          <a:prstGeom prst="rect">
-            <a:avLst/>
-          </a:prstGeom>
-          <a:solidFill>
-            <a:schemeClr val="accent6">
-              <a:lumMod val="20000"/>
-              <a:lumOff val="80000"/>
-            </a:schemeClr>
-          </a:solidFill>
-          <a:ln>
-            <a:solidFill>
-              <a:schemeClr val="accent2">
-                <a:lumMod val="20000"/>
-                <a:lumOff val="80000"/>
-              </a:schemeClr>
-            </a:solidFill>
-          </a:ln>
-        </p:spPr>
-        <p:style>
-          <a:lnRef idx="2">
-            <a:schemeClr val="accent1">
-              <a:shade val="15000"/>
-            </a:schemeClr>
-          </a:lnRef>
-          <a:fillRef idx="1">
-            <a:schemeClr val="accent1"/>
-          </a:fillRef>
-          <a:effectRef idx="0">
-            <a:schemeClr val="accent1"/>
-          </a:effectRef>
-          <a:fontRef idx="minor">
-            <a:schemeClr val="lt1"/>
-          </a:fontRef>
-        </p:style>
-        <p:txBody>
-          <a:bodyPr rtlCol="0" anchor="ctr"/>
-          <a:lstStyle/>
-          <a:p>
-            <a:pPr algn="ctr"/>
-            <a:r>
-              <a:rPr lang="en-US" dirty="0">
-                <a:solidFill>
-                  <a:schemeClr val="tx2"/>
-                </a:solidFill>
-              </a:rPr>
-              <a:t>Reset Position</a:t>
-            </a:r>
-          </a:p>
-        </p:txBody>
-      </p:sp>
-      <p:sp>
-        <p:nvSpPr>
-          <p:cNvPr id="20" name="Rectangle 19">
-            <a:extLst>
-              <a:ext uri="{FF2B5EF4-FFF2-40B4-BE49-F238E27FC236}">
-                <a16:creationId xmlns:a16="http://schemas.microsoft.com/office/drawing/2014/main" id="{310EA12B-9AD3-C372-4AAA-ACD138FBBC4C}"/>
-              </a:ext>
-            </a:extLst>
-          </p:cNvPr>
-          <p:cNvSpPr/>
-          <p:nvPr/>
-        </p:nvSpPr>
-        <p:spPr>
-          <a:xfrm>
-            <a:off x="9100369" y="1963707"/>
-            <a:ext cx="1595535" cy="445758"/>
-          </a:xfrm>
-          <a:prstGeom prst="rect">
-            <a:avLst/>
-          </a:prstGeom>
-          <a:solidFill>
-            <a:schemeClr val="accent6">
-              <a:lumMod val="20000"/>
-              <a:lumOff val="80000"/>
-            </a:schemeClr>
-          </a:solidFill>
-          <a:ln>
-            <a:solidFill>
-              <a:schemeClr val="accent2">
-                <a:lumMod val="20000"/>
-                <a:lumOff val="80000"/>
-              </a:schemeClr>
-            </a:solidFill>
-          </a:ln>
-        </p:spPr>
-        <p:style>
-          <a:lnRef idx="2">
-            <a:schemeClr val="accent1">
-              <a:shade val="15000"/>
-            </a:schemeClr>
-          </a:lnRef>
-          <a:fillRef idx="1">
-            <a:schemeClr val="accent1"/>
-          </a:fillRef>
-          <a:effectRef idx="0">
-            <a:schemeClr val="accent1"/>
-          </a:effectRef>
-          <a:fontRef idx="minor">
-            <a:schemeClr val="lt1"/>
-          </a:fontRef>
-        </p:style>
-        <p:txBody>
-          <a:bodyPr rtlCol="0" anchor="ctr"/>
-          <a:lstStyle/>
-          <a:p>
-            <a:pPr algn="ctr"/>
-            <a:r>
-              <a:rPr lang="en-US" dirty="0">
-                <a:solidFill>
-                  <a:schemeClr val="tx2"/>
-                </a:solidFill>
-              </a:rPr>
-              <a:t>Just Shoot</a:t>
-            </a:r>
-          </a:p>
-          <a:p>
-            <a:pPr algn="ctr"/>
-            <a:r>
-              <a:rPr lang="en-US" sz="1200" dirty="0">
-                <a:solidFill>
-                  <a:schemeClr val="tx2"/>
-                </a:solidFill>
-              </a:rPr>
-              <a:t>(back pressed)</a:t>
-            </a:r>
-            <a:endParaRPr lang="en-US" dirty="0">
-              <a:solidFill>
-                <a:schemeClr val="tx2"/>
-              </a:solidFill>
-            </a:endParaRPr>
-          </a:p>
-        </p:txBody>
-      </p:sp>
-      <p:sp>
-        <p:nvSpPr>
-          <p:cNvPr id="23" name="Rectangle 22">
-            <a:extLst>
-              <a:ext uri="{FF2B5EF4-FFF2-40B4-BE49-F238E27FC236}">
-                <a16:creationId xmlns:a16="http://schemas.microsoft.com/office/drawing/2014/main" id="{6FB3F50A-FFA8-E4EA-EA5C-F47592E5A084}"/>
-              </a:ext>
-            </a:extLst>
-          </p:cNvPr>
-          <p:cNvSpPr/>
-          <p:nvPr/>
-        </p:nvSpPr>
-        <p:spPr>
-          <a:xfrm>
-            <a:off x="2276769" y="3904199"/>
-            <a:ext cx="1776927" cy="317241"/>
-          </a:xfrm>
-          <a:prstGeom prst="rect">
-            <a:avLst/>
-          </a:prstGeom>
-          <a:solidFill>
-            <a:schemeClr val="accent6">
-              <a:lumMod val="20000"/>
-              <a:lumOff val="80000"/>
-            </a:schemeClr>
-          </a:solidFill>
-          <a:ln>
-            <a:solidFill>
-              <a:schemeClr val="accent2">
-                <a:lumMod val="20000"/>
-                <a:lumOff val="80000"/>
-              </a:schemeClr>
-            </a:solidFill>
-          </a:ln>
-        </p:spPr>
-        <p:style>
-          <a:lnRef idx="2">
-            <a:schemeClr val="accent1">
-              <a:shade val="15000"/>
-            </a:schemeClr>
-          </a:lnRef>
-          <a:fillRef idx="1">
-            <a:schemeClr val="accent1"/>
-          </a:fillRef>
-          <a:effectRef idx="0">
-            <a:schemeClr val="accent1"/>
-          </a:effectRef>
-          <a:fontRef idx="minor">
-            <a:schemeClr val="lt1"/>
-          </a:fontRef>
-        </p:style>
-        <p:txBody>
-          <a:bodyPr rtlCol="0" anchor="ctr"/>
-          <a:lstStyle/>
-          <a:p>
-            <a:pPr algn="ctr"/>
-            <a:r>
-              <a:rPr lang="en-US" dirty="0">
-                <a:solidFill>
-                  <a:schemeClr val="tx2"/>
-                </a:solidFill>
-              </a:rPr>
-              <a:t>Retract Climber</a:t>
-            </a:r>
-          </a:p>
-        </p:txBody>
-      </p:sp>
-      <p:sp>
-        <p:nvSpPr>
-          <p:cNvPr id="24" name="Rectangle 23">
-            <a:extLst>
-              <a:ext uri="{FF2B5EF4-FFF2-40B4-BE49-F238E27FC236}">
-                <a16:creationId xmlns:a16="http://schemas.microsoft.com/office/drawing/2014/main" id="{9FC38623-D4B1-E2FF-6BA6-B423FA6F1473}"/>
-              </a:ext>
-            </a:extLst>
-          </p:cNvPr>
-          <p:cNvSpPr/>
-          <p:nvPr/>
-        </p:nvSpPr>
-        <p:spPr>
-          <a:xfrm>
-            <a:off x="2276769" y="3429000"/>
-            <a:ext cx="1776927" cy="317241"/>
-          </a:xfrm>
-          <a:prstGeom prst="rect">
-            <a:avLst/>
-          </a:prstGeom>
-          <a:solidFill>
-            <a:schemeClr val="accent6">
-              <a:lumMod val="20000"/>
-              <a:lumOff val="80000"/>
-            </a:schemeClr>
-          </a:solidFill>
-          <a:ln>
-            <a:solidFill>
-              <a:schemeClr val="accent2">
-                <a:lumMod val="20000"/>
-                <a:lumOff val="80000"/>
-              </a:schemeClr>
-            </a:solidFill>
-          </a:ln>
-        </p:spPr>
-        <p:style>
-          <a:lnRef idx="2">
-            <a:schemeClr val="accent1">
-              <a:shade val="15000"/>
-            </a:schemeClr>
-          </a:lnRef>
-          <a:fillRef idx="1">
-            <a:schemeClr val="accent1"/>
-          </a:fillRef>
-          <a:effectRef idx="0">
-            <a:schemeClr val="accent1"/>
-          </a:effectRef>
-          <a:fontRef idx="minor">
-            <a:schemeClr val="lt1"/>
-          </a:fontRef>
-        </p:style>
-        <p:txBody>
-          <a:bodyPr rtlCol="0" anchor="ctr"/>
-          <a:lstStyle/>
-          <a:p>
-            <a:pPr algn="ctr"/>
-            <a:r>
-              <a:rPr lang="en-US" dirty="0">
-                <a:solidFill>
-                  <a:schemeClr val="tx2"/>
-                </a:solidFill>
-              </a:rPr>
-              <a:t>Extend Climber</a:t>
-            </a:r>
-          </a:p>
-        </p:txBody>
-      </p:sp>
-      <p:sp>
-        <p:nvSpPr>
-          <p:cNvPr id="26" name="Rectangle 25">
-            <a:extLst>
-              <a:ext uri="{FF2B5EF4-FFF2-40B4-BE49-F238E27FC236}">
-                <a16:creationId xmlns:a16="http://schemas.microsoft.com/office/drawing/2014/main" id="{6B6E82EA-1AE1-CFB3-BE12-C33072D8CBE7}"/>
-              </a:ext>
-            </a:extLst>
-          </p:cNvPr>
-          <p:cNvSpPr/>
-          <p:nvPr/>
-        </p:nvSpPr>
-        <p:spPr>
-          <a:xfrm>
-            <a:off x="2771474" y="5914229"/>
-            <a:ext cx="1595535" cy="317241"/>
-          </a:xfrm>
-          <a:prstGeom prst="rect">
-            <a:avLst/>
-          </a:prstGeom>
-          <a:solidFill>
-            <a:schemeClr val="accent6">
-              <a:lumMod val="20000"/>
-              <a:lumOff val="80000"/>
-            </a:schemeClr>
-          </a:solidFill>
-          <a:ln>
-            <a:solidFill>
-              <a:schemeClr val="accent2">
-                <a:lumMod val="20000"/>
-                <a:lumOff val="80000"/>
-              </a:schemeClr>
-            </a:solidFill>
-          </a:ln>
-        </p:spPr>
-        <p:style>
-          <a:lnRef idx="2">
-            <a:schemeClr val="accent1">
-              <a:shade val="15000"/>
-            </a:schemeClr>
-          </a:lnRef>
-          <a:fillRef idx="1">
-            <a:schemeClr val="accent1"/>
-          </a:fillRef>
-          <a:effectRef idx="0">
-            <a:schemeClr val="accent1"/>
-          </a:effectRef>
-          <a:fontRef idx="minor">
-            <a:schemeClr val="lt1"/>
-          </a:fontRef>
-        </p:style>
-        <p:txBody>
-          <a:bodyPr rtlCol="0" anchor="ctr"/>
-          <a:lstStyle/>
-          <a:p>
-            <a:pPr algn="ctr"/>
-            <a:endParaRPr lang="en-US" dirty="0">
-              <a:solidFill>
-                <a:schemeClr val="tx2"/>
-              </a:solidFill>
-            </a:endParaRPr>
-          </a:p>
-        </p:txBody>
-      </p:sp>
-      <p:sp>
-        <p:nvSpPr>
-          <p:cNvPr id="27" name="Rectangle 26">
-            <a:extLst>
-              <a:ext uri="{FF2B5EF4-FFF2-40B4-BE49-F238E27FC236}">
-                <a16:creationId xmlns:a16="http://schemas.microsoft.com/office/drawing/2014/main" id="{536CB937-8976-AE7B-7FE7-929F24F3C592}"/>
-              </a:ext>
-            </a:extLst>
-          </p:cNvPr>
-          <p:cNvSpPr/>
-          <p:nvPr/>
-        </p:nvSpPr>
-        <p:spPr>
-          <a:xfrm>
-            <a:off x="2923874" y="6066629"/>
-            <a:ext cx="1595535" cy="317241"/>
-          </a:xfrm>
-          <a:prstGeom prst="rect">
-            <a:avLst/>
-          </a:prstGeom>
-          <a:solidFill>
-            <a:schemeClr val="accent6">
-              <a:lumMod val="20000"/>
-              <a:lumOff val="80000"/>
-            </a:schemeClr>
-          </a:solidFill>
-          <a:ln>
-            <a:solidFill>
-              <a:schemeClr val="accent2">
-                <a:lumMod val="20000"/>
-                <a:lumOff val="80000"/>
-              </a:schemeClr>
-            </a:solidFill>
-          </a:ln>
-        </p:spPr>
-        <p:style>
-          <a:lnRef idx="2">
-            <a:schemeClr val="accent1">
-              <a:shade val="15000"/>
-            </a:schemeClr>
-          </a:lnRef>
-          <a:fillRef idx="1">
-            <a:schemeClr val="accent1"/>
-          </a:fillRef>
-          <a:effectRef idx="0">
-            <a:schemeClr val="accent1"/>
-          </a:effectRef>
-          <a:fontRef idx="minor">
-            <a:schemeClr val="lt1"/>
-          </a:fontRef>
-        </p:style>
-        <p:txBody>
-          <a:bodyPr rtlCol="0" anchor="ctr"/>
-          <a:lstStyle/>
-          <a:p>
-            <a:pPr algn="ctr"/>
-            <a:endParaRPr lang="en-US" dirty="0">
-              <a:solidFill>
-                <a:schemeClr val="tx2"/>
-              </a:solidFill>
-            </a:endParaRPr>
-          </a:p>
-        </p:txBody>
-      </p:sp>
-      <p:sp>
-        <p:nvSpPr>
-          <p:cNvPr id="28" name="Rectangle 27">
-            <a:extLst>
-              <a:ext uri="{FF2B5EF4-FFF2-40B4-BE49-F238E27FC236}">
-                <a16:creationId xmlns:a16="http://schemas.microsoft.com/office/drawing/2014/main" id="{2313DCAD-124D-5850-AD89-3AB6441F9862}"/>
-              </a:ext>
-            </a:extLst>
-          </p:cNvPr>
-          <p:cNvSpPr/>
-          <p:nvPr/>
-        </p:nvSpPr>
-        <p:spPr>
-          <a:xfrm>
-            <a:off x="3076274" y="6219029"/>
-            <a:ext cx="1595535" cy="317241"/>
-          </a:xfrm>
-          <a:prstGeom prst="rect">
-            <a:avLst/>
-          </a:prstGeom>
-          <a:solidFill>
-            <a:schemeClr val="accent6">
-              <a:lumMod val="20000"/>
-              <a:lumOff val="80000"/>
-            </a:schemeClr>
-          </a:solidFill>
-          <a:ln>
-            <a:solidFill>
-              <a:schemeClr val="accent2">
-                <a:lumMod val="20000"/>
-                <a:lumOff val="80000"/>
-              </a:schemeClr>
-            </a:solidFill>
-          </a:ln>
-        </p:spPr>
-        <p:style>
-          <a:lnRef idx="2">
-            <a:schemeClr val="accent1">
-              <a:shade val="15000"/>
-            </a:schemeClr>
-          </a:lnRef>
-          <a:fillRef idx="1">
-            <a:schemeClr val="accent1"/>
-          </a:fillRef>
-          <a:effectRef idx="0">
-            <a:schemeClr val="accent1"/>
-          </a:effectRef>
-          <a:fontRef idx="minor">
-            <a:schemeClr val="lt1"/>
-          </a:fontRef>
-        </p:style>
-        <p:txBody>
-          <a:bodyPr rtlCol="0" anchor="ctr"/>
-          <a:lstStyle/>
-          <a:p>
-            <a:pPr algn="ctr"/>
-            <a:endParaRPr lang="en-US" dirty="0">
-              <a:solidFill>
-                <a:schemeClr val="tx2"/>
-              </a:solidFill>
-            </a:endParaRPr>
-          </a:p>
-        </p:txBody>
-      </p:sp>
-      <p:sp>
-        <p:nvSpPr>
-          <p:cNvPr id="29" name="Rectangle 28">
-            <a:extLst>
-              <a:ext uri="{FF2B5EF4-FFF2-40B4-BE49-F238E27FC236}">
-                <a16:creationId xmlns:a16="http://schemas.microsoft.com/office/drawing/2014/main" id="{530B3026-3929-68C0-D9CA-51C0578C6396}"/>
-              </a:ext>
-            </a:extLst>
-          </p:cNvPr>
-          <p:cNvSpPr/>
-          <p:nvPr/>
-        </p:nvSpPr>
-        <p:spPr>
-          <a:xfrm>
-            <a:off x="3076274" y="5268629"/>
-            <a:ext cx="1595535" cy="490853"/>
-          </a:xfrm>
-          <a:prstGeom prst="rect">
-            <a:avLst/>
-          </a:prstGeom>
-          <a:solidFill>
-            <a:schemeClr val="accent6">
-              <a:lumMod val="20000"/>
-              <a:lumOff val="80000"/>
-            </a:schemeClr>
-          </a:solidFill>
-          <a:ln>
-            <a:solidFill>
-              <a:schemeClr val="accent2">
-                <a:lumMod val="20000"/>
-                <a:lumOff val="80000"/>
-              </a:schemeClr>
-            </a:solidFill>
-          </a:ln>
-        </p:spPr>
-        <p:style>
-          <a:lnRef idx="2">
-            <a:schemeClr val="accent1">
-              <a:shade val="15000"/>
-            </a:schemeClr>
-          </a:lnRef>
-          <a:fillRef idx="1">
-            <a:schemeClr val="accent1"/>
-          </a:fillRef>
-          <a:effectRef idx="0">
-            <a:schemeClr val="accent1"/>
-          </a:effectRef>
-          <a:fontRef idx="minor">
-            <a:schemeClr val="lt1"/>
-          </a:fontRef>
-        </p:style>
-        <p:txBody>
-          <a:bodyPr rtlCol="0" anchor="ctr"/>
-          <a:lstStyle/>
-          <a:p>
-            <a:pPr algn="ctr"/>
-            <a:r>
-              <a:rPr lang="en-US" dirty="0">
-                <a:solidFill>
-                  <a:schemeClr val="tx2"/>
-                </a:solidFill>
-              </a:rPr>
-              <a:t>Retract Intake </a:t>
-            </a:r>
-            <a:r>
-              <a:rPr lang="en-US" sz="1200" dirty="0">
-                <a:solidFill>
-                  <a:schemeClr val="tx2"/>
-                </a:solidFill>
-              </a:rPr>
-              <a:t>(up)</a:t>
-            </a:r>
-            <a:endParaRPr lang="en-US" dirty="0">
-              <a:solidFill>
-                <a:schemeClr val="tx2"/>
-              </a:solidFill>
-            </a:endParaRPr>
-          </a:p>
-        </p:txBody>
-      </p:sp>
-      <p:sp>
-        <p:nvSpPr>
-          <p:cNvPr id="37" name="TextBox 36">
-            <a:extLst>
-              <a:ext uri="{FF2B5EF4-FFF2-40B4-BE49-F238E27FC236}">
-                <a16:creationId xmlns:a16="http://schemas.microsoft.com/office/drawing/2014/main" id="{DB13644A-9285-9111-3BBE-6AB488C981FF}"/>
-              </a:ext>
-            </a:extLst>
-          </p:cNvPr>
-          <p:cNvSpPr txBox="1"/>
-          <p:nvPr/>
-        </p:nvSpPr>
-        <p:spPr>
-          <a:xfrm>
-            <a:off x="4410360" y="1516588"/>
-            <a:ext cx="977220" cy="369332"/>
-          </a:xfrm>
-          <a:prstGeom prst="rect">
-            <a:avLst/>
-          </a:prstGeom>
-          <a:noFill/>
-        </p:spPr>
-        <p:txBody>
-          <a:bodyPr wrap="square">
-            <a:spAutoFit/>
-          </a:bodyPr>
-          <a:lstStyle/>
-          <a:p>
-            <a:pPr algn="ctr"/>
-            <a:r>
-              <a:rPr lang="en-US" sz="1800" dirty="0">
-                <a:solidFill>
-                  <a:schemeClr val="accent2">
-                    <a:lumMod val="60000"/>
-                    <a:lumOff val="40000"/>
-                  </a:schemeClr>
-                </a:solidFill>
-              </a:rPr>
-              <a:t>Bumper</a:t>
-            </a:r>
-          </a:p>
-        </p:txBody>
-      </p:sp>
-      <p:sp>
-        <p:nvSpPr>
-          <p:cNvPr id="38" name="TextBox 37">
-            <a:extLst>
-              <a:ext uri="{FF2B5EF4-FFF2-40B4-BE49-F238E27FC236}">
-                <a16:creationId xmlns:a16="http://schemas.microsoft.com/office/drawing/2014/main" id="{663C2E0C-F6E9-C73C-F7F2-26D2724A3EC5}"/>
-              </a:ext>
-            </a:extLst>
-          </p:cNvPr>
-          <p:cNvSpPr txBox="1"/>
-          <p:nvPr/>
-        </p:nvSpPr>
-        <p:spPr>
-          <a:xfrm>
-            <a:off x="6879240" y="1504584"/>
-            <a:ext cx="977220" cy="369332"/>
-          </a:xfrm>
-          <a:prstGeom prst="rect">
-            <a:avLst/>
-          </a:prstGeom>
-          <a:noFill/>
-        </p:spPr>
-        <p:txBody>
-          <a:bodyPr wrap="square">
-            <a:spAutoFit/>
-          </a:bodyPr>
-          <a:lstStyle/>
-          <a:p>
-            <a:pPr algn="ctr"/>
-            <a:r>
-              <a:rPr lang="en-US" sz="1800" dirty="0">
-                <a:solidFill>
-                  <a:schemeClr val="accent2">
-                    <a:lumMod val="60000"/>
-                    <a:lumOff val="40000"/>
-                  </a:schemeClr>
-                </a:solidFill>
-              </a:rPr>
-              <a:t>Bumper</a:t>
-            </a:r>
-          </a:p>
-        </p:txBody>
-      </p:sp>
-      <p:sp>
-        <p:nvSpPr>
-          <p:cNvPr id="40" name="TextBox 39">
-            <a:extLst>
-              <a:ext uri="{FF2B5EF4-FFF2-40B4-BE49-F238E27FC236}">
-                <a16:creationId xmlns:a16="http://schemas.microsoft.com/office/drawing/2014/main" id="{5FC26886-D16D-E4C3-22DA-B6459CC232DD}"/>
-              </a:ext>
-            </a:extLst>
-          </p:cNvPr>
-          <p:cNvSpPr txBox="1"/>
-          <p:nvPr/>
-        </p:nvSpPr>
-        <p:spPr>
-          <a:xfrm>
-            <a:off x="3743261" y="1667107"/>
-            <a:ext cx="338554" cy="580800"/>
-          </a:xfrm>
-          <a:prstGeom prst="rect">
-            <a:avLst/>
-          </a:prstGeom>
-          <a:noFill/>
-        </p:spPr>
-        <p:txBody>
-          <a:bodyPr vert="vert270" wrap="none" lIns="0" tIns="0" rIns="91440" bIns="0" rtlCol="0">
-            <a:spAutoFit/>
-          </a:bodyPr>
-          <a:lstStyle/>
-          <a:p>
-            <a:pPr algn="ctr"/>
-            <a:r>
-              <a:rPr lang="en-US" sz="1600" dirty="0">
-                <a:solidFill>
-                  <a:schemeClr val="bg2"/>
-                </a:solidFill>
-              </a:rPr>
-              <a:t>Trigger</a:t>
-            </a:r>
-          </a:p>
-        </p:txBody>
-      </p:sp>
-      <p:sp>
-        <p:nvSpPr>
-          <p:cNvPr id="41" name="TextBox 40">
-            <a:extLst>
-              <a:ext uri="{FF2B5EF4-FFF2-40B4-BE49-F238E27FC236}">
-                <a16:creationId xmlns:a16="http://schemas.microsoft.com/office/drawing/2014/main" id="{4AAA1677-C84E-01A0-4838-DEC253AEDD33}"/>
-              </a:ext>
-            </a:extLst>
-          </p:cNvPr>
-          <p:cNvSpPr txBox="1"/>
-          <p:nvPr/>
-        </p:nvSpPr>
-        <p:spPr>
-          <a:xfrm>
-            <a:off x="8169225" y="1650792"/>
-            <a:ext cx="338554" cy="580800"/>
-          </a:xfrm>
-          <a:prstGeom prst="rect">
-            <a:avLst/>
-          </a:prstGeom>
-          <a:noFill/>
-        </p:spPr>
-        <p:txBody>
-          <a:bodyPr vert="vert270" wrap="none" lIns="0" tIns="0" rIns="91440" bIns="0" rtlCol="0">
-            <a:spAutoFit/>
-          </a:bodyPr>
-          <a:lstStyle/>
-          <a:p>
-            <a:pPr algn="ctr"/>
-            <a:r>
-              <a:rPr lang="en-US" sz="1600" dirty="0">
-                <a:solidFill>
-                  <a:schemeClr val="bg2"/>
-                </a:solidFill>
-              </a:rPr>
-              <a:t>Trigger</a:t>
-            </a:r>
-          </a:p>
-        </p:txBody>
-      </p:sp>
-      <p:sp>
-        <p:nvSpPr>
-          <p:cNvPr id="30" name="TextBox 29">
-            <a:extLst>
-              <a:ext uri="{FF2B5EF4-FFF2-40B4-BE49-F238E27FC236}">
-                <a16:creationId xmlns:a16="http://schemas.microsoft.com/office/drawing/2014/main" id="{4DD483E6-0944-EC88-9A25-F3839E12ED50}"/>
-              </a:ext>
-            </a:extLst>
-          </p:cNvPr>
-          <p:cNvSpPr txBox="1"/>
-          <p:nvPr/>
-        </p:nvSpPr>
-        <p:spPr>
-          <a:xfrm rot="5400000">
-            <a:off x="6410673" y="2179293"/>
-            <a:ext cx="276999" cy="306301"/>
-          </a:xfrm>
-          <a:prstGeom prst="rect">
-            <a:avLst/>
-          </a:prstGeom>
-          <a:noFill/>
-        </p:spPr>
-        <p:txBody>
-          <a:bodyPr vert="vert270" wrap="none" lIns="0" tIns="0" rIns="91440" bIns="0" rtlCol="0">
-            <a:spAutoFit/>
-          </a:bodyPr>
-          <a:lstStyle/>
-          <a:p>
-            <a:pPr algn="ctr"/>
-            <a:r>
-              <a:rPr lang="en-US" sz="1200" dirty="0">
-                <a:solidFill>
-                  <a:schemeClr val="accent2">
-                    <a:lumMod val="60000"/>
-                    <a:lumOff val="40000"/>
-                  </a:schemeClr>
-                </a:solidFill>
-              </a:rPr>
-              <a:t>start</a:t>
-            </a:r>
-          </a:p>
-        </p:txBody>
-      </p:sp>
-      <p:sp>
-        <p:nvSpPr>
-          <p:cNvPr id="31" name="TextBox 30">
-            <a:extLst>
-              <a:ext uri="{FF2B5EF4-FFF2-40B4-BE49-F238E27FC236}">
-                <a16:creationId xmlns:a16="http://schemas.microsoft.com/office/drawing/2014/main" id="{2E389938-BC74-9774-0C0E-5E96467866AF}"/>
-              </a:ext>
-            </a:extLst>
-          </p:cNvPr>
-          <p:cNvSpPr txBox="1"/>
-          <p:nvPr/>
-        </p:nvSpPr>
-        <p:spPr>
-          <a:xfrm rot="5400000">
-            <a:off x="5470425" y="2191881"/>
-            <a:ext cx="276999" cy="323808"/>
-          </a:xfrm>
-          <a:prstGeom prst="rect">
-            <a:avLst/>
-          </a:prstGeom>
-          <a:noFill/>
-        </p:spPr>
-        <p:txBody>
-          <a:bodyPr vert="vert270" wrap="none" lIns="0" tIns="0" rIns="91440" bIns="0" rtlCol="0">
-            <a:spAutoFit/>
-          </a:bodyPr>
-          <a:lstStyle/>
-          <a:p>
-            <a:pPr algn="ctr"/>
-            <a:r>
-              <a:rPr lang="en-US" sz="1200" dirty="0">
-                <a:solidFill>
-                  <a:schemeClr val="accent2">
-                    <a:lumMod val="60000"/>
-                    <a:lumOff val="40000"/>
-                  </a:schemeClr>
-                </a:solidFill>
-              </a:rPr>
-              <a:t>back</a:t>
-            </a:r>
-          </a:p>
-        </p:txBody>
-      </p:sp>
-      <p:cxnSp>
-        <p:nvCxnSpPr>
-          <p:cNvPr id="32" name="Straight Arrow Connector 31">
-            <a:extLst>
-              <a:ext uri="{FF2B5EF4-FFF2-40B4-BE49-F238E27FC236}">
-                <a16:creationId xmlns:a16="http://schemas.microsoft.com/office/drawing/2014/main" id="{B3C5C913-85F8-2C50-28A3-5D5BB59BBE80}"/>
-              </a:ext>
-            </a:extLst>
-          </p:cNvPr>
-          <p:cNvCxnSpPr>
-            <a:cxnSpLocks/>
-            <a:stCxn id="11" idx="3"/>
-            <a:endCxn id="40" idx="1"/>
-          </p:cNvCxnSpPr>
-          <p:nvPr/>
-        </p:nvCxnSpPr>
-        <p:spPr>
-          <a:xfrm flipV="1">
-            <a:off x="3076274" y="1957507"/>
-            <a:ext cx="666987" cy="613141"/>
-          </a:xfrm>
-          <a:prstGeom prst="straightConnector1">
-            <a:avLst/>
-          </a:prstGeom>
-          <a:ln>
-            <a:solidFill>
-              <a:srgbClr val="FF0000"/>
-            </a:solidFill>
-            <a:tailEnd type="triangle"/>
-          </a:ln>
-        </p:spPr>
-        <p:style>
-          <a:lnRef idx="2">
-            <a:schemeClr val="accent1"/>
-          </a:lnRef>
-          <a:fillRef idx="0">
-            <a:schemeClr val="accent1"/>
-          </a:fillRef>
-          <a:effectRef idx="1">
-            <a:schemeClr val="accent1"/>
-          </a:effectRef>
-          <a:fontRef idx="minor">
-            <a:schemeClr val="tx1"/>
-          </a:fontRef>
-        </p:style>
-      </p:cxnSp>
-      <p:cxnSp>
-        <p:nvCxnSpPr>
-          <p:cNvPr id="33" name="Straight Arrow Connector 32">
-            <a:extLst>
-              <a:ext uri="{FF2B5EF4-FFF2-40B4-BE49-F238E27FC236}">
-                <a16:creationId xmlns:a16="http://schemas.microsoft.com/office/drawing/2014/main" id="{D0DEA290-90F8-28D1-6CBD-C733FE940D32}"/>
-              </a:ext>
-            </a:extLst>
-          </p:cNvPr>
-          <p:cNvCxnSpPr>
-            <a:cxnSpLocks/>
-            <a:stCxn id="16" idx="2"/>
-            <a:endCxn id="31" idx="1"/>
-          </p:cNvCxnSpPr>
-          <p:nvPr/>
-        </p:nvCxnSpPr>
-        <p:spPr>
-          <a:xfrm flipH="1">
-            <a:off x="5608925" y="700260"/>
-            <a:ext cx="397370" cy="1515026"/>
-          </a:xfrm>
-          <a:prstGeom prst="straightConnector1">
-            <a:avLst/>
-          </a:prstGeom>
-          <a:ln>
-            <a:solidFill>
-              <a:srgbClr val="FF0000"/>
-            </a:solidFill>
-            <a:tailEnd type="triangle"/>
-          </a:ln>
-        </p:spPr>
-        <p:style>
-          <a:lnRef idx="2">
-            <a:schemeClr val="accent1"/>
-          </a:lnRef>
-          <a:fillRef idx="0">
-            <a:schemeClr val="accent1"/>
-          </a:fillRef>
-          <a:effectRef idx="1">
-            <a:schemeClr val="accent1"/>
-          </a:effectRef>
-          <a:fontRef idx="minor">
-            <a:schemeClr val="tx1"/>
-          </a:fontRef>
-        </p:style>
-      </p:cxnSp>
-      <p:cxnSp>
-        <p:nvCxnSpPr>
-          <p:cNvPr id="34" name="Straight Arrow Connector 33">
-            <a:extLst>
-              <a:ext uri="{FF2B5EF4-FFF2-40B4-BE49-F238E27FC236}">
-                <a16:creationId xmlns:a16="http://schemas.microsoft.com/office/drawing/2014/main" id="{D4880E23-506E-F8A1-178D-DD14868625AA}"/>
-              </a:ext>
-            </a:extLst>
-          </p:cNvPr>
-          <p:cNvCxnSpPr/>
-          <p:nvPr/>
-        </p:nvCxnSpPr>
-        <p:spPr>
-          <a:xfrm>
-            <a:off x="10021583" y="4194873"/>
-            <a:ext cx="400178" cy="829107"/>
-          </a:xfrm>
-          <a:prstGeom prst="straightConnector1">
-            <a:avLst/>
-          </a:prstGeom>
-          <a:ln>
-            <a:solidFill>
-              <a:srgbClr val="FF0000"/>
-            </a:solidFill>
-            <a:tailEnd type="triangle"/>
-          </a:ln>
-        </p:spPr>
-        <p:style>
-          <a:lnRef idx="2">
-            <a:schemeClr val="accent1"/>
-          </a:lnRef>
-          <a:fillRef idx="0">
-            <a:schemeClr val="accent1"/>
-          </a:fillRef>
-          <a:effectRef idx="1">
-            <a:schemeClr val="accent1"/>
-          </a:effectRef>
-          <a:fontRef idx="minor">
-            <a:schemeClr val="tx1"/>
-          </a:fontRef>
-        </p:style>
-      </p:cxnSp>
-      <p:cxnSp>
-        <p:nvCxnSpPr>
-          <p:cNvPr id="35" name="Straight Arrow Connector 34">
-            <a:extLst>
-              <a:ext uri="{FF2B5EF4-FFF2-40B4-BE49-F238E27FC236}">
-                <a16:creationId xmlns:a16="http://schemas.microsoft.com/office/drawing/2014/main" id="{1CBE9FD5-C548-4E8D-1796-AB52E919A60F}"/>
-              </a:ext>
-            </a:extLst>
-          </p:cNvPr>
-          <p:cNvCxnSpPr/>
-          <p:nvPr/>
-        </p:nvCxnSpPr>
-        <p:spPr>
-          <a:xfrm>
-            <a:off x="10173983" y="4347273"/>
-            <a:ext cx="400178" cy="829107"/>
-          </a:xfrm>
-          <a:prstGeom prst="straightConnector1">
-            <a:avLst/>
-          </a:prstGeom>
-          <a:ln>
-            <a:solidFill>
-              <a:srgbClr val="FF0000"/>
-            </a:solidFill>
-            <a:tailEnd type="triangle"/>
-          </a:ln>
-        </p:spPr>
-        <p:style>
-          <a:lnRef idx="2">
-            <a:schemeClr val="accent1"/>
-          </a:lnRef>
-          <a:fillRef idx="0">
-            <a:schemeClr val="accent1"/>
-          </a:fillRef>
-          <a:effectRef idx="1">
-            <a:schemeClr val="accent1"/>
-          </a:effectRef>
-          <a:fontRef idx="minor">
-            <a:schemeClr val="tx1"/>
-          </a:fontRef>
-        </p:style>
-      </p:cxnSp>
-      <p:cxnSp>
-        <p:nvCxnSpPr>
-          <p:cNvPr id="36" name="Straight Arrow Connector 35">
-            <a:extLst>
-              <a:ext uri="{FF2B5EF4-FFF2-40B4-BE49-F238E27FC236}">
-                <a16:creationId xmlns:a16="http://schemas.microsoft.com/office/drawing/2014/main" id="{9A5A32E0-CA1D-F4D9-E93F-E30902460FBC}"/>
-              </a:ext>
-            </a:extLst>
-          </p:cNvPr>
-          <p:cNvCxnSpPr/>
-          <p:nvPr/>
-        </p:nvCxnSpPr>
-        <p:spPr>
-          <a:xfrm>
-            <a:off x="10326383" y="4499673"/>
-            <a:ext cx="400178" cy="829107"/>
-          </a:xfrm>
-          <a:prstGeom prst="straightConnector1">
-            <a:avLst/>
-          </a:prstGeom>
-          <a:ln>
-            <a:solidFill>
-              <a:srgbClr val="FF0000"/>
-            </a:solidFill>
-            <a:tailEnd type="triangle"/>
-          </a:ln>
-        </p:spPr>
-        <p:style>
-          <a:lnRef idx="2">
-            <a:schemeClr val="accent1"/>
-          </a:lnRef>
-          <a:fillRef idx="0">
-            <a:schemeClr val="accent1"/>
-          </a:fillRef>
-          <a:effectRef idx="1">
-            <a:schemeClr val="accent1"/>
-          </a:effectRef>
-          <a:fontRef idx="minor">
-            <a:schemeClr val="tx1"/>
-          </a:fontRef>
-        </p:style>
-      </p:cxnSp>
-      <p:cxnSp>
-        <p:nvCxnSpPr>
-          <p:cNvPr id="39" name="Straight Arrow Connector 38">
-            <a:extLst>
-              <a:ext uri="{FF2B5EF4-FFF2-40B4-BE49-F238E27FC236}">
-                <a16:creationId xmlns:a16="http://schemas.microsoft.com/office/drawing/2014/main" id="{7CC5CA1E-2771-5D66-2E70-B26BC853E70E}"/>
-              </a:ext>
-            </a:extLst>
-          </p:cNvPr>
-          <p:cNvCxnSpPr>
-            <a:cxnSpLocks/>
-            <a:stCxn id="24" idx="3"/>
-          </p:cNvCxnSpPr>
-          <p:nvPr/>
-        </p:nvCxnSpPr>
-        <p:spPr>
-          <a:xfrm flipV="1">
-            <a:off x="4053696" y="3074498"/>
-            <a:ext cx="1326482" cy="513123"/>
-          </a:xfrm>
-          <a:prstGeom prst="straightConnector1">
-            <a:avLst/>
-          </a:prstGeom>
-          <a:ln>
-            <a:solidFill>
-              <a:srgbClr val="FF0000"/>
-            </a:solidFill>
-            <a:tailEnd type="triangle"/>
-          </a:ln>
-        </p:spPr>
-        <p:style>
-          <a:lnRef idx="2">
-            <a:schemeClr val="accent1"/>
-          </a:lnRef>
-          <a:fillRef idx="0">
-            <a:schemeClr val="accent1"/>
-          </a:fillRef>
-          <a:effectRef idx="1">
-            <a:schemeClr val="accent1"/>
-          </a:effectRef>
-          <a:fontRef idx="minor">
-            <a:schemeClr val="tx1"/>
-          </a:fontRef>
-        </p:style>
-      </p:cxnSp>
-      <p:cxnSp>
-        <p:nvCxnSpPr>
-          <p:cNvPr id="42" name="Straight Arrow Connector 41">
-            <a:extLst>
-              <a:ext uri="{FF2B5EF4-FFF2-40B4-BE49-F238E27FC236}">
-                <a16:creationId xmlns:a16="http://schemas.microsoft.com/office/drawing/2014/main" id="{C523899B-4D9D-5339-9C5E-BFA19B705426}"/>
-              </a:ext>
-            </a:extLst>
-          </p:cNvPr>
-          <p:cNvCxnSpPr>
-            <a:cxnSpLocks/>
-            <a:stCxn id="23" idx="3"/>
-          </p:cNvCxnSpPr>
-          <p:nvPr/>
-        </p:nvCxnSpPr>
-        <p:spPr>
-          <a:xfrm flipV="1">
-            <a:off x="4053696" y="3604556"/>
-            <a:ext cx="1333884" cy="458264"/>
-          </a:xfrm>
-          <a:prstGeom prst="straightConnector1">
-            <a:avLst/>
-          </a:prstGeom>
-          <a:ln>
-            <a:solidFill>
-              <a:srgbClr val="FF0000"/>
-            </a:solidFill>
-            <a:tailEnd type="triangle"/>
-          </a:ln>
-        </p:spPr>
-        <p:style>
-          <a:lnRef idx="2">
-            <a:schemeClr val="accent1"/>
-          </a:lnRef>
-          <a:fillRef idx="0">
-            <a:schemeClr val="accent1"/>
-          </a:fillRef>
-          <a:effectRef idx="1">
-            <a:schemeClr val="accent1"/>
-          </a:effectRef>
-          <a:fontRef idx="minor">
-            <a:schemeClr val="tx1"/>
-          </a:fontRef>
-        </p:style>
-      </p:cxnSp>
-      <p:cxnSp>
-        <p:nvCxnSpPr>
-          <p:cNvPr id="43" name="Straight Arrow Connector 42">
-            <a:extLst>
-              <a:ext uri="{FF2B5EF4-FFF2-40B4-BE49-F238E27FC236}">
-                <a16:creationId xmlns:a16="http://schemas.microsoft.com/office/drawing/2014/main" id="{8BB9347A-1448-9C36-E156-00C8C555592D}"/>
-              </a:ext>
-            </a:extLst>
-          </p:cNvPr>
-          <p:cNvCxnSpPr>
-            <a:cxnSpLocks/>
-            <a:stCxn id="17" idx="3"/>
-            <a:endCxn id="40" idx="1"/>
-          </p:cNvCxnSpPr>
-          <p:nvPr/>
-        </p:nvCxnSpPr>
-        <p:spPr>
-          <a:xfrm>
-            <a:off x="3045288" y="1771531"/>
-            <a:ext cx="697973" cy="185976"/>
-          </a:xfrm>
-          <a:prstGeom prst="straightConnector1">
-            <a:avLst/>
-          </a:prstGeom>
-          <a:ln>
-            <a:solidFill>
-              <a:srgbClr val="FF0000"/>
-            </a:solidFill>
-            <a:tailEnd type="triangle"/>
-          </a:ln>
-        </p:spPr>
-        <p:style>
-          <a:lnRef idx="2">
-            <a:schemeClr val="accent1"/>
-          </a:lnRef>
-          <a:fillRef idx="0">
-            <a:schemeClr val="accent1"/>
-          </a:fillRef>
-          <a:effectRef idx="1">
-            <a:schemeClr val="accent1"/>
-          </a:effectRef>
-          <a:fontRef idx="minor">
-            <a:schemeClr val="tx1"/>
-          </a:fontRef>
-        </p:style>
-      </p:cxnSp>
-      <p:cxnSp>
-        <p:nvCxnSpPr>
-          <p:cNvPr id="44" name="Straight Arrow Connector 43">
-            <a:extLst>
-              <a:ext uri="{FF2B5EF4-FFF2-40B4-BE49-F238E27FC236}">
-                <a16:creationId xmlns:a16="http://schemas.microsoft.com/office/drawing/2014/main" id="{73E7EA0A-B3C2-81CC-41E8-496E73B19E76}"/>
-              </a:ext>
-            </a:extLst>
-          </p:cNvPr>
-          <p:cNvCxnSpPr>
-            <a:cxnSpLocks/>
-            <a:stCxn id="29" idx="0"/>
-          </p:cNvCxnSpPr>
-          <p:nvPr/>
-        </p:nvCxnSpPr>
-        <p:spPr>
-          <a:xfrm flipV="1">
-            <a:off x="3874042" y="3350062"/>
-            <a:ext cx="1303164" cy="1918567"/>
-          </a:xfrm>
-          <a:prstGeom prst="straightConnector1">
-            <a:avLst/>
-          </a:prstGeom>
-          <a:ln>
-            <a:solidFill>
-              <a:srgbClr val="FF0000"/>
-            </a:solidFill>
-            <a:tailEnd type="triangle"/>
-          </a:ln>
-        </p:spPr>
-        <p:style>
-          <a:lnRef idx="2">
-            <a:schemeClr val="accent1"/>
-          </a:lnRef>
-          <a:fillRef idx="0">
-            <a:schemeClr val="accent1"/>
-          </a:fillRef>
-          <a:effectRef idx="1">
-            <a:schemeClr val="accent1"/>
-          </a:effectRef>
-          <a:fontRef idx="minor">
-            <a:schemeClr val="tx1"/>
-          </a:fontRef>
-        </p:style>
-      </p:cxnSp>
-      <p:cxnSp>
-        <p:nvCxnSpPr>
-          <p:cNvPr id="45" name="Straight Arrow Connector 44">
-            <a:extLst>
-              <a:ext uri="{FF2B5EF4-FFF2-40B4-BE49-F238E27FC236}">
-                <a16:creationId xmlns:a16="http://schemas.microsoft.com/office/drawing/2014/main" id="{8DDF0C2D-32E3-CA34-48C3-798CBE854D40}"/>
-              </a:ext>
-            </a:extLst>
-          </p:cNvPr>
-          <p:cNvCxnSpPr>
-            <a:cxnSpLocks/>
-            <a:stCxn id="49" idx="0"/>
-          </p:cNvCxnSpPr>
-          <p:nvPr/>
-        </p:nvCxnSpPr>
-        <p:spPr>
-          <a:xfrm flipH="1" flipV="1">
-            <a:off x="5696657" y="3350062"/>
-            <a:ext cx="6847" cy="1957340"/>
-          </a:xfrm>
-          <a:prstGeom prst="straightConnector1">
-            <a:avLst/>
-          </a:prstGeom>
-          <a:ln>
-            <a:solidFill>
-              <a:srgbClr val="FF0000"/>
-            </a:solidFill>
-            <a:tailEnd type="triangle"/>
-          </a:ln>
-        </p:spPr>
-        <p:style>
-          <a:lnRef idx="2">
-            <a:schemeClr val="accent1"/>
-          </a:lnRef>
-          <a:fillRef idx="0">
-            <a:schemeClr val="accent1"/>
-          </a:fillRef>
-          <a:effectRef idx="1">
-            <a:schemeClr val="accent1"/>
-          </a:effectRef>
-          <a:fontRef idx="minor">
-            <a:schemeClr val="tx1"/>
-          </a:fontRef>
-        </p:style>
-      </p:cxnSp>
-      <p:cxnSp>
-        <p:nvCxnSpPr>
-          <p:cNvPr id="46" name="Straight Arrow Connector 45">
-            <a:extLst>
-              <a:ext uri="{FF2B5EF4-FFF2-40B4-BE49-F238E27FC236}">
-                <a16:creationId xmlns:a16="http://schemas.microsoft.com/office/drawing/2014/main" id="{B2325063-E19B-E3AD-067B-B0DBB5BA31A5}"/>
-              </a:ext>
-            </a:extLst>
-          </p:cNvPr>
-          <p:cNvCxnSpPr>
-            <a:cxnSpLocks/>
-            <a:stCxn id="14" idx="1"/>
-          </p:cNvCxnSpPr>
-          <p:nvPr/>
-        </p:nvCxnSpPr>
-        <p:spPr>
-          <a:xfrm flipH="1" flipV="1">
-            <a:off x="7482254" y="2969062"/>
-            <a:ext cx="1648772" cy="539621"/>
-          </a:xfrm>
-          <a:prstGeom prst="straightConnector1">
-            <a:avLst/>
-          </a:prstGeom>
-          <a:ln>
-            <a:solidFill>
-              <a:srgbClr val="FF0000"/>
-            </a:solidFill>
-            <a:tailEnd type="triangle"/>
-          </a:ln>
-        </p:spPr>
-        <p:style>
-          <a:lnRef idx="2">
-            <a:schemeClr val="accent1"/>
-          </a:lnRef>
-          <a:fillRef idx="0">
-            <a:schemeClr val="accent1"/>
-          </a:fillRef>
-          <a:effectRef idx="1">
-            <a:schemeClr val="accent1"/>
-          </a:effectRef>
-          <a:fontRef idx="minor">
-            <a:schemeClr val="tx1"/>
-          </a:fontRef>
-        </p:style>
-      </p:cxnSp>
-      <p:sp>
-        <p:nvSpPr>
-          <p:cNvPr id="49" name="Rectangle 48">
-            <a:extLst>
-              <a:ext uri="{FF2B5EF4-FFF2-40B4-BE49-F238E27FC236}">
-                <a16:creationId xmlns:a16="http://schemas.microsoft.com/office/drawing/2014/main" id="{0E13D29F-7527-67DC-910F-7C75EBB88EAA}"/>
-              </a:ext>
-            </a:extLst>
-          </p:cNvPr>
-          <p:cNvSpPr/>
-          <p:nvPr/>
-        </p:nvSpPr>
-        <p:spPr>
-          <a:xfrm>
-            <a:off x="4905736" y="5307402"/>
-            <a:ext cx="1595535" cy="471859"/>
-          </a:xfrm>
-          <a:prstGeom prst="rect">
-            <a:avLst/>
-          </a:prstGeom>
-          <a:solidFill>
-            <a:schemeClr val="accent6">
-              <a:lumMod val="20000"/>
-              <a:lumOff val="80000"/>
-            </a:schemeClr>
-          </a:solidFill>
-          <a:ln>
-            <a:solidFill>
-              <a:schemeClr val="accent2">
-                <a:lumMod val="20000"/>
-                <a:lumOff val="80000"/>
-              </a:schemeClr>
-            </a:solidFill>
-          </a:ln>
-        </p:spPr>
-        <p:style>
-          <a:lnRef idx="2">
-            <a:schemeClr val="accent1">
-              <a:shade val="15000"/>
-            </a:schemeClr>
-          </a:lnRef>
-          <a:fillRef idx="1">
-            <a:schemeClr val="accent1"/>
-          </a:fillRef>
-          <a:effectRef idx="0">
-            <a:schemeClr val="accent1"/>
-          </a:effectRef>
-          <a:fontRef idx="minor">
-            <a:schemeClr val="lt1"/>
-          </a:fontRef>
-        </p:style>
-        <p:txBody>
-          <a:bodyPr rtlCol="0" anchor="ctr"/>
-          <a:lstStyle/>
-          <a:p>
-            <a:pPr algn="ctr"/>
-            <a:r>
-              <a:rPr lang="en-US" dirty="0">
-                <a:solidFill>
-                  <a:schemeClr val="tx2"/>
-                </a:solidFill>
-              </a:rPr>
-              <a:t>Deploy Intake </a:t>
+              <a:t>Tweak Intake </a:t>
             </a:r>
             <a:r>
               <a:rPr lang="en-US" sz="1200" dirty="0">
@@ -7914,310 +8595,12 @@
           </a:p>
         </p:txBody>
       </p:sp>
-      <p:cxnSp>
-        <p:nvCxnSpPr>
-          <p:cNvPr id="57" name="Straight Arrow Connector 56">
-            <a:extLst>
-              <a:ext uri="{FF2B5EF4-FFF2-40B4-BE49-F238E27FC236}">
-                <a16:creationId xmlns:a16="http://schemas.microsoft.com/office/drawing/2014/main" id="{47B6922E-B551-616F-95A0-C704B3DA611B}"/>
-              </a:ext>
-            </a:extLst>
-          </p:cNvPr>
-          <p:cNvCxnSpPr/>
-          <p:nvPr/>
-        </p:nvCxnSpPr>
-        <p:spPr>
-          <a:xfrm>
-            <a:off x="10881133" y="3859790"/>
-            <a:ext cx="400178" cy="829107"/>
-          </a:xfrm>
-          <a:prstGeom prst="straightConnector1">
-            <a:avLst/>
-          </a:prstGeom>
-          <a:ln>
-            <a:solidFill>
-              <a:srgbClr val="FF0000"/>
-            </a:solidFill>
-            <a:tailEnd type="triangle"/>
-          </a:ln>
-        </p:spPr>
-        <p:style>
-          <a:lnRef idx="2">
-            <a:schemeClr val="accent1"/>
-          </a:lnRef>
-          <a:fillRef idx="0">
-            <a:schemeClr val="accent1"/>
-          </a:fillRef>
-          <a:effectRef idx="1">
-            <a:schemeClr val="accent1"/>
-          </a:effectRef>
-          <a:fontRef idx="minor">
-            <a:schemeClr val="tx1"/>
-          </a:fontRef>
-        </p:style>
-      </p:cxnSp>
-      <p:cxnSp>
-        <p:nvCxnSpPr>
-          <p:cNvPr id="58" name="Straight Arrow Connector 57">
-            <a:extLst>
-              <a:ext uri="{FF2B5EF4-FFF2-40B4-BE49-F238E27FC236}">
-                <a16:creationId xmlns:a16="http://schemas.microsoft.com/office/drawing/2014/main" id="{9D2BFB52-60A8-3EDA-BAB7-FAF1E5BB88C4}"/>
-              </a:ext>
-            </a:extLst>
-          </p:cNvPr>
-          <p:cNvCxnSpPr/>
-          <p:nvPr/>
-        </p:nvCxnSpPr>
-        <p:spPr>
-          <a:xfrm>
-            <a:off x="11033533" y="4012190"/>
-            <a:ext cx="400178" cy="829107"/>
-          </a:xfrm>
-          <a:prstGeom prst="straightConnector1">
-            <a:avLst/>
-          </a:prstGeom>
-          <a:ln>
-            <a:solidFill>
-              <a:srgbClr val="FF0000"/>
-            </a:solidFill>
-            <a:tailEnd type="triangle"/>
-          </a:ln>
-        </p:spPr>
-        <p:style>
-          <a:lnRef idx="2">
-            <a:schemeClr val="accent1"/>
-          </a:lnRef>
-          <a:fillRef idx="0">
-            <a:schemeClr val="accent1"/>
-          </a:fillRef>
-          <a:effectRef idx="1">
-            <a:schemeClr val="accent1"/>
-          </a:effectRef>
-          <a:fontRef idx="minor">
-            <a:schemeClr val="tx1"/>
-          </a:fontRef>
-        </p:style>
-      </p:cxnSp>
-      <p:cxnSp>
-        <p:nvCxnSpPr>
-          <p:cNvPr id="59" name="Straight Arrow Connector 58">
-            <a:extLst>
-              <a:ext uri="{FF2B5EF4-FFF2-40B4-BE49-F238E27FC236}">
-                <a16:creationId xmlns:a16="http://schemas.microsoft.com/office/drawing/2014/main" id="{02DB378A-D1BC-64C7-3E13-6875826B9912}"/>
-              </a:ext>
-            </a:extLst>
-          </p:cNvPr>
-          <p:cNvCxnSpPr/>
-          <p:nvPr/>
-        </p:nvCxnSpPr>
-        <p:spPr>
-          <a:xfrm>
-            <a:off x="11185933" y="4164590"/>
-            <a:ext cx="400178" cy="829107"/>
-          </a:xfrm>
-          <a:prstGeom prst="straightConnector1">
-            <a:avLst/>
-          </a:prstGeom>
-          <a:ln>
-            <a:solidFill>
-              <a:srgbClr val="FF0000"/>
-            </a:solidFill>
-            <a:tailEnd type="triangle"/>
-          </a:ln>
-        </p:spPr>
-        <p:style>
-          <a:lnRef idx="2">
-            <a:schemeClr val="accent1"/>
-          </a:lnRef>
-          <a:fillRef idx="0">
-            <a:schemeClr val="accent1"/>
-          </a:fillRef>
-          <a:effectRef idx="1">
-            <a:schemeClr val="accent1"/>
-          </a:effectRef>
-          <a:fontRef idx="minor">
-            <a:schemeClr val="tx1"/>
-          </a:fontRef>
-        </p:style>
-      </p:cxnSp>
-      <p:cxnSp>
-        <p:nvCxnSpPr>
-          <p:cNvPr id="61" name="Straight Arrow Connector 60">
-            <a:extLst>
-              <a:ext uri="{FF2B5EF4-FFF2-40B4-BE49-F238E27FC236}">
-                <a16:creationId xmlns:a16="http://schemas.microsoft.com/office/drawing/2014/main" id="{A40DC03C-2D5E-A001-64E3-E19D2B3E612C}"/>
-              </a:ext>
-            </a:extLst>
-          </p:cNvPr>
-          <p:cNvCxnSpPr>
-            <a:cxnSpLocks/>
-            <a:stCxn id="13" idx="1"/>
-            <a:endCxn id="41" idx="3"/>
-          </p:cNvCxnSpPr>
-          <p:nvPr/>
-        </p:nvCxnSpPr>
-        <p:spPr>
-          <a:xfrm flipH="1">
-            <a:off x="8507779" y="1623952"/>
-            <a:ext cx="563636" cy="317240"/>
-          </a:xfrm>
-          <a:prstGeom prst="straightConnector1">
-            <a:avLst/>
-          </a:prstGeom>
-          <a:ln>
-            <a:solidFill>
-              <a:srgbClr val="FF0000"/>
-            </a:solidFill>
-            <a:tailEnd type="triangle"/>
-          </a:ln>
-        </p:spPr>
-        <p:style>
-          <a:lnRef idx="2">
-            <a:schemeClr val="accent1"/>
-          </a:lnRef>
-          <a:fillRef idx="0">
-            <a:schemeClr val="accent1"/>
-          </a:fillRef>
-          <a:effectRef idx="1">
-            <a:schemeClr val="accent1"/>
-          </a:effectRef>
-          <a:fontRef idx="minor">
-            <a:schemeClr val="tx1"/>
-          </a:fontRef>
-        </p:style>
-      </p:cxnSp>
-      <p:cxnSp>
-        <p:nvCxnSpPr>
-          <p:cNvPr id="62" name="Straight Arrow Connector 61">
-            <a:extLst>
-              <a:ext uri="{FF2B5EF4-FFF2-40B4-BE49-F238E27FC236}">
-                <a16:creationId xmlns:a16="http://schemas.microsoft.com/office/drawing/2014/main" id="{46CC430F-1C96-F7AF-802B-18DA56C6B849}"/>
-              </a:ext>
-            </a:extLst>
-          </p:cNvPr>
-          <p:cNvCxnSpPr/>
-          <p:nvPr/>
-        </p:nvCxnSpPr>
-        <p:spPr>
-          <a:xfrm>
-            <a:off x="10734261" y="4154321"/>
-            <a:ext cx="400178" cy="829107"/>
-          </a:xfrm>
-          <a:prstGeom prst="straightConnector1">
-            <a:avLst/>
-          </a:prstGeom>
-          <a:ln>
-            <a:solidFill>
-              <a:srgbClr val="FF0000"/>
-            </a:solidFill>
-            <a:tailEnd type="triangle"/>
-          </a:ln>
-        </p:spPr>
-        <p:style>
-          <a:lnRef idx="2">
-            <a:schemeClr val="accent1"/>
-          </a:lnRef>
-          <a:fillRef idx="0">
-            <a:schemeClr val="accent1"/>
-          </a:fillRef>
-          <a:effectRef idx="1">
-            <a:schemeClr val="accent1"/>
-          </a:effectRef>
-          <a:fontRef idx="minor">
-            <a:schemeClr val="tx1"/>
-          </a:fontRef>
-        </p:style>
-      </p:cxnSp>
-      <p:cxnSp>
-        <p:nvCxnSpPr>
-          <p:cNvPr id="63" name="Straight Arrow Connector 62">
-            <a:extLst>
-              <a:ext uri="{FF2B5EF4-FFF2-40B4-BE49-F238E27FC236}">
-                <a16:creationId xmlns:a16="http://schemas.microsoft.com/office/drawing/2014/main" id="{1397F8D8-E9D4-512A-2BA5-F56ACE47DAC8}"/>
-              </a:ext>
-            </a:extLst>
-          </p:cNvPr>
-          <p:cNvCxnSpPr/>
-          <p:nvPr/>
-        </p:nvCxnSpPr>
-        <p:spPr>
-          <a:xfrm>
-            <a:off x="10595539" y="4529394"/>
-            <a:ext cx="400178" cy="829107"/>
-          </a:xfrm>
-          <a:prstGeom prst="straightConnector1">
-            <a:avLst/>
-          </a:prstGeom>
-          <a:ln>
-            <a:solidFill>
-              <a:srgbClr val="FF0000"/>
-            </a:solidFill>
-            <a:tailEnd type="triangle"/>
-          </a:ln>
-        </p:spPr>
-        <p:style>
-          <a:lnRef idx="2">
-            <a:schemeClr val="accent1"/>
-          </a:lnRef>
-          <a:fillRef idx="0">
-            <a:schemeClr val="accent1"/>
-          </a:fillRef>
-          <a:effectRef idx="1">
-            <a:schemeClr val="accent1"/>
-          </a:effectRef>
-          <a:fontRef idx="minor">
-            <a:schemeClr val="tx1"/>
-          </a:fontRef>
-        </p:style>
-      </p:cxnSp>
-      <p:cxnSp>
-        <p:nvCxnSpPr>
-          <p:cNvPr id="64" name="Straight Arrow Connector 63">
-            <a:extLst>
-              <a:ext uri="{FF2B5EF4-FFF2-40B4-BE49-F238E27FC236}">
-                <a16:creationId xmlns:a16="http://schemas.microsoft.com/office/drawing/2014/main" id="{7C20C0ED-A4F3-F9CE-CA48-769B7B374086}"/>
-              </a:ext>
-            </a:extLst>
-          </p:cNvPr>
-          <p:cNvCxnSpPr/>
-          <p:nvPr/>
-        </p:nvCxnSpPr>
-        <p:spPr>
-          <a:xfrm>
-            <a:off x="11125784" y="4650568"/>
-            <a:ext cx="400178" cy="829107"/>
-          </a:xfrm>
-          <a:prstGeom prst="straightConnector1">
-            <a:avLst/>
-          </a:prstGeom>
-          <a:ln>
-            <a:solidFill>
-              <a:srgbClr val="FF0000"/>
-            </a:solidFill>
-            <a:tailEnd type="triangle"/>
-          </a:ln>
-        </p:spPr>
-        <p:style>
-          <a:lnRef idx="2">
-            <a:schemeClr val="accent1"/>
-          </a:lnRef>
-          <a:fillRef idx="0">
-            <a:schemeClr val="accent1"/>
-          </a:fillRef>
-          <a:effectRef idx="1">
-            <a:schemeClr val="accent1"/>
-          </a:effectRef>
-          <a:fontRef idx="minor">
-            <a:schemeClr val="tx1"/>
-          </a:fontRef>
-        </p:style>
-      </p:cxnSp>
-      <p:sp>
-        <p:nvSpPr>
-          <p:cNvPr id="86" name="TextBox 85">
-            <a:extLst>
-              <a:ext uri="{FF2B5EF4-FFF2-40B4-BE49-F238E27FC236}">
-                <a16:creationId xmlns:a16="http://schemas.microsoft.com/office/drawing/2014/main" id="{64FF40F8-86DB-E873-9B59-C8FF4F75FB8F}"/>
+      <p:sp>
+        <p:nvSpPr>
+          <p:cNvPr id="65" name="TextBox 64">
+            <a:extLst>
+              <a:ext uri="{FF2B5EF4-FFF2-40B4-BE49-F238E27FC236}">
+                <a16:creationId xmlns:a16="http://schemas.microsoft.com/office/drawing/2014/main" id="{797F1A53-2FCD-6A1A-A80C-D18C3770D3AF}"/>
               </a:ext>
             </a:extLst>
           </p:cNvPr>
@@ -8226,8 +8609,8 @@
         </p:nvSpPr>
         <p:spPr>
           <a:xfrm>
-            <a:off x="10764045" y="1040863"/>
-            <a:ext cx="1238289" cy="769441"/>
+            <a:off x="9236558" y="159659"/>
+            <a:ext cx="1238289" cy="600164"/>
           </a:xfrm>
           <a:prstGeom prst="rect">
             <a:avLst/>
@@ -8242,17 +8625,17 @@
           <a:p>
             <a:r>
               <a:rPr lang="en-US" sz="1100" dirty="0"/>
-              <a:t>Goto a good location, aim, engage brake, and shoot all fuel</a:t>
-            </a:r>
-          </a:p>
-        </p:txBody>
-      </p:sp>
-      <p:sp>
-        <p:nvSpPr>
-          <p:cNvPr id="93" name="TextBox 92">
-            <a:extLst>
-              <a:ext uri="{FF2B5EF4-FFF2-40B4-BE49-F238E27FC236}">
-                <a16:creationId xmlns:a16="http://schemas.microsoft.com/office/drawing/2014/main" id="{EA9B908C-C2A5-4AFB-330F-1619EF2A4E93}"/>
+              <a:t>Both of these also operates indexer</a:t>
+            </a:r>
+          </a:p>
+        </p:txBody>
+      </p:sp>
+      <p:sp>
+        <p:nvSpPr>
+          <p:cNvPr id="66" name="TextBox 65">
+            <a:extLst>
+              <a:ext uri="{FF2B5EF4-FFF2-40B4-BE49-F238E27FC236}">
+                <a16:creationId xmlns:a16="http://schemas.microsoft.com/office/drawing/2014/main" id="{6A7EDDBC-7009-31DA-6F1C-6DA065FD969C}"/>
               </a:ext>
             </a:extLst>
           </p:cNvPr>
@@ -8261,8 +8644,8 @@
         </p:nvSpPr>
         <p:spPr>
           <a:xfrm>
-            <a:off x="10745448" y="1886504"/>
-            <a:ext cx="1469585" cy="600164"/>
+            <a:off x="271962" y="2409465"/>
+            <a:ext cx="847649" cy="938719"/>
           </a:xfrm>
           <a:prstGeom prst="rect">
             <a:avLst/>
@@ -8275,9 +8658,10 @@
           </a:bodyPr>
           <a:lstStyle/>
           <a:p>
+            <a:pPr algn="r"/>
             <a:r>
               <a:rPr lang="en-US" sz="1100" dirty="0"/>
-              <a:t>Maintains aim and shoot all fuel. Can be moving…</a:t>
+              <a:t>Empty Fuel also operates indexer in reverse</a:t>
             </a:r>
           </a:p>
         </p:txBody>

--- a/docs/Controller Mappings & Paths.pptx
+++ b/docs/Controller Mappings & Paths.pptx
@@ -407,7 +407,7 @@
           <a:p>
             <a:fld id="{B6000E93-69C7-4C90-931E-A5484B820028}" type="datetimeFigureOut">
               <a:rPr lang="en-US" smtClean="0"/>
-              <a:t>3/26/2026</a:t>
+              <a:t>3/29/2026</a:t>
             </a:fld>
             <a:endParaRPr lang="en-US"/>
           </a:p>
@@ -605,7 +605,7 @@
           <a:p>
             <a:fld id="{B6000E93-69C7-4C90-931E-A5484B820028}" type="datetimeFigureOut">
               <a:rPr lang="en-US" smtClean="0"/>
-              <a:t>3/26/2026</a:t>
+              <a:t>3/29/2026</a:t>
             </a:fld>
             <a:endParaRPr lang="en-US"/>
           </a:p>
@@ -813,7 +813,7 @@
           <a:p>
             <a:fld id="{B6000E93-69C7-4C90-931E-A5484B820028}" type="datetimeFigureOut">
               <a:rPr lang="en-US" smtClean="0"/>
-              <a:t>3/26/2026</a:t>
+              <a:t>3/29/2026</a:t>
             </a:fld>
             <a:endParaRPr lang="en-US"/>
           </a:p>
@@ -1011,7 +1011,7 @@
           <a:p>
             <a:fld id="{B6000E93-69C7-4C90-931E-A5484B820028}" type="datetimeFigureOut">
               <a:rPr lang="en-US" smtClean="0"/>
-              <a:t>3/26/2026</a:t>
+              <a:t>3/29/2026</a:t>
             </a:fld>
             <a:endParaRPr lang="en-US"/>
           </a:p>
@@ -1286,7 +1286,7 @@
           <a:p>
             <a:fld id="{B6000E93-69C7-4C90-931E-A5484B820028}" type="datetimeFigureOut">
               <a:rPr lang="en-US" smtClean="0"/>
-              <a:t>3/26/2026</a:t>
+              <a:t>3/29/2026</a:t>
             </a:fld>
             <a:endParaRPr lang="en-US"/>
           </a:p>
@@ -1551,7 +1551,7 @@
           <a:p>
             <a:fld id="{B6000E93-69C7-4C90-931E-A5484B820028}" type="datetimeFigureOut">
               <a:rPr lang="en-US" smtClean="0"/>
-              <a:t>3/26/2026</a:t>
+              <a:t>3/29/2026</a:t>
             </a:fld>
             <a:endParaRPr lang="en-US"/>
           </a:p>
@@ -1963,7 +1963,7 @@
           <a:p>
             <a:fld id="{B6000E93-69C7-4C90-931E-A5484B820028}" type="datetimeFigureOut">
               <a:rPr lang="en-US" smtClean="0"/>
-              <a:t>3/26/2026</a:t>
+              <a:t>3/29/2026</a:t>
             </a:fld>
             <a:endParaRPr lang="en-US"/>
           </a:p>
@@ -2104,7 +2104,7 @@
           <a:p>
             <a:fld id="{B6000E93-69C7-4C90-931E-A5484B820028}" type="datetimeFigureOut">
               <a:rPr lang="en-US" smtClean="0"/>
-              <a:t>3/26/2026</a:t>
+              <a:t>3/29/2026</a:t>
             </a:fld>
             <a:endParaRPr lang="en-US"/>
           </a:p>
@@ -2217,7 +2217,7 @@
           <a:p>
             <a:fld id="{B6000E93-69C7-4C90-931E-A5484B820028}" type="datetimeFigureOut">
               <a:rPr lang="en-US" smtClean="0"/>
-              <a:t>3/26/2026</a:t>
+              <a:t>3/29/2026</a:t>
             </a:fld>
             <a:endParaRPr lang="en-US"/>
           </a:p>
@@ -2528,7 +2528,7 @@
           <a:p>
             <a:fld id="{B6000E93-69C7-4C90-931E-A5484B820028}" type="datetimeFigureOut">
               <a:rPr lang="en-US" smtClean="0"/>
-              <a:t>3/26/2026</a:t>
+              <a:t>3/29/2026</a:t>
             </a:fld>
             <a:endParaRPr lang="en-US"/>
           </a:p>
@@ -2816,7 +2816,7 @@
           <a:p>
             <a:fld id="{B6000E93-69C7-4C90-931E-A5484B820028}" type="datetimeFigureOut">
               <a:rPr lang="en-US" smtClean="0"/>
-              <a:t>3/26/2026</a:t>
+              <a:t>3/29/2026</a:t>
             </a:fld>
             <a:endParaRPr lang="en-US"/>
           </a:p>
@@ -3057,7 +3057,7 @@
           <a:p>
             <a:fld id="{B6000E93-69C7-4C90-931E-A5484B820028}" type="datetimeFigureOut">
               <a:rPr lang="en-US" smtClean="0"/>
-              <a:t>3/26/2026</a:t>
+              <a:t>3/29/2026</a:t>
             </a:fld>
             <a:endParaRPr lang="en-US"/>
           </a:p>
@@ -9483,7 +9483,7 @@
         </p:nvSpPr>
         <p:spPr>
           <a:xfrm>
-            <a:off x="5293166" y="2706837"/>
+            <a:off x="5293166" y="2651180"/>
             <a:ext cx="466928" cy="466928"/>
           </a:xfrm>
           <a:prstGeom prst="rect">
@@ -9542,7 +9542,7 @@
         </p:nvSpPr>
         <p:spPr>
           <a:xfrm>
-            <a:off x="5293166" y="4186136"/>
+            <a:off x="5293166" y="4202038"/>
             <a:ext cx="466928" cy="466928"/>
           </a:xfrm>
           <a:prstGeom prst="rect">
@@ -9884,7 +9884,7 @@
         <p:spPr>
           <a:xfrm>
             <a:off x="201086" y="2106672"/>
-            <a:ext cx="1628590" cy="3046988"/>
+            <a:ext cx="1628590" cy="2800767"/>
           </a:xfrm>
           <a:prstGeom prst="rect">
             <a:avLst/>
@@ -9922,28 +9922,28 @@
             <a:pPr indent="285750"/>
             <a:r>
               <a:rPr lang="en-US" sz="1600" dirty="0"/>
-              <a:t>S1- 3.8, 7.5</a:t>
+              <a:t>S1- 3.6, 7.4</a:t>
             </a:r>
           </a:p>
           <a:p>
             <a:pPr indent="285750"/>
             <a:r>
               <a:rPr lang="en-US" sz="1600" dirty="0"/>
-              <a:t>S2- 3.7, 5.0</a:t>
+              <a:t>S2- 3.6, 5.2</a:t>
             </a:r>
           </a:p>
           <a:p>
             <a:pPr indent="285750"/>
             <a:r>
               <a:rPr lang="en-US" sz="1600" dirty="0"/>
-              <a:t>S3- 3.7, 2.8</a:t>
+              <a:t>S3- 3.6, 2.8</a:t>
             </a:r>
           </a:p>
           <a:p>
             <a:pPr indent="285750"/>
             <a:r>
               <a:rPr lang="en-US" sz="1600" dirty="0"/>
-              <a:t>S4- 3.8, 0.7</a:t>
+              <a:t>S4- 3.6	, 0.7</a:t>
             </a:r>
           </a:p>
           <a:p>
@@ -9971,13 +9971,6 @@
               <a:t>C3-</a:t>
             </a:r>
           </a:p>
-          <a:p>
-            <a:pPr indent="285750"/>
-            <a:r>
-              <a:rPr lang="en-US" sz="1600" dirty="0"/>
-              <a:t>C4-</a:t>
-            </a:r>
-          </a:p>
         </p:txBody>
       </p:sp>
       <p:sp>
@@ -9994,7 +9987,7 @@
         </p:nvSpPr>
         <p:spPr>
           <a:xfrm>
-            <a:off x="3460463" y="3570762"/>
+            <a:off x="3509226" y="3583199"/>
             <a:ext cx="466928" cy="466928"/>
           </a:xfrm>
           <a:prstGeom prst="rect">
@@ -10034,66 +10027,6 @@
                 </a:solidFill>
               </a:rPr>
               <a:t>C3</a:t>
-            </a:r>
-          </a:p>
-        </p:txBody>
-      </p:sp>
-      <p:sp>
-        <p:nvSpPr>
-          <p:cNvPr id="4" name="Rectangle 3">
-            <a:extLst>
-              <a:ext uri="{FF2B5EF4-FFF2-40B4-BE49-F238E27FC236}">
-                <a16:creationId xmlns:a16="http://schemas.microsoft.com/office/drawing/2014/main" id="{500991A2-9D54-EA33-019E-AEF36A18F0BD}"/>
-              </a:ext>
-            </a:extLst>
-          </p:cNvPr>
-          <p:cNvSpPr/>
-          <p:nvPr/>
-        </p:nvSpPr>
-        <p:spPr>
-          <a:xfrm>
-            <a:off x="3460463" y="3652969"/>
-            <a:ext cx="466928" cy="466928"/>
-          </a:xfrm>
-          <a:prstGeom prst="rect">
-            <a:avLst/>
-          </a:prstGeom>
-          <a:solidFill>
-            <a:schemeClr val="accent1">
-              <a:lumMod val="40000"/>
-              <a:lumOff val="60000"/>
-              <a:alpha val="20000"/>
-            </a:schemeClr>
-          </a:solidFill>
-        </p:spPr>
-        <p:style>
-          <a:lnRef idx="2">
-            <a:schemeClr val="accent1">
-              <a:shade val="15000"/>
-            </a:schemeClr>
-          </a:lnRef>
-          <a:fillRef idx="1">
-            <a:schemeClr val="accent1"/>
-          </a:fillRef>
-          <a:effectRef idx="0">
-            <a:schemeClr val="accent1"/>
-          </a:effectRef>
-          <a:fontRef idx="minor">
-            <a:schemeClr val="lt1"/>
-          </a:fontRef>
-        </p:style>
-        <p:txBody>
-          <a:bodyPr tIns="91440" bIns="0" rtlCol="0" anchor="ctr"/>
-          <a:lstStyle/>
-          <a:p>
-            <a:pPr algn="r"/>
-            <a:r>
-              <a:rPr lang="en-US" sz="1400" dirty="0">
-                <a:solidFill>
-                  <a:schemeClr val="tx1"/>
-                </a:solidFill>
-              </a:rPr>
-              <a:t>C4</a:t>
             </a:r>
           </a:p>
         </p:txBody>

--- a/docs/Controller Mappings & Paths.pptx
+++ b/docs/Controller Mappings & Paths.pptx
@@ -4,6 +4,9 @@
   <p:sldMasterIdLst>
     <p:sldMasterId id="2147483648" r:id="rId1"/>
   </p:sldMasterIdLst>
+  <p:notesMasterIdLst>
+    <p:notesMasterId r:id="rId11"/>
+  </p:notesMasterIdLst>
   <p:sldIdLst>
     <p:sldId id="257" r:id="rId2"/>
     <p:sldId id="256" r:id="rId3"/>
@@ -260,6 +263,439 @@
 </inkml:ink>
 </file>
 
+<file path=ppt/notesMasters/notesMaster1.xml><?xml version="1.0" encoding="utf-8"?>
+<p:notesMaster xmlns:a="http://schemas.openxmlformats.org/drawingml/2006/main" xmlns:r="http://schemas.openxmlformats.org/officeDocument/2006/relationships" xmlns:p="http://schemas.openxmlformats.org/presentationml/2006/main">
+  <p:cSld>
+    <p:bg>
+      <p:bgRef idx="1001">
+        <a:schemeClr val="bg1"/>
+      </p:bgRef>
+    </p:bg>
+    <p:spTree>
+      <p:nvGrpSpPr>
+        <p:cNvPr id="1" name=""/>
+        <p:cNvGrpSpPr/>
+        <p:nvPr/>
+      </p:nvGrpSpPr>
+      <p:grpSpPr>
+        <a:xfrm>
+          <a:off x="0" y="0"/>
+          <a:ext cx="0" cy="0"/>
+          <a:chOff x="0" y="0"/>
+          <a:chExt cx="0" cy="0"/>
+        </a:xfrm>
+      </p:grpSpPr>
+      <p:sp>
+        <p:nvSpPr>
+          <p:cNvPr id="2" name="Header Placeholder 1"/>
+          <p:cNvSpPr>
+            <a:spLocks noGrp="1"/>
+          </p:cNvSpPr>
+          <p:nvPr>
+            <p:ph type="hdr" sz="quarter"/>
+          </p:nvPr>
+        </p:nvSpPr>
+        <p:spPr>
+          <a:xfrm>
+            <a:off x="0" y="0"/>
+            <a:ext cx="2971800" cy="458788"/>
+          </a:xfrm>
+          <a:prstGeom prst="rect">
+            <a:avLst/>
+          </a:prstGeom>
+        </p:spPr>
+        <p:txBody>
+          <a:bodyPr vert="horz" lIns="91440" tIns="45720" rIns="91440" bIns="45720" rtlCol="0"/>
+          <a:lstStyle>
+            <a:lvl1pPr algn="l">
+              <a:defRPr sz="1200"/>
+            </a:lvl1pPr>
+          </a:lstStyle>
+          <a:p>
+            <a:endParaRPr lang="en-US"/>
+          </a:p>
+        </p:txBody>
+      </p:sp>
+      <p:sp>
+        <p:nvSpPr>
+          <p:cNvPr id="3" name="Date Placeholder 2"/>
+          <p:cNvSpPr>
+            <a:spLocks noGrp="1"/>
+          </p:cNvSpPr>
+          <p:nvPr>
+            <p:ph type="dt" idx="1"/>
+          </p:nvPr>
+        </p:nvSpPr>
+        <p:spPr>
+          <a:xfrm>
+            <a:off x="3884613" y="0"/>
+            <a:ext cx="2971800" cy="458788"/>
+          </a:xfrm>
+          <a:prstGeom prst="rect">
+            <a:avLst/>
+          </a:prstGeom>
+        </p:spPr>
+        <p:txBody>
+          <a:bodyPr vert="horz" lIns="91440" tIns="45720" rIns="91440" bIns="45720" rtlCol="0"/>
+          <a:lstStyle>
+            <a:lvl1pPr algn="r">
+              <a:defRPr sz="1200"/>
+            </a:lvl1pPr>
+          </a:lstStyle>
+          <a:p>
+            <a:fld id="{AE04D560-2BC0-4E9A-8DFC-A40971B69CDD}" type="datetimeFigureOut">
+              <a:rPr lang="en-US" smtClean="0"/>
+              <a:t>3/30/2026</a:t>
+            </a:fld>
+            <a:endParaRPr lang="en-US"/>
+          </a:p>
+        </p:txBody>
+      </p:sp>
+      <p:sp>
+        <p:nvSpPr>
+          <p:cNvPr id="4" name="Slide Image Placeholder 3"/>
+          <p:cNvSpPr>
+            <a:spLocks noGrp="1" noRot="1" noChangeAspect="1"/>
+          </p:cNvSpPr>
+          <p:nvPr>
+            <p:ph type="sldImg" idx="2"/>
+          </p:nvPr>
+        </p:nvSpPr>
+        <p:spPr>
+          <a:xfrm>
+            <a:off x="685800" y="1143000"/>
+            <a:ext cx="5486400" cy="3086100"/>
+          </a:xfrm>
+          <a:prstGeom prst="rect">
+            <a:avLst/>
+          </a:prstGeom>
+          <a:noFill/>
+          <a:ln w="12700">
+            <a:solidFill>
+              <a:prstClr val="black"/>
+            </a:solidFill>
+          </a:ln>
+        </p:spPr>
+        <p:txBody>
+          <a:bodyPr vert="horz" lIns="91440" tIns="45720" rIns="91440" bIns="45720" rtlCol="0" anchor="ctr"/>
+          <a:lstStyle/>
+          <a:p>
+            <a:endParaRPr lang="en-US"/>
+          </a:p>
+        </p:txBody>
+      </p:sp>
+      <p:sp>
+        <p:nvSpPr>
+          <p:cNvPr id="5" name="Notes Placeholder 4"/>
+          <p:cNvSpPr>
+            <a:spLocks noGrp="1"/>
+          </p:cNvSpPr>
+          <p:nvPr>
+            <p:ph type="body" sz="quarter" idx="3"/>
+          </p:nvPr>
+        </p:nvSpPr>
+        <p:spPr>
+          <a:xfrm>
+            <a:off x="685800" y="4400550"/>
+            <a:ext cx="5486400" cy="3600450"/>
+          </a:xfrm>
+          <a:prstGeom prst="rect">
+            <a:avLst/>
+          </a:prstGeom>
+        </p:spPr>
+        <p:txBody>
+          <a:bodyPr vert="horz" lIns="91440" tIns="45720" rIns="91440" bIns="45720" rtlCol="0"/>
+          <a:lstStyle/>
+          <a:p>
+            <a:pPr lvl="0"/>
+            <a:r>
+              <a:rPr lang="en-US"/>
+              <a:t>Click to edit Master text styles</a:t>
+            </a:r>
+          </a:p>
+          <a:p>
+            <a:pPr lvl="1"/>
+            <a:r>
+              <a:rPr lang="en-US"/>
+              <a:t>Second level</a:t>
+            </a:r>
+          </a:p>
+          <a:p>
+            <a:pPr lvl="2"/>
+            <a:r>
+              <a:rPr lang="en-US"/>
+              <a:t>Third level</a:t>
+            </a:r>
+          </a:p>
+          <a:p>
+            <a:pPr lvl="3"/>
+            <a:r>
+              <a:rPr lang="en-US"/>
+              <a:t>Fourth level</a:t>
+            </a:r>
+          </a:p>
+          <a:p>
+            <a:pPr lvl="4"/>
+            <a:r>
+              <a:rPr lang="en-US"/>
+              <a:t>Fifth level</a:t>
+            </a:r>
+          </a:p>
+        </p:txBody>
+      </p:sp>
+      <p:sp>
+        <p:nvSpPr>
+          <p:cNvPr id="6" name="Footer Placeholder 5"/>
+          <p:cNvSpPr>
+            <a:spLocks noGrp="1"/>
+          </p:cNvSpPr>
+          <p:nvPr>
+            <p:ph type="ftr" sz="quarter" idx="4"/>
+          </p:nvPr>
+        </p:nvSpPr>
+        <p:spPr>
+          <a:xfrm>
+            <a:off x="0" y="8685213"/>
+            <a:ext cx="2971800" cy="458787"/>
+          </a:xfrm>
+          <a:prstGeom prst="rect">
+            <a:avLst/>
+          </a:prstGeom>
+        </p:spPr>
+        <p:txBody>
+          <a:bodyPr vert="horz" lIns="91440" tIns="45720" rIns="91440" bIns="45720" rtlCol="0" anchor="b"/>
+          <a:lstStyle>
+            <a:lvl1pPr algn="l">
+              <a:defRPr sz="1200"/>
+            </a:lvl1pPr>
+          </a:lstStyle>
+          <a:p>
+            <a:endParaRPr lang="en-US"/>
+          </a:p>
+        </p:txBody>
+      </p:sp>
+      <p:sp>
+        <p:nvSpPr>
+          <p:cNvPr id="7" name="Slide Number Placeholder 6"/>
+          <p:cNvSpPr>
+            <a:spLocks noGrp="1"/>
+          </p:cNvSpPr>
+          <p:nvPr>
+            <p:ph type="sldNum" sz="quarter" idx="5"/>
+          </p:nvPr>
+        </p:nvSpPr>
+        <p:spPr>
+          <a:xfrm>
+            <a:off x="3884613" y="8685213"/>
+            <a:ext cx="2971800" cy="458787"/>
+          </a:xfrm>
+          <a:prstGeom prst="rect">
+            <a:avLst/>
+          </a:prstGeom>
+        </p:spPr>
+        <p:txBody>
+          <a:bodyPr vert="horz" lIns="91440" tIns="45720" rIns="91440" bIns="45720" rtlCol="0" anchor="b"/>
+          <a:lstStyle>
+            <a:lvl1pPr algn="r">
+              <a:defRPr sz="1200"/>
+            </a:lvl1pPr>
+          </a:lstStyle>
+          <a:p>
+            <a:fld id="{37E61306-F19D-474D-AFBE-997314930689}" type="slidenum">
+              <a:rPr lang="en-US" smtClean="0"/>
+              <a:t>‹#›</a:t>
+            </a:fld>
+            <a:endParaRPr lang="en-US"/>
+          </a:p>
+        </p:txBody>
+      </p:sp>
+    </p:spTree>
+    <p:extLst>
+      <p:ext uri="{BB962C8B-B14F-4D97-AF65-F5344CB8AC3E}">
+        <p14:creationId xmlns:p14="http://schemas.microsoft.com/office/powerpoint/2010/main" val="2258765506"/>
+      </p:ext>
+    </p:extLst>
+  </p:cSld>
+  <p:clrMap bg1="lt1" tx1="dk1" bg2="lt2" tx2="dk2" accent1="accent1" accent2="accent2" accent3="accent3" accent4="accent4" accent5="accent5" accent6="accent6" hlink="hlink" folHlink="folHlink"/>
+  <p:notesStyle>
+    <a:lvl1pPr marL="0" algn="l" defTabSz="914400" rtl="0" eaLnBrk="1" latinLnBrk="0" hangingPunct="1">
+      <a:defRPr sz="1200" kern="1200">
+        <a:solidFill>
+          <a:schemeClr val="tx1"/>
+        </a:solidFill>
+        <a:latin typeface="+mn-lt"/>
+        <a:ea typeface="+mn-ea"/>
+        <a:cs typeface="+mn-cs"/>
+      </a:defRPr>
+    </a:lvl1pPr>
+    <a:lvl2pPr marL="457200" algn="l" defTabSz="914400" rtl="0" eaLnBrk="1" latinLnBrk="0" hangingPunct="1">
+      <a:defRPr sz="1200" kern="1200">
+        <a:solidFill>
+          <a:schemeClr val="tx1"/>
+        </a:solidFill>
+        <a:latin typeface="+mn-lt"/>
+        <a:ea typeface="+mn-ea"/>
+        <a:cs typeface="+mn-cs"/>
+      </a:defRPr>
+    </a:lvl2pPr>
+    <a:lvl3pPr marL="914400" algn="l" defTabSz="914400" rtl="0" eaLnBrk="1" latinLnBrk="0" hangingPunct="1">
+      <a:defRPr sz="1200" kern="1200">
+        <a:solidFill>
+          <a:schemeClr val="tx1"/>
+        </a:solidFill>
+        <a:latin typeface="+mn-lt"/>
+        <a:ea typeface="+mn-ea"/>
+        <a:cs typeface="+mn-cs"/>
+      </a:defRPr>
+    </a:lvl3pPr>
+    <a:lvl4pPr marL="1371600" algn="l" defTabSz="914400" rtl="0" eaLnBrk="1" latinLnBrk="0" hangingPunct="1">
+      <a:defRPr sz="1200" kern="1200">
+        <a:solidFill>
+          <a:schemeClr val="tx1"/>
+        </a:solidFill>
+        <a:latin typeface="+mn-lt"/>
+        <a:ea typeface="+mn-ea"/>
+        <a:cs typeface="+mn-cs"/>
+      </a:defRPr>
+    </a:lvl4pPr>
+    <a:lvl5pPr marL="1828800" algn="l" defTabSz="914400" rtl="0" eaLnBrk="1" latinLnBrk="0" hangingPunct="1">
+      <a:defRPr sz="1200" kern="1200">
+        <a:solidFill>
+          <a:schemeClr val="tx1"/>
+        </a:solidFill>
+        <a:latin typeface="+mn-lt"/>
+        <a:ea typeface="+mn-ea"/>
+        <a:cs typeface="+mn-cs"/>
+      </a:defRPr>
+    </a:lvl5pPr>
+    <a:lvl6pPr marL="2286000" algn="l" defTabSz="914400" rtl="0" eaLnBrk="1" latinLnBrk="0" hangingPunct="1">
+      <a:defRPr sz="1200" kern="1200">
+        <a:solidFill>
+          <a:schemeClr val="tx1"/>
+        </a:solidFill>
+        <a:latin typeface="+mn-lt"/>
+        <a:ea typeface="+mn-ea"/>
+        <a:cs typeface="+mn-cs"/>
+      </a:defRPr>
+    </a:lvl6pPr>
+    <a:lvl7pPr marL="2743200" algn="l" defTabSz="914400" rtl="0" eaLnBrk="1" latinLnBrk="0" hangingPunct="1">
+      <a:defRPr sz="1200" kern="1200">
+        <a:solidFill>
+          <a:schemeClr val="tx1"/>
+        </a:solidFill>
+        <a:latin typeface="+mn-lt"/>
+        <a:ea typeface="+mn-ea"/>
+        <a:cs typeface="+mn-cs"/>
+      </a:defRPr>
+    </a:lvl7pPr>
+    <a:lvl8pPr marL="3200400" algn="l" defTabSz="914400" rtl="0" eaLnBrk="1" latinLnBrk="0" hangingPunct="1">
+      <a:defRPr sz="1200" kern="1200">
+        <a:solidFill>
+          <a:schemeClr val="tx1"/>
+        </a:solidFill>
+        <a:latin typeface="+mn-lt"/>
+        <a:ea typeface="+mn-ea"/>
+        <a:cs typeface="+mn-cs"/>
+      </a:defRPr>
+    </a:lvl8pPr>
+    <a:lvl9pPr marL="3657600" algn="l" defTabSz="914400" rtl="0" eaLnBrk="1" latinLnBrk="0" hangingPunct="1">
+      <a:defRPr sz="1200" kern="1200">
+        <a:solidFill>
+          <a:schemeClr val="tx1"/>
+        </a:solidFill>
+        <a:latin typeface="+mn-lt"/>
+        <a:ea typeface="+mn-ea"/>
+        <a:cs typeface="+mn-cs"/>
+      </a:defRPr>
+    </a:lvl9pPr>
+  </p:notesStyle>
+</p:notesMaster>
+</file>
+
+<file path=ppt/notesSlides/notesSlide1.xml><?xml version="1.0" encoding="utf-8"?>
+<p:notes xmlns:a="http://schemas.openxmlformats.org/drawingml/2006/main" xmlns:r="http://schemas.openxmlformats.org/officeDocument/2006/relationships" xmlns:p="http://schemas.openxmlformats.org/presentationml/2006/main">
+  <p:cSld>
+    <p:spTree>
+      <p:nvGrpSpPr>
+        <p:cNvPr id="1" name=""/>
+        <p:cNvGrpSpPr/>
+        <p:nvPr/>
+      </p:nvGrpSpPr>
+      <p:grpSpPr>
+        <a:xfrm>
+          <a:off x="0" y="0"/>
+          <a:ext cx="0" cy="0"/>
+          <a:chOff x="0" y="0"/>
+          <a:chExt cx="0" cy="0"/>
+        </a:xfrm>
+      </p:grpSpPr>
+      <p:sp>
+        <p:nvSpPr>
+          <p:cNvPr id="2" name="Slide Image Placeholder 1"/>
+          <p:cNvSpPr>
+            <a:spLocks noGrp="1" noRot="1" noChangeAspect="1"/>
+          </p:cNvSpPr>
+          <p:nvPr>
+            <p:ph type="sldImg"/>
+          </p:nvPr>
+        </p:nvSpPr>
+        <p:spPr/>
+      </p:sp>
+      <p:sp>
+        <p:nvSpPr>
+          <p:cNvPr id="3" name="Notes Placeholder 2"/>
+          <p:cNvSpPr>
+            <a:spLocks noGrp="1"/>
+          </p:cNvSpPr>
+          <p:nvPr>
+            <p:ph type="body" idx="1"/>
+          </p:nvPr>
+        </p:nvSpPr>
+        <p:spPr/>
+        <p:txBody>
+          <a:bodyPr/>
+          <a:lstStyle/>
+          <a:p>
+            <a:endParaRPr lang="en-US" dirty="0"/>
+          </a:p>
+        </p:txBody>
+      </p:sp>
+      <p:sp>
+        <p:nvSpPr>
+          <p:cNvPr id="4" name="Slide Number Placeholder 3"/>
+          <p:cNvSpPr>
+            <a:spLocks noGrp="1"/>
+          </p:cNvSpPr>
+          <p:nvPr>
+            <p:ph type="sldNum" sz="quarter" idx="5"/>
+          </p:nvPr>
+        </p:nvSpPr>
+        <p:spPr/>
+        <p:txBody>
+          <a:bodyPr/>
+          <a:lstStyle/>
+          <a:p>
+            <a:fld id="{37E61306-F19D-474D-AFBE-997314930689}" type="slidenum">
+              <a:rPr lang="en-US" smtClean="0"/>
+              <a:t>1</a:t>
+            </a:fld>
+            <a:endParaRPr lang="en-US"/>
+          </a:p>
+        </p:txBody>
+      </p:sp>
+    </p:spTree>
+    <p:extLst>
+      <p:ext uri="{BB962C8B-B14F-4D97-AF65-F5344CB8AC3E}">
+        <p14:creationId xmlns:p14="http://schemas.microsoft.com/office/powerpoint/2010/main" val="4190948989"/>
+      </p:ext>
+    </p:extLst>
+  </p:cSld>
+  <p:clrMapOvr>
+    <a:masterClrMapping/>
+  </p:clrMapOvr>
+</p:notes>
+</file>
+
 <file path=ppt/slideLayouts/slideLayout1.xml><?xml version="1.0" encoding="utf-8"?>
 <p:sldLayout xmlns:a="http://schemas.openxmlformats.org/drawingml/2006/main" xmlns:r="http://schemas.openxmlformats.org/officeDocument/2006/relationships" xmlns:p="http://schemas.openxmlformats.org/presentationml/2006/main" type="title" preserve="1">
   <p:cSld name="Title Slide">
@@ -407,7 +843,7 @@
           <a:p>
             <a:fld id="{B6000E93-69C7-4C90-931E-A5484B820028}" type="datetimeFigureOut">
               <a:rPr lang="en-US" smtClean="0"/>
-              <a:t>3/29/2026</a:t>
+              <a:t>3/30/2026</a:t>
             </a:fld>
             <a:endParaRPr lang="en-US"/>
           </a:p>
@@ -605,7 +1041,7 @@
           <a:p>
             <a:fld id="{B6000E93-69C7-4C90-931E-A5484B820028}" type="datetimeFigureOut">
               <a:rPr lang="en-US" smtClean="0"/>
-              <a:t>3/29/2026</a:t>
+              <a:t>3/30/2026</a:t>
             </a:fld>
             <a:endParaRPr lang="en-US"/>
           </a:p>
@@ -813,7 +1249,7 @@
           <a:p>
             <a:fld id="{B6000E93-69C7-4C90-931E-A5484B820028}" type="datetimeFigureOut">
               <a:rPr lang="en-US" smtClean="0"/>
-              <a:t>3/29/2026</a:t>
+              <a:t>3/30/2026</a:t>
             </a:fld>
             <a:endParaRPr lang="en-US"/>
           </a:p>
@@ -1011,7 +1447,7 @@
           <a:p>
             <a:fld id="{B6000E93-69C7-4C90-931E-A5484B820028}" type="datetimeFigureOut">
               <a:rPr lang="en-US" smtClean="0"/>
-              <a:t>3/29/2026</a:t>
+              <a:t>3/30/2026</a:t>
             </a:fld>
             <a:endParaRPr lang="en-US"/>
           </a:p>
@@ -1286,7 +1722,7 @@
           <a:p>
             <a:fld id="{B6000E93-69C7-4C90-931E-A5484B820028}" type="datetimeFigureOut">
               <a:rPr lang="en-US" smtClean="0"/>
-              <a:t>3/29/2026</a:t>
+              <a:t>3/30/2026</a:t>
             </a:fld>
             <a:endParaRPr lang="en-US"/>
           </a:p>
@@ -1551,7 +1987,7 @@
           <a:p>
             <a:fld id="{B6000E93-69C7-4C90-931E-A5484B820028}" type="datetimeFigureOut">
               <a:rPr lang="en-US" smtClean="0"/>
-              <a:t>3/29/2026</a:t>
+              <a:t>3/30/2026</a:t>
             </a:fld>
             <a:endParaRPr lang="en-US"/>
           </a:p>
@@ -1963,7 +2399,7 @@
           <a:p>
             <a:fld id="{B6000E93-69C7-4C90-931E-A5484B820028}" type="datetimeFigureOut">
               <a:rPr lang="en-US" smtClean="0"/>
-              <a:t>3/29/2026</a:t>
+              <a:t>3/30/2026</a:t>
             </a:fld>
             <a:endParaRPr lang="en-US"/>
           </a:p>
@@ -2104,7 +2540,7 @@
           <a:p>
             <a:fld id="{B6000E93-69C7-4C90-931E-A5484B820028}" type="datetimeFigureOut">
               <a:rPr lang="en-US" smtClean="0"/>
-              <a:t>3/29/2026</a:t>
+              <a:t>3/30/2026</a:t>
             </a:fld>
             <a:endParaRPr lang="en-US"/>
           </a:p>
@@ -2217,7 +2653,7 @@
           <a:p>
             <a:fld id="{B6000E93-69C7-4C90-931E-A5484B820028}" type="datetimeFigureOut">
               <a:rPr lang="en-US" smtClean="0"/>
-              <a:t>3/29/2026</a:t>
+              <a:t>3/30/2026</a:t>
             </a:fld>
             <a:endParaRPr lang="en-US"/>
           </a:p>
@@ -2528,7 +2964,7 @@
           <a:p>
             <a:fld id="{B6000E93-69C7-4C90-931E-A5484B820028}" type="datetimeFigureOut">
               <a:rPr lang="en-US" smtClean="0"/>
-              <a:t>3/29/2026</a:t>
+              <a:t>3/30/2026</a:t>
             </a:fld>
             <a:endParaRPr lang="en-US"/>
           </a:p>
@@ -2816,7 +3252,7 @@
           <a:p>
             <a:fld id="{B6000E93-69C7-4C90-931E-A5484B820028}" type="datetimeFigureOut">
               <a:rPr lang="en-US" smtClean="0"/>
-              <a:t>3/29/2026</a:t>
+              <a:t>3/30/2026</a:t>
             </a:fld>
             <a:endParaRPr lang="en-US"/>
           </a:p>
@@ -3057,7 +3493,7 @@
           <a:p>
             <a:fld id="{B6000E93-69C7-4C90-931E-A5484B820028}" type="datetimeFigureOut">
               <a:rPr lang="en-US" smtClean="0"/>
-              <a:t>3/29/2026</a:t>
+              <a:t>3/30/2026</a:t>
             </a:fld>
             <a:endParaRPr lang="en-US"/>
           </a:p>
@@ -3476,6 +3912,86 @@
       </p:grpSpPr>
       <p:sp>
         <p:nvSpPr>
+          <p:cNvPr id="9" name="Rectangle 8">
+            <a:extLst>
+              <a:ext uri="{FF2B5EF4-FFF2-40B4-BE49-F238E27FC236}">
+                <a16:creationId xmlns:a16="http://schemas.microsoft.com/office/drawing/2014/main" id="{DC93AF2D-73A4-E0FD-7B3D-B2A7BC89594C}"/>
+              </a:ext>
+            </a:extLst>
+          </p:cNvPr>
+          <p:cNvSpPr/>
+          <p:nvPr/>
+        </p:nvSpPr>
+        <p:spPr>
+          <a:xfrm>
+            <a:off x="5771507" y="5561137"/>
+            <a:ext cx="1595535" cy="553140"/>
+          </a:xfrm>
+          <a:prstGeom prst="rect">
+            <a:avLst/>
+          </a:prstGeom>
+          <a:solidFill>
+            <a:schemeClr val="accent6">
+              <a:lumMod val="20000"/>
+              <a:lumOff val="80000"/>
+            </a:schemeClr>
+          </a:solidFill>
+          <a:ln>
+            <a:solidFill>
+              <a:schemeClr val="accent2">
+                <a:lumMod val="20000"/>
+                <a:lumOff val="80000"/>
+              </a:schemeClr>
+            </a:solidFill>
+          </a:ln>
+        </p:spPr>
+        <p:style>
+          <a:lnRef idx="2">
+            <a:schemeClr val="accent1">
+              <a:shade val="15000"/>
+            </a:schemeClr>
+          </a:lnRef>
+          <a:fillRef idx="1">
+            <a:schemeClr val="accent1"/>
+          </a:fillRef>
+          <a:effectRef idx="0">
+            <a:schemeClr val="accent1"/>
+          </a:effectRef>
+          <a:fontRef idx="minor">
+            <a:schemeClr val="lt1"/>
+          </a:fontRef>
+        </p:style>
+        <p:txBody>
+          <a:bodyPr rtlCol="0" anchor="ctr"/>
+          <a:lstStyle/>
+          <a:p>
+            <a:pPr algn="ctr"/>
+            <a:r>
+              <a:rPr lang="en-US" sz="1600" dirty="0">
+                <a:solidFill>
+                  <a:schemeClr val="tx2"/>
+                </a:solidFill>
+              </a:rPr>
+              <a:t>Climber</a:t>
+            </a:r>
+            <a:r>
+              <a:rPr lang="en-US" sz="1400" dirty="0">
+                <a:solidFill>
+                  <a:schemeClr val="tx2"/>
+                </a:solidFill>
+              </a:rPr>
+              <a:t>(Tweak Down)</a:t>
+            </a:r>
+            <a:endParaRPr lang="en-US" sz="1600" dirty="0">
+              <a:solidFill>
+                <a:schemeClr val="tx2"/>
+              </a:solidFill>
+            </a:endParaRPr>
+          </a:p>
+        </p:txBody>
+      </p:sp>
+      <p:sp>
+        <p:nvSpPr>
           <p:cNvPr id="2" name="TextBox 1">
             <a:extLst>
               <a:ext uri="{FF2B5EF4-FFF2-40B4-BE49-F238E27FC236}">
@@ -3523,7 +4039,7 @@
         </p:nvSpPr>
         <p:spPr>
           <a:xfrm>
-            <a:off x="9855703" y="1286788"/>
+            <a:off x="8814310" y="5910286"/>
             <a:ext cx="1595535" cy="317241"/>
           </a:xfrm>
           <a:prstGeom prst="rect">
@@ -3657,7 +4173,7 @@
         </p:nvSpPr>
         <p:spPr>
           <a:xfrm>
-            <a:off x="9139825" y="2632710"/>
+            <a:off x="9074697" y="1717161"/>
             <a:ext cx="2078544" cy="317241"/>
           </a:xfrm>
           <a:prstGeom prst="rect">
@@ -3941,7 +4457,7 @@
         </p:nvSpPr>
         <p:spPr>
           <a:xfrm>
-            <a:off x="9855703" y="914454"/>
+            <a:off x="9850900" y="742561"/>
             <a:ext cx="1595535" cy="317241"/>
           </a:xfrm>
           <a:prstGeom prst="rect">
@@ -4075,7 +4591,7 @@
         </p:nvSpPr>
         <p:spPr>
           <a:xfrm>
-            <a:off x="10352397" y="1783041"/>
+            <a:off x="10355474" y="5480548"/>
             <a:ext cx="1595535" cy="317241"/>
           </a:xfrm>
           <a:prstGeom prst="rect">
@@ -4142,7 +4658,7 @@
         </p:nvSpPr>
         <p:spPr>
           <a:xfrm>
-            <a:off x="9855703" y="444813"/>
+            <a:off x="9011561" y="3286873"/>
             <a:ext cx="1595535" cy="317241"/>
           </a:xfrm>
           <a:prstGeom prst="rect">
@@ -4185,12 +4701,12 @@
           <a:p>
             <a:pPr algn="ctr"/>
             <a:r>
-              <a:rPr lang="en-US" dirty="0">
+              <a:rPr lang="en-US" sz="1600" dirty="0">
                 <a:solidFill>
                   <a:schemeClr val="tx2"/>
                 </a:solidFill>
               </a:rPr>
-              <a:t>Reset Position</a:t>
+              <a:t>Reset Telemetry</a:t>
             </a:r>
           </a:p>
         </p:txBody>
@@ -4276,135 +4792,7 @@
         </p:nvSpPr>
         <p:spPr>
           <a:xfrm>
-            <a:off x="9756775" y="6030259"/>
-            <a:ext cx="1595535" cy="317241"/>
-          </a:xfrm>
-          <a:prstGeom prst="rect">
-            <a:avLst/>
-          </a:prstGeom>
-          <a:solidFill>
-            <a:schemeClr val="accent6">
-              <a:lumMod val="20000"/>
-              <a:lumOff val="80000"/>
-            </a:schemeClr>
-          </a:solidFill>
-          <a:ln>
-            <a:solidFill>
-              <a:schemeClr val="accent2">
-                <a:lumMod val="20000"/>
-                <a:lumOff val="80000"/>
-              </a:schemeClr>
-            </a:solidFill>
-          </a:ln>
-        </p:spPr>
-        <p:style>
-          <a:lnRef idx="2">
-            <a:schemeClr val="accent1">
-              <a:shade val="15000"/>
-            </a:schemeClr>
-          </a:lnRef>
-          <a:fillRef idx="1">
-            <a:schemeClr val="accent1"/>
-          </a:fillRef>
-          <a:effectRef idx="0">
-            <a:schemeClr val="accent1"/>
-          </a:effectRef>
-          <a:fontRef idx="minor">
-            <a:schemeClr val="lt1"/>
-          </a:fontRef>
-        </p:style>
-        <p:txBody>
-          <a:bodyPr rtlCol="0" anchor="ctr"/>
-          <a:lstStyle/>
-          <a:p>
-            <a:pPr algn="ctr"/>
-            <a:endParaRPr lang="en-US" dirty="0">
-              <a:solidFill>
-                <a:schemeClr val="tx2"/>
-              </a:solidFill>
-            </a:endParaRPr>
-          </a:p>
-        </p:txBody>
-      </p:sp>
-      <p:sp>
-        <p:nvSpPr>
-          <p:cNvPr id="28" name="Rectangle 27">
-            <a:extLst>
-              <a:ext uri="{FF2B5EF4-FFF2-40B4-BE49-F238E27FC236}">
-                <a16:creationId xmlns:a16="http://schemas.microsoft.com/office/drawing/2014/main" id="{4995BC81-9903-6C07-5912-D3957C575183}"/>
-              </a:ext>
-            </a:extLst>
-          </p:cNvPr>
-          <p:cNvSpPr/>
-          <p:nvPr/>
-        </p:nvSpPr>
-        <p:spPr>
-          <a:xfrm>
-            <a:off x="9909175" y="6182659"/>
-            <a:ext cx="1595535" cy="317241"/>
-          </a:xfrm>
-          <a:prstGeom prst="rect">
-            <a:avLst/>
-          </a:prstGeom>
-          <a:solidFill>
-            <a:schemeClr val="accent6">
-              <a:lumMod val="20000"/>
-              <a:lumOff val="80000"/>
-            </a:schemeClr>
-          </a:solidFill>
-          <a:ln>
-            <a:solidFill>
-              <a:schemeClr val="accent2">
-                <a:lumMod val="20000"/>
-                <a:lumOff val="80000"/>
-              </a:schemeClr>
-            </a:solidFill>
-          </a:ln>
-        </p:spPr>
-        <p:style>
-          <a:lnRef idx="2">
-            <a:schemeClr val="accent1">
-              <a:shade val="15000"/>
-            </a:schemeClr>
-          </a:lnRef>
-          <a:fillRef idx="1">
-            <a:schemeClr val="accent1"/>
-          </a:fillRef>
-          <a:effectRef idx="0">
-            <a:schemeClr val="accent1"/>
-          </a:effectRef>
-          <a:fontRef idx="minor">
-            <a:schemeClr val="lt1"/>
-          </a:fontRef>
-        </p:style>
-        <p:txBody>
-          <a:bodyPr rtlCol="0" anchor="ctr"/>
-          <a:lstStyle/>
-          <a:p>
-            <a:pPr algn="ctr"/>
-            <a:endParaRPr lang="en-US" dirty="0">
-              <a:solidFill>
-                <a:schemeClr val="tx2"/>
-              </a:solidFill>
-            </a:endParaRPr>
-          </a:p>
-        </p:txBody>
-      </p:sp>
-      <p:sp>
-        <p:nvSpPr>
-          <p:cNvPr id="29" name="Rectangle 28">
-            <a:extLst>
-              <a:ext uri="{FF2B5EF4-FFF2-40B4-BE49-F238E27FC236}">
-                <a16:creationId xmlns:a16="http://schemas.microsoft.com/office/drawing/2014/main" id="{3D7A8DB9-C713-AA15-2812-CCC07794A7F1}"/>
-              </a:ext>
-            </a:extLst>
-          </p:cNvPr>
-          <p:cNvSpPr/>
-          <p:nvPr/>
-        </p:nvSpPr>
-        <p:spPr>
-          <a:xfrm>
-            <a:off x="10061575" y="6335059"/>
+            <a:off x="8071505" y="6291489"/>
             <a:ext cx="1595535" cy="317241"/>
           </a:xfrm>
           <a:prstGeom prst="rect">
@@ -4556,7 +4944,7 @@
             <p:nvPr/>
           </p:nvPicPr>
           <p:blipFill>
-            <a:blip r:embed="rId2">
+            <a:blip r:embed="rId3">
               <a:extLst>
                 <a:ext uri="{28A0092B-C50C-407E-A947-70E740481C1C}">
                   <a14:useLocalDpi xmlns:a14="http://schemas.microsoft.com/office/drawing/2010/main" val="0"/>
@@ -4577,46 +4965,6 @@
             </a:prstGeom>
           </p:spPr>
         </p:pic>
-        <p:sp>
-          <p:nvSpPr>
-            <p:cNvPr id="31" name="TextBox 30">
-              <a:extLst>
-                <a:ext uri="{FF2B5EF4-FFF2-40B4-BE49-F238E27FC236}">
-                  <a16:creationId xmlns:a16="http://schemas.microsoft.com/office/drawing/2014/main" id="{1651F236-D3FE-6452-481B-09721FBE1382}"/>
-                </a:ext>
-              </a:extLst>
-            </p:cNvPr>
-            <p:cNvSpPr txBox="1"/>
-            <p:nvPr/>
-          </p:nvSpPr>
-          <p:spPr>
-            <a:xfrm>
-              <a:off x="8085485" y="3460782"/>
-              <a:ext cx="338554" cy="580800"/>
-            </a:xfrm>
-            <a:prstGeom prst="rect">
-              <a:avLst/>
-            </a:prstGeom>
-            <a:noFill/>
-          </p:spPr>
-          <p:txBody>
-            <a:bodyPr vert="vert270" wrap="none" lIns="0" tIns="0" rIns="91440" bIns="0" rtlCol="0">
-              <a:spAutoFit/>
-            </a:bodyPr>
-            <a:lstStyle/>
-            <a:p>
-              <a:pPr algn="ctr"/>
-              <a:r>
-                <a:rPr lang="en-US" sz="1600" dirty="0">
-                  <a:solidFill>
-                    <a:schemeClr val="bg2"/>
-                  </a:solidFill>
-                </a:rPr>
-                <a:t>Trigger</a:t>
-              </a:r>
-            </a:p>
-          </p:txBody>
-        </p:sp>
         <p:sp>
           <p:nvSpPr>
             <p:cNvPr id="32" name="TextBox 31">
@@ -4743,6 +5091,46 @@
             </a:p>
           </p:txBody>
         </p:sp>
+        <p:sp>
+          <p:nvSpPr>
+            <p:cNvPr id="31" name="TextBox 30">
+              <a:extLst>
+                <a:ext uri="{FF2B5EF4-FFF2-40B4-BE49-F238E27FC236}">
+                  <a16:creationId xmlns:a16="http://schemas.microsoft.com/office/drawing/2014/main" id="{1651F236-D3FE-6452-481B-09721FBE1382}"/>
+                </a:ext>
+              </a:extLst>
+            </p:cNvPr>
+            <p:cNvSpPr txBox="1"/>
+            <p:nvPr/>
+          </p:nvSpPr>
+          <p:spPr>
+            <a:xfrm>
+              <a:off x="8085485" y="3460782"/>
+              <a:ext cx="338554" cy="580800"/>
+            </a:xfrm>
+            <a:prstGeom prst="rect">
+              <a:avLst/>
+            </a:prstGeom>
+            <a:noFill/>
+          </p:spPr>
+          <p:txBody>
+            <a:bodyPr vert="vert270" wrap="none" lIns="0" tIns="0" rIns="91440" bIns="0" rtlCol="0">
+              <a:spAutoFit/>
+            </a:bodyPr>
+            <a:lstStyle/>
+            <a:p>
+              <a:pPr algn="ctr"/>
+              <a:r>
+                <a:rPr lang="en-US" sz="1600" dirty="0">
+                  <a:solidFill>
+                    <a:schemeClr val="bg2"/>
+                  </a:solidFill>
+                </a:rPr>
+                <a:t>Trigger</a:t>
+              </a:r>
+            </a:p>
+          </p:txBody>
+        </p:sp>
       </p:grpSp>
       <p:sp>
         <p:nvSpPr>
@@ -4955,7 +5343,7 @@
         </p:nvCxnSpPr>
         <p:spPr>
           <a:xfrm>
-            <a:off x="5087469" y="5037559"/>
+            <a:off x="2070037" y="4935000"/>
             <a:ext cx="400178" cy="829107"/>
           </a:xfrm>
           <a:prstGeom prst="straightConnector1">
@@ -4997,7 +5385,7 @@
         </p:nvCxnSpPr>
         <p:spPr>
           <a:xfrm>
-            <a:off x="5239869" y="5189959"/>
+            <a:off x="2222437" y="5087400"/>
             <a:ext cx="400178" cy="829107"/>
           </a:xfrm>
           <a:prstGeom prst="straightConnector1">
@@ -5039,7 +5427,7 @@
         </p:nvCxnSpPr>
         <p:spPr>
           <a:xfrm>
-            <a:off x="5392269" y="5342359"/>
+            <a:off x="2374837" y="5239800"/>
             <a:ext cx="400178" cy="829107"/>
           </a:xfrm>
           <a:prstGeom prst="straightConnector1">
@@ -5081,7 +5469,7 @@
         </p:nvCxnSpPr>
         <p:spPr>
           <a:xfrm>
-            <a:off x="5544669" y="5494759"/>
+            <a:off x="2527237" y="5392200"/>
             <a:ext cx="400178" cy="829107"/>
           </a:xfrm>
           <a:prstGeom prst="straightConnector1">
@@ -5118,13 +5506,16 @@
               </a:ext>
             </a:extLst>
           </p:cNvPr>
-          <p:cNvCxnSpPr/>
+          <p:cNvCxnSpPr>
+            <a:cxnSpLocks/>
+            <a:stCxn id="19" idx="1"/>
+          </p:cNvCxnSpPr>
           <p:nvPr/>
         </p:nvCxnSpPr>
         <p:spPr>
-          <a:xfrm>
-            <a:off x="5697069" y="5647159"/>
-            <a:ext cx="400178" cy="829107"/>
+          <a:xfrm flipH="1" flipV="1">
+            <a:off x="7364371" y="2850851"/>
+            <a:ext cx="1647190" cy="594643"/>
           </a:xfrm>
           <a:prstGeom prst="straightConnector1">
             <a:avLst/>
@@ -5160,13 +5551,16 @@
               </a:ext>
             </a:extLst>
           </p:cNvPr>
-          <p:cNvCxnSpPr/>
+          <p:cNvCxnSpPr>
+            <a:cxnSpLocks/>
+            <a:stCxn id="41" idx="0"/>
+          </p:cNvCxnSpPr>
           <p:nvPr/>
         </p:nvCxnSpPr>
         <p:spPr>
-          <a:xfrm>
-            <a:off x="5849469" y="5799559"/>
-            <a:ext cx="400178" cy="829107"/>
+          <a:xfrm flipV="1">
+            <a:off x="4545336" y="3908309"/>
+            <a:ext cx="698314" cy="1694491"/>
           </a:xfrm>
           <a:prstGeom prst="straightConnector1">
             <a:avLst/>
@@ -5202,13 +5596,16 @@
               </a:ext>
             </a:extLst>
           </p:cNvPr>
-          <p:cNvCxnSpPr/>
+          <p:cNvCxnSpPr>
+            <a:cxnSpLocks/>
+            <a:stCxn id="9" idx="0"/>
+          </p:cNvCxnSpPr>
           <p:nvPr/>
         </p:nvCxnSpPr>
         <p:spPr>
-          <a:xfrm>
-            <a:off x="6001869" y="5951959"/>
-            <a:ext cx="400178" cy="829107"/>
+          <a:xfrm flipH="1" flipV="1">
+            <a:off x="5741241" y="4006276"/>
+            <a:ext cx="828034" cy="1554861"/>
           </a:xfrm>
           <a:prstGeom prst="straightConnector1">
             <a:avLst/>
@@ -5434,9 +5831,9 @@
           <p:nvPr/>
         </p:nvCxnSpPr>
         <p:spPr>
-          <a:xfrm flipH="1" flipV="1">
-            <a:off x="8410059" y="2601682"/>
-            <a:ext cx="729766" cy="189649"/>
+          <a:xfrm flipH="1">
+            <a:off x="8410059" y="1875782"/>
+            <a:ext cx="664638" cy="725900"/>
           </a:xfrm>
           <a:prstGeom prst="straightConnector1">
             <a:avLst/>
@@ -5480,8 +5877,8 @@
         </p:nvCxnSpPr>
         <p:spPr>
           <a:xfrm flipH="1" flipV="1">
-            <a:off x="7482254" y="3562318"/>
-            <a:ext cx="1387057" cy="675492"/>
+            <a:off x="7367042" y="3538582"/>
+            <a:ext cx="1502269" cy="699228"/>
           </a:xfrm>
           <a:prstGeom prst="straightConnector1">
             <a:avLst/>
@@ -6046,6 +6443,97 @@
           </p:txBody>
         </p:sp>
       </p:grpSp>
+      <p:sp>
+        <p:nvSpPr>
+          <p:cNvPr id="41" name="Rectangle 40">
+            <a:extLst>
+              <a:ext uri="{FF2B5EF4-FFF2-40B4-BE49-F238E27FC236}">
+                <a16:creationId xmlns:a16="http://schemas.microsoft.com/office/drawing/2014/main" id="{56711DA7-35AB-95FE-610A-BD889E3BA019}"/>
+              </a:ext>
+            </a:extLst>
+          </p:cNvPr>
+          <p:cNvSpPr/>
+          <p:nvPr/>
+        </p:nvSpPr>
+        <p:spPr>
+          <a:xfrm>
+            <a:off x="3811490" y="5602800"/>
+            <a:ext cx="1467692" cy="553140"/>
+          </a:xfrm>
+          <a:prstGeom prst="rect">
+            <a:avLst/>
+          </a:prstGeom>
+          <a:solidFill>
+            <a:schemeClr val="accent6">
+              <a:lumMod val="20000"/>
+              <a:lumOff val="80000"/>
+            </a:schemeClr>
+          </a:solidFill>
+          <a:ln>
+            <a:solidFill>
+              <a:schemeClr val="accent2">
+                <a:lumMod val="20000"/>
+                <a:lumOff val="80000"/>
+              </a:schemeClr>
+            </a:solidFill>
+          </a:ln>
+        </p:spPr>
+        <p:style>
+          <a:lnRef idx="2">
+            <a:schemeClr val="accent1">
+              <a:shade val="15000"/>
+            </a:schemeClr>
+          </a:lnRef>
+          <a:fillRef idx="1">
+            <a:schemeClr val="accent1"/>
+          </a:fillRef>
+          <a:effectRef idx="0">
+            <a:schemeClr val="accent1"/>
+          </a:effectRef>
+          <a:fontRef idx="minor">
+            <a:schemeClr val="lt1"/>
+          </a:fontRef>
+        </p:style>
+        <p:txBody>
+          <a:bodyPr rtlCol="0" anchor="ctr"/>
+          <a:lstStyle/>
+          <a:p>
+            <a:pPr algn="ctr"/>
+            <a:r>
+              <a:rPr lang="en-US" sz="1600" dirty="0">
+                <a:solidFill>
+                  <a:schemeClr val="tx2"/>
+                </a:solidFill>
+              </a:rPr>
+              <a:t>Climber</a:t>
+            </a:r>
+          </a:p>
+          <a:p>
+            <a:pPr algn="ctr"/>
+            <a:r>
+              <a:rPr lang="en-US" sz="1600" dirty="0">
+                <a:solidFill>
+                  <a:schemeClr val="tx2"/>
+                </a:solidFill>
+              </a:rPr>
+              <a:t> </a:t>
+            </a:r>
+            <a:r>
+              <a:rPr lang="en-US" sz="1400" dirty="0">
+                <a:solidFill>
+                  <a:schemeClr val="tx2"/>
+                </a:solidFill>
+              </a:rPr>
+              <a:t>(Tweak Up)</a:t>
+            </a:r>
+            <a:endParaRPr lang="en-US" sz="1600" dirty="0">
+              <a:solidFill>
+                <a:schemeClr val="tx2"/>
+              </a:solidFill>
+            </a:endParaRPr>
+          </a:p>
+        </p:txBody>
+      </p:sp>
     </p:spTree>
     <p:extLst>
       <p:ext uri="{BB962C8B-B14F-4D97-AF65-F5344CB8AC3E}">
@@ -17196,4 +17684,319 @@
     </a:ext>
   </a:extLst>
 </a:theme>
+</file>
+
+<file path=ppt/theme/theme2.xml><?xml version="1.0" encoding="utf-8"?>
+<a:theme xmlns:a="http://schemas.openxmlformats.org/drawingml/2006/main" name="Office Theme">
+  <a:themeElements>
+    <a:clrScheme name="Office">
+      <a:dk1>
+        <a:sysClr val="windowText" lastClr="000000"/>
+      </a:dk1>
+      <a:lt1>
+        <a:sysClr val="window" lastClr="FFFFFF"/>
+      </a:lt1>
+      <a:dk2>
+        <a:srgbClr val="0E2841"/>
+      </a:dk2>
+      <a:lt2>
+        <a:srgbClr val="E8E8E8"/>
+      </a:lt2>
+      <a:accent1>
+        <a:srgbClr val="156082"/>
+      </a:accent1>
+      <a:accent2>
+        <a:srgbClr val="E97132"/>
+      </a:accent2>
+      <a:accent3>
+        <a:srgbClr val="196B24"/>
+      </a:accent3>
+      <a:accent4>
+        <a:srgbClr val="0F9ED5"/>
+      </a:accent4>
+      <a:accent5>
+        <a:srgbClr val="A02B93"/>
+      </a:accent5>
+      <a:accent6>
+        <a:srgbClr val="4EA72E"/>
+      </a:accent6>
+      <a:hlink>
+        <a:srgbClr val="467886"/>
+      </a:hlink>
+      <a:folHlink>
+        <a:srgbClr val="96607D"/>
+      </a:folHlink>
+    </a:clrScheme>
+    <a:fontScheme name="Office">
+      <a:majorFont>
+        <a:latin typeface="Aptos Display" panose="02110004020202020204"/>
+        <a:ea typeface=""/>
+        <a:cs typeface=""/>
+        <a:font script="Jpan" typeface="游ゴシック Light"/>
+        <a:font script="Hang" typeface="맑은 고딕"/>
+        <a:font script="Hans" typeface="等线 Light"/>
+        <a:font script="Hant" typeface="新細明體"/>
+        <a:font script="Arab" typeface="Times New Roman"/>
+        <a:font script="Hebr" typeface="Times New Roman"/>
+        <a:font script="Thai" typeface="Angsana New"/>
+        <a:font script="Ethi" typeface="Nyala"/>
+        <a:font script="Beng" typeface="Vrinda"/>
+        <a:font script="Gujr" typeface="Shruti"/>
+        <a:font script="Khmr" typeface="MoolBoran"/>
+        <a:font script="Knda" typeface="Tunga"/>
+        <a:font script="Guru" typeface="Raavi"/>
+        <a:font script="Cans" typeface="Euphemia"/>
+        <a:font script="Cher" typeface="Plantagenet Cherokee"/>
+        <a:font script="Yiii" typeface="Microsoft Yi Baiti"/>
+        <a:font script="Tibt" typeface="Microsoft Himalaya"/>
+        <a:font script="Thaa" typeface="MV Boli"/>
+        <a:font script="Deva" typeface="Mangal"/>
+        <a:font script="Telu" typeface="Gautami"/>
+        <a:font script="Taml" typeface="Latha"/>
+        <a:font script="Syrc" typeface="Estrangelo Edessa"/>
+        <a:font script="Orya" typeface="Kalinga"/>
+        <a:font script="Mlym" typeface="Kartika"/>
+        <a:font script="Laoo" typeface="DokChampa"/>
+        <a:font script="Sinh" typeface="Iskoola Pota"/>
+        <a:font script="Mong" typeface="Mongolian Baiti"/>
+        <a:font script="Viet" typeface="Times New Roman"/>
+        <a:font script="Uigh" typeface="Microsoft Uighur"/>
+        <a:font script="Geor" typeface="Sylfaen"/>
+        <a:font script="Armn" typeface="Arial"/>
+        <a:font script="Bugi" typeface="Leelawadee UI"/>
+        <a:font script="Bopo" typeface="Microsoft JhengHei"/>
+        <a:font script="Java" typeface="Javanese Text"/>
+        <a:font script="Lisu" typeface="Segoe UI"/>
+        <a:font script="Mymr" typeface="Myanmar Text"/>
+        <a:font script="Nkoo" typeface="Ebrima"/>
+        <a:font script="Olck" typeface="Nirmala UI"/>
+        <a:font script="Osma" typeface="Ebrima"/>
+        <a:font script="Phag" typeface="Phagspa"/>
+        <a:font script="Syrn" typeface="Estrangelo Edessa"/>
+        <a:font script="Syrj" typeface="Estrangelo Edessa"/>
+        <a:font script="Syre" typeface="Estrangelo Edessa"/>
+        <a:font script="Sora" typeface="Nirmala UI"/>
+        <a:font script="Tale" typeface="Microsoft Tai Le"/>
+        <a:font script="Talu" typeface="Microsoft New Tai Lue"/>
+        <a:font script="Tfng" typeface="Ebrima"/>
+      </a:majorFont>
+      <a:minorFont>
+        <a:latin typeface="Aptos" panose="02110004020202020204"/>
+        <a:ea typeface=""/>
+        <a:cs typeface=""/>
+        <a:font script="Jpan" typeface="游ゴシック"/>
+        <a:font script="Hang" typeface="맑은 고딕"/>
+        <a:font script="Hans" typeface="等线"/>
+        <a:font script="Hant" typeface="新細明體"/>
+        <a:font script="Arab" typeface="Arial"/>
+        <a:font script="Hebr" typeface="Arial"/>
+        <a:font script="Thai" typeface="Cordia New"/>
+        <a:font script="Ethi" typeface="Nyala"/>
+        <a:font script="Beng" typeface="Vrinda"/>
+        <a:font script="Gujr" typeface="Shruti"/>
+        <a:font script="Khmr" typeface="DaunPenh"/>
+        <a:font script="Knda" typeface="Tunga"/>
+        <a:font script="Guru" typeface="Raavi"/>
+        <a:font script="Cans" typeface="Euphemia"/>
+        <a:font script="Cher" typeface="Plantagenet Cherokee"/>
+        <a:font script="Yiii" typeface="Microsoft Yi Baiti"/>
+        <a:font script="Tibt" typeface="Microsoft Himalaya"/>
+        <a:font script="Thaa" typeface="MV Boli"/>
+        <a:font script="Deva" typeface="Mangal"/>
+        <a:font script="Telu" typeface="Gautami"/>
+        <a:font script="Taml" typeface="Latha"/>
+        <a:font script="Syrc" typeface="Estrangelo Edessa"/>
+        <a:font script="Orya" typeface="Kalinga"/>
+        <a:font script="Mlym" typeface="Kartika"/>
+        <a:font script="Laoo" typeface="DokChampa"/>
+        <a:font script="Sinh" typeface="Iskoola Pota"/>
+        <a:font script="Mong" typeface="Mongolian Baiti"/>
+        <a:font script="Viet" typeface="Arial"/>
+        <a:font script="Uigh" typeface="Microsoft Uighur"/>
+        <a:font script="Geor" typeface="Sylfaen"/>
+        <a:font script="Armn" typeface="Arial"/>
+        <a:font script="Bugi" typeface="Leelawadee UI"/>
+        <a:font script="Bopo" typeface="Microsoft JhengHei"/>
+        <a:font script="Java" typeface="Javanese Text"/>
+        <a:font script="Lisu" typeface="Segoe UI"/>
+        <a:font script="Mymr" typeface="Myanmar Text"/>
+        <a:font script="Nkoo" typeface="Ebrima"/>
+        <a:font script="Olck" typeface="Nirmala UI"/>
+        <a:font script="Osma" typeface="Ebrima"/>
+        <a:font script="Phag" typeface="Phagspa"/>
+        <a:font script="Syrn" typeface="Estrangelo Edessa"/>
+        <a:font script="Syrj" typeface="Estrangelo Edessa"/>
+        <a:font script="Syre" typeface="Estrangelo Edessa"/>
+        <a:font script="Sora" typeface="Nirmala UI"/>
+        <a:font script="Tale" typeface="Microsoft Tai Le"/>
+        <a:font script="Talu" typeface="Microsoft New Tai Lue"/>
+        <a:font script="Tfng" typeface="Ebrima"/>
+      </a:minorFont>
+    </a:fontScheme>
+    <a:fmtScheme name="Office">
+      <a:fillStyleLst>
+        <a:solidFill>
+          <a:schemeClr val="phClr"/>
+        </a:solidFill>
+        <a:gradFill rotWithShape="1">
+          <a:gsLst>
+            <a:gs pos="0">
+              <a:schemeClr val="phClr">
+                <a:lumMod val="110000"/>
+                <a:satMod val="105000"/>
+                <a:tint val="67000"/>
+              </a:schemeClr>
+            </a:gs>
+            <a:gs pos="50000">
+              <a:schemeClr val="phClr">
+                <a:lumMod val="105000"/>
+                <a:satMod val="103000"/>
+                <a:tint val="73000"/>
+              </a:schemeClr>
+            </a:gs>
+            <a:gs pos="100000">
+              <a:schemeClr val="phClr">
+                <a:lumMod val="105000"/>
+                <a:satMod val="109000"/>
+                <a:tint val="81000"/>
+              </a:schemeClr>
+            </a:gs>
+          </a:gsLst>
+          <a:lin ang="5400000" scaled="0"/>
+        </a:gradFill>
+        <a:gradFill rotWithShape="1">
+          <a:gsLst>
+            <a:gs pos="0">
+              <a:schemeClr val="phClr">
+                <a:satMod val="103000"/>
+                <a:lumMod val="102000"/>
+                <a:tint val="94000"/>
+              </a:schemeClr>
+            </a:gs>
+            <a:gs pos="50000">
+              <a:schemeClr val="phClr">
+                <a:satMod val="110000"/>
+                <a:lumMod val="100000"/>
+                <a:shade val="100000"/>
+              </a:schemeClr>
+            </a:gs>
+            <a:gs pos="100000">
+              <a:schemeClr val="phClr">
+                <a:lumMod val="99000"/>
+                <a:satMod val="120000"/>
+                <a:shade val="78000"/>
+              </a:schemeClr>
+            </a:gs>
+          </a:gsLst>
+          <a:lin ang="5400000" scaled="0"/>
+        </a:gradFill>
+      </a:fillStyleLst>
+      <a:lnStyleLst>
+        <a:ln w="12700" cap="flat" cmpd="sng" algn="ctr">
+          <a:solidFill>
+            <a:schemeClr val="phClr"/>
+          </a:solidFill>
+          <a:prstDash val="solid"/>
+          <a:miter lim="800000"/>
+        </a:ln>
+        <a:ln w="19050" cap="flat" cmpd="sng" algn="ctr">
+          <a:solidFill>
+            <a:schemeClr val="phClr"/>
+          </a:solidFill>
+          <a:prstDash val="solid"/>
+          <a:miter lim="800000"/>
+        </a:ln>
+        <a:ln w="25400" cap="flat" cmpd="sng" algn="ctr">
+          <a:solidFill>
+            <a:schemeClr val="phClr"/>
+          </a:solidFill>
+          <a:prstDash val="solid"/>
+          <a:miter lim="800000"/>
+        </a:ln>
+      </a:lnStyleLst>
+      <a:effectStyleLst>
+        <a:effectStyle>
+          <a:effectLst/>
+        </a:effectStyle>
+        <a:effectStyle>
+          <a:effectLst/>
+        </a:effectStyle>
+        <a:effectStyle>
+          <a:effectLst>
+            <a:outerShdw blurRad="57150" dist="19050" dir="5400000" algn="ctr" rotWithShape="0">
+              <a:srgbClr val="000000">
+                <a:alpha val="63000"/>
+              </a:srgbClr>
+            </a:outerShdw>
+          </a:effectLst>
+        </a:effectStyle>
+      </a:effectStyleLst>
+      <a:bgFillStyleLst>
+        <a:solidFill>
+          <a:schemeClr val="phClr"/>
+        </a:solidFill>
+        <a:solidFill>
+          <a:schemeClr val="phClr">
+            <a:tint val="95000"/>
+            <a:satMod val="170000"/>
+          </a:schemeClr>
+        </a:solidFill>
+        <a:gradFill rotWithShape="1">
+          <a:gsLst>
+            <a:gs pos="0">
+              <a:schemeClr val="phClr">
+                <a:tint val="93000"/>
+                <a:satMod val="150000"/>
+                <a:shade val="98000"/>
+                <a:lumMod val="102000"/>
+              </a:schemeClr>
+            </a:gs>
+            <a:gs pos="50000">
+              <a:schemeClr val="phClr">
+                <a:tint val="98000"/>
+                <a:satMod val="130000"/>
+                <a:shade val="90000"/>
+                <a:lumMod val="103000"/>
+              </a:schemeClr>
+            </a:gs>
+            <a:gs pos="100000">
+              <a:schemeClr val="phClr">
+                <a:shade val="63000"/>
+                <a:satMod val="120000"/>
+              </a:schemeClr>
+            </a:gs>
+          </a:gsLst>
+          <a:lin ang="5400000" scaled="0"/>
+        </a:gradFill>
+      </a:bgFillStyleLst>
+    </a:fmtScheme>
+  </a:themeElements>
+  <a:objectDefaults>
+    <a:lnDef>
+      <a:spPr/>
+      <a:bodyPr/>
+      <a:lstStyle/>
+      <a:style>
+        <a:lnRef idx="2">
+          <a:schemeClr val="accent1"/>
+        </a:lnRef>
+        <a:fillRef idx="0">
+          <a:schemeClr val="accent1"/>
+        </a:fillRef>
+        <a:effectRef idx="1">
+          <a:schemeClr val="accent1"/>
+        </a:effectRef>
+        <a:fontRef idx="minor">
+          <a:schemeClr val="tx1"/>
+        </a:fontRef>
+      </a:style>
+    </a:lnDef>
+  </a:objectDefaults>
+  <a:extraClrSchemeLst/>
+  <a:extLst>
+    <a:ext uri="{05A4C25C-085E-4340-85A3-A5531E510DB2}">
+      <thm15:themeFamily xmlns:thm15="http://schemas.microsoft.com/office/thememl/2012/main" name="Office Theme" id="{2E142A2C-CD16-42D6-873A-C26D2A0506FA}" vid="{1BDDFF52-6CD6-40A5-AB3C-68EB2F1E4D0A}"/>
+    </a:ext>
+  </a:extLst>
+</a:theme>
 </file>